--- a/attached_assets/VaughnMartin-Investor-Pitch-Deck.pptx
+++ b/attached_assets/VaughnMartin-Investor-Pitch-Deck.pptx
@@ -3157,23 +3157,23 @@
         </p:nvSpPr>
         <p:spPr>
           <a:xfrm>
-            <a:off x="1097280" y="914400"/>
-            <a:ext cx="9601200" cy="914400"/>
-          </a:xfrm>
-          <a:prstGeom prst="rect">
-            <a:avLst/>
-          </a:prstGeom>
-          <a:noFill/>
-        </p:spPr>
-        <p:txBody>
-          <a:bodyPr wrap="square">
-            <a:spAutoFit/>
-          </a:bodyPr>
-          <a:lstStyle/>
-          <a:p>
-            <a:pPr algn="ctr"/>
-            <a:r>
-              <a:rPr sz="3600" b="1">
+            <a:off x="914400" y="777240"/>
+            <a:ext cx="10332720" cy="1005840"/>
+          </a:xfrm>
+          <a:prstGeom prst="rect">
+            <a:avLst/>
+          </a:prstGeom>
+          <a:noFill/>
+        </p:spPr>
+        <p:txBody>
+          <a:bodyPr wrap="square">
+            <a:spAutoFit/>
+          </a:bodyPr>
+          <a:lstStyle/>
+          <a:p>
+            <a:pPr algn="ctr"/>
+            <a:r>
+              <a:rPr sz="4000" b="1">
                 <a:solidFill>
                   <a:srgbClr val="FFFFFF"/>
                 </a:solidFill>
@@ -3192,23 +3192,23 @@
         </p:nvSpPr>
         <p:spPr>
           <a:xfrm>
-            <a:off x="1097280" y="1737360"/>
-            <a:ext cx="9601200" cy="1188720"/>
-          </a:xfrm>
-          <a:prstGeom prst="rect">
-            <a:avLst/>
-          </a:prstGeom>
-          <a:noFill/>
-        </p:spPr>
-        <p:txBody>
-          <a:bodyPr wrap="square">
-            <a:spAutoFit/>
-          </a:bodyPr>
-          <a:lstStyle/>
-          <a:p>
-            <a:pPr algn="ctr"/>
-            <a:r>
-              <a:rPr sz="3200" b="1">
+            <a:off x="914400" y="1737360"/>
+            <a:ext cx="10332720" cy="1280160"/>
+          </a:xfrm>
+          <a:prstGeom prst="rect">
+            <a:avLst/>
+          </a:prstGeom>
+          <a:noFill/>
+        </p:spPr>
+        <p:txBody>
+          <a:bodyPr wrap="square">
+            <a:spAutoFit/>
+          </a:bodyPr>
+          <a:lstStyle/>
+          <a:p>
+            <a:pPr algn="ctr"/>
+            <a:r>
+              <a:rPr sz="3400" b="1">
                 <a:solidFill>
                   <a:srgbClr val="C9A84C"/>
                 </a:solidFill>
@@ -3227,8 +3227,8 @@
         </p:nvSpPr>
         <p:spPr>
           <a:xfrm>
-            <a:off x="1371600" y="3200400"/>
-            <a:ext cx="3017520" cy="457200"/>
+            <a:off x="1188720" y="3200400"/>
+            <a:ext cx="3200400" cy="457200"/>
           </a:xfrm>
           <a:prstGeom prst="rect">
             <a:avLst/>
@@ -3272,8 +3272,8 @@
         </p:nvSpPr>
         <p:spPr>
           <a:xfrm>
-            <a:off x="1463040" y="3302000"/>
-            <a:ext cx="2834640" cy="457200"/>
+            <a:off x="1298448" y="3314700"/>
+            <a:ext cx="2980944" cy="457200"/>
           </a:xfrm>
           <a:prstGeom prst="rect">
             <a:avLst/>
@@ -3307,8 +3307,8 @@
         </p:nvSpPr>
         <p:spPr>
           <a:xfrm>
-            <a:off x="4754880" y="3200400"/>
-            <a:ext cx="3017520" cy="457200"/>
+            <a:off x="4617720" y="3200400"/>
+            <a:ext cx="3200400" cy="457200"/>
           </a:xfrm>
           <a:prstGeom prst="rect">
             <a:avLst/>
@@ -3352,8 +3352,8 @@
         </p:nvSpPr>
         <p:spPr>
           <a:xfrm>
-            <a:off x="4846320" y="3302000"/>
-            <a:ext cx="2834640" cy="457200"/>
+            <a:off x="4727448" y="3314700"/>
+            <a:ext cx="2980944" cy="457200"/>
           </a:xfrm>
           <a:prstGeom prst="rect">
             <a:avLst/>
@@ -3387,18 +3387,18 @@
         </p:nvSpPr>
         <p:spPr>
           <a:xfrm>
-            <a:off x="8138160" y="3200400"/>
-            <a:ext cx="3017520" cy="457200"/>
+            <a:off x="8046720" y="3200400"/>
+            <a:ext cx="3200400" cy="457200"/>
           </a:xfrm>
           <a:prstGeom prst="rect">
             <a:avLst/>
           </a:prstGeom>
           <a:solidFill>
-            <a:srgbClr val="202850"/>
+            <a:srgbClr val="182250"/>
           </a:solidFill>
           <a:ln w="12700">
             <a:solidFill>
-              <a:srgbClr val="445070"/>
+              <a:srgbClr val="333D60"/>
             </a:solidFill>
           </a:ln>
         </p:spPr>
@@ -3432,8 +3432,8 @@
         </p:nvSpPr>
         <p:spPr>
           <a:xfrm>
-            <a:off x="8229600" y="3302000"/>
-            <a:ext cx="2834640" cy="457200"/>
+            <a:off x="8156448" y="3314700"/>
+            <a:ext cx="2980944" cy="457200"/>
           </a:xfrm>
           <a:prstGeom prst="rect">
             <a:avLst/>
@@ -3467,8 +3467,8 @@
         </p:nvSpPr>
         <p:spPr>
           <a:xfrm>
-            <a:off x="1097280" y="3931920"/>
-            <a:ext cx="9601200" cy="355600"/>
+            <a:off x="914400" y="3840480"/>
+            <a:ext cx="10332720" cy="330200"/>
           </a:xfrm>
           <a:prstGeom prst="rect">
             <a:avLst/>
@@ -3494,16 +3494,126 @@
           </a:p>
         </p:txBody>
       </p:sp>
-      <p:sp>
-        <p:nvSpPr>
-          <p:cNvPr id="12" name="TextBox 11"/>
-          <p:cNvSpPr txBox="1"/>
-          <p:nvPr/>
-        </p:nvSpPr>
-        <p:spPr>
-          <a:xfrm>
-            <a:off x="457200" y="6126480"/>
-            <a:ext cx="4572000" cy="279400"/>
+      <p:pic>
+        <p:nvPicPr>
+          <p:cNvPr id="12" name="Picture 11" descr="pptx_command_tower.jpg"/>
+          <p:cNvPicPr>
+            <a:picLocks noChangeAspect="1"/>
+          </p:cNvPicPr>
+          <p:nvPr/>
+        </p:nvPicPr>
+        <p:blipFill>
+          <a:blip r:embed="rId2"/>
+          <a:stretch>
+            <a:fillRect/>
+          </a:stretch>
+        </p:blipFill>
+        <p:spPr>
+          <a:xfrm>
+            <a:off x="1828800" y="4572000"/>
+            <a:ext cx="8531352" cy="1920240"/>
+          </a:xfrm>
+          <a:prstGeom prst="rect">
+            <a:avLst/>
+          </a:prstGeom>
+        </p:spPr>
+      </p:pic>
+      <p:sp>
+        <p:nvSpPr>
+          <p:cNvPr id="13" name="Rectangle 12"/>
+          <p:cNvSpPr/>
+          <p:nvPr/>
+        </p:nvSpPr>
+        <p:spPr>
+          <a:xfrm>
+            <a:off x="1828800" y="4572000"/>
+            <a:ext cx="8531352" cy="1920240"/>
+          </a:xfrm>
+          <a:prstGeom prst="rect">
+            <a:avLst/>
+          </a:prstGeom>
+          <a:noFill/>
+          <a:ln w="15240">
+            <a:solidFill>
+              <a:srgbClr val="C9A84C"/>
+            </a:solidFill>
+          </a:ln>
+        </p:spPr>
+        <p:style>
+          <a:lnRef idx="1">
+            <a:schemeClr val="accent1"/>
+          </a:lnRef>
+          <a:fillRef idx="3">
+            <a:schemeClr val="accent1"/>
+          </a:fillRef>
+          <a:effectRef idx="2">
+            <a:schemeClr val="accent1"/>
+          </a:effectRef>
+          <a:fontRef idx="minor">
+            <a:schemeClr val="lt1"/>
+          </a:fontRef>
+        </p:style>
+        <p:txBody>
+          <a:bodyPr rtlCol="0" anchor="ctr"/>
+          <a:lstStyle/>
+          <a:p>
+            <a:pPr algn="ctr"/>
+          </a:p>
+        </p:txBody>
+      </p:sp>
+      <p:sp>
+        <p:nvSpPr>
+          <p:cNvPr id="14" name="Rectangle 13"/>
+          <p:cNvSpPr/>
+          <p:nvPr/>
+        </p:nvSpPr>
+        <p:spPr>
+          <a:xfrm>
+            <a:off x="1828800" y="6172200"/>
+            <a:ext cx="8531352" cy="320040"/>
+          </a:xfrm>
+          <a:prstGeom prst="rect">
+            <a:avLst/>
+          </a:prstGeom>
+          <a:solidFill>
+            <a:srgbClr val="080D26"/>
+          </a:solidFill>
+          <a:ln>
+            <a:noFill/>
+          </a:ln>
+        </p:spPr>
+        <p:style>
+          <a:lnRef idx="1">
+            <a:schemeClr val="accent1"/>
+          </a:lnRef>
+          <a:fillRef idx="3">
+            <a:schemeClr val="accent1"/>
+          </a:fillRef>
+          <a:effectRef idx="2">
+            <a:schemeClr val="accent1"/>
+          </a:effectRef>
+          <a:fontRef idx="minor">
+            <a:schemeClr val="lt1"/>
+          </a:fontRef>
+        </p:style>
+        <p:txBody>
+          <a:bodyPr rtlCol="0" anchor="ctr"/>
+          <a:lstStyle/>
+          <a:p>
+            <a:pPr algn="ctr"/>
+          </a:p>
+        </p:txBody>
+      </p:sp>
+      <p:sp>
+        <p:nvSpPr>
+          <p:cNvPr id="15" name="TextBox 14"/>
+          <p:cNvSpPr txBox="1"/>
+          <p:nvPr/>
+        </p:nvSpPr>
+        <p:spPr>
+          <a:xfrm>
+            <a:off x="1938528" y="6248400"/>
+            <a:ext cx="8311896" cy="320040"/>
           </a:xfrm>
           <a:prstGeom prst="rect">
             <a:avLst/>
@@ -3518,12 +3628,47 @@
           <a:p>
             <a:pPr algn="l"/>
             <a:r>
-              <a:rPr sz="1200" b="1" i="0">
+              <a:rPr sz="900" b="1" i="0">
                 <a:solidFill>
                   <a:srgbClr val="C9A84C"/>
                 </a:solidFill>
                 <a:latin typeface="Barlow Condensed"/>
               </a:rPr>
+              <a:t>COMMAND TOWER · LIVE PRODUCTION · 221 TRIGGERS ARMED · 20 ACTIVE DETECTIONS · 170 PROTOCOLS READY</a:t>
+            </a:r>
+          </a:p>
+        </p:txBody>
+      </p:sp>
+      <p:sp>
+        <p:nvSpPr>
+          <p:cNvPr id="16" name="TextBox 15"/>
+          <p:cNvSpPr txBox="1"/>
+          <p:nvPr/>
+        </p:nvSpPr>
+        <p:spPr>
+          <a:xfrm>
+            <a:off x="365760" y="6565392"/>
+            <a:ext cx="4572000" cy="228600"/>
+          </a:xfrm>
+          <a:prstGeom prst="rect">
+            <a:avLst/>
+          </a:prstGeom>
+          <a:noFill/>
+        </p:spPr>
+        <p:txBody>
+          <a:bodyPr wrap="square">
+            <a:spAutoFit/>
+          </a:bodyPr>
+          <a:lstStyle/>
+          <a:p>
+            <a:pPr algn="l"/>
+            <a:r>
+              <a:rPr sz="1100" b="1" i="0">
+                <a:solidFill>
+                  <a:srgbClr val="C9A84C"/>
+                </a:solidFill>
+                <a:latin typeface="Barlow Condensed"/>
+              </a:rPr>
               <a:t>VaughnMartin  ·  Readiness OS</a:t>
             </a:r>
           </a:p>
@@ -3531,27 +3676,27 @@
       </p:sp>
       <p:sp>
         <p:nvSpPr>
-          <p:cNvPr id="13" name="TextBox 12"/>
-          <p:cNvSpPr txBox="1"/>
-          <p:nvPr/>
-        </p:nvSpPr>
-        <p:spPr>
-          <a:xfrm>
-            <a:off x="11247120" y="6492240"/>
-            <a:ext cx="914400" cy="228600"/>
-          </a:xfrm>
-          <a:prstGeom prst="rect">
-            <a:avLst/>
-          </a:prstGeom>
-          <a:noFill/>
-        </p:spPr>
-        <p:txBody>
-          <a:bodyPr wrap="square">
-            <a:spAutoFit/>
-          </a:bodyPr>
-          <a:lstStyle/>
-          <a:p>
-            <a:pPr algn="l"/>
+          <p:cNvPr id="17" name="TextBox 16"/>
+          <p:cNvSpPr txBox="1"/>
+          <p:nvPr/>
+        </p:nvSpPr>
+        <p:spPr>
+          <a:xfrm>
+            <a:off x="11247120" y="6537960"/>
+            <a:ext cx="914400" cy="203200"/>
+          </a:xfrm>
+          <a:prstGeom prst="rect">
+            <a:avLst/>
+          </a:prstGeom>
+          <a:noFill/>
+        </p:spPr>
+        <p:txBody>
+          <a:bodyPr wrap="square">
+            <a:spAutoFit/>
+          </a:bodyPr>
+          <a:lstStyle/>
+          <a:p>
+            <a:pPr algn="r"/>
             <a:r>
               <a:rPr sz="1000" b="1" i="0">
                 <a:solidFill>
@@ -3641,8 +3786,8 @@
         </p:nvSpPr>
         <p:spPr>
           <a:xfrm>
-            <a:off x="457200" y="457200"/>
-            <a:ext cx="9144000" cy="254000"/>
+            <a:off x="457200" y="411480"/>
+            <a:ext cx="10972800" cy="228600"/>
           </a:xfrm>
           <a:prstGeom prst="rect">
             <a:avLst/>
@@ -3676,8 +3821,8 @@
         </p:nvSpPr>
         <p:spPr>
           <a:xfrm>
-            <a:off x="457200" y="777240"/>
-            <a:ext cx="5029200" cy="2743200"/>
+            <a:off x="457200" y="749808"/>
+            <a:ext cx="5120640" cy="2743200"/>
           </a:xfrm>
           <a:prstGeom prst="rect">
             <a:avLst/>
@@ -3713,7 +3858,7 @@
         </p:nvSpPr>
         <p:spPr>
           <a:xfrm>
-            <a:off x="457200" y="3749039"/>
+            <a:off x="457200" y="3657600"/>
             <a:ext cx="4572000" cy="19050"/>
           </a:xfrm>
           <a:prstGeom prst="rect">
@@ -3756,8 +3901,8 @@
         </p:nvSpPr>
         <p:spPr>
           <a:xfrm>
-            <a:off x="457200" y="3886200"/>
-            <a:ext cx="4754880" cy="1371600"/>
+            <a:off x="457200" y="3822191"/>
+            <a:ext cx="4846320" cy="1371600"/>
           </a:xfrm>
           <a:prstGeom prst="rect">
             <a:avLst/>
@@ -3793,8 +3938,8 @@
         </p:nvSpPr>
         <p:spPr>
           <a:xfrm>
-            <a:off x="5760720" y="502920"/>
-            <a:ext cx="9144000" cy="254000"/>
+            <a:off x="5760720" y="411480"/>
+            <a:ext cx="10972800" cy="228600"/>
           </a:xfrm>
           <a:prstGeom prst="rect">
             <a:avLst/>
@@ -3828,8 +3973,8 @@
         </p:nvSpPr>
         <p:spPr>
           <a:xfrm>
-            <a:off x="5760720" y="822960"/>
-            <a:ext cx="5943600" cy="1097280"/>
+            <a:off x="5760720" y="749808"/>
+            <a:ext cx="6035040" cy="1143000"/>
           </a:xfrm>
           <a:prstGeom prst="rect">
             <a:avLst/>
@@ -3871,7 +4016,7 @@
         </p:nvSpPr>
         <p:spPr>
           <a:xfrm>
-            <a:off x="5943600" y="924560"/>
+            <a:off x="5943600" y="851408"/>
             <a:ext cx="2743200" cy="228600"/>
           </a:xfrm>
           <a:prstGeom prst="rect">
@@ -3906,8 +4051,8 @@
         </p:nvSpPr>
         <p:spPr>
           <a:xfrm>
-            <a:off x="5943600" y="1178560"/>
-            <a:ext cx="5577840" cy="431800"/>
+            <a:off x="5943600" y="1080008"/>
+            <a:ext cx="5669280" cy="482600"/>
           </a:xfrm>
           <a:prstGeom prst="rect">
             <a:avLst/>
@@ -3941,8 +4086,8 @@
         </p:nvSpPr>
         <p:spPr>
           <a:xfrm>
-            <a:off x="5760720" y="2057400"/>
-            <a:ext cx="5943600" cy="1097280"/>
+            <a:off x="5760720" y="2029968"/>
+            <a:ext cx="6035040" cy="1143000"/>
           </a:xfrm>
           <a:prstGeom prst="rect">
             <a:avLst/>
@@ -3984,7 +4129,7 @@
         </p:nvSpPr>
         <p:spPr>
           <a:xfrm>
-            <a:off x="5943600" y="2159000"/>
+            <a:off x="5943600" y="2131568"/>
             <a:ext cx="2743200" cy="228600"/>
           </a:xfrm>
           <a:prstGeom prst="rect">
@@ -4019,8 +4164,8 @@
         </p:nvSpPr>
         <p:spPr>
           <a:xfrm>
-            <a:off x="5943600" y="2413000"/>
-            <a:ext cx="5577840" cy="431800"/>
+            <a:off x="5943600" y="2360168"/>
+            <a:ext cx="5669280" cy="482600"/>
           </a:xfrm>
           <a:prstGeom prst="rect">
             <a:avLst/>
@@ -4054,8 +4199,8 @@
         </p:nvSpPr>
         <p:spPr>
           <a:xfrm>
-            <a:off x="5760720" y="3291840"/>
-            <a:ext cx="5943600" cy="1097280"/>
+            <a:off x="5760720" y="3310128"/>
+            <a:ext cx="6035040" cy="1143000"/>
           </a:xfrm>
           <a:prstGeom prst="rect">
             <a:avLst/>
@@ -4097,7 +4242,7 @@
         </p:nvSpPr>
         <p:spPr>
           <a:xfrm>
-            <a:off x="5943600" y="3393440"/>
+            <a:off x="5943600" y="3411728"/>
             <a:ext cx="2743200" cy="228600"/>
           </a:xfrm>
           <a:prstGeom prst="rect">
@@ -4132,8 +4277,8 @@
         </p:nvSpPr>
         <p:spPr>
           <a:xfrm>
-            <a:off x="5943600" y="3647440"/>
-            <a:ext cx="5577840" cy="431800"/>
+            <a:off x="5943600" y="3640328"/>
+            <a:ext cx="5669280" cy="482600"/>
           </a:xfrm>
           <a:prstGeom prst="rect">
             <a:avLst/>
@@ -4167,8 +4312,8 @@
         </p:nvSpPr>
         <p:spPr>
           <a:xfrm>
-            <a:off x="5760720" y="4526280"/>
-            <a:ext cx="5943600" cy="1097280"/>
+            <a:off x="5760720" y="4590288"/>
+            <a:ext cx="6035040" cy="1143000"/>
           </a:xfrm>
           <a:prstGeom prst="rect">
             <a:avLst/>
@@ -4210,7 +4355,7 @@
         </p:nvSpPr>
         <p:spPr>
           <a:xfrm>
-            <a:off x="5943600" y="4627880"/>
+            <a:off x="5943600" y="4691888"/>
             <a:ext cx="2743200" cy="228600"/>
           </a:xfrm>
           <a:prstGeom prst="rect">
@@ -4245,8 +4390,8 @@
         </p:nvSpPr>
         <p:spPr>
           <a:xfrm>
-            <a:off x="5943600" y="4881880"/>
-            <a:ext cx="5577840" cy="431800"/>
+            <a:off x="5943600" y="4920488"/>
+            <a:ext cx="5669280" cy="482600"/>
           </a:xfrm>
           <a:prstGeom prst="rect">
             <a:avLst/>
@@ -4274,70 +4419,27 @@
       </p:sp>
       <p:sp>
         <p:nvSpPr>
-          <p:cNvPr id="20" name="Rectangle 19"/>
-          <p:cNvSpPr/>
-          <p:nvPr/>
-        </p:nvSpPr>
-        <p:spPr>
-          <a:xfrm>
-            <a:off x="5715000" y="457200"/>
-            <a:ext cx="25400" cy="12700"/>
-          </a:xfrm>
-          <a:prstGeom prst="rect">
-            <a:avLst/>
-          </a:prstGeom>
-          <a:solidFill>
-            <a:srgbClr val="222B55"/>
-          </a:solidFill>
-          <a:ln>
-            <a:noFill/>
-          </a:ln>
-        </p:spPr>
-        <p:style>
-          <a:lnRef idx="1">
-            <a:schemeClr val="accent1"/>
-          </a:lnRef>
-          <a:fillRef idx="3">
-            <a:schemeClr val="accent1"/>
-          </a:fillRef>
-          <a:effectRef idx="2">
-            <a:schemeClr val="accent1"/>
-          </a:effectRef>
-          <a:fontRef idx="minor">
-            <a:schemeClr val="lt1"/>
-          </a:fontRef>
-        </p:style>
-        <p:txBody>
-          <a:bodyPr rtlCol="0" anchor="ctr"/>
-          <a:lstStyle/>
-          <a:p>
-            <a:pPr algn="ctr"/>
-          </a:p>
-        </p:txBody>
-      </p:sp>
-      <p:sp>
-        <p:nvSpPr>
-          <p:cNvPr id="21" name="TextBox 20"/>
-          <p:cNvSpPr txBox="1"/>
-          <p:nvPr/>
-        </p:nvSpPr>
-        <p:spPr>
-          <a:xfrm>
-            <a:off x="11247120" y="6492240"/>
-            <a:ext cx="914400" cy="228600"/>
-          </a:xfrm>
-          <a:prstGeom prst="rect">
-            <a:avLst/>
-          </a:prstGeom>
-          <a:noFill/>
-        </p:spPr>
-        <p:txBody>
-          <a:bodyPr wrap="square">
-            <a:spAutoFit/>
-          </a:bodyPr>
-          <a:lstStyle/>
-          <a:p>
-            <a:pPr algn="l"/>
+          <p:cNvPr id="20" name="TextBox 19"/>
+          <p:cNvSpPr txBox="1"/>
+          <p:nvPr/>
+        </p:nvSpPr>
+        <p:spPr>
+          <a:xfrm>
+            <a:off x="11247120" y="6537960"/>
+            <a:ext cx="914400" cy="203200"/>
+          </a:xfrm>
+          <a:prstGeom prst="rect">
+            <a:avLst/>
+          </a:prstGeom>
+          <a:noFill/>
+        </p:spPr>
+        <p:txBody>
+          <a:bodyPr wrap="square">
+            <a:spAutoFit/>
+          </a:bodyPr>
+          <a:lstStyle/>
+          <a:p>
+            <a:pPr algn="r"/>
             <a:r>
               <a:rPr sz="1000" b="1" i="0">
                 <a:solidFill>
@@ -4427,14 +4529,14 @@
         </p:nvSpPr>
         <p:spPr>
           <a:xfrm>
-            <a:off x="7772400" y="0"/>
-            <a:ext cx="4572000" cy="3200400"/>
+            <a:off x="7315200" y="0"/>
+            <a:ext cx="5029200" cy="3200400"/>
           </a:xfrm>
           <a:prstGeom prst="rect">
             <a:avLst/>
           </a:prstGeom>
           <a:solidFill>
-            <a:srgbClr val="101C48"/>
+            <a:srgbClr val="0E1844"/>
           </a:solidFill>
           <a:ln>
             <a:noFill/>
@@ -4505,14 +4607,14 @@
         </p:nvSpPr>
         <p:spPr>
           <a:xfrm>
-            <a:off x="731520" y="914400"/>
-            <a:ext cx="10698480" cy="1371600"/>
+            <a:off x="640080" y="960120"/>
+            <a:ext cx="10881360" cy="1444752"/>
           </a:xfrm>
           <a:prstGeom prst="rect">
             <a:avLst/>
           </a:prstGeom>
           <a:solidFill>
-            <a:srgbClr val="101842"/>
+            <a:srgbClr val="0E1640"/>
           </a:solidFill>
           <a:ln>
             <a:noFill/>
@@ -4548,8 +4650,8 @@
         </p:nvSpPr>
         <p:spPr>
           <a:xfrm>
-            <a:off x="731520" y="914400"/>
-            <a:ext cx="50800" cy="12700"/>
+            <a:off x="640080" y="960120"/>
+            <a:ext cx="50800" cy="1444752"/>
           </a:xfrm>
           <a:prstGeom prst="rect">
             <a:avLst/>
@@ -4591,7 +4693,7 @@
         </p:nvSpPr>
         <p:spPr>
           <a:xfrm>
-            <a:off x="914400" y="1066800"/>
+            <a:off x="868680" y="1112520"/>
             <a:ext cx="1097280" cy="330200"/>
           </a:xfrm>
           <a:prstGeom prst="rect">
@@ -4626,8 +4728,8 @@
         </p:nvSpPr>
         <p:spPr>
           <a:xfrm>
-            <a:off x="2103120" y="1041400"/>
-            <a:ext cx="9144000" cy="533400"/>
+            <a:off x="1965960" y="1087120"/>
+            <a:ext cx="9326880" cy="635000"/>
           </a:xfrm>
           <a:prstGeom prst="rect">
             <a:avLst/>
@@ -4661,14 +4763,14 @@
         </p:nvSpPr>
         <p:spPr>
           <a:xfrm>
-            <a:off x="731520" y="2423160"/>
-            <a:ext cx="10698480" cy="1371600"/>
+            <a:off x="640080" y="2560320"/>
+            <a:ext cx="10881360" cy="1444752"/>
           </a:xfrm>
           <a:prstGeom prst="rect">
             <a:avLst/>
           </a:prstGeom>
           <a:solidFill>
-            <a:srgbClr val="101842"/>
+            <a:srgbClr val="0E1640"/>
           </a:solidFill>
           <a:ln>
             <a:noFill/>
@@ -4704,8 +4806,8 @@
         </p:nvSpPr>
         <p:spPr>
           <a:xfrm>
-            <a:off x="731520" y="2423160"/>
-            <a:ext cx="50800" cy="12700"/>
+            <a:off x="640080" y="2560320"/>
+            <a:ext cx="50800" cy="1444752"/>
           </a:xfrm>
           <a:prstGeom prst="rect">
             <a:avLst/>
@@ -4747,7 +4849,7 @@
         </p:nvSpPr>
         <p:spPr>
           <a:xfrm>
-            <a:off x="914400" y="2575560"/>
+            <a:off x="868680" y="2712720"/>
             <a:ext cx="1097280" cy="330200"/>
           </a:xfrm>
           <a:prstGeom prst="rect">
@@ -4782,8 +4884,8 @@
         </p:nvSpPr>
         <p:spPr>
           <a:xfrm>
-            <a:off x="2103120" y="2550160"/>
-            <a:ext cx="9144000" cy="533400"/>
+            <a:off x="1965960" y="2687320"/>
+            <a:ext cx="9326880" cy="635000"/>
           </a:xfrm>
           <a:prstGeom prst="rect">
             <a:avLst/>
@@ -4817,14 +4919,14 @@
         </p:nvSpPr>
         <p:spPr>
           <a:xfrm>
-            <a:off x="731520" y="3931920"/>
-            <a:ext cx="10698480" cy="1371600"/>
+            <a:off x="640080" y="4160520"/>
+            <a:ext cx="10881360" cy="1444752"/>
           </a:xfrm>
           <a:prstGeom prst="rect">
             <a:avLst/>
           </a:prstGeom>
           <a:solidFill>
-            <a:srgbClr val="101842"/>
+            <a:srgbClr val="0E1640"/>
           </a:solidFill>
           <a:ln>
             <a:noFill/>
@@ -4860,8 +4962,8 @@
         </p:nvSpPr>
         <p:spPr>
           <a:xfrm>
-            <a:off x="731520" y="3931920"/>
-            <a:ext cx="50800" cy="12700"/>
+            <a:off x="640080" y="4160520"/>
+            <a:ext cx="50800" cy="1444752"/>
           </a:xfrm>
           <a:prstGeom prst="rect">
             <a:avLst/>
@@ -4903,7 +5005,7 @@
         </p:nvSpPr>
         <p:spPr>
           <a:xfrm>
-            <a:off x="914400" y="4084320"/>
+            <a:off x="868680" y="4312920"/>
             <a:ext cx="1097280" cy="330200"/>
           </a:xfrm>
           <a:prstGeom prst="rect">
@@ -4938,8 +5040,8 @@
         </p:nvSpPr>
         <p:spPr>
           <a:xfrm>
-            <a:off x="2103120" y="4058920"/>
-            <a:ext cx="9144000" cy="533400"/>
+            <a:off x="1965960" y="4287520"/>
+            <a:ext cx="9326880" cy="635000"/>
           </a:xfrm>
           <a:prstGeom prst="rect">
             <a:avLst/>
@@ -4973,8 +5075,8 @@
         </p:nvSpPr>
         <p:spPr>
           <a:xfrm>
-            <a:off x="1371600" y="5486400"/>
-            <a:ext cx="9144000" cy="457200"/>
+            <a:off x="1371600" y="5715000"/>
+            <a:ext cx="9418320" cy="457200"/>
           </a:xfrm>
           <a:prstGeom prst="rect">
             <a:avLst/>
@@ -5008,8 +5110,8 @@
         </p:nvSpPr>
         <p:spPr>
           <a:xfrm>
-            <a:off x="1371600" y="5989320"/>
-            <a:ext cx="9144000" cy="279400"/>
+            <a:off x="1371600" y="6199632"/>
+            <a:ext cx="9418320" cy="254000"/>
           </a:xfrm>
           <a:prstGeom prst="rect">
             <a:avLst/>
@@ -5043,21 +5145,21 @@
         </p:nvSpPr>
         <p:spPr>
           <a:xfrm>
-            <a:off x="11247120" y="6492240"/>
-            <a:ext cx="914400" cy="228600"/>
-          </a:xfrm>
-          <a:prstGeom prst="rect">
-            <a:avLst/>
-          </a:prstGeom>
-          <a:noFill/>
-        </p:spPr>
-        <p:txBody>
-          <a:bodyPr wrap="square">
-            <a:spAutoFit/>
-          </a:bodyPr>
-          <a:lstStyle/>
-          <a:p>
-            <a:pPr algn="l"/>
+            <a:off x="11247120" y="6537960"/>
+            <a:ext cx="914400" cy="203200"/>
+          </a:xfrm>
+          <a:prstGeom prst="rect">
+            <a:avLst/>
+          </a:prstGeom>
+          <a:noFill/>
+        </p:spPr>
+        <p:txBody>
+          <a:bodyPr wrap="square">
+            <a:spAutoFit/>
+          </a:bodyPr>
+          <a:lstStyle/>
+          <a:p>
+            <a:pPr algn="r"/>
             <a:r>
               <a:rPr sz="1000" b="1" i="0">
                 <a:solidFill>
@@ -5147,8 +5249,8 @@
         </p:nvSpPr>
         <p:spPr>
           <a:xfrm>
-            <a:off x="548640" y="548640"/>
-            <a:ext cx="9144000" cy="254000"/>
+            <a:off x="457200" y="457200"/>
+            <a:ext cx="10972800" cy="228600"/>
           </a:xfrm>
           <a:prstGeom prst="rect">
             <a:avLst/>
@@ -5182,8 +5284,8 @@
         </p:nvSpPr>
         <p:spPr>
           <a:xfrm>
-            <a:off x="548640" y="914400"/>
-            <a:ext cx="2743200" cy="1828800"/>
+            <a:off x="457200" y="822960"/>
+            <a:ext cx="2926080" cy="2011680"/>
           </a:xfrm>
           <a:prstGeom prst="rect">
             <a:avLst/>
@@ -5198,7 +5300,7 @@
           <a:p>
             <a:pPr algn="l"/>
             <a:r>
-              <a:rPr sz="11000" b="1" i="0">
+              <a:rPr sz="12000" b="1" i="0">
                 <a:solidFill>
                   <a:srgbClr val="C9A84C"/>
                 </a:solidFill>
@@ -5217,8 +5319,8 @@
         </p:nvSpPr>
         <p:spPr>
           <a:xfrm>
-            <a:off x="548640" y="2560320"/>
-            <a:ext cx="2743200" cy="457200"/>
+            <a:off x="457200" y="2606040"/>
+            <a:ext cx="2926080" cy="502920"/>
           </a:xfrm>
           <a:prstGeom prst="rect">
             <a:avLst/>
@@ -5233,7 +5335,7 @@
           <a:p>
             <a:pPr algn="l"/>
             <a:r>
-              <a:rPr sz="2800" b="1" i="0">
+              <a:rPr sz="3000" b="1" i="0">
                 <a:solidFill>
                   <a:srgbClr val="FFFFFF"/>
                 </a:solidFill>
@@ -5252,8 +5354,8 @@
         </p:nvSpPr>
         <p:spPr>
           <a:xfrm>
-            <a:off x="548640" y="3108960"/>
-            <a:ext cx="3200400" cy="19050"/>
+            <a:off x="457200" y="3246120"/>
+            <a:ext cx="3474720" cy="19050"/>
           </a:xfrm>
           <a:prstGeom prst="rect">
             <a:avLst/>
@@ -5295,8 +5397,8 @@
         </p:nvSpPr>
         <p:spPr>
           <a:xfrm>
-            <a:off x="548640" y="3291840"/>
-            <a:ext cx="3474720" cy="1371600"/>
+            <a:off x="457200" y="3410712"/>
+            <a:ext cx="3657600" cy="822960"/>
           </a:xfrm>
           <a:prstGeom prst="rect">
             <a:avLst/>
@@ -5317,31 +5419,126 @@
                 </a:solidFill>
                 <a:latin typeface="Barlow"/>
               </a:rPr>
+              <a:t>Average mobilization time before
+any execution begins.</a:t>
+            </a:r>
+          </a:p>
+        </p:txBody>
+      </p:sp>
+      <p:sp>
+        <p:nvSpPr>
+          <p:cNvPr id="8" name="TextBox 7"/>
+          <p:cNvSpPr txBox="1"/>
+          <p:nvPr/>
+        </p:nvSpPr>
+        <p:spPr>
+          <a:xfrm>
+            <a:off x="457200" y="4297680"/>
+            <a:ext cx="3749039" cy="822960"/>
+          </a:xfrm>
+          <a:prstGeom prst="rect">
+            <a:avLst/>
+          </a:prstGeom>
+          <a:noFill/>
+        </p:spPr>
+        <p:txBody>
+          <a:bodyPr wrap="square">
+            <a:spAutoFit/>
+          </a:bodyPr>
+          <a:lstStyle/>
+          <a:p>
+            <a:pPr algn="l"/>
+            <a:r>
+              <a:rPr sz="1400" b="0" i="0">
+                <a:solidFill>
+                  <a:srgbClr val="CCD2E0"/>
+                </a:solidFill>
+                <a:latin typeface="Barlow"/>
+              </a:rPr>
               <a:t>That's not execution time.
-That's mobilization time before any execution begins.</a:t>
-            </a:r>
-          </a:p>
-        </p:txBody>
-      </p:sp>
-      <p:sp>
-        <p:nvSpPr>
-          <p:cNvPr id="8" name="Rectangle 7"/>
+That's just figuring out who's in the room.</a:t>
+            </a:r>
+          </a:p>
+        </p:txBody>
+      </p:sp>
+      <p:sp>
+        <p:nvSpPr>
+          <p:cNvPr id="9" name="TextBox 8"/>
+          <p:cNvSpPr txBox="1"/>
+          <p:nvPr/>
+        </p:nvSpPr>
+        <p:spPr>
+          <a:xfrm>
+            <a:off x="4572000" y="457200"/>
+            <a:ext cx="10972800" cy="228600"/>
+          </a:xfrm>
+          <a:prstGeom prst="rect">
+            <a:avLst/>
+          </a:prstGeom>
+          <a:noFill/>
+        </p:spPr>
+        <p:txBody>
+          <a:bodyPr wrap="square">
+            <a:spAutoFit/>
+          </a:bodyPr>
+          <a:lstStyle/>
+          <a:p>
+            <a:pPr algn="l"/>
+            <a:r>
+              <a:rPr sz="900" b="1" i="0">
+                <a:solidFill>
+                  <a:srgbClr val="C9A84C"/>
+                </a:solidFill>
+                <a:latin typeface="Barlow Condensed"/>
+              </a:rPr>
+              <a:t>THIS IS WHAT A TRIGGER LOOKS LIKE — RIGHT NOW</a:t>
+            </a:r>
+          </a:p>
+        </p:txBody>
+      </p:sp>
+      <p:pic>
+        <p:nvPicPr>
+          <p:cNvPr id="10" name="Picture 9" descr="pptx_demo.jpg"/>
+          <p:cNvPicPr>
+            <a:picLocks noChangeAspect="1"/>
+          </p:cNvPicPr>
+          <p:nvPr/>
+        </p:nvPicPr>
+        <p:blipFill>
+          <a:blip r:embed="rId2"/>
+          <a:stretch>
+            <a:fillRect/>
+          </a:stretch>
+        </p:blipFill>
+        <p:spPr>
+          <a:xfrm>
+            <a:off x="4572000" y="777240"/>
+            <a:ext cx="7223760" cy="5486400"/>
+          </a:xfrm>
+          <a:prstGeom prst="rect">
+            <a:avLst/>
+          </a:prstGeom>
+        </p:spPr>
+      </p:pic>
+      <p:sp>
+        <p:nvSpPr>
+          <p:cNvPr id="11" name="Rectangle 10"/>
           <p:cNvSpPr/>
           <p:nvPr/>
         </p:nvSpPr>
         <p:spPr>
           <a:xfrm>
-            <a:off x="4572000" y="457200"/>
-            <a:ext cx="12700" cy="12700"/>
-          </a:xfrm>
-          <a:prstGeom prst="rect">
-            <a:avLst/>
-          </a:prstGeom>
-          <a:solidFill>
-            <a:srgbClr val="222B52"/>
-          </a:solidFill>
-          <a:ln>
-            <a:noFill/>
+            <a:off x="4572000" y="777240"/>
+            <a:ext cx="7223760" cy="5486400"/>
+          </a:xfrm>
+          <a:prstGeom prst="rect">
+            <a:avLst/>
+          </a:prstGeom>
+          <a:noFill/>
+          <a:ln w="15240">
+            <a:solidFill>
+              <a:srgbClr val="C9A84C"/>
+            </a:solidFill>
           </a:ln>
         </p:spPr>
         <p:style>
@@ -5368,55 +5565,20 @@
       </p:sp>
       <p:sp>
         <p:nvSpPr>
-          <p:cNvPr id="9" name="TextBox 8"/>
-          <p:cNvSpPr txBox="1"/>
-          <p:nvPr/>
-        </p:nvSpPr>
-        <p:spPr>
-          <a:xfrm>
-            <a:off x="4846320" y="457200"/>
-            <a:ext cx="9144000" cy="254000"/>
-          </a:xfrm>
-          <a:prstGeom prst="rect">
-            <a:avLst/>
-          </a:prstGeom>
-          <a:noFill/>
-        </p:spPr>
-        <p:txBody>
-          <a:bodyPr wrap="square">
-            <a:spAutoFit/>
-          </a:bodyPr>
-          <a:lstStyle/>
-          <a:p>
-            <a:pPr algn="l"/>
-            <a:r>
-              <a:rPr sz="900" b="1" i="0">
-                <a:solidFill>
-                  <a:srgbClr val="C9A84C"/>
-                </a:solidFill>
-                <a:latin typeface="Barlow Condensed"/>
-              </a:rPr>
-              <a:t>THE OLD MODEL — EVERY TIME</a:t>
-            </a:r>
-          </a:p>
-        </p:txBody>
-      </p:sp>
-      <p:sp>
-        <p:nvSpPr>
-          <p:cNvPr id="10" name="Rectangle 9"/>
+          <p:cNvPr id="12" name="Rectangle 11"/>
           <p:cNvSpPr/>
           <p:nvPr/>
         </p:nvSpPr>
         <p:spPr>
           <a:xfrm>
-            <a:off x="4846320" y="914400"/>
-            <a:ext cx="101600" cy="101600"/>
+            <a:off x="4572000" y="5943600"/>
+            <a:ext cx="7223760" cy="320040"/>
           </a:xfrm>
           <a:prstGeom prst="rect">
             <a:avLst/>
           </a:prstGeom>
           <a:solidFill>
-            <a:srgbClr val="C9A84C"/>
+            <a:srgbClr val="080D26"/>
           </a:solidFill>
           <a:ln>
             <a:noFill/>
@@ -5446,14 +5608,14 @@
       </p:sp>
       <p:sp>
         <p:nvSpPr>
-          <p:cNvPr id="11" name="TextBox 10"/>
-          <p:cNvSpPr txBox="1"/>
-          <p:nvPr/>
-        </p:nvSpPr>
-        <p:spPr>
-          <a:xfrm>
-            <a:off x="5166360" y="822960"/>
-            <a:ext cx="6400800" cy="279400"/>
+          <p:cNvPr id="13" name="TextBox 12"/>
+          <p:cNvSpPr txBox="1"/>
+          <p:nvPr/>
+        </p:nvSpPr>
+        <p:spPr>
+          <a:xfrm>
+            <a:off x="4681728" y="6019800"/>
+            <a:ext cx="7004304" cy="320040"/>
           </a:xfrm>
           <a:prstGeom prst="rect">
             <a:avLst/>
@@ -5468,699 +5630,40 @@
           <a:p>
             <a:pPr algn="l"/>
             <a:r>
-              <a:rPr sz="1400" b="1" i="0">
-                <a:solidFill>
-                  <a:srgbClr val="FFFFFF"/>
-                </a:solidFill>
-                <a:latin typeface="Barlow"/>
-              </a:rPr>
-              <a:t>Trigger fires</a:t>
-            </a:r>
-          </a:p>
-        </p:txBody>
-      </p:sp>
-      <p:sp>
-        <p:nvSpPr>
-          <p:cNvPr id="12" name="TextBox 11"/>
-          <p:cNvSpPr txBox="1"/>
-          <p:nvPr/>
-        </p:nvSpPr>
-        <p:spPr>
-          <a:xfrm>
-            <a:off x="5166360" y="1076960"/>
-            <a:ext cx="6583680" cy="279400"/>
-          </a:xfrm>
-          <a:prstGeom prst="rect">
-            <a:avLst/>
-          </a:prstGeom>
-          <a:noFill/>
-        </p:spPr>
-        <p:txBody>
-          <a:bodyPr wrap="square">
-            <a:spAutoFit/>
-          </a:bodyPr>
-          <a:lstStyle/>
-          <a:p>
-            <a:pPr algn="l"/>
-            <a:r>
-              <a:rPr sz="1200" b="0" i="0">
-                <a:solidFill>
-                  <a:srgbClr val="99A5BB"/>
-                </a:solidFill>
-                <a:latin typeface="Barlow"/>
-              </a:rPr>
-              <a:t>Signal detected — no protocol exists. Emails go out.</a:t>
-            </a:r>
-          </a:p>
-        </p:txBody>
-      </p:sp>
-      <p:sp>
-        <p:nvSpPr>
-          <p:cNvPr id="13" name="Rectangle 12"/>
-          <p:cNvSpPr/>
-          <p:nvPr/>
-        </p:nvSpPr>
-        <p:spPr>
-          <a:xfrm>
-            <a:off x="5166360" y="1407160"/>
-            <a:ext cx="6400800" cy="12700"/>
-          </a:xfrm>
-          <a:prstGeom prst="rect">
-            <a:avLst/>
-          </a:prstGeom>
-          <a:solidFill>
-            <a:srgbClr val="1E2750"/>
-          </a:solidFill>
-          <a:ln>
-            <a:noFill/>
-          </a:ln>
-        </p:spPr>
-        <p:style>
-          <a:lnRef idx="1">
-            <a:schemeClr val="accent1"/>
-          </a:lnRef>
-          <a:fillRef idx="3">
-            <a:schemeClr val="accent1"/>
-          </a:fillRef>
-          <a:effectRef idx="2">
-            <a:schemeClr val="accent1"/>
-          </a:effectRef>
-          <a:fontRef idx="minor">
-            <a:schemeClr val="lt1"/>
-          </a:fontRef>
-        </p:style>
-        <p:txBody>
-          <a:bodyPr rtlCol="0" anchor="ctr"/>
-          <a:lstStyle/>
-          <a:p>
-            <a:pPr algn="ctr"/>
-          </a:p>
-        </p:txBody>
-      </p:sp>
-      <p:sp>
-        <p:nvSpPr>
-          <p:cNvPr id="14" name="Rectangle 13"/>
-          <p:cNvSpPr/>
-          <p:nvPr/>
-        </p:nvSpPr>
-        <p:spPr>
-          <a:xfrm>
-            <a:off x="4846320" y="1965960"/>
-            <a:ext cx="101600" cy="101600"/>
-          </a:xfrm>
-          <a:prstGeom prst="rect">
-            <a:avLst/>
-          </a:prstGeom>
-          <a:solidFill>
-            <a:srgbClr val="333D60"/>
-          </a:solidFill>
-          <a:ln>
-            <a:noFill/>
-          </a:ln>
-        </p:spPr>
-        <p:style>
-          <a:lnRef idx="1">
-            <a:schemeClr val="accent1"/>
-          </a:lnRef>
-          <a:fillRef idx="3">
-            <a:schemeClr val="accent1"/>
-          </a:fillRef>
-          <a:effectRef idx="2">
-            <a:schemeClr val="accent1"/>
-          </a:effectRef>
-          <a:fontRef idx="minor">
-            <a:schemeClr val="lt1"/>
-          </a:fontRef>
-        </p:style>
-        <p:txBody>
-          <a:bodyPr rtlCol="0" anchor="ctr"/>
-          <a:lstStyle/>
-          <a:p>
-            <a:pPr algn="ctr"/>
-          </a:p>
-        </p:txBody>
-      </p:sp>
-      <p:sp>
-        <p:nvSpPr>
-          <p:cNvPr id="15" name="TextBox 14"/>
-          <p:cNvSpPr txBox="1"/>
-          <p:nvPr/>
-        </p:nvSpPr>
-        <p:spPr>
-          <a:xfrm>
-            <a:off x="5166360" y="1874520"/>
-            <a:ext cx="6400800" cy="279400"/>
-          </a:xfrm>
-          <a:prstGeom prst="rect">
-            <a:avLst/>
-          </a:prstGeom>
-          <a:noFill/>
-        </p:spPr>
-        <p:txBody>
-          <a:bodyPr wrap="square">
-            <a:spAutoFit/>
-          </a:bodyPr>
-          <a:lstStyle/>
-          <a:p>
-            <a:pPr algn="l"/>
-            <a:r>
-              <a:rPr sz="1400" b="1" i="0">
-                <a:solidFill>
-                  <a:srgbClr val="CCD2E0"/>
-                </a:solidFill>
-                <a:latin typeface="Barlow"/>
-              </a:rPr>
-              <a:t>Days 1–5: Who's in the room?</a:t>
-            </a:r>
-          </a:p>
-        </p:txBody>
-      </p:sp>
-      <p:sp>
-        <p:nvSpPr>
-          <p:cNvPr id="16" name="TextBox 15"/>
-          <p:cNvSpPr txBox="1"/>
-          <p:nvPr/>
-        </p:nvSpPr>
-        <p:spPr>
-          <a:xfrm>
-            <a:off x="5166360" y="2128520"/>
-            <a:ext cx="6583680" cy="279400"/>
-          </a:xfrm>
-          <a:prstGeom prst="rect">
-            <a:avLst/>
-          </a:prstGeom>
-          <a:noFill/>
-        </p:spPr>
-        <p:txBody>
-          <a:bodyPr wrap="square">
-            <a:spAutoFit/>
-          </a:bodyPr>
-          <a:lstStyle/>
-          <a:p>
-            <a:pPr algn="l"/>
-            <a:r>
-              <a:rPr sz="1200" b="0" i="0">
-                <a:solidFill>
-                  <a:srgbClr val="99A5BB"/>
-                </a:solidFill>
-                <a:latin typeface="Barlow"/>
-              </a:rPr>
-              <a:t>Executives align on who should lead. Calendars negotiated.</a:t>
-            </a:r>
-          </a:p>
-        </p:txBody>
-      </p:sp>
-      <p:sp>
-        <p:nvSpPr>
-          <p:cNvPr id="17" name="Rectangle 16"/>
-          <p:cNvSpPr/>
-          <p:nvPr/>
-        </p:nvSpPr>
-        <p:spPr>
-          <a:xfrm>
-            <a:off x="5166360" y="2458720"/>
-            <a:ext cx="6400800" cy="12700"/>
-          </a:xfrm>
-          <a:prstGeom prst="rect">
-            <a:avLst/>
-          </a:prstGeom>
-          <a:solidFill>
-            <a:srgbClr val="1E2750"/>
-          </a:solidFill>
-          <a:ln>
-            <a:noFill/>
-          </a:ln>
-        </p:spPr>
-        <p:style>
-          <a:lnRef idx="1">
-            <a:schemeClr val="accent1"/>
-          </a:lnRef>
-          <a:fillRef idx="3">
-            <a:schemeClr val="accent1"/>
-          </a:fillRef>
-          <a:effectRef idx="2">
-            <a:schemeClr val="accent1"/>
-          </a:effectRef>
-          <a:fontRef idx="minor">
-            <a:schemeClr val="lt1"/>
-          </a:fontRef>
-        </p:style>
-        <p:txBody>
-          <a:bodyPr rtlCol="0" anchor="ctr"/>
-          <a:lstStyle/>
-          <a:p>
-            <a:pPr algn="ctr"/>
-          </a:p>
-        </p:txBody>
-      </p:sp>
-      <p:sp>
-        <p:nvSpPr>
-          <p:cNvPr id="18" name="Rectangle 17"/>
-          <p:cNvSpPr/>
-          <p:nvPr/>
-        </p:nvSpPr>
-        <p:spPr>
-          <a:xfrm>
-            <a:off x="4846320" y="3017520"/>
-            <a:ext cx="101600" cy="101600"/>
-          </a:xfrm>
-          <a:prstGeom prst="rect">
-            <a:avLst/>
-          </a:prstGeom>
-          <a:solidFill>
-            <a:srgbClr val="333D60"/>
-          </a:solidFill>
-          <a:ln>
-            <a:noFill/>
-          </a:ln>
-        </p:spPr>
-        <p:style>
-          <a:lnRef idx="1">
-            <a:schemeClr val="accent1"/>
-          </a:lnRef>
-          <a:fillRef idx="3">
-            <a:schemeClr val="accent1"/>
-          </a:fillRef>
-          <a:effectRef idx="2">
-            <a:schemeClr val="accent1"/>
-          </a:effectRef>
-          <a:fontRef idx="minor">
-            <a:schemeClr val="lt1"/>
-          </a:fontRef>
-        </p:style>
-        <p:txBody>
-          <a:bodyPr rtlCol="0" anchor="ctr"/>
-          <a:lstStyle/>
-          <a:p>
-            <a:pPr algn="ctr"/>
-          </a:p>
-        </p:txBody>
-      </p:sp>
-      <p:sp>
-        <p:nvSpPr>
-          <p:cNvPr id="19" name="TextBox 18"/>
-          <p:cNvSpPr txBox="1"/>
-          <p:nvPr/>
-        </p:nvSpPr>
-        <p:spPr>
-          <a:xfrm>
-            <a:off x="5166360" y="2926080"/>
-            <a:ext cx="6400800" cy="279400"/>
-          </a:xfrm>
-          <a:prstGeom prst="rect">
-            <a:avLst/>
-          </a:prstGeom>
-          <a:noFill/>
-        </p:spPr>
-        <p:txBody>
-          <a:bodyPr wrap="square">
-            <a:spAutoFit/>
-          </a:bodyPr>
-          <a:lstStyle/>
-          <a:p>
-            <a:pPr algn="l"/>
-            <a:r>
-              <a:rPr sz="1400" b="1" i="0">
-                <a:solidFill>
-                  <a:srgbClr val="CCD2E0"/>
-                </a:solidFill>
-                <a:latin typeface="Barlow"/>
-              </a:rPr>
-              <a:t>Days 6–14: What's the plan?</a:t>
-            </a:r>
-          </a:p>
-        </p:txBody>
-      </p:sp>
-      <p:sp>
-        <p:nvSpPr>
-          <p:cNvPr id="20" name="TextBox 19"/>
-          <p:cNvSpPr txBox="1"/>
-          <p:nvPr/>
-        </p:nvSpPr>
-        <p:spPr>
-          <a:xfrm>
-            <a:off x="5166360" y="3180080"/>
-            <a:ext cx="6583680" cy="279400"/>
-          </a:xfrm>
-          <a:prstGeom prst="rect">
-            <a:avLst/>
-          </a:prstGeom>
-          <a:noFill/>
-        </p:spPr>
-        <p:txBody>
-          <a:bodyPr wrap="square">
-            <a:spAutoFit/>
-          </a:bodyPr>
-          <a:lstStyle/>
-          <a:p>
-            <a:pPr algn="l"/>
-            <a:r>
-              <a:rPr sz="1200" b="0" i="0">
-                <a:solidFill>
-                  <a:srgbClr val="99A5BB"/>
-                </a:solidFill>
-                <a:latin typeface="Barlow"/>
-              </a:rPr>
-              <a:t>Strategy formed. Consultants engaged.</a:t>
-            </a:r>
-          </a:p>
-        </p:txBody>
-      </p:sp>
-      <p:sp>
-        <p:nvSpPr>
-          <p:cNvPr id="21" name="Rectangle 20"/>
-          <p:cNvSpPr/>
-          <p:nvPr/>
-        </p:nvSpPr>
-        <p:spPr>
-          <a:xfrm>
-            <a:off x="5166360" y="3510280"/>
-            <a:ext cx="6400800" cy="12700"/>
-          </a:xfrm>
-          <a:prstGeom prst="rect">
-            <a:avLst/>
-          </a:prstGeom>
-          <a:solidFill>
-            <a:srgbClr val="1E2750"/>
-          </a:solidFill>
-          <a:ln>
-            <a:noFill/>
-          </a:ln>
-        </p:spPr>
-        <p:style>
-          <a:lnRef idx="1">
-            <a:schemeClr val="accent1"/>
-          </a:lnRef>
-          <a:fillRef idx="3">
-            <a:schemeClr val="accent1"/>
-          </a:fillRef>
-          <a:effectRef idx="2">
-            <a:schemeClr val="accent1"/>
-          </a:effectRef>
-          <a:fontRef idx="minor">
-            <a:schemeClr val="lt1"/>
-          </a:fontRef>
-        </p:style>
-        <p:txBody>
-          <a:bodyPr rtlCol="0" anchor="ctr"/>
-          <a:lstStyle/>
-          <a:p>
-            <a:pPr algn="ctr"/>
-          </a:p>
-        </p:txBody>
-      </p:sp>
-      <p:sp>
-        <p:nvSpPr>
-          <p:cNvPr id="22" name="Rectangle 21"/>
-          <p:cNvSpPr/>
-          <p:nvPr/>
-        </p:nvSpPr>
-        <p:spPr>
-          <a:xfrm>
-            <a:off x="4846320" y="4069080"/>
-            <a:ext cx="101600" cy="101600"/>
-          </a:xfrm>
-          <a:prstGeom prst="rect">
-            <a:avLst/>
-          </a:prstGeom>
-          <a:solidFill>
-            <a:srgbClr val="333D60"/>
-          </a:solidFill>
-          <a:ln>
-            <a:noFill/>
-          </a:ln>
-        </p:spPr>
-        <p:style>
-          <a:lnRef idx="1">
-            <a:schemeClr val="accent1"/>
-          </a:lnRef>
-          <a:fillRef idx="3">
-            <a:schemeClr val="accent1"/>
-          </a:fillRef>
-          <a:effectRef idx="2">
-            <a:schemeClr val="accent1"/>
-          </a:effectRef>
-          <a:fontRef idx="minor">
-            <a:schemeClr val="lt1"/>
-          </a:fontRef>
-        </p:style>
-        <p:txBody>
-          <a:bodyPr rtlCol="0" anchor="ctr"/>
-          <a:lstStyle/>
-          <a:p>
-            <a:pPr algn="ctr"/>
-          </a:p>
-        </p:txBody>
-      </p:sp>
-      <p:sp>
-        <p:nvSpPr>
-          <p:cNvPr id="23" name="TextBox 22"/>
-          <p:cNvSpPr txBox="1"/>
-          <p:nvPr/>
-        </p:nvSpPr>
-        <p:spPr>
-          <a:xfrm>
-            <a:off x="5166360" y="3977640"/>
-            <a:ext cx="6400800" cy="279400"/>
-          </a:xfrm>
-          <a:prstGeom prst="rect">
-            <a:avLst/>
-          </a:prstGeom>
-          <a:noFill/>
-        </p:spPr>
-        <p:txBody>
-          <a:bodyPr wrap="square">
-            <a:spAutoFit/>
-          </a:bodyPr>
-          <a:lstStyle/>
-          <a:p>
-            <a:pPr algn="l"/>
-            <a:r>
-              <a:rPr sz="1400" b="1" i="0">
-                <a:solidFill>
-                  <a:srgbClr val="CCD2E0"/>
-                </a:solidFill>
-                <a:latin typeface="Barlow"/>
-              </a:rPr>
-              <a:t>Days 15–25: Alignment cycle</a:t>
-            </a:r>
-          </a:p>
-        </p:txBody>
-      </p:sp>
-      <p:sp>
-        <p:nvSpPr>
-          <p:cNvPr id="24" name="TextBox 23"/>
-          <p:cNvSpPr txBox="1"/>
-          <p:nvPr/>
-        </p:nvSpPr>
-        <p:spPr>
-          <a:xfrm>
-            <a:off x="5166360" y="4231640"/>
-            <a:ext cx="6583680" cy="279400"/>
-          </a:xfrm>
-          <a:prstGeom prst="rect">
-            <a:avLst/>
-          </a:prstGeom>
-          <a:noFill/>
-        </p:spPr>
-        <p:txBody>
-          <a:bodyPr wrap="square">
-            <a:spAutoFit/>
-          </a:bodyPr>
-          <a:lstStyle/>
-          <a:p>
-            <a:pPr algn="l"/>
-            <a:r>
-              <a:rPr sz="1200" b="0" i="0">
-                <a:solidFill>
-                  <a:srgbClr val="99A5BB"/>
-                </a:solidFill>
-                <a:latin typeface="Barlow"/>
-              </a:rPr>
-              <a:t>Stakeholders aligned. Approvals queued.</a:t>
-            </a:r>
-          </a:p>
-        </p:txBody>
-      </p:sp>
-      <p:sp>
-        <p:nvSpPr>
-          <p:cNvPr id="25" name="Rectangle 24"/>
-          <p:cNvSpPr/>
-          <p:nvPr/>
-        </p:nvSpPr>
-        <p:spPr>
-          <a:xfrm>
-            <a:off x="5166360" y="4561840"/>
-            <a:ext cx="6400800" cy="12700"/>
-          </a:xfrm>
-          <a:prstGeom prst="rect">
-            <a:avLst/>
-          </a:prstGeom>
-          <a:solidFill>
-            <a:srgbClr val="1E2750"/>
-          </a:solidFill>
-          <a:ln>
-            <a:noFill/>
-          </a:ln>
-        </p:spPr>
-        <p:style>
-          <a:lnRef idx="1">
-            <a:schemeClr val="accent1"/>
-          </a:lnRef>
-          <a:fillRef idx="3">
-            <a:schemeClr val="accent1"/>
-          </a:fillRef>
-          <a:effectRef idx="2">
-            <a:schemeClr val="accent1"/>
-          </a:effectRef>
-          <a:fontRef idx="minor">
-            <a:schemeClr val="lt1"/>
-          </a:fontRef>
-        </p:style>
-        <p:txBody>
-          <a:bodyPr rtlCol="0" anchor="ctr"/>
-          <a:lstStyle/>
-          <a:p>
-            <a:pPr algn="ctr"/>
-          </a:p>
-        </p:txBody>
-      </p:sp>
-      <p:sp>
-        <p:nvSpPr>
-          <p:cNvPr id="26" name="Rectangle 25"/>
-          <p:cNvSpPr/>
-          <p:nvPr/>
-        </p:nvSpPr>
-        <p:spPr>
-          <a:xfrm>
-            <a:off x="4846320" y="5120640"/>
-            <a:ext cx="101600" cy="101600"/>
-          </a:xfrm>
-          <a:prstGeom prst="rect">
-            <a:avLst/>
-          </a:prstGeom>
-          <a:solidFill>
-            <a:srgbClr val="333D60"/>
-          </a:solidFill>
-          <a:ln>
-            <a:noFill/>
-          </a:ln>
-        </p:spPr>
-        <p:style>
-          <a:lnRef idx="1">
-            <a:schemeClr val="accent1"/>
-          </a:lnRef>
-          <a:fillRef idx="3">
-            <a:schemeClr val="accent1"/>
-          </a:fillRef>
-          <a:effectRef idx="2">
-            <a:schemeClr val="accent1"/>
-          </a:effectRef>
-          <a:fontRef idx="minor">
-            <a:schemeClr val="lt1"/>
-          </a:fontRef>
-        </p:style>
-        <p:txBody>
-          <a:bodyPr rtlCol="0" anchor="ctr"/>
-          <a:lstStyle/>
-          <a:p>
-            <a:pPr algn="ctr"/>
-          </a:p>
-        </p:txBody>
-      </p:sp>
-      <p:sp>
-        <p:nvSpPr>
-          <p:cNvPr id="27" name="TextBox 26"/>
-          <p:cNvSpPr txBox="1"/>
-          <p:nvPr/>
-        </p:nvSpPr>
-        <p:spPr>
-          <a:xfrm>
-            <a:off x="5166360" y="5029200"/>
-            <a:ext cx="6400800" cy="279400"/>
-          </a:xfrm>
-          <a:prstGeom prst="rect">
-            <a:avLst/>
-          </a:prstGeom>
-          <a:noFill/>
-        </p:spPr>
-        <p:txBody>
-          <a:bodyPr wrap="square">
-            <a:spAutoFit/>
-          </a:bodyPr>
-          <a:lstStyle/>
-          <a:p>
-            <a:pPr algn="l"/>
-            <a:r>
-              <a:rPr sz="1400" b="1" i="0">
-                <a:solidFill>
-                  <a:srgbClr val="CCD2E0"/>
-                </a:solidFill>
-                <a:latin typeface="Barlow"/>
-              </a:rPr>
-              <a:t>Day 30+: Execution begins</a:t>
-            </a:r>
-          </a:p>
-        </p:txBody>
-      </p:sp>
-      <p:sp>
-        <p:nvSpPr>
-          <p:cNvPr id="28" name="TextBox 27"/>
-          <p:cNvSpPr txBox="1"/>
-          <p:nvPr/>
-        </p:nvSpPr>
-        <p:spPr>
-          <a:xfrm>
-            <a:off x="5166360" y="5283200"/>
-            <a:ext cx="6583680" cy="279400"/>
-          </a:xfrm>
-          <a:prstGeom prst="rect">
-            <a:avLst/>
-          </a:prstGeom>
-          <a:noFill/>
-        </p:spPr>
-        <p:txBody>
-          <a:bodyPr wrap="square">
-            <a:spAutoFit/>
-          </a:bodyPr>
-          <a:lstStyle/>
-          <a:p>
-            <a:pPr algn="l"/>
-            <a:r>
-              <a:rPr sz="1200" b="0" i="0">
-                <a:solidFill>
-                  <a:srgbClr val="99A5BB"/>
-                </a:solidFill>
-                <a:latin typeface="Barlow"/>
-              </a:rPr>
-              <a:t>After 30 days of coordination. If you're lucky.</a:t>
-            </a:r>
-          </a:p>
-        </p:txBody>
-      </p:sp>
-      <p:sp>
-        <p:nvSpPr>
-          <p:cNvPr id="29" name="TextBox 28"/>
-          <p:cNvSpPr txBox="1"/>
-          <p:nvPr/>
-        </p:nvSpPr>
-        <p:spPr>
-          <a:xfrm>
-            <a:off x="11247120" y="6492240"/>
-            <a:ext cx="914400" cy="228600"/>
-          </a:xfrm>
-          <a:prstGeom prst="rect">
-            <a:avLst/>
-          </a:prstGeom>
-          <a:noFill/>
-        </p:spPr>
-        <p:txBody>
-          <a:bodyPr wrap="square">
-            <a:spAutoFit/>
-          </a:bodyPr>
-          <a:lstStyle/>
-          <a:p>
-            <a:pPr algn="l"/>
+              <a:rPr sz="900" b="1" i="0">
+                <a:solidFill>
+                  <a:srgbClr val="C9A84C"/>
+                </a:solidFill>
+                <a:latin typeface="Barlow Condensed"/>
+              </a:rPr>
+              <a:t>LIVE SIMULATION · M&amp;A TRIGGER · RISK 88/100 — HIGH · NO RESPONSE PRE-STAGED</a:t>
+            </a:r>
+          </a:p>
+        </p:txBody>
+      </p:sp>
+      <p:sp>
+        <p:nvSpPr>
+          <p:cNvPr id="14" name="TextBox 13"/>
+          <p:cNvSpPr txBox="1"/>
+          <p:nvPr/>
+        </p:nvSpPr>
+        <p:spPr>
+          <a:xfrm>
+            <a:off x="11247120" y="6537960"/>
+            <a:ext cx="914400" cy="203200"/>
+          </a:xfrm>
+          <a:prstGeom prst="rect">
+            <a:avLst/>
+          </a:prstGeom>
+          <a:noFill/>
+        </p:spPr>
+        <p:txBody>
+          <a:bodyPr wrap="square">
+            <a:spAutoFit/>
+          </a:bodyPr>
+          <a:lstStyle/>
+          <a:p>
+            <a:pPr algn="r"/>
             <a:r>
               <a:rPr sz="1000" b="1" i="0">
                 <a:solidFill>
@@ -6250,8 +5753,8 @@
         </p:nvSpPr>
         <p:spPr>
           <a:xfrm>
-            <a:off x="1097280" y="457200"/>
-            <a:ext cx="9144000" cy="254000"/>
+            <a:off x="457200" y="411480"/>
+            <a:ext cx="10972800" cy="228600"/>
           </a:xfrm>
           <a:prstGeom prst="rect">
             <a:avLst/>
@@ -6285,23 +5788,23 @@
         </p:nvSpPr>
         <p:spPr>
           <a:xfrm>
-            <a:off x="1097280" y="777240"/>
-            <a:ext cx="9601200" cy="914400"/>
-          </a:xfrm>
-          <a:prstGeom prst="rect">
-            <a:avLst/>
-          </a:prstGeom>
-          <a:noFill/>
-        </p:spPr>
-        <p:txBody>
-          <a:bodyPr wrap="square">
-            <a:spAutoFit/>
-          </a:bodyPr>
-          <a:lstStyle/>
-          <a:p>
-            <a:pPr algn="ctr"/>
-            <a:r>
-              <a:rPr sz="3000" b="1">
+            <a:off x="457200" y="731520"/>
+            <a:ext cx="11247120" cy="822960"/>
+          </a:xfrm>
+          <a:prstGeom prst="rect">
+            <a:avLst/>
+          </a:prstGeom>
+          <a:noFill/>
+        </p:spPr>
+        <p:txBody>
+          <a:bodyPr wrap="square">
+            <a:spAutoFit/>
+          </a:bodyPr>
+          <a:lstStyle/>
+          <a:p>
+            <a:pPr algn="ctr"/>
+            <a:r>
+              <a:rPr sz="2800" b="1">
                 <a:solidFill>
                   <a:srgbClr val="FFFFFF"/>
                 </a:solidFill>
@@ -6320,18 +5823,18 @@
         </p:nvSpPr>
         <p:spPr>
           <a:xfrm>
-            <a:off x="457200" y="1737360"/>
-            <a:ext cx="3657600" cy="3474720"/>
+            <a:off x="411480" y="1645920"/>
+            <a:ext cx="3703320" cy="2651760"/>
           </a:xfrm>
           <a:prstGeom prst="rect">
             <a:avLst/>
           </a:prstGeom>
           <a:solidFill>
-            <a:srgbClr val="121A44"/>
+            <a:srgbClr val="101842"/>
           </a:solidFill>
           <a:ln w="12700">
             <a:solidFill>
-              <a:srgbClr val="2A3666"/>
+              <a:srgbClr val="283468"/>
             </a:solidFill>
           </a:ln>
         </p:spPr>
@@ -6365,8 +5868,8 @@
         </p:nvSpPr>
         <p:spPr>
           <a:xfrm>
-            <a:off x="2926080" y="1874520"/>
-            <a:ext cx="1097280" cy="548640"/>
+            <a:off x="2880360" y="1783080"/>
+            <a:ext cx="1097280" cy="502920"/>
           </a:xfrm>
           <a:prstGeom prst="rect">
             <a:avLst/>
@@ -6400,8 +5903,8 @@
         </p:nvSpPr>
         <p:spPr>
           <a:xfrm>
-            <a:off x="640080" y="1920240"/>
-            <a:ext cx="2194560" cy="365760"/>
+            <a:off x="576072" y="1810512"/>
+            <a:ext cx="2286000" cy="279400"/>
           </a:xfrm>
           <a:prstGeom prst="rect">
             <a:avLst/>
@@ -6435,8 +5938,8 @@
         </p:nvSpPr>
         <p:spPr>
           <a:xfrm>
-            <a:off x="640080" y="2423160"/>
-            <a:ext cx="3291840" cy="914400"/>
+            <a:off x="576072" y="2240280"/>
+            <a:ext cx="3383280" cy="868680"/>
           </a:xfrm>
           <a:prstGeom prst="rect">
             <a:avLst/>
@@ -6451,7 +5954,7 @@
           <a:p>
             <a:pPr algn="l"/>
             <a:r>
-              <a:rPr sz="2200" b="1" i="0">
+              <a:rPr sz="2100" b="1">
                 <a:solidFill>
                   <a:srgbClr val="FFFFFF"/>
                 </a:solidFill>
@@ -6471,14 +5974,14 @@
         </p:nvSpPr>
         <p:spPr>
           <a:xfrm>
-            <a:off x="640080" y="3520440"/>
-            <a:ext cx="3291840" cy="50800"/>
+            <a:off x="576072" y="3218688"/>
+            <a:ext cx="3383280" cy="63500"/>
           </a:xfrm>
           <a:prstGeom prst="rect">
             <a:avLst/>
           </a:prstGeom>
           <a:solidFill>
-            <a:srgbClr val="1E2855"/>
+            <a:srgbClr val="1E2755"/>
           </a:solidFill>
           <a:ln>
             <a:noFill/>
@@ -6514,8 +6017,8 @@
         </p:nvSpPr>
         <p:spPr>
           <a:xfrm>
-            <a:off x="640080" y="3520440"/>
-            <a:ext cx="3127248" cy="50800"/>
+            <a:off x="576072" y="3218688"/>
+            <a:ext cx="3214116" cy="63500"/>
           </a:xfrm>
           <a:prstGeom prst="rect">
             <a:avLst/>
@@ -6557,8 +6060,8 @@
         </p:nvSpPr>
         <p:spPr>
           <a:xfrm>
-            <a:off x="640080" y="3749040"/>
-            <a:ext cx="3291840" cy="254000"/>
+            <a:off x="576072" y="3474720"/>
+            <a:ext cx="3383280" cy="279400"/>
           </a:xfrm>
           <a:prstGeom prst="rect">
             <a:avLst/>
@@ -6592,18 +6095,18 @@
         </p:nvSpPr>
         <p:spPr>
           <a:xfrm>
-            <a:off x="4389120" y="1737360"/>
-            <a:ext cx="3657600" cy="3474720"/>
+            <a:off x="4343400" y="1645920"/>
+            <a:ext cx="3703320" cy="2651760"/>
           </a:xfrm>
           <a:prstGeom prst="rect">
             <a:avLst/>
           </a:prstGeom>
           <a:solidFill>
-            <a:srgbClr val="121A44"/>
+            <a:srgbClr val="101842"/>
           </a:solidFill>
           <a:ln w="12700">
             <a:solidFill>
-              <a:srgbClr val="2A3666"/>
+              <a:srgbClr val="283468"/>
             </a:solidFill>
           </a:ln>
         </p:spPr>
@@ -6637,8 +6140,8 @@
         </p:nvSpPr>
         <p:spPr>
           <a:xfrm>
-            <a:off x="6858000" y="1874520"/>
-            <a:ext cx="1097280" cy="548640"/>
+            <a:off x="6812280" y="1783080"/>
+            <a:ext cx="1097280" cy="502920"/>
           </a:xfrm>
           <a:prstGeom prst="rect">
             <a:avLst/>
@@ -6672,8 +6175,8 @@
         </p:nvSpPr>
         <p:spPr>
           <a:xfrm>
-            <a:off x="4572000" y="1920240"/>
-            <a:ext cx="2194560" cy="365760"/>
+            <a:off x="4507992" y="1810512"/>
+            <a:ext cx="2286000" cy="279400"/>
           </a:xfrm>
           <a:prstGeom prst="rect">
             <a:avLst/>
@@ -6707,8 +6210,8 @@
         </p:nvSpPr>
         <p:spPr>
           <a:xfrm>
-            <a:off x="4572000" y="2423160"/>
-            <a:ext cx="3291840" cy="914400"/>
+            <a:off x="4507992" y="2240280"/>
+            <a:ext cx="3383280" cy="868680"/>
           </a:xfrm>
           <a:prstGeom prst="rect">
             <a:avLst/>
@@ -6723,7 +6226,7 @@
           <a:p>
             <a:pPr algn="l"/>
             <a:r>
-              <a:rPr sz="2200" b="1" i="0">
+              <a:rPr sz="2100" b="1">
                 <a:solidFill>
                   <a:srgbClr val="FFFFFF"/>
                 </a:solidFill>
@@ -6743,14 +6246,14 @@
         </p:nvSpPr>
         <p:spPr>
           <a:xfrm>
-            <a:off x="4572000" y="3520440"/>
-            <a:ext cx="3291840" cy="50800"/>
+            <a:off x="4507992" y="3218688"/>
+            <a:ext cx="3383280" cy="63500"/>
           </a:xfrm>
           <a:prstGeom prst="rect">
             <a:avLst/>
           </a:prstGeom>
           <a:solidFill>
-            <a:srgbClr val="1E2855"/>
+            <a:srgbClr val="1E2755"/>
           </a:solidFill>
           <a:ln>
             <a:noFill/>
@@ -6786,8 +6289,8 @@
         </p:nvSpPr>
         <p:spPr>
           <a:xfrm>
-            <a:off x="4572000" y="3520440"/>
-            <a:ext cx="2995574" cy="50800"/>
+            <a:off x="4507992" y="3218688"/>
+            <a:ext cx="3078784" cy="63500"/>
           </a:xfrm>
           <a:prstGeom prst="rect">
             <a:avLst/>
@@ -6829,8 +6332,8 @@
         </p:nvSpPr>
         <p:spPr>
           <a:xfrm>
-            <a:off x="4572000" y="3749040"/>
-            <a:ext cx="3291840" cy="254000"/>
+            <a:off x="4507992" y="3474720"/>
+            <a:ext cx="3383280" cy="279400"/>
           </a:xfrm>
           <a:prstGeom prst="rect">
             <a:avLst/>
@@ -6864,18 +6367,18 @@
         </p:nvSpPr>
         <p:spPr>
           <a:xfrm>
-            <a:off x="8321040" y="1737360"/>
-            <a:ext cx="3657600" cy="3474720"/>
+            <a:off x="8275319" y="1645920"/>
+            <a:ext cx="3703320" cy="2651760"/>
           </a:xfrm>
           <a:prstGeom prst="rect">
             <a:avLst/>
           </a:prstGeom>
           <a:solidFill>
-            <a:srgbClr val="121A44"/>
+            <a:srgbClr val="101842"/>
           </a:solidFill>
           <a:ln w="12700">
             <a:solidFill>
-              <a:srgbClr val="2A3666"/>
+              <a:srgbClr val="283468"/>
             </a:solidFill>
           </a:ln>
         </p:spPr>
@@ -6909,8 +6412,8 @@
         </p:nvSpPr>
         <p:spPr>
           <a:xfrm>
-            <a:off x="10789920" y="1874520"/>
-            <a:ext cx="1097280" cy="548640"/>
+            <a:off x="10744199" y="1783080"/>
+            <a:ext cx="1097280" cy="502920"/>
           </a:xfrm>
           <a:prstGeom prst="rect">
             <a:avLst/>
@@ -6944,8 +6447,8 @@
         </p:nvSpPr>
         <p:spPr>
           <a:xfrm>
-            <a:off x="8503920" y="1920240"/>
-            <a:ext cx="2194560" cy="365760"/>
+            <a:off x="8439911" y="1810512"/>
+            <a:ext cx="2286000" cy="279400"/>
           </a:xfrm>
           <a:prstGeom prst="rect">
             <a:avLst/>
@@ -6979,8 +6482,8 @@
         </p:nvSpPr>
         <p:spPr>
           <a:xfrm>
-            <a:off x="8503920" y="2423160"/>
-            <a:ext cx="3291840" cy="914400"/>
+            <a:off x="8439911" y="2240280"/>
+            <a:ext cx="3383280" cy="868680"/>
           </a:xfrm>
           <a:prstGeom prst="rect">
             <a:avLst/>
@@ -6995,7 +6498,7 @@
           <a:p>
             <a:pPr algn="l"/>
             <a:r>
-              <a:rPr sz="2200" b="1" i="0">
+              <a:rPr sz="2100" b="1">
                 <a:solidFill>
                   <a:srgbClr val="FFFFFF"/>
                 </a:solidFill>
@@ -7015,14 +6518,14 @@
         </p:nvSpPr>
         <p:spPr>
           <a:xfrm>
-            <a:off x="8503920" y="3520440"/>
-            <a:ext cx="3291840" cy="50800"/>
+            <a:off x="8439911" y="3218688"/>
+            <a:ext cx="3383280" cy="63500"/>
           </a:xfrm>
           <a:prstGeom prst="rect">
             <a:avLst/>
           </a:prstGeom>
           <a:solidFill>
-            <a:srgbClr val="1E2855"/>
+            <a:srgbClr val="1E2755"/>
           </a:solidFill>
           <a:ln>
             <a:noFill/>
@@ -7058,8 +6561,8 @@
         </p:nvSpPr>
         <p:spPr>
           <a:xfrm>
-            <a:off x="8503920" y="3520440"/>
-            <a:ext cx="2863900" cy="50800"/>
+            <a:off x="8439911" y="3218688"/>
+            <a:ext cx="2943453" cy="63500"/>
           </a:xfrm>
           <a:prstGeom prst="rect">
             <a:avLst/>
@@ -7101,8 +6604,8 @@
         </p:nvSpPr>
         <p:spPr>
           <a:xfrm>
-            <a:off x="8503920" y="3749040"/>
-            <a:ext cx="3291840" cy="254000"/>
+            <a:off x="8439911" y="3474720"/>
+            <a:ext cx="3383280" cy="279400"/>
           </a:xfrm>
           <a:prstGeom prst="rect">
             <a:avLst/>
@@ -7144,8 +6647,8 @@
         </p:blipFill>
         <p:spPr>
           <a:xfrm>
-            <a:off x="0" y="5212080"/>
-            <a:ext cx="12188952" cy="1463040"/>
+            <a:off x="365760" y="4434840"/>
+            <a:ext cx="11457432" cy="2103120"/>
           </a:xfrm>
           <a:prstGeom prst="rect">
             <a:avLst/>
@@ -7154,62 +6657,148 @@
       </p:pic>
       <p:sp>
         <p:nvSpPr>
-          <p:cNvPr id="27" name="TextBox 26"/>
-          <p:cNvSpPr txBox="1"/>
-          <p:nvPr/>
-        </p:nvSpPr>
-        <p:spPr>
-          <a:xfrm>
-            <a:off x="1097280" y="5303520"/>
-            <a:ext cx="9601200" cy="254000"/>
-          </a:xfrm>
-          <a:prstGeom prst="rect">
-            <a:avLst/>
-          </a:prstGeom>
-          <a:noFill/>
-        </p:spPr>
-        <p:txBody>
-          <a:bodyPr wrap="square">
-            <a:spAutoFit/>
-          </a:bodyPr>
-          <a:lstStyle/>
-          <a:p>
-            <a:pPr algn="ctr"/>
-            <a:r>
-              <a:rPr sz="1000" b="1" i="0">
+          <p:cNvPr id="27" name="Rectangle 26"/>
+          <p:cNvSpPr/>
+          <p:nvPr/>
+        </p:nvSpPr>
+        <p:spPr>
+          <a:xfrm>
+            <a:off x="365760" y="4434840"/>
+            <a:ext cx="11457432" cy="2103120"/>
+          </a:xfrm>
+          <a:prstGeom prst="rect">
+            <a:avLst/>
+          </a:prstGeom>
+          <a:noFill/>
+          <a:ln w="15240">
+            <a:solidFill>
+              <a:srgbClr val="C9A84C"/>
+            </a:solidFill>
+          </a:ln>
+        </p:spPr>
+        <p:style>
+          <a:lnRef idx="1">
+            <a:schemeClr val="accent1"/>
+          </a:lnRef>
+          <a:fillRef idx="3">
+            <a:schemeClr val="accent1"/>
+          </a:fillRef>
+          <a:effectRef idx="2">
+            <a:schemeClr val="accent1"/>
+          </a:effectRef>
+          <a:fontRef idx="minor">
+            <a:schemeClr val="lt1"/>
+          </a:fontRef>
+        </p:style>
+        <p:txBody>
+          <a:bodyPr rtlCol="0" anchor="ctr"/>
+          <a:lstStyle/>
+          <a:p>
+            <a:pPr algn="ctr"/>
+          </a:p>
+        </p:txBody>
+      </p:sp>
+      <p:sp>
+        <p:nvSpPr>
+          <p:cNvPr id="28" name="Rectangle 27"/>
+          <p:cNvSpPr/>
+          <p:nvPr/>
+        </p:nvSpPr>
+        <p:spPr>
+          <a:xfrm>
+            <a:off x="365760" y="6217920"/>
+            <a:ext cx="11457432" cy="320040"/>
+          </a:xfrm>
+          <a:prstGeom prst="rect">
+            <a:avLst/>
+          </a:prstGeom>
+          <a:solidFill>
+            <a:srgbClr val="080D26"/>
+          </a:solidFill>
+          <a:ln>
+            <a:noFill/>
+          </a:ln>
+        </p:spPr>
+        <p:style>
+          <a:lnRef idx="1">
+            <a:schemeClr val="accent1"/>
+          </a:lnRef>
+          <a:fillRef idx="3">
+            <a:schemeClr val="accent1"/>
+          </a:fillRef>
+          <a:effectRef idx="2">
+            <a:schemeClr val="accent1"/>
+          </a:effectRef>
+          <a:fontRef idx="minor">
+            <a:schemeClr val="lt1"/>
+          </a:fontRef>
+        </p:style>
+        <p:txBody>
+          <a:bodyPr rtlCol="0" anchor="ctr"/>
+          <a:lstStyle/>
+          <a:p>
+            <a:pPr algn="ctr"/>
+          </a:p>
+        </p:txBody>
+      </p:sp>
+      <p:sp>
+        <p:nvSpPr>
+          <p:cNvPr id="29" name="TextBox 28"/>
+          <p:cNvSpPr txBox="1"/>
+          <p:nvPr/>
+        </p:nvSpPr>
+        <p:spPr>
+          <a:xfrm>
+            <a:off x="475488" y="6294120"/>
+            <a:ext cx="11237976" cy="320040"/>
+          </a:xfrm>
+          <a:prstGeom prst="rect">
+            <a:avLst/>
+          </a:prstGeom>
+          <a:noFill/>
+        </p:spPr>
+        <p:txBody>
+          <a:bodyPr wrap="square">
+            <a:spAutoFit/>
+          </a:bodyPr>
+          <a:lstStyle/>
+          <a:p>
+            <a:pPr algn="l"/>
+            <a:r>
+              <a:rPr sz="900" b="1" i="0">
                 <a:solidFill>
                   <a:srgbClr val="C9A84C"/>
                 </a:solidFill>
                 <a:latin typeface="Barlow Condensed"/>
               </a:rPr>
-              <a:t>● Live signal detections from vaughnmartin.com production — not hypothetical</a:t>
-            </a:r>
-          </a:p>
-        </p:txBody>
-      </p:sp>
-      <p:sp>
-        <p:nvSpPr>
-          <p:cNvPr id="28" name="TextBox 27"/>
-          <p:cNvSpPr txBox="1"/>
-          <p:nvPr/>
-        </p:nvSpPr>
-        <p:spPr>
-          <a:xfrm>
-            <a:off x="11247120" y="6492240"/>
-            <a:ext cx="914400" cy="228600"/>
-          </a:xfrm>
-          <a:prstGeom prst="rect">
-            <a:avLst/>
-          </a:prstGeom>
-          <a:noFill/>
-        </p:spPr>
-        <p:txBody>
-          <a:bodyPr wrap="square">
-            <a:spAutoFit/>
-          </a:bodyPr>
-          <a:lstStyle/>
-          <a:p>
-            <a:pPr algn="l"/>
+              <a:t>SIGNAL INTELLIGENCE FEED · VAUGHNMARTIN.COM · LIVE DETECTIONS · PRODUCTION</a:t>
+            </a:r>
+          </a:p>
+        </p:txBody>
+      </p:sp>
+      <p:sp>
+        <p:nvSpPr>
+          <p:cNvPr id="30" name="TextBox 29"/>
+          <p:cNvSpPr txBox="1"/>
+          <p:nvPr/>
+        </p:nvSpPr>
+        <p:spPr>
+          <a:xfrm>
+            <a:off x="11247120" y="6537960"/>
+            <a:ext cx="914400" cy="203200"/>
+          </a:xfrm>
+          <a:prstGeom prst="rect">
+            <a:avLst/>
+          </a:prstGeom>
+          <a:noFill/>
+        </p:spPr>
+        <p:txBody>
+          <a:bodyPr wrap="square">
+            <a:spAutoFit/>
+          </a:bodyPr>
+          <a:lstStyle/>
+          <a:p>
+            <a:pPr algn="r"/>
             <a:r>
               <a:rPr sz="1000" b="1" i="0">
                 <a:solidFill>
@@ -7299,14 +6888,14 @@
         </p:nvSpPr>
         <p:spPr>
           <a:xfrm>
-            <a:off x="7315200" y="0"/>
-            <a:ext cx="5486400" cy="3657600"/>
+            <a:off x="6858000" y="0"/>
+            <a:ext cx="5486400" cy="3474720"/>
           </a:xfrm>
           <a:prstGeom prst="rect">
             <a:avLst/>
           </a:prstGeom>
           <a:solidFill>
-            <a:srgbClr val="121F4A"/>
+            <a:srgbClr val="101C4A"/>
           </a:solidFill>
           <a:ln>
             <a:noFill/>
@@ -7342,23 +6931,23 @@
         </p:nvSpPr>
         <p:spPr>
           <a:xfrm>
-            <a:off x="1371600" y="914400"/>
-            <a:ext cx="9144000" cy="1097280"/>
-          </a:xfrm>
-          <a:prstGeom prst="rect">
-            <a:avLst/>
-          </a:prstGeom>
-          <a:noFill/>
-        </p:spPr>
-        <p:txBody>
-          <a:bodyPr wrap="square">
-            <a:spAutoFit/>
-          </a:bodyPr>
-          <a:lstStyle/>
-          <a:p>
-            <a:pPr algn="ctr"/>
-            <a:r>
-              <a:rPr sz="5200" b="1">
+            <a:off x="914400" y="777240"/>
+            <a:ext cx="10332720" cy="1097280"/>
+          </a:xfrm>
+          <a:prstGeom prst="rect">
+            <a:avLst/>
+          </a:prstGeom>
+          <a:noFill/>
+        </p:spPr>
+        <p:txBody>
+          <a:bodyPr wrap="square">
+            <a:spAutoFit/>
+          </a:bodyPr>
+          <a:lstStyle/>
+          <a:p>
+            <a:pPr algn="ctr"/>
+            <a:r>
+              <a:rPr sz="5400" b="1">
                 <a:solidFill>
                   <a:srgbClr val="FFFFFF"/>
                 </a:solidFill>
@@ -7377,23 +6966,23 @@
         </p:nvSpPr>
         <p:spPr>
           <a:xfrm>
-            <a:off x="1371600" y="1783080"/>
-            <a:ext cx="9144000" cy="1097280"/>
-          </a:xfrm>
-          <a:prstGeom prst="rect">
-            <a:avLst/>
-          </a:prstGeom>
-          <a:noFill/>
-        </p:spPr>
-        <p:txBody>
-          <a:bodyPr wrap="square">
-            <a:spAutoFit/>
-          </a:bodyPr>
-          <a:lstStyle/>
-          <a:p>
-            <a:pPr algn="ctr"/>
-            <a:r>
-              <a:rPr sz="5200" b="1">
+            <a:off x="914400" y="1783080"/>
+            <a:ext cx="10332720" cy="1097280"/>
+          </a:xfrm>
+          <a:prstGeom prst="rect">
+            <a:avLst/>
+          </a:prstGeom>
+          <a:noFill/>
+        </p:spPr>
+        <p:txBody>
+          <a:bodyPr wrap="square">
+            <a:spAutoFit/>
+          </a:bodyPr>
+          <a:lstStyle/>
+          <a:p>
+            <a:pPr algn="ctr"/>
+            <a:r>
+              <a:rPr sz="5400" b="1">
                 <a:solidFill>
                   <a:srgbClr val="C9A84C"/>
                 </a:solidFill>
@@ -7412,8 +7001,8 @@
         </p:nvSpPr>
         <p:spPr>
           <a:xfrm>
-            <a:off x="1371600" y="2834640"/>
-            <a:ext cx="9144000" cy="355600"/>
+            <a:off x="914400" y="2834640"/>
+            <a:ext cx="10332720" cy="355600"/>
           </a:xfrm>
           <a:prstGeom prst="rect">
             <a:avLst/>
@@ -7447,14 +7036,14 @@
         </p:nvSpPr>
         <p:spPr>
           <a:xfrm>
-            <a:off x="1371600" y="3606800"/>
-            <a:ext cx="3200400" cy="12700"/>
+            <a:off x="548640" y="3429000"/>
+            <a:ext cx="3566160" cy="19050"/>
           </a:xfrm>
           <a:prstGeom prst="rect">
             <a:avLst/>
           </a:prstGeom>
           <a:solidFill>
-            <a:srgbClr val="222B55"/>
+            <a:srgbClr val="C9A84C"/>
           </a:solidFill>
           <a:ln>
             <a:noFill/>
@@ -7490,8 +7079,8 @@
         </p:nvSpPr>
         <p:spPr>
           <a:xfrm>
-            <a:off x="1371600" y="3657600"/>
-            <a:ext cx="3200400" cy="1097280"/>
+            <a:off x="548640" y="3566160"/>
+            <a:ext cx="3566160" cy="1097280"/>
           </a:xfrm>
           <a:prstGeom prst="rect">
             <a:avLst/>
@@ -7525,30 +7114,29 @@
         </p:nvSpPr>
         <p:spPr>
           <a:xfrm>
-            <a:off x="1371600" y="4572000"/>
-            <a:ext cx="3200400" cy="640080"/>
-          </a:xfrm>
-          <a:prstGeom prst="rect">
-            <a:avLst/>
-          </a:prstGeom>
-          <a:noFill/>
-        </p:spPr>
-        <p:txBody>
-          <a:bodyPr wrap="square">
-            <a:spAutoFit/>
-          </a:bodyPr>
-          <a:lstStyle/>
-          <a:p>
-            <a:pPr algn="ctr"/>
-            <a:r>
-              <a:rPr sz="1400" b="0" i="0">
+            <a:off x="548640" y="4617720"/>
+            <a:ext cx="3566160" cy="330200"/>
+          </a:xfrm>
+          <a:prstGeom prst="rect">
+            <a:avLst/>
+          </a:prstGeom>
+          <a:noFill/>
+        </p:spPr>
+        <p:txBody>
+          <a:bodyPr wrap="square">
+            <a:spAutoFit/>
+          </a:bodyPr>
+          <a:lstStyle/>
+          <a:p>
+            <a:pPr algn="ctr"/>
+            <a:r>
+              <a:rPr sz="1300" b="0" i="0">
                 <a:solidFill>
                   <a:srgbClr val="FFFFFF"/>
                 </a:solidFill>
                 <a:latin typeface="Barlow"/>
               </a:rPr>
-              <a:t>Readiness
-Protocols</a:t>
+              <a:t>Readiness Protocols</a:t>
             </a:r>
           </a:p>
         </p:txBody>
@@ -7561,14 +7149,14 @@
         </p:nvSpPr>
         <p:spPr>
           <a:xfrm>
-            <a:off x="4846320" y="3606800"/>
-            <a:ext cx="3200400" cy="12700"/>
+            <a:off x="4389120" y="3429000"/>
+            <a:ext cx="3566160" cy="19050"/>
           </a:xfrm>
           <a:prstGeom prst="rect">
             <a:avLst/>
           </a:prstGeom>
           <a:solidFill>
-            <a:srgbClr val="222B55"/>
+            <a:srgbClr val="C9A84C"/>
           </a:solidFill>
           <a:ln>
             <a:noFill/>
@@ -7604,8 +7192,8 @@
         </p:nvSpPr>
         <p:spPr>
           <a:xfrm>
-            <a:off x="4846320" y="3657600"/>
-            <a:ext cx="3200400" cy="1097280"/>
+            <a:off x="4389120" y="3566160"/>
+            <a:ext cx="3566160" cy="1097280"/>
           </a:xfrm>
           <a:prstGeom prst="rect">
             <a:avLst/>
@@ -7639,30 +7227,29 @@
         </p:nvSpPr>
         <p:spPr>
           <a:xfrm>
-            <a:off x="4846320" y="4572000"/>
-            <a:ext cx="3200400" cy="640080"/>
-          </a:xfrm>
-          <a:prstGeom prst="rect">
-            <a:avLst/>
-          </a:prstGeom>
-          <a:noFill/>
-        </p:spPr>
-        <p:txBody>
-          <a:bodyPr wrap="square">
-            <a:spAutoFit/>
-          </a:bodyPr>
-          <a:lstStyle/>
-          <a:p>
-            <a:pPr algn="ctr"/>
-            <a:r>
-              <a:rPr sz="1400" b="0" i="0">
+            <a:off x="4389120" y="4617720"/>
+            <a:ext cx="3566160" cy="330200"/>
+          </a:xfrm>
+          <a:prstGeom prst="rect">
+            <a:avLst/>
+          </a:prstGeom>
+          <a:noFill/>
+        </p:spPr>
+        <p:txBody>
+          <a:bodyPr wrap="square">
+            <a:spAutoFit/>
+          </a:bodyPr>
+          <a:lstStyle/>
+          <a:p>
+            <a:pPr algn="ctr"/>
+            <a:r>
+              <a:rPr sz="1300" b="0" i="0">
                 <a:solidFill>
                   <a:srgbClr val="FFFFFF"/>
                 </a:solidFill>
                 <a:latin typeface="Barlow"/>
               </a:rPr>
-              <a:t>Strategic
-Triggers Mapped</a:t>
+              <a:t>Strategic Triggers</a:t>
             </a:r>
           </a:p>
         </p:txBody>
@@ -7675,14 +7262,14 @@
         </p:nvSpPr>
         <p:spPr>
           <a:xfrm>
-            <a:off x="8321040" y="3606800"/>
-            <a:ext cx="3200400" cy="12700"/>
+            <a:off x="8229600" y="3429000"/>
+            <a:ext cx="3566160" cy="19050"/>
           </a:xfrm>
           <a:prstGeom prst="rect">
             <a:avLst/>
           </a:prstGeom>
           <a:solidFill>
-            <a:srgbClr val="222B55"/>
+            <a:srgbClr val="C9A84C"/>
           </a:solidFill>
           <a:ln>
             <a:noFill/>
@@ -7718,23 +7305,23 @@
         </p:nvSpPr>
         <p:spPr>
           <a:xfrm>
-            <a:off x="8321040" y="3657600"/>
-            <a:ext cx="3200400" cy="1097280"/>
-          </a:xfrm>
-          <a:prstGeom prst="rect">
-            <a:avLst/>
-          </a:prstGeom>
-          <a:noFill/>
-        </p:spPr>
-        <p:txBody>
-          <a:bodyPr wrap="square">
-            <a:spAutoFit/>
-          </a:bodyPr>
-          <a:lstStyle/>
-          <a:p>
-            <a:pPr algn="ctr"/>
-            <a:r>
-              <a:rPr sz="4200" b="1" i="0">
+            <a:off x="8229600" y="3566160"/>
+            <a:ext cx="3566160" cy="1097280"/>
+          </a:xfrm>
+          <a:prstGeom prst="rect">
+            <a:avLst/>
+          </a:prstGeom>
+          <a:noFill/>
+        </p:spPr>
+        <p:txBody>
+          <a:bodyPr wrap="square">
+            <a:spAutoFit/>
+          </a:bodyPr>
+          <a:lstStyle/>
+          <a:p>
+            <a:pPr algn="ctr"/>
+            <a:r>
+              <a:rPr sz="4400" b="1" i="0">
                 <a:solidFill>
                   <a:srgbClr val="C9A84C"/>
                 </a:solidFill>
@@ -7753,44 +7340,153 @@
         </p:nvSpPr>
         <p:spPr>
           <a:xfrm>
-            <a:off x="8321040" y="4572000"/>
-            <a:ext cx="3200400" cy="640080"/>
-          </a:xfrm>
-          <a:prstGeom prst="rect">
-            <a:avLst/>
-          </a:prstGeom>
-          <a:noFill/>
-        </p:spPr>
-        <p:txBody>
-          <a:bodyPr wrap="square">
-            <a:spAutoFit/>
-          </a:bodyPr>
-          <a:lstStyle/>
-          <a:p>
-            <a:pPr algn="ctr"/>
-            <a:r>
-              <a:rPr sz="1400" b="0" i="0">
+            <a:off x="8229600" y="4617720"/>
+            <a:ext cx="3566160" cy="330200"/>
+          </a:xfrm>
+          <a:prstGeom prst="rect">
+            <a:avLst/>
+          </a:prstGeom>
+          <a:noFill/>
+        </p:spPr>
+        <p:txBody>
+          <a:bodyPr wrap="square">
+            <a:spAutoFit/>
+          </a:bodyPr>
+          <a:lstStyle/>
+          <a:p>
+            <a:pPr algn="ctr"/>
+            <a:r>
+              <a:rPr sz="1300" b="0" i="0">
                 <a:solidFill>
                   <a:srgbClr val="FFFFFF"/>
                 </a:solidFill>
                 <a:latin typeface="Barlow"/>
               </a:rPr>
-              <a:t>Full Execution
-Cycle</a:t>
-            </a:r>
-          </a:p>
-        </p:txBody>
-      </p:sp>
-      <p:sp>
-        <p:nvSpPr>
-          <p:cNvPr id="16" name="TextBox 15"/>
-          <p:cNvSpPr txBox="1"/>
-          <p:nvPr/>
-        </p:nvSpPr>
-        <p:spPr>
-          <a:xfrm>
-            <a:off x="11247120" y="6492240"/>
-            <a:ext cx="914400" cy="228600"/>
+              <a:t>Full Execution Cycle</a:t>
+            </a:r>
+          </a:p>
+        </p:txBody>
+      </p:sp>
+      <p:pic>
+        <p:nvPicPr>
+          <p:cNvPr id="16" name="Picture 15" descr="pptx_how_executes.jpg"/>
+          <p:cNvPicPr>
+            <a:picLocks noChangeAspect="1"/>
+          </p:cNvPicPr>
+          <p:nvPr/>
+        </p:nvPicPr>
+        <p:blipFill>
+          <a:blip r:embed="rId2"/>
+          <a:stretch>
+            <a:fillRect/>
+          </a:stretch>
+        </p:blipFill>
+        <p:spPr>
+          <a:xfrm>
+            <a:off x="2743200" y="5120640"/>
+            <a:ext cx="6702552" cy="1417320"/>
+          </a:xfrm>
+          <a:prstGeom prst="rect">
+            <a:avLst/>
+          </a:prstGeom>
+        </p:spPr>
+      </p:pic>
+      <p:sp>
+        <p:nvSpPr>
+          <p:cNvPr id="17" name="Rectangle 16"/>
+          <p:cNvSpPr/>
+          <p:nvPr/>
+        </p:nvSpPr>
+        <p:spPr>
+          <a:xfrm>
+            <a:off x="2743200" y="5120640"/>
+            <a:ext cx="6702552" cy="1417320"/>
+          </a:xfrm>
+          <a:prstGeom prst="rect">
+            <a:avLst/>
+          </a:prstGeom>
+          <a:noFill/>
+          <a:ln w="15240">
+            <a:solidFill>
+              <a:srgbClr val="C9A84C"/>
+            </a:solidFill>
+          </a:ln>
+        </p:spPr>
+        <p:style>
+          <a:lnRef idx="1">
+            <a:schemeClr val="accent1"/>
+          </a:lnRef>
+          <a:fillRef idx="3">
+            <a:schemeClr val="accent1"/>
+          </a:fillRef>
+          <a:effectRef idx="2">
+            <a:schemeClr val="accent1"/>
+          </a:effectRef>
+          <a:fontRef idx="minor">
+            <a:schemeClr val="lt1"/>
+          </a:fontRef>
+        </p:style>
+        <p:txBody>
+          <a:bodyPr rtlCol="0" anchor="ctr"/>
+          <a:lstStyle/>
+          <a:p>
+            <a:pPr algn="ctr"/>
+          </a:p>
+        </p:txBody>
+      </p:sp>
+      <p:sp>
+        <p:nvSpPr>
+          <p:cNvPr id="18" name="Rectangle 17"/>
+          <p:cNvSpPr/>
+          <p:nvPr/>
+        </p:nvSpPr>
+        <p:spPr>
+          <a:xfrm>
+            <a:off x="2743200" y="6217920"/>
+            <a:ext cx="6702552" cy="320040"/>
+          </a:xfrm>
+          <a:prstGeom prst="rect">
+            <a:avLst/>
+          </a:prstGeom>
+          <a:solidFill>
+            <a:srgbClr val="080D26"/>
+          </a:solidFill>
+          <a:ln>
+            <a:noFill/>
+          </a:ln>
+        </p:spPr>
+        <p:style>
+          <a:lnRef idx="1">
+            <a:schemeClr val="accent1"/>
+          </a:lnRef>
+          <a:fillRef idx="3">
+            <a:schemeClr val="accent1"/>
+          </a:fillRef>
+          <a:effectRef idx="2">
+            <a:schemeClr val="accent1"/>
+          </a:effectRef>
+          <a:fontRef idx="minor">
+            <a:schemeClr val="lt1"/>
+          </a:fontRef>
+        </p:style>
+        <p:txBody>
+          <a:bodyPr rtlCol="0" anchor="ctr"/>
+          <a:lstStyle/>
+          <a:p>
+            <a:pPr algn="ctr"/>
+          </a:p>
+        </p:txBody>
+      </p:sp>
+      <p:sp>
+        <p:nvSpPr>
+          <p:cNvPr id="19" name="TextBox 18"/>
+          <p:cNvSpPr txBox="1"/>
+          <p:nvPr/>
+        </p:nvSpPr>
+        <p:spPr>
+          <a:xfrm>
+            <a:off x="2852928" y="6294120"/>
+            <a:ext cx="6483096" cy="320040"/>
           </a:xfrm>
           <a:prstGeom prst="rect">
             <a:avLst/>
@@ -7804,6 +7500,41 @@
           <a:lstStyle/>
           <a:p>
             <a:pPr algn="l"/>
+            <a:r>
+              <a:rPr sz="900" b="1" i="0">
+                <a:solidFill>
+                  <a:srgbClr val="C9A84C"/>
+                </a:solidFill>
+                <a:latin typeface="Barlow Condensed"/>
+              </a:rPr>
+              <a:t>VAUGHNMARTIN.COM/HOW-IT-EXECUTES · LIVE ANIMATED EXECUTION CHAIN</a:t>
+            </a:r>
+          </a:p>
+        </p:txBody>
+      </p:sp>
+      <p:sp>
+        <p:nvSpPr>
+          <p:cNvPr id="20" name="TextBox 19"/>
+          <p:cNvSpPr txBox="1"/>
+          <p:nvPr/>
+        </p:nvSpPr>
+        <p:spPr>
+          <a:xfrm>
+            <a:off x="11247120" y="6537960"/>
+            <a:ext cx="914400" cy="203200"/>
+          </a:xfrm>
+          <a:prstGeom prst="rect">
+            <a:avLst/>
+          </a:prstGeom>
+          <a:noFill/>
+        </p:spPr>
+        <p:txBody>
+          <a:bodyPr wrap="square">
+            <a:spAutoFit/>
+          </a:bodyPr>
+          <a:lstStyle/>
+          <a:p>
+            <a:pPr algn="r"/>
             <a:r>
               <a:rPr sz="1000" b="1" i="0">
                 <a:solidFill>
@@ -7894,13 +7625,13 @@
         <p:spPr>
           <a:xfrm>
             <a:off x="0" y="0"/>
-            <a:ext cx="5486400" cy="6858000"/>
+            <a:ext cx="5760720" cy="6858000"/>
           </a:xfrm>
           <a:prstGeom prst="rect">
             <a:avLst/>
           </a:prstGeom>
           <a:solidFill>
-            <a:srgbClr val="101435"/>
+            <a:srgbClr val="0E1334"/>
           </a:solidFill>
           <a:ln>
             <a:noFill/>
@@ -7936,8 +7667,8 @@
         </p:nvSpPr>
         <p:spPr>
           <a:xfrm>
-            <a:off x="457200" y="548640"/>
-            <a:ext cx="4572000" cy="254000"/>
+            <a:off x="411480" y="502920"/>
+            <a:ext cx="5029200" cy="254000"/>
           </a:xfrm>
           <a:prstGeom prst="rect">
             <a:avLst/>
@@ -7971,8 +7702,8 @@
         </p:nvSpPr>
         <p:spPr>
           <a:xfrm>
-            <a:off x="457200" y="914400"/>
-            <a:ext cx="5029200" cy="914400"/>
+            <a:off x="411480" y="868680"/>
+            <a:ext cx="5212080" cy="914400"/>
           </a:xfrm>
           <a:prstGeom prst="rect">
             <a:avLst/>
@@ -8006,8 +7737,8 @@
         </p:nvSpPr>
         <p:spPr>
           <a:xfrm>
-            <a:off x="457200" y="2011680"/>
-            <a:ext cx="365760" cy="355600"/>
+            <a:off x="411480" y="1920240"/>
+            <a:ext cx="411480" cy="355600"/>
           </a:xfrm>
           <a:prstGeom prst="rect">
             <a:avLst/>
@@ -8041,8 +7772,8 @@
         </p:nvSpPr>
         <p:spPr>
           <a:xfrm>
-            <a:off x="914400" y="2011680"/>
-            <a:ext cx="4389120" cy="355600"/>
+            <a:off x="868680" y="1920240"/>
+            <a:ext cx="4663440" cy="355600"/>
           </a:xfrm>
           <a:prstGeom prst="rect">
             <a:avLst/>
@@ -8076,8 +7807,8 @@
         </p:nvSpPr>
         <p:spPr>
           <a:xfrm>
-            <a:off x="457200" y="2880360"/>
-            <a:ext cx="365760" cy="355600"/>
+            <a:off x="411480" y="2788920"/>
+            <a:ext cx="411480" cy="355600"/>
           </a:xfrm>
           <a:prstGeom prst="rect">
             <a:avLst/>
@@ -8111,8 +7842,8 @@
         </p:nvSpPr>
         <p:spPr>
           <a:xfrm>
-            <a:off x="914400" y="2880360"/>
-            <a:ext cx="4389120" cy="355600"/>
+            <a:off x="868680" y="2788920"/>
+            <a:ext cx="4663440" cy="355600"/>
           </a:xfrm>
           <a:prstGeom prst="rect">
             <a:avLst/>
@@ -8146,8 +7877,8 @@
         </p:nvSpPr>
         <p:spPr>
           <a:xfrm>
-            <a:off x="457200" y="3749040"/>
-            <a:ext cx="365760" cy="355600"/>
+            <a:off x="411480" y="3657600"/>
+            <a:ext cx="411480" cy="355600"/>
           </a:xfrm>
           <a:prstGeom prst="rect">
             <a:avLst/>
@@ -8181,8 +7912,8 @@
         </p:nvSpPr>
         <p:spPr>
           <a:xfrm>
-            <a:off x="914400" y="3749040"/>
-            <a:ext cx="4389120" cy="355600"/>
+            <a:off x="868680" y="3657600"/>
+            <a:ext cx="4663440" cy="355600"/>
           </a:xfrm>
           <a:prstGeom prst="rect">
             <a:avLst/>
@@ -8216,8 +7947,8 @@
         </p:nvSpPr>
         <p:spPr>
           <a:xfrm>
-            <a:off x="457200" y="4617720"/>
-            <a:ext cx="365760" cy="355600"/>
+            <a:off x="411480" y="4526280"/>
+            <a:ext cx="411480" cy="355600"/>
           </a:xfrm>
           <a:prstGeom prst="rect">
             <a:avLst/>
@@ -8251,8 +7982,8 @@
         </p:nvSpPr>
         <p:spPr>
           <a:xfrm>
-            <a:off x="914400" y="4617720"/>
-            <a:ext cx="4389120" cy="355600"/>
+            <a:off x="868680" y="4526280"/>
+            <a:ext cx="4663440" cy="355600"/>
           </a:xfrm>
           <a:prstGeom prst="rect">
             <a:avLst/>
@@ -8286,8 +8017,8 @@
         </p:nvSpPr>
         <p:spPr>
           <a:xfrm>
-            <a:off x="6217920" y="548640"/>
-            <a:ext cx="9144000" cy="254000"/>
+            <a:off x="6217920" y="502920"/>
+            <a:ext cx="10972800" cy="228600"/>
           </a:xfrm>
           <a:prstGeom prst="rect">
             <a:avLst/>
@@ -8321,8 +8052,8 @@
         </p:nvSpPr>
         <p:spPr>
           <a:xfrm>
-            <a:off x="5943600" y="914400"/>
-            <a:ext cx="5760720" cy="1097280"/>
+            <a:off x="5943600" y="868680"/>
+            <a:ext cx="5852160" cy="1005840"/>
           </a:xfrm>
           <a:prstGeom prst="rect">
             <a:avLst/>
@@ -8356,8 +8087,8 @@
         </p:nvSpPr>
         <p:spPr>
           <a:xfrm>
-            <a:off x="5943600" y="2011680"/>
-            <a:ext cx="365760" cy="355600"/>
+            <a:off x="5943600" y="1920240"/>
+            <a:ext cx="411480" cy="355600"/>
           </a:xfrm>
           <a:prstGeom prst="rect">
             <a:avLst/>
@@ -8391,8 +8122,8 @@
         </p:nvSpPr>
         <p:spPr>
           <a:xfrm>
-            <a:off x="6400800" y="2011680"/>
-            <a:ext cx="5303520" cy="355600"/>
+            <a:off x="6400800" y="1920240"/>
+            <a:ext cx="5394960" cy="355600"/>
           </a:xfrm>
           <a:prstGeom prst="rect">
             <a:avLst/>
@@ -8426,8 +8157,8 @@
         </p:nvSpPr>
         <p:spPr>
           <a:xfrm>
-            <a:off x="5943600" y="2880360"/>
-            <a:ext cx="365760" cy="355600"/>
+            <a:off x="5943600" y="2788920"/>
+            <a:ext cx="411480" cy="355600"/>
           </a:xfrm>
           <a:prstGeom prst="rect">
             <a:avLst/>
@@ -8461,8 +8192,8 @@
         </p:nvSpPr>
         <p:spPr>
           <a:xfrm>
-            <a:off x="6400800" y="2880360"/>
-            <a:ext cx="5303520" cy="355600"/>
+            <a:off x="6400800" y="2788920"/>
+            <a:ext cx="5394960" cy="355600"/>
           </a:xfrm>
           <a:prstGeom prst="rect">
             <a:avLst/>
@@ -8496,8 +8227,8 @@
         </p:nvSpPr>
         <p:spPr>
           <a:xfrm>
-            <a:off x="5943600" y="3749040"/>
-            <a:ext cx="365760" cy="355600"/>
+            <a:off x="5943600" y="3657600"/>
+            <a:ext cx="411480" cy="355600"/>
           </a:xfrm>
           <a:prstGeom prst="rect">
             <a:avLst/>
@@ -8531,8 +8262,8 @@
         </p:nvSpPr>
         <p:spPr>
           <a:xfrm>
-            <a:off x="6400800" y="3749040"/>
-            <a:ext cx="5303520" cy="355600"/>
+            <a:off x="6400800" y="3657600"/>
+            <a:ext cx="5394960" cy="355600"/>
           </a:xfrm>
           <a:prstGeom prst="rect">
             <a:avLst/>
@@ -8566,8 +8297,8 @@
         </p:nvSpPr>
         <p:spPr>
           <a:xfrm>
-            <a:off x="5943600" y="4617720"/>
-            <a:ext cx="365760" cy="355600"/>
+            <a:off x="5943600" y="4526280"/>
+            <a:ext cx="411480" cy="355600"/>
           </a:xfrm>
           <a:prstGeom prst="rect">
             <a:avLst/>
@@ -8601,8 +8332,8 @@
         </p:nvSpPr>
         <p:spPr>
           <a:xfrm>
-            <a:off x="6400800" y="4617720"/>
-            <a:ext cx="5303520" cy="355600"/>
+            <a:off x="6400800" y="4526280"/>
+            <a:ext cx="5394960" cy="355600"/>
           </a:xfrm>
           <a:prstGeom prst="rect">
             <a:avLst/>
@@ -8636,14 +8367,14 @@
         </p:nvSpPr>
         <p:spPr>
           <a:xfrm>
-            <a:off x="5897880" y="457200"/>
-            <a:ext cx="19050" cy="12700"/>
+            <a:off x="5897880" y="365760"/>
+            <a:ext cx="0" cy="19050"/>
           </a:xfrm>
           <a:prstGeom prst="rect">
             <a:avLst/>
           </a:prstGeom>
           <a:solidFill>
-            <a:srgbClr val="222B55"/>
+            <a:srgbClr val="C9A84C"/>
           </a:solidFill>
           <a:ln>
             <a:noFill/>
@@ -8673,27 +8404,70 @@
       </p:sp>
       <p:sp>
         <p:nvSpPr>
-          <p:cNvPr id="25" name="TextBox 24"/>
-          <p:cNvSpPr txBox="1"/>
-          <p:nvPr/>
-        </p:nvSpPr>
-        <p:spPr>
-          <a:xfrm>
-            <a:off x="11247120" y="6492240"/>
-            <a:ext cx="914400" cy="228600"/>
-          </a:xfrm>
-          <a:prstGeom prst="rect">
-            <a:avLst/>
-          </a:prstGeom>
-          <a:noFill/>
-        </p:spPr>
-        <p:txBody>
-          <a:bodyPr wrap="square">
-            <a:spAutoFit/>
-          </a:bodyPr>
-          <a:lstStyle/>
-          <a:p>
-            <a:pPr algn="l"/>
+          <p:cNvPr id="25" name="Rectangle 24"/>
+          <p:cNvSpPr/>
+          <p:nvPr/>
+        </p:nvSpPr>
+        <p:spPr>
+          <a:xfrm>
+            <a:off x="5897880" y="320040"/>
+            <a:ext cx="19050" cy="6400800"/>
+          </a:xfrm>
+          <a:prstGeom prst="rect">
+            <a:avLst/>
+          </a:prstGeom>
+          <a:solidFill>
+            <a:srgbClr val="1E2755"/>
+          </a:solidFill>
+          <a:ln>
+            <a:noFill/>
+          </a:ln>
+        </p:spPr>
+        <p:style>
+          <a:lnRef idx="1">
+            <a:schemeClr val="accent1"/>
+          </a:lnRef>
+          <a:fillRef idx="3">
+            <a:schemeClr val="accent1"/>
+          </a:fillRef>
+          <a:effectRef idx="2">
+            <a:schemeClr val="accent1"/>
+          </a:effectRef>
+          <a:fontRef idx="minor">
+            <a:schemeClr val="lt1"/>
+          </a:fontRef>
+        </p:style>
+        <p:txBody>
+          <a:bodyPr rtlCol="0" anchor="ctr"/>
+          <a:lstStyle/>
+          <a:p>
+            <a:pPr algn="ctr"/>
+          </a:p>
+        </p:txBody>
+      </p:sp>
+      <p:sp>
+        <p:nvSpPr>
+          <p:cNvPr id="26" name="TextBox 25"/>
+          <p:cNvSpPr txBox="1"/>
+          <p:nvPr/>
+        </p:nvSpPr>
+        <p:spPr>
+          <a:xfrm>
+            <a:off x="11247120" y="6537960"/>
+            <a:ext cx="914400" cy="203200"/>
+          </a:xfrm>
+          <a:prstGeom prst="rect">
+            <a:avLst/>
+          </a:prstGeom>
+          <a:noFill/>
+        </p:spPr>
+        <p:txBody>
+          <a:bodyPr wrap="square">
+            <a:spAutoFit/>
+          </a:bodyPr>
+          <a:lstStyle/>
+          <a:p>
+            <a:pPr algn="r"/>
             <a:r>
               <a:rPr sz="1000" b="1" i="0">
                 <a:solidFill>
@@ -8783,8 +8557,8 @@
         </p:nvSpPr>
         <p:spPr>
           <a:xfrm>
-            <a:off x="457200" y="457200"/>
-            <a:ext cx="10972800" cy="254000"/>
+            <a:off x="457200" y="411480"/>
+            <a:ext cx="10972800" cy="228600"/>
           </a:xfrm>
           <a:prstGeom prst="rect">
             <a:avLst/>
@@ -8818,29 +8592,29 @@
         </p:nvSpPr>
         <p:spPr>
           <a:xfrm>
-            <a:off x="731520" y="731520"/>
-            <a:ext cx="10515600" cy="822960"/>
-          </a:xfrm>
-          <a:prstGeom prst="rect">
-            <a:avLst/>
-          </a:prstGeom>
-          <a:noFill/>
-        </p:spPr>
-        <p:txBody>
-          <a:bodyPr wrap="square">
-            <a:spAutoFit/>
-          </a:bodyPr>
-          <a:lstStyle/>
-          <a:p>
-            <a:pPr algn="ctr"/>
-            <a:r>
-              <a:rPr sz="2600" b="1">
+            <a:off x="457200" y="713232"/>
+            <a:ext cx="11247120" cy="731520"/>
+          </a:xfrm>
+          <a:prstGeom prst="rect">
+            <a:avLst/>
+          </a:prstGeom>
+          <a:noFill/>
+        </p:spPr>
+        <p:txBody>
+          <a:bodyPr wrap="square">
+            <a:spAutoFit/>
+          </a:bodyPr>
+          <a:lstStyle/>
+          <a:p>
+            <a:pPr algn="ctr"/>
+            <a:r>
+              <a:rPr sz="2200" b="1">
                 <a:solidFill>
                   <a:srgbClr val="FFFFFF"/>
                 </a:solidFill>
                 <a:latin typeface="Cormorant Garamond"/>
               </a:rPr>
-              <a:t>The preparation architecture that exists before the trigger fires</a:t>
+              <a:t>Signal detected → Protocol activates → Executive authorizes → 12 minutes</a:t>
             </a:r>
           </a:p>
         </p:txBody>
@@ -8853,14 +8627,14 @@
         </p:nvSpPr>
         <p:spPr>
           <a:xfrm>
-            <a:off x="548640" y="1737360"/>
-            <a:ext cx="1371600" cy="1371600"/>
+            <a:off x="502920" y="1508760"/>
+            <a:ext cx="1463040" cy="1463040"/>
           </a:xfrm>
           <a:prstGeom prst="ellipse">
             <a:avLst/>
           </a:prstGeom>
           <a:solidFill>
-            <a:srgbClr val="182252"/>
+            <a:srgbClr val="151F52"/>
           </a:solidFill>
           <a:ln w="19050">
             <a:solidFill>
@@ -8898,8 +8672,8 @@
         </p:nvSpPr>
         <p:spPr>
           <a:xfrm>
-            <a:off x="548640" y="2148840"/>
-            <a:ext cx="1371600" cy="548640"/>
+            <a:off x="502920" y="1965960"/>
+            <a:ext cx="1463040" cy="548640"/>
           </a:xfrm>
           <a:prstGeom prst="rect">
             <a:avLst/>
@@ -8933,8 +8707,8 @@
         </p:nvSpPr>
         <p:spPr>
           <a:xfrm>
-            <a:off x="548640" y="3200400"/>
-            <a:ext cx="1371600" cy="640080"/>
+            <a:off x="502920" y="3017520"/>
+            <a:ext cx="1463040" cy="548640"/>
           </a:xfrm>
           <a:prstGeom prst="rect">
             <a:avLst/>
@@ -8969,8 +8743,8 @@
         </p:nvSpPr>
         <p:spPr>
           <a:xfrm>
-            <a:off x="1938528" y="2368296"/>
-            <a:ext cx="512064" cy="25400"/>
+            <a:off x="1984248" y="2212848"/>
+            <a:ext cx="484632" cy="25400"/>
           </a:xfrm>
           <a:prstGeom prst="rect">
             <a:avLst/>
@@ -9012,14 +8786,14 @@
         </p:nvSpPr>
         <p:spPr>
           <a:xfrm>
-            <a:off x="2468880" y="1737360"/>
-            <a:ext cx="1371600" cy="1371600"/>
+            <a:off x="2487168" y="1508760"/>
+            <a:ext cx="1463040" cy="1463040"/>
           </a:xfrm>
           <a:prstGeom prst="ellipse">
             <a:avLst/>
           </a:prstGeom>
           <a:solidFill>
-            <a:srgbClr val="182252"/>
+            <a:srgbClr val="151F52"/>
           </a:solidFill>
           <a:ln w="19050">
             <a:solidFill>
@@ -9057,8 +8831,8 @@
         </p:nvSpPr>
         <p:spPr>
           <a:xfrm>
-            <a:off x="2468880" y="2148840"/>
-            <a:ext cx="1371600" cy="548640"/>
+            <a:off x="2487168" y="1965960"/>
+            <a:ext cx="1463040" cy="548640"/>
           </a:xfrm>
           <a:prstGeom prst="rect">
             <a:avLst/>
@@ -9092,8 +8866,8 @@
         </p:nvSpPr>
         <p:spPr>
           <a:xfrm>
-            <a:off x="2468880" y="3200400"/>
-            <a:ext cx="1371600" cy="640080"/>
+            <a:off x="2487168" y="3017520"/>
+            <a:ext cx="1463040" cy="548640"/>
           </a:xfrm>
           <a:prstGeom prst="rect">
             <a:avLst/>
@@ -9128,8 +8902,8 @@
         </p:nvSpPr>
         <p:spPr>
           <a:xfrm>
-            <a:off x="3858768" y="2368296"/>
-            <a:ext cx="512064" cy="25400"/>
+            <a:off x="3968496" y="2212848"/>
+            <a:ext cx="484632" cy="25400"/>
           </a:xfrm>
           <a:prstGeom prst="rect">
             <a:avLst/>
@@ -9171,8 +8945,8 @@
         </p:nvSpPr>
         <p:spPr>
           <a:xfrm>
-            <a:off x="4389120" y="1737360"/>
-            <a:ext cx="1371600" cy="1371600"/>
+            <a:off x="4471416" y="1508760"/>
+            <a:ext cx="1463040" cy="1463040"/>
           </a:xfrm>
           <a:prstGeom prst="ellipse">
             <a:avLst/>
@@ -9216,8 +8990,8 @@
         </p:nvSpPr>
         <p:spPr>
           <a:xfrm>
-            <a:off x="4389120" y="2148840"/>
-            <a:ext cx="1371600" cy="548640"/>
+            <a:off x="4471416" y="1965960"/>
+            <a:ext cx="1463040" cy="548640"/>
           </a:xfrm>
           <a:prstGeom prst="rect">
             <a:avLst/>
@@ -9251,8 +9025,8 @@
         </p:nvSpPr>
         <p:spPr>
           <a:xfrm>
-            <a:off x="4389120" y="3200400"/>
-            <a:ext cx="1371600" cy="640080"/>
+            <a:off x="4471416" y="3017520"/>
+            <a:ext cx="1463040" cy="548640"/>
           </a:xfrm>
           <a:prstGeom prst="rect">
             <a:avLst/>
@@ -9287,8 +9061,8 @@
         </p:nvSpPr>
         <p:spPr>
           <a:xfrm>
-            <a:off x="5779008" y="2368296"/>
-            <a:ext cx="512064" cy="25400"/>
+            <a:off x="5952744" y="2212848"/>
+            <a:ext cx="484632" cy="25400"/>
           </a:xfrm>
           <a:prstGeom prst="rect">
             <a:avLst/>
@@ -9330,14 +9104,14 @@
         </p:nvSpPr>
         <p:spPr>
           <a:xfrm>
-            <a:off x="6309360" y="1737360"/>
-            <a:ext cx="1371600" cy="1371600"/>
+            <a:off x="6455664" y="1508760"/>
+            <a:ext cx="1463040" cy="1463040"/>
           </a:xfrm>
           <a:prstGeom prst="ellipse">
             <a:avLst/>
           </a:prstGeom>
           <a:solidFill>
-            <a:srgbClr val="182252"/>
+            <a:srgbClr val="151F52"/>
           </a:solidFill>
           <a:ln w="19050">
             <a:solidFill>
@@ -9375,8 +9149,8 @@
         </p:nvSpPr>
         <p:spPr>
           <a:xfrm>
-            <a:off x="6309360" y="2148840"/>
-            <a:ext cx="1371600" cy="548640"/>
+            <a:off x="6455664" y="1965960"/>
+            <a:ext cx="1463040" cy="548640"/>
           </a:xfrm>
           <a:prstGeom prst="rect">
             <a:avLst/>
@@ -9410,8 +9184,8 @@
         </p:nvSpPr>
         <p:spPr>
           <a:xfrm>
-            <a:off x="6309360" y="3200400"/>
-            <a:ext cx="1371600" cy="640080"/>
+            <a:off x="6455664" y="3017520"/>
+            <a:ext cx="1463040" cy="548640"/>
           </a:xfrm>
           <a:prstGeom prst="rect">
             <a:avLst/>
@@ -9446,8 +9220,8 @@
         </p:nvSpPr>
         <p:spPr>
           <a:xfrm>
-            <a:off x="7699248" y="2368296"/>
-            <a:ext cx="512064" cy="25400"/>
+            <a:off x="7936992" y="2212848"/>
+            <a:ext cx="484632" cy="25400"/>
           </a:xfrm>
           <a:prstGeom prst="rect">
             <a:avLst/>
@@ -9489,14 +9263,14 @@
         </p:nvSpPr>
         <p:spPr>
           <a:xfrm>
-            <a:off x="8229600" y="1737360"/>
-            <a:ext cx="1371600" cy="1371600"/>
+            <a:off x="8439912" y="1508760"/>
+            <a:ext cx="1463040" cy="1463040"/>
           </a:xfrm>
           <a:prstGeom prst="ellipse">
             <a:avLst/>
           </a:prstGeom>
           <a:solidFill>
-            <a:srgbClr val="182252"/>
+            <a:srgbClr val="151F52"/>
           </a:solidFill>
           <a:ln w="19050">
             <a:solidFill>
@@ -9534,8 +9308,8 @@
         </p:nvSpPr>
         <p:spPr>
           <a:xfrm>
-            <a:off x="8229600" y="2148840"/>
-            <a:ext cx="1371600" cy="548640"/>
+            <a:off x="8439912" y="1965960"/>
+            <a:ext cx="1463040" cy="548640"/>
           </a:xfrm>
           <a:prstGeom prst="rect">
             <a:avLst/>
@@ -9569,8 +9343,8 @@
         </p:nvSpPr>
         <p:spPr>
           <a:xfrm>
-            <a:off x="8229600" y="3200400"/>
-            <a:ext cx="1371600" cy="640080"/>
+            <a:off x="8439912" y="3017520"/>
+            <a:ext cx="1463040" cy="548640"/>
           </a:xfrm>
           <a:prstGeom prst="rect">
             <a:avLst/>
@@ -9605,8 +9379,8 @@
         </p:nvSpPr>
         <p:spPr>
           <a:xfrm>
-            <a:off x="9619488" y="2368296"/>
-            <a:ext cx="512064" cy="25400"/>
+            <a:off x="9921240" y="2212848"/>
+            <a:ext cx="484632" cy="25400"/>
           </a:xfrm>
           <a:prstGeom prst="rect">
             <a:avLst/>
@@ -9648,8 +9422,8 @@
         </p:nvSpPr>
         <p:spPr>
           <a:xfrm>
-            <a:off x="10149840" y="1737360"/>
-            <a:ext cx="1371600" cy="1371600"/>
+            <a:off x="10424160" y="1508760"/>
+            <a:ext cx="1463040" cy="1463040"/>
           </a:xfrm>
           <a:prstGeom prst="ellipse">
             <a:avLst/>
@@ -9693,8 +9467,8 @@
         </p:nvSpPr>
         <p:spPr>
           <a:xfrm>
-            <a:off x="10149840" y="2148840"/>
-            <a:ext cx="1371600" cy="548640"/>
+            <a:off x="10424160" y="1965960"/>
+            <a:ext cx="1463040" cy="548640"/>
           </a:xfrm>
           <a:prstGeom prst="rect">
             <a:avLst/>
@@ -9728,8 +9502,8 @@
         </p:nvSpPr>
         <p:spPr>
           <a:xfrm>
-            <a:off x="10149840" y="3200400"/>
-            <a:ext cx="1371600" cy="640080"/>
+            <a:off x="10424160" y="3017520"/>
+            <a:ext cx="1463040" cy="548640"/>
           </a:xfrm>
           <a:prstGeom prst="rect">
             <a:avLst/>
@@ -9764,14 +9538,14 @@
         </p:nvSpPr>
         <p:spPr>
           <a:xfrm>
-            <a:off x="457200" y="3429000"/>
-            <a:ext cx="5029200" cy="502920"/>
+            <a:off x="457200" y="3200400"/>
+            <a:ext cx="5943600" cy="475488"/>
           </a:xfrm>
           <a:prstGeom prst="rect">
             <a:avLst/>
           </a:prstGeom>
           <a:solidFill>
-            <a:srgbClr val="20301A"/>
+            <a:srgbClr val="15281C"/>
           </a:solidFill>
           <a:ln w="12700">
             <a:solidFill>
@@ -9809,8 +9583,8 @@
         </p:nvSpPr>
         <p:spPr>
           <a:xfrm>
-            <a:off x="548640" y="3474720"/>
-            <a:ext cx="4846320" cy="457200"/>
+            <a:off x="594360" y="3246120"/>
+            <a:ext cx="5669280" cy="438912"/>
           </a:xfrm>
           <a:prstGeom prst="rect">
             <a:avLst/>
@@ -9825,13 +9599,13 @@
           <a:p>
             <a:pPr algn="l"/>
             <a:r>
-              <a:rPr sz="1500" b="1" i="0">
+              <a:rPr sz="1400" b="1" i="0">
                 <a:solidFill>
                   <a:srgbClr val="2B8A6E"/>
                 </a:solidFill>
                 <a:latin typeface="Barlow"/>
               </a:rPr>
-              <a:t>✓  Complete in 12 minutes</a:t>
+              <a:t>✓  Complete in 12 minutes — 30 days compressed</a:t>
             </a:r>
           </a:p>
         </p:txBody>
@@ -9844,8 +9618,8 @@
         </p:nvSpPr>
         <p:spPr>
           <a:xfrm>
-            <a:off x="5760720" y="3520440"/>
-            <a:ext cx="5943600" cy="355600"/>
+            <a:off x="6583680" y="3264408"/>
+            <a:ext cx="5212080" cy="438912"/>
           </a:xfrm>
           <a:prstGeom prst="rect">
             <a:avLst/>
@@ -9866,14 +9640,14 @@
                 </a:solidFill>
                 <a:latin typeface="Barlow"/>
               </a:rPr>
-              <a:t>The alternative: 30 days of mobilization before execution begins</a:t>
+              <a:t>The alternative: 30 days of mobilization before any execution begins</a:t>
             </a:r>
           </a:p>
         </p:txBody>
       </p:sp>
       <p:pic>
         <p:nvPicPr>
-          <p:cNvPr id="31" name="Picture 30" descr="slide_mission_control.jpg"/>
+          <p:cNvPr id="31" name="Picture 30" descr="pptx_how_executes.jpg"/>
           <p:cNvPicPr>
             <a:picLocks noChangeAspect="1"/>
           </p:cNvPicPr>
@@ -9887,8 +9661,8 @@
         </p:blipFill>
         <p:spPr>
           <a:xfrm>
-            <a:off x="457200" y="4069080"/>
-            <a:ext cx="7772400" cy="2194560"/>
+            <a:off x="365760" y="3794760"/>
+            <a:ext cx="11457432" cy="2697480"/>
           </a:xfrm>
           <a:prstGeom prst="rect">
             <a:avLst/>
@@ -9897,14 +9671,100 @@
       </p:pic>
       <p:sp>
         <p:nvSpPr>
-          <p:cNvPr id="32" name="TextBox 31"/>
-          <p:cNvSpPr txBox="1"/>
-          <p:nvPr/>
-        </p:nvSpPr>
-        <p:spPr>
-          <a:xfrm>
-            <a:off x="8412480" y="4572000"/>
-            <a:ext cx="3474720" cy="1371600"/>
+          <p:cNvPr id="32" name="Rectangle 31"/>
+          <p:cNvSpPr/>
+          <p:nvPr/>
+        </p:nvSpPr>
+        <p:spPr>
+          <a:xfrm>
+            <a:off x="365760" y="3794760"/>
+            <a:ext cx="11457432" cy="2697480"/>
+          </a:xfrm>
+          <a:prstGeom prst="rect">
+            <a:avLst/>
+          </a:prstGeom>
+          <a:noFill/>
+          <a:ln w="15240">
+            <a:solidFill>
+              <a:srgbClr val="C9A84C"/>
+            </a:solidFill>
+          </a:ln>
+        </p:spPr>
+        <p:style>
+          <a:lnRef idx="1">
+            <a:schemeClr val="accent1"/>
+          </a:lnRef>
+          <a:fillRef idx="3">
+            <a:schemeClr val="accent1"/>
+          </a:fillRef>
+          <a:effectRef idx="2">
+            <a:schemeClr val="accent1"/>
+          </a:effectRef>
+          <a:fontRef idx="minor">
+            <a:schemeClr val="lt1"/>
+          </a:fontRef>
+        </p:style>
+        <p:txBody>
+          <a:bodyPr rtlCol="0" anchor="ctr"/>
+          <a:lstStyle/>
+          <a:p>
+            <a:pPr algn="ctr"/>
+          </a:p>
+        </p:txBody>
+      </p:sp>
+      <p:sp>
+        <p:nvSpPr>
+          <p:cNvPr id="33" name="Rectangle 32"/>
+          <p:cNvSpPr/>
+          <p:nvPr/>
+        </p:nvSpPr>
+        <p:spPr>
+          <a:xfrm>
+            <a:off x="365760" y="6172200"/>
+            <a:ext cx="11457432" cy="320040"/>
+          </a:xfrm>
+          <a:prstGeom prst="rect">
+            <a:avLst/>
+          </a:prstGeom>
+          <a:solidFill>
+            <a:srgbClr val="080D26"/>
+          </a:solidFill>
+          <a:ln>
+            <a:noFill/>
+          </a:ln>
+        </p:spPr>
+        <p:style>
+          <a:lnRef idx="1">
+            <a:schemeClr val="accent1"/>
+          </a:lnRef>
+          <a:fillRef idx="3">
+            <a:schemeClr val="accent1"/>
+          </a:fillRef>
+          <a:effectRef idx="2">
+            <a:schemeClr val="accent1"/>
+          </a:effectRef>
+          <a:fontRef idx="minor">
+            <a:schemeClr val="lt1"/>
+          </a:fontRef>
+        </p:style>
+        <p:txBody>
+          <a:bodyPr rtlCol="0" anchor="ctr"/>
+          <a:lstStyle/>
+          <a:p>
+            <a:pPr algn="ctr"/>
+          </a:p>
+        </p:txBody>
+      </p:sp>
+      <p:sp>
+        <p:nvSpPr>
+          <p:cNvPr id="34" name="TextBox 33"/>
+          <p:cNvSpPr txBox="1"/>
+          <p:nvPr/>
+        </p:nvSpPr>
+        <p:spPr>
+          <a:xfrm>
+            <a:off x="475488" y="6248400"/>
+            <a:ext cx="11237976" cy="320040"/>
           </a:xfrm>
           <a:prstGeom prst="rect">
             <a:avLst/>
@@ -9919,40 +9779,40 @@
           <a:p>
             <a:pPr algn="l"/>
             <a:r>
-              <a:rPr sz="1200" b="0" i="0">
+              <a:rPr sz="900" b="1" i="0">
                 <a:solidFill>
                   <a:srgbClr val="C9A84C"/>
                 </a:solidFill>
                 <a:latin typeface="Barlow Condensed"/>
               </a:rPr>
-              <a:t>Mission Control · Executive-authorized execution · Live in production</a:t>
-            </a:r>
-          </a:p>
-        </p:txBody>
-      </p:sp>
-      <p:sp>
-        <p:nvSpPr>
-          <p:cNvPr id="33" name="TextBox 32"/>
-          <p:cNvSpPr txBox="1"/>
-          <p:nvPr/>
-        </p:nvSpPr>
-        <p:spPr>
-          <a:xfrm>
-            <a:off x="11247120" y="6492240"/>
-            <a:ext cx="914400" cy="228600"/>
-          </a:xfrm>
-          <a:prstGeom prst="rect">
-            <a:avLst/>
-          </a:prstGeom>
-          <a:noFill/>
-        </p:spPr>
-        <p:txBody>
-          <a:bodyPr wrap="square">
-            <a:spAutoFit/>
-          </a:bodyPr>
-          <a:lstStyle/>
-          <a:p>
-            <a:pPr algn="l"/>
+              <a:t>VAUGHNMARTIN.COM/HOW-IT-EXECUTES · LIVE ANIMATED EXECUTION CHAIN · SHOWING 12-MINUTE SEQUENCE</a:t>
+            </a:r>
+          </a:p>
+        </p:txBody>
+      </p:sp>
+      <p:sp>
+        <p:nvSpPr>
+          <p:cNvPr id="35" name="TextBox 34"/>
+          <p:cNvSpPr txBox="1"/>
+          <p:nvPr/>
+        </p:nvSpPr>
+        <p:spPr>
+          <a:xfrm>
+            <a:off x="11247120" y="6537960"/>
+            <a:ext cx="914400" cy="203200"/>
+          </a:xfrm>
+          <a:prstGeom prst="rect">
+            <a:avLst/>
+          </a:prstGeom>
+          <a:noFill/>
+        </p:spPr>
+        <p:txBody>
+          <a:bodyPr wrap="square">
+            <a:spAutoFit/>
+          </a:bodyPr>
+          <a:lstStyle/>
+          <a:p>
+            <a:pPr algn="r"/>
             <a:r>
               <a:rPr sz="1000" b="1" i="0">
                 <a:solidFill>
@@ -10042,8 +9902,8 @@
         </p:nvSpPr>
         <p:spPr>
           <a:xfrm>
-            <a:off x="457200" y="457200"/>
-            <a:ext cx="9144000" cy="254000"/>
+            <a:off x="411480" y="411480"/>
+            <a:ext cx="10972800" cy="228600"/>
           </a:xfrm>
           <a:prstGeom prst="rect">
             <a:avLst/>
@@ -10077,8 +9937,8 @@
         </p:nvSpPr>
         <p:spPr>
           <a:xfrm>
-            <a:off x="457200" y="914400"/>
-            <a:ext cx="2011680" cy="914400"/>
+            <a:off x="411480" y="777240"/>
+            <a:ext cx="4206240" cy="1463040"/>
           </a:xfrm>
           <a:prstGeom prst="rect">
             <a:avLst/>
@@ -10093,7 +9953,7 @@
           <a:p>
             <a:pPr algn="l"/>
             <a:r>
-              <a:rPr sz="5800" b="1" i="0">
+              <a:rPr sz="7200" b="1" i="0">
                 <a:solidFill>
                   <a:srgbClr val="C9A84C"/>
                 </a:solidFill>
@@ -10112,8 +9972,8 @@
         </p:nvSpPr>
         <p:spPr>
           <a:xfrm>
-            <a:off x="457200" y="1691640"/>
-            <a:ext cx="2011680" cy="640080"/>
+            <a:off x="411480" y="2011680"/>
+            <a:ext cx="4206240" cy="355600"/>
           </a:xfrm>
           <a:prstGeom prst="rect">
             <a:avLst/>
@@ -10134,8 +9994,7 @@
                 </a:solidFill>
                 <a:latin typeface="Barlow"/>
               </a:rPr>
-              <a:t>Execution Head Start
-vs. Old Model</a:t>
+              <a:t>Execution Head Start vs. Old Model</a:t>
             </a:r>
           </a:p>
         </p:txBody>
@@ -10148,8 +10007,8 @@
         </p:nvSpPr>
         <p:spPr>
           <a:xfrm>
-            <a:off x="457200" y="2560320"/>
-            <a:ext cx="2011680" cy="914400"/>
+            <a:off x="411480" y="2514600"/>
+            <a:ext cx="4206240" cy="868680"/>
           </a:xfrm>
           <a:prstGeom prst="rect">
             <a:avLst/>
@@ -10164,7 +10023,7 @@
           <a:p>
             <a:pPr algn="l"/>
             <a:r>
-              <a:rPr sz="4400" b="1" i="0">
+              <a:rPr sz="5000" b="1" i="0">
                 <a:solidFill>
                   <a:srgbClr val="FFFFFF"/>
                 </a:solidFill>
@@ -10183,8 +10042,8 @@
         </p:nvSpPr>
         <p:spPr>
           <a:xfrm>
-            <a:off x="457200" y="3337560"/>
-            <a:ext cx="2011680" cy="640080"/>
+            <a:off x="411480" y="3246120"/>
+            <a:ext cx="4206240" cy="304800"/>
           </a:xfrm>
           <a:prstGeom prst="rect">
             <a:avLst/>
@@ -10218,8 +10077,8 @@
         </p:nvSpPr>
         <p:spPr>
           <a:xfrm>
-            <a:off x="457200" y="3566160"/>
-            <a:ext cx="4114800" cy="19050"/>
+            <a:off x="411480" y="3630168"/>
+            <a:ext cx="4206240" cy="19050"/>
           </a:xfrm>
           <a:prstGeom prst="rect">
             <a:avLst/>
@@ -10261,8 +10120,8 @@
         </p:nvSpPr>
         <p:spPr>
           <a:xfrm>
-            <a:off x="457200" y="3657600"/>
-            <a:ext cx="4114800" cy="914400"/>
+            <a:off x="411480" y="3749039"/>
+            <a:ext cx="4206240" cy="355600"/>
           </a:xfrm>
           <a:prstGeom prst="rect">
             <a:avLst/>
@@ -10277,14 +10136,13 @@
           <a:p>
             <a:pPr algn="l"/>
             <a:r>
-              <a:rPr sz="1600" b="0" i="1">
-                <a:solidFill>
-                  <a:srgbClr val="99A5BB"/>
+              <a:rPr sz="1400" b="0" i="0">
+                <a:solidFill>
+                  <a:srgbClr val="FFFFFF"/>
                 </a:solidFill>
                 <a:latin typeface="Barlow"/>
               </a:rPr>
-              <a:t>Breaks even before
-the second activation.</a:t>
+              <a:t>Replaces $400K–$800K consulting retainer</a:t>
             </a:r>
           </a:p>
         </p:txBody>
@@ -10297,8 +10155,8 @@
         </p:nvSpPr>
         <p:spPr>
           <a:xfrm>
-            <a:off x="5029200" y="457200"/>
-            <a:ext cx="9144000" cy="254000"/>
+            <a:off x="411480" y="4114800"/>
+            <a:ext cx="4206240" cy="355600"/>
           </a:xfrm>
           <a:prstGeom prst="rect">
             <a:avLst/>
@@ -10313,635 +10171,62 @@
           <a:p>
             <a:pPr algn="l"/>
             <a:r>
-              <a:rPr sz="900" b="1" i="0">
-                <a:solidFill>
-                  <a:srgbClr val="C9A84C"/>
-                </a:solidFill>
-                <a:latin typeface="Barlow Condensed"/>
-              </a:rPr>
-              <a:t>THE BUSINESS CASE</a:t>
-            </a:r>
-          </a:p>
-        </p:txBody>
-      </p:sp>
-      <p:sp>
-        <p:nvSpPr>
-          <p:cNvPr id="11" name="Rectangle 10"/>
+              <a:rPr sz="1400" b="0" i="0">
+                <a:solidFill>
+                  <a:srgbClr val="2B8A6E"/>
+                </a:solidFill>
+                <a:latin typeface="Barlow"/>
+              </a:rPr>
+              <a:t>Break-even before the 2nd activation.</a:t>
+            </a:r>
+          </a:p>
+        </p:txBody>
+      </p:sp>
+      <p:sp>
+        <p:nvSpPr>
+          <p:cNvPr id="11" name="TextBox 10"/>
+          <p:cNvSpPr txBox="1"/>
+          <p:nvPr/>
+        </p:nvSpPr>
+        <p:spPr>
+          <a:xfrm>
+            <a:off x="411480" y="4480560"/>
+            <a:ext cx="4206240" cy="355600"/>
+          </a:xfrm>
+          <a:prstGeom prst="rect">
+            <a:avLst/>
+          </a:prstGeom>
+          <a:noFill/>
+        </p:spPr>
+        <p:txBody>
+          <a:bodyPr wrap="square">
+            <a:spAutoFit/>
+          </a:bodyPr>
+          <a:lstStyle/>
+          <a:p>
+            <a:pPr algn="l"/>
+            <a:r>
+              <a:rPr sz="1400" b="0" i="0">
+                <a:solidFill>
+                  <a:srgbClr val="FFFFFF"/>
+                </a:solidFill>
+                <a:latin typeface="Barlow"/>
+              </a:rPr>
+              <a:t>The budget line already exists.</a:t>
+            </a:r>
+          </a:p>
+        </p:txBody>
+      </p:sp>
+      <p:sp>
+        <p:nvSpPr>
+          <p:cNvPr id="12" name="Rectangle 11"/>
           <p:cNvSpPr/>
           <p:nvPr/>
         </p:nvSpPr>
         <p:spPr>
           <a:xfrm>
-            <a:off x="5029200" y="914400"/>
-            <a:ext cx="6583680" cy="822960"/>
-          </a:xfrm>
-          <a:prstGeom prst="rect">
-            <a:avLst/>
-          </a:prstGeom>
-          <a:solidFill>
-            <a:srgbClr val="121A44"/>
-          </a:solidFill>
-          <a:ln>
-            <a:noFill/>
-          </a:ln>
-        </p:spPr>
-        <p:style>
-          <a:lnRef idx="1">
-            <a:schemeClr val="accent1"/>
-          </a:lnRef>
-          <a:fillRef idx="3">
-            <a:schemeClr val="accent1"/>
-          </a:fillRef>
-          <a:effectRef idx="2">
-            <a:schemeClr val="accent1"/>
-          </a:effectRef>
-          <a:fontRef idx="minor">
-            <a:schemeClr val="lt1"/>
-          </a:fontRef>
-        </p:style>
-        <p:txBody>
-          <a:bodyPr rtlCol="0" anchor="ctr"/>
-          <a:lstStyle/>
-          <a:p>
-            <a:pPr algn="ctr"/>
-          </a:p>
-        </p:txBody>
-      </p:sp>
-      <p:sp>
-        <p:nvSpPr>
-          <p:cNvPr id="12" name="TextBox 11"/>
-          <p:cNvSpPr txBox="1"/>
-          <p:nvPr/>
-        </p:nvSpPr>
-        <p:spPr>
-          <a:xfrm>
-            <a:off x="5212080" y="1041400"/>
-            <a:ext cx="3657600" cy="381000"/>
-          </a:xfrm>
-          <a:prstGeom prst="rect">
-            <a:avLst/>
-          </a:prstGeom>
-          <a:noFill/>
-        </p:spPr>
-        <p:txBody>
-          <a:bodyPr wrap="square">
-            <a:spAutoFit/>
-          </a:bodyPr>
-          <a:lstStyle/>
-          <a:p>
-            <a:pPr algn="l"/>
-            <a:r>
-              <a:rPr sz="1300" b="0" i="0">
-                <a:solidFill>
-                  <a:srgbClr val="99A5BB"/>
-                </a:solidFill>
-                <a:latin typeface="Barlow"/>
-              </a:rPr>
-              <a:t>Consulting Retainer Replaced</a:t>
-            </a:r>
-          </a:p>
-        </p:txBody>
-      </p:sp>
-      <p:sp>
-        <p:nvSpPr>
-          <p:cNvPr id="13" name="TextBox 12"/>
-          <p:cNvSpPr txBox="1"/>
-          <p:nvPr/>
-        </p:nvSpPr>
-        <p:spPr>
-          <a:xfrm>
-            <a:off x="9052560" y="1041400"/>
-            <a:ext cx="2377440" cy="381000"/>
-          </a:xfrm>
-          <a:prstGeom prst="rect">
-            <a:avLst/>
-          </a:prstGeom>
-          <a:noFill/>
-        </p:spPr>
-        <p:txBody>
-          <a:bodyPr wrap="square">
-            <a:spAutoFit/>
-          </a:bodyPr>
-          <a:lstStyle/>
-          <a:p>
-            <a:pPr algn="r"/>
-            <a:r>
-              <a:rPr sz="1300" b="1" i="0">
-                <a:solidFill>
-                  <a:srgbClr val="C9A84C"/>
-                </a:solidFill>
-                <a:latin typeface="Barlow"/>
-              </a:rPr>
-              <a:t>$400K – $800K / yr</a:t>
-            </a:r>
-          </a:p>
-        </p:txBody>
-      </p:sp>
-      <p:sp>
-        <p:nvSpPr>
-          <p:cNvPr id="14" name="Rectangle 13"/>
-          <p:cNvSpPr/>
-          <p:nvPr/>
-        </p:nvSpPr>
-        <p:spPr>
-          <a:xfrm>
-            <a:off x="5029200" y="1874520"/>
-            <a:ext cx="6583680" cy="822960"/>
-          </a:xfrm>
-          <a:prstGeom prst="rect">
-            <a:avLst/>
-          </a:prstGeom>
-          <a:solidFill>
-            <a:srgbClr val="0E1438"/>
-          </a:solidFill>
-          <a:ln>
-            <a:noFill/>
-          </a:ln>
-        </p:spPr>
-        <p:style>
-          <a:lnRef idx="1">
-            <a:schemeClr val="accent1"/>
-          </a:lnRef>
-          <a:fillRef idx="3">
-            <a:schemeClr val="accent1"/>
-          </a:fillRef>
-          <a:effectRef idx="2">
-            <a:schemeClr val="accent1"/>
-          </a:effectRef>
-          <a:fontRef idx="minor">
-            <a:schemeClr val="lt1"/>
-          </a:fontRef>
-        </p:style>
-        <p:txBody>
-          <a:bodyPr rtlCol="0" anchor="ctr"/>
-          <a:lstStyle/>
-          <a:p>
-            <a:pPr algn="ctr"/>
-          </a:p>
-        </p:txBody>
-      </p:sp>
-      <p:sp>
-        <p:nvSpPr>
-          <p:cNvPr id="15" name="TextBox 14"/>
-          <p:cNvSpPr txBox="1"/>
-          <p:nvPr/>
-        </p:nvSpPr>
-        <p:spPr>
-          <a:xfrm>
-            <a:off x="5212080" y="2001520"/>
-            <a:ext cx="3657600" cy="381000"/>
-          </a:xfrm>
-          <a:prstGeom prst="rect">
-            <a:avLst/>
-          </a:prstGeom>
-          <a:noFill/>
-        </p:spPr>
-        <p:txBody>
-          <a:bodyPr wrap="square">
-            <a:spAutoFit/>
-          </a:bodyPr>
-          <a:lstStyle/>
-          <a:p>
-            <a:pPr algn="l"/>
-            <a:r>
-              <a:rPr sz="1300" b="0" i="0">
-                <a:solidFill>
-                  <a:srgbClr val="99A5BB"/>
-                </a:solidFill>
-                <a:latin typeface="Barlow"/>
-              </a:rPr>
-              <a:t>Platform Cost</a:t>
-            </a:r>
-          </a:p>
-        </p:txBody>
-      </p:sp>
-      <p:sp>
-        <p:nvSpPr>
-          <p:cNvPr id="16" name="TextBox 15"/>
-          <p:cNvSpPr txBox="1"/>
-          <p:nvPr/>
-        </p:nvSpPr>
-        <p:spPr>
-          <a:xfrm>
-            <a:off x="9052560" y="2001520"/>
-            <a:ext cx="2377440" cy="381000"/>
-          </a:xfrm>
-          <a:prstGeom prst="rect">
-            <a:avLst/>
-          </a:prstGeom>
-          <a:noFill/>
-        </p:spPr>
-        <p:txBody>
-          <a:bodyPr wrap="square">
-            <a:spAutoFit/>
-          </a:bodyPr>
-          <a:lstStyle/>
-          <a:p>
-            <a:pPr algn="r"/>
-            <a:r>
-              <a:rPr sz="1300" b="1" i="0">
-                <a:solidFill>
-                  <a:srgbClr val="FFFFFF"/>
-                </a:solidFill>
-                <a:latin typeface="Barlow"/>
-              </a:rPr>
-              <a:t>$60K – $240K / yr</a:t>
-            </a:r>
-          </a:p>
-        </p:txBody>
-      </p:sp>
-      <p:sp>
-        <p:nvSpPr>
-          <p:cNvPr id="17" name="Rectangle 16"/>
-          <p:cNvSpPr/>
-          <p:nvPr/>
-        </p:nvSpPr>
-        <p:spPr>
-          <a:xfrm>
-            <a:off x="5029200" y="2834640"/>
-            <a:ext cx="6583680" cy="822960"/>
-          </a:xfrm>
-          <a:prstGeom prst="rect">
-            <a:avLst/>
-          </a:prstGeom>
-          <a:solidFill>
-            <a:srgbClr val="121A44"/>
-          </a:solidFill>
-          <a:ln>
-            <a:noFill/>
-          </a:ln>
-        </p:spPr>
-        <p:style>
-          <a:lnRef idx="1">
-            <a:schemeClr val="accent1"/>
-          </a:lnRef>
-          <a:fillRef idx="3">
-            <a:schemeClr val="accent1"/>
-          </a:fillRef>
-          <a:effectRef idx="2">
-            <a:schemeClr val="accent1"/>
-          </a:effectRef>
-          <a:fontRef idx="minor">
-            <a:schemeClr val="lt1"/>
-          </a:fontRef>
-        </p:style>
-        <p:txBody>
-          <a:bodyPr rtlCol="0" anchor="ctr"/>
-          <a:lstStyle/>
-          <a:p>
-            <a:pPr algn="ctr"/>
-          </a:p>
-        </p:txBody>
-      </p:sp>
-      <p:sp>
-        <p:nvSpPr>
-          <p:cNvPr id="18" name="TextBox 17"/>
-          <p:cNvSpPr txBox="1"/>
-          <p:nvPr/>
-        </p:nvSpPr>
-        <p:spPr>
-          <a:xfrm>
-            <a:off x="5212080" y="2961640"/>
-            <a:ext cx="3657600" cy="381000"/>
-          </a:xfrm>
-          <a:prstGeom prst="rect">
-            <a:avLst/>
-          </a:prstGeom>
-          <a:noFill/>
-        </p:spPr>
-        <p:txBody>
-          <a:bodyPr wrap="square">
-            <a:spAutoFit/>
-          </a:bodyPr>
-          <a:lstStyle/>
-          <a:p>
-            <a:pPr algn="l"/>
-            <a:r>
-              <a:rPr sz="1300" b="0" i="0">
-                <a:solidFill>
-                  <a:srgbClr val="99A5BB"/>
-                </a:solidFill>
-                <a:latin typeface="Barlow"/>
-              </a:rPr>
-              <a:t>Break-Even Point</a:t>
-            </a:r>
-          </a:p>
-        </p:txBody>
-      </p:sp>
-      <p:sp>
-        <p:nvSpPr>
-          <p:cNvPr id="19" name="TextBox 18"/>
-          <p:cNvSpPr txBox="1"/>
-          <p:nvPr/>
-        </p:nvSpPr>
-        <p:spPr>
-          <a:xfrm>
-            <a:off x="9052560" y="2961640"/>
-            <a:ext cx="2377440" cy="381000"/>
-          </a:xfrm>
-          <a:prstGeom prst="rect">
-            <a:avLst/>
-          </a:prstGeom>
-          <a:noFill/>
-        </p:spPr>
-        <p:txBody>
-          <a:bodyPr wrap="square">
-            <a:spAutoFit/>
-          </a:bodyPr>
-          <a:lstStyle/>
-          <a:p>
-            <a:pPr algn="r"/>
-            <a:r>
-              <a:rPr sz="1300" b="1" i="0">
-                <a:solidFill>
-                  <a:srgbClr val="2B8A6E"/>
-                </a:solidFill>
-                <a:latin typeface="Barlow"/>
-              </a:rPr>
-              <a:t>2nd Activation</a:t>
-            </a:r>
-          </a:p>
-        </p:txBody>
-      </p:sp>
-      <p:sp>
-        <p:nvSpPr>
-          <p:cNvPr id="20" name="Rectangle 19"/>
-          <p:cNvSpPr/>
-          <p:nvPr/>
-        </p:nvSpPr>
-        <p:spPr>
-          <a:xfrm>
-            <a:off x="5029200" y="3794760"/>
-            <a:ext cx="6583680" cy="822960"/>
-          </a:xfrm>
-          <a:prstGeom prst="rect">
-            <a:avLst/>
-          </a:prstGeom>
-          <a:solidFill>
-            <a:srgbClr val="0E1438"/>
-          </a:solidFill>
-          <a:ln>
-            <a:noFill/>
-          </a:ln>
-        </p:spPr>
-        <p:style>
-          <a:lnRef idx="1">
-            <a:schemeClr val="accent1"/>
-          </a:lnRef>
-          <a:fillRef idx="3">
-            <a:schemeClr val="accent1"/>
-          </a:fillRef>
-          <a:effectRef idx="2">
-            <a:schemeClr val="accent1"/>
-          </a:effectRef>
-          <a:fontRef idx="minor">
-            <a:schemeClr val="lt1"/>
-          </a:fontRef>
-        </p:style>
-        <p:txBody>
-          <a:bodyPr rtlCol="0" anchor="ctr"/>
-          <a:lstStyle/>
-          <a:p>
-            <a:pPr algn="ctr"/>
-          </a:p>
-        </p:txBody>
-      </p:sp>
-      <p:sp>
-        <p:nvSpPr>
-          <p:cNvPr id="21" name="TextBox 20"/>
-          <p:cNvSpPr txBox="1"/>
-          <p:nvPr/>
-        </p:nvSpPr>
-        <p:spPr>
-          <a:xfrm>
-            <a:off x="5212080" y="3921760"/>
-            <a:ext cx="3657600" cy="381000"/>
-          </a:xfrm>
-          <a:prstGeom prst="rect">
-            <a:avLst/>
-          </a:prstGeom>
-          <a:noFill/>
-        </p:spPr>
-        <p:txBody>
-          <a:bodyPr wrap="square">
-            <a:spAutoFit/>
-          </a:bodyPr>
-          <a:lstStyle/>
-          <a:p>
-            <a:pPr algn="l"/>
-            <a:r>
-              <a:rPr sz="1300" b="0" i="0">
-                <a:solidFill>
-                  <a:srgbClr val="99A5BB"/>
-                </a:solidFill>
-                <a:latin typeface="Barlow"/>
-              </a:rPr>
-              <a:t>3-Year Net Value</a:t>
-            </a:r>
-          </a:p>
-        </p:txBody>
-      </p:sp>
-      <p:sp>
-        <p:nvSpPr>
-          <p:cNvPr id="22" name="TextBox 21"/>
-          <p:cNvSpPr txBox="1"/>
-          <p:nvPr/>
-        </p:nvSpPr>
-        <p:spPr>
-          <a:xfrm>
-            <a:off x="9052560" y="3921760"/>
-            <a:ext cx="2377440" cy="381000"/>
-          </a:xfrm>
-          <a:prstGeom prst="rect">
-            <a:avLst/>
-          </a:prstGeom>
-          <a:noFill/>
-        </p:spPr>
-        <p:txBody>
-          <a:bodyPr wrap="square">
-            <a:spAutoFit/>
-          </a:bodyPr>
-          <a:lstStyle/>
-          <a:p>
-            <a:pPr algn="r"/>
-            <a:r>
-              <a:rPr sz="1300" b="1" i="0">
-                <a:solidFill>
-                  <a:srgbClr val="C9A84C"/>
-                </a:solidFill>
-                <a:latin typeface="Barlow"/>
-              </a:rPr>
-              <a:t>Live at /roi-calculator</a:t>
-            </a:r>
-          </a:p>
-        </p:txBody>
-      </p:sp>
-      <p:sp>
-        <p:nvSpPr>
-          <p:cNvPr id="23" name="Rectangle 22"/>
-          <p:cNvSpPr/>
-          <p:nvPr/>
-        </p:nvSpPr>
-        <p:spPr>
-          <a:xfrm>
-            <a:off x="5029200" y="4754880"/>
-            <a:ext cx="6583680" cy="822960"/>
-          </a:xfrm>
-          <a:prstGeom prst="rect">
-            <a:avLst/>
-          </a:prstGeom>
-          <a:solidFill>
-            <a:srgbClr val="121A44"/>
-          </a:solidFill>
-          <a:ln>
-            <a:noFill/>
-          </a:ln>
-        </p:spPr>
-        <p:style>
-          <a:lnRef idx="1">
-            <a:schemeClr val="accent1"/>
-          </a:lnRef>
-          <a:fillRef idx="3">
-            <a:schemeClr val="accent1"/>
-          </a:fillRef>
-          <a:effectRef idx="2">
-            <a:schemeClr val="accent1"/>
-          </a:effectRef>
-          <a:fontRef idx="minor">
-            <a:schemeClr val="lt1"/>
-          </a:fontRef>
-        </p:style>
-        <p:txBody>
-          <a:bodyPr rtlCol="0" anchor="ctr"/>
-          <a:lstStyle/>
-          <a:p>
-            <a:pPr algn="ctr"/>
-          </a:p>
-        </p:txBody>
-      </p:sp>
-      <p:sp>
-        <p:nvSpPr>
-          <p:cNvPr id="24" name="TextBox 23"/>
-          <p:cNvSpPr txBox="1"/>
-          <p:nvPr/>
-        </p:nvSpPr>
-        <p:spPr>
-          <a:xfrm>
-            <a:off x="5212080" y="4881880"/>
-            <a:ext cx="3657600" cy="381000"/>
-          </a:xfrm>
-          <a:prstGeom prst="rect">
-            <a:avLst/>
-          </a:prstGeom>
-          <a:noFill/>
-        </p:spPr>
-        <p:txBody>
-          <a:bodyPr wrap="square">
-            <a:spAutoFit/>
-          </a:bodyPr>
-          <a:lstStyle/>
-          <a:p>
-            <a:pPr algn="l"/>
-            <a:r>
-              <a:rPr sz="1300" b="0" i="0">
-                <a:solidFill>
-                  <a:srgbClr val="99A5BB"/>
-                </a:solidFill>
-                <a:latin typeface="Barlow"/>
-              </a:rPr>
-              <a:t>Budget Line Already Exists</a:t>
-            </a:r>
-          </a:p>
-        </p:txBody>
-      </p:sp>
-      <p:sp>
-        <p:nvSpPr>
-          <p:cNvPr id="25" name="TextBox 24"/>
-          <p:cNvSpPr txBox="1"/>
-          <p:nvPr/>
-        </p:nvSpPr>
-        <p:spPr>
-          <a:xfrm>
-            <a:off x="9052560" y="4881880"/>
-            <a:ext cx="2377440" cy="381000"/>
-          </a:xfrm>
-          <a:prstGeom prst="rect">
-            <a:avLst/>
-          </a:prstGeom>
-          <a:noFill/>
-        </p:spPr>
-        <p:txBody>
-          <a:bodyPr wrap="square">
-            <a:spAutoFit/>
-          </a:bodyPr>
-          <a:lstStyle/>
-          <a:p>
-            <a:pPr algn="r"/>
-            <a:r>
-              <a:rPr sz="1300" b="1" i="0">
-                <a:solidFill>
-                  <a:srgbClr val="2B8A6E"/>
-                </a:solidFill>
-                <a:latin typeface="Barlow"/>
-              </a:rPr>
-              <a:t>Replaces existing retainer</a:t>
-            </a:r>
-          </a:p>
-        </p:txBody>
-      </p:sp>
-      <p:sp>
-        <p:nvSpPr>
-          <p:cNvPr id="26" name="Rectangle 25"/>
-          <p:cNvSpPr/>
-          <p:nvPr/>
-        </p:nvSpPr>
-        <p:spPr>
-          <a:xfrm>
-            <a:off x="5029200" y="5669280"/>
-            <a:ext cx="6583680" cy="822960"/>
-          </a:xfrm>
-          <a:prstGeom prst="rect">
-            <a:avLst/>
-          </a:prstGeom>
-          <a:solidFill>
-            <a:srgbClr val="0C1236"/>
-          </a:solidFill>
-          <a:ln>
-            <a:noFill/>
-          </a:ln>
-        </p:spPr>
-        <p:style>
-          <a:lnRef idx="1">
-            <a:schemeClr val="accent1"/>
-          </a:lnRef>
-          <a:fillRef idx="3">
-            <a:schemeClr val="accent1"/>
-          </a:fillRef>
-          <a:effectRef idx="2">
-            <a:schemeClr val="accent1"/>
-          </a:effectRef>
-          <a:fontRef idx="minor">
-            <a:schemeClr val="lt1"/>
-          </a:fontRef>
-        </p:style>
-        <p:txBody>
-          <a:bodyPr rtlCol="0" anchor="ctr"/>
-          <a:lstStyle/>
-          <a:p>
-            <a:pPr algn="ctr"/>
-          </a:p>
-        </p:txBody>
-      </p:sp>
-      <p:sp>
-        <p:nvSpPr>
-          <p:cNvPr id="27" name="Rectangle 26"/>
-          <p:cNvSpPr/>
-          <p:nvPr/>
-        </p:nvSpPr>
-        <p:spPr>
-          <a:xfrm>
-            <a:off x="5029200" y="5669280"/>
-            <a:ext cx="38100" cy="12700"/>
+            <a:off x="411480" y="4956048"/>
+            <a:ext cx="4206240" cy="19050"/>
           </a:xfrm>
           <a:prstGeom prst="rect">
             <a:avLst/>
@@ -10977,14 +10262,14 @@
       </p:sp>
       <p:sp>
         <p:nvSpPr>
-          <p:cNvPr id="28" name="TextBox 27"/>
-          <p:cNvSpPr txBox="1"/>
-          <p:nvPr/>
-        </p:nvSpPr>
-        <p:spPr>
-          <a:xfrm>
-            <a:off x="5166360" y="5715000"/>
-            <a:ext cx="6309360" cy="731520"/>
+          <p:cNvPr id="13" name="TextBox 12"/>
+          <p:cNvSpPr txBox="1"/>
+          <p:nvPr/>
+        </p:nvSpPr>
+        <p:spPr>
+          <a:xfrm>
+            <a:off x="411480" y="5074920"/>
+            <a:ext cx="4206240" cy="731520"/>
           </a:xfrm>
           <a:prstGeom prst="rect">
             <a:avLst/>
@@ -10999,27 +10284,27 @@
           <a:p>
             <a:pPr algn="l"/>
             <a:r>
-              <a:rPr sz="1100" b="0" i="1">
+              <a:rPr sz="1200" b="0" i="1">
                 <a:solidFill>
                   <a:srgbClr val="99A5BB"/>
                 </a:solidFill>
                 <a:latin typeface="Barlow"/>
               </a:rPr>
-              <a:t>“We’re not adding to the budget. We’re replacing a line item that every Fortune 1000 already pays.”</a:t>
-            </a:r>
-          </a:p>
-        </p:txBody>
-      </p:sp>
-      <p:sp>
-        <p:nvSpPr>
-          <p:cNvPr id="29" name="TextBox 28"/>
-          <p:cNvSpPr txBox="1"/>
-          <p:nvPr/>
-        </p:nvSpPr>
-        <p:spPr>
-          <a:xfrm>
-            <a:off x="11247120" y="6492240"/>
-            <a:ext cx="914400" cy="228600"/>
+              <a:t>"We're replacing a line item every Fortune 1000 already pays."</a:t>
+            </a:r>
+          </a:p>
+        </p:txBody>
+      </p:sp>
+      <p:sp>
+        <p:nvSpPr>
+          <p:cNvPr id="14" name="TextBox 13"/>
+          <p:cNvSpPr txBox="1"/>
+          <p:nvPr/>
+        </p:nvSpPr>
+        <p:spPr>
+          <a:xfrm>
+            <a:off x="4754880" y="411480"/>
+            <a:ext cx="10972800" cy="228600"/>
           </a:xfrm>
           <a:prstGeom prst="rect">
             <a:avLst/>
@@ -11033,6 +10318,186 @@
           <a:lstStyle/>
           <a:p>
             <a:pPr algn="l"/>
+            <a:r>
+              <a:rPr sz="900" b="1" i="0">
+                <a:solidFill>
+                  <a:srgbClr val="C9A84C"/>
+                </a:solidFill>
+                <a:latin typeface="Barlow Condensed"/>
+              </a:rPr>
+              <a:t>LIVE AT VAUGHNMARTIN.COM/ROI-CALCULATOR</a:t>
+            </a:r>
+          </a:p>
+        </p:txBody>
+      </p:sp>
+      <p:pic>
+        <p:nvPicPr>
+          <p:cNvPr id="15" name="Picture 14" descr="pptx_roi.jpg"/>
+          <p:cNvPicPr>
+            <a:picLocks noChangeAspect="1"/>
+          </p:cNvPicPr>
+          <p:nvPr/>
+        </p:nvPicPr>
+        <p:blipFill>
+          <a:blip r:embed="rId2"/>
+          <a:stretch>
+            <a:fillRect/>
+          </a:stretch>
+        </p:blipFill>
+        <p:spPr>
+          <a:xfrm>
+            <a:off x="4754880" y="749808"/>
+            <a:ext cx="7068312" cy="5742432"/>
+          </a:xfrm>
+          <a:prstGeom prst="rect">
+            <a:avLst/>
+          </a:prstGeom>
+        </p:spPr>
+      </p:pic>
+      <p:sp>
+        <p:nvSpPr>
+          <p:cNvPr id="16" name="Rectangle 15"/>
+          <p:cNvSpPr/>
+          <p:nvPr/>
+        </p:nvSpPr>
+        <p:spPr>
+          <a:xfrm>
+            <a:off x="4754880" y="749808"/>
+            <a:ext cx="7068312" cy="5742432"/>
+          </a:xfrm>
+          <a:prstGeom prst="rect">
+            <a:avLst/>
+          </a:prstGeom>
+          <a:noFill/>
+          <a:ln w="15240">
+            <a:solidFill>
+              <a:srgbClr val="C9A84C"/>
+            </a:solidFill>
+          </a:ln>
+        </p:spPr>
+        <p:style>
+          <a:lnRef idx="1">
+            <a:schemeClr val="accent1"/>
+          </a:lnRef>
+          <a:fillRef idx="3">
+            <a:schemeClr val="accent1"/>
+          </a:fillRef>
+          <a:effectRef idx="2">
+            <a:schemeClr val="accent1"/>
+          </a:effectRef>
+          <a:fontRef idx="minor">
+            <a:schemeClr val="lt1"/>
+          </a:fontRef>
+        </p:style>
+        <p:txBody>
+          <a:bodyPr rtlCol="0" anchor="ctr"/>
+          <a:lstStyle/>
+          <a:p>
+            <a:pPr algn="ctr"/>
+          </a:p>
+        </p:txBody>
+      </p:sp>
+      <p:sp>
+        <p:nvSpPr>
+          <p:cNvPr id="17" name="Rectangle 16"/>
+          <p:cNvSpPr/>
+          <p:nvPr/>
+        </p:nvSpPr>
+        <p:spPr>
+          <a:xfrm>
+            <a:off x="4754880" y="6172200"/>
+            <a:ext cx="7068312" cy="320040"/>
+          </a:xfrm>
+          <a:prstGeom prst="rect">
+            <a:avLst/>
+          </a:prstGeom>
+          <a:solidFill>
+            <a:srgbClr val="080D26"/>
+          </a:solidFill>
+          <a:ln>
+            <a:noFill/>
+          </a:ln>
+        </p:spPr>
+        <p:style>
+          <a:lnRef idx="1">
+            <a:schemeClr val="accent1"/>
+          </a:lnRef>
+          <a:fillRef idx="3">
+            <a:schemeClr val="accent1"/>
+          </a:fillRef>
+          <a:effectRef idx="2">
+            <a:schemeClr val="accent1"/>
+          </a:effectRef>
+          <a:fontRef idx="minor">
+            <a:schemeClr val="lt1"/>
+          </a:fontRef>
+        </p:style>
+        <p:txBody>
+          <a:bodyPr rtlCol="0" anchor="ctr"/>
+          <a:lstStyle/>
+          <a:p>
+            <a:pPr algn="ctr"/>
+          </a:p>
+        </p:txBody>
+      </p:sp>
+      <p:sp>
+        <p:nvSpPr>
+          <p:cNvPr id="18" name="TextBox 17"/>
+          <p:cNvSpPr txBox="1"/>
+          <p:nvPr/>
+        </p:nvSpPr>
+        <p:spPr>
+          <a:xfrm>
+            <a:off x="4864608" y="6248400"/>
+            <a:ext cx="6848856" cy="320040"/>
+          </a:xfrm>
+          <a:prstGeom prst="rect">
+            <a:avLst/>
+          </a:prstGeom>
+          <a:noFill/>
+        </p:spPr>
+        <p:txBody>
+          <a:bodyPr wrap="square">
+            <a:spAutoFit/>
+          </a:bodyPr>
+          <a:lstStyle/>
+          <a:p>
+            <a:pPr algn="l"/>
+            <a:r>
+              <a:rPr sz="900" b="1" i="0">
+                <a:solidFill>
+                  <a:srgbClr val="C9A84C"/>
+                </a:solidFill>
+                <a:latin typeface="Barlow Condensed"/>
+              </a:rPr>
+              <a:t>ROI CALCULATOR · ESTIMATES $61.3M+ ANNUAL VALUE · 3,600× EXECUTION HEAD START</a:t>
+            </a:r>
+          </a:p>
+        </p:txBody>
+      </p:sp>
+      <p:sp>
+        <p:nvSpPr>
+          <p:cNvPr id="19" name="TextBox 18"/>
+          <p:cNvSpPr txBox="1"/>
+          <p:nvPr/>
+        </p:nvSpPr>
+        <p:spPr>
+          <a:xfrm>
+            <a:off x="11247120" y="6537960"/>
+            <a:ext cx="914400" cy="203200"/>
+          </a:xfrm>
+          <a:prstGeom prst="rect">
+            <a:avLst/>
+          </a:prstGeom>
+          <a:noFill/>
+        </p:spPr>
+        <p:txBody>
+          <a:bodyPr wrap="square">
+            <a:spAutoFit/>
+          </a:bodyPr>
+          <a:lstStyle/>
+          <a:p>
+            <a:pPr algn="r"/>
             <a:r>
               <a:rPr sz="1000" b="1" i="0">
                 <a:solidFill>
@@ -11122,8 +10587,8 @@
         </p:nvSpPr>
         <p:spPr>
           <a:xfrm>
-            <a:off x="457200" y="457200"/>
-            <a:ext cx="10972800" cy="254000"/>
+            <a:off x="457200" y="411480"/>
+            <a:ext cx="10972800" cy="228600"/>
           </a:xfrm>
           <a:prstGeom prst="rect">
             <a:avLst/>
@@ -11157,23 +10622,23 @@
         </p:nvSpPr>
         <p:spPr>
           <a:xfrm>
-            <a:off x="914400" y="731520"/>
-            <a:ext cx="10058400" cy="777240"/>
-          </a:xfrm>
-          <a:prstGeom prst="rect">
-            <a:avLst/>
-          </a:prstGeom>
-          <a:noFill/>
-        </p:spPr>
-        <p:txBody>
-          <a:bodyPr wrap="square">
-            <a:spAutoFit/>
-          </a:bodyPr>
-          <a:lstStyle/>
-          <a:p>
-            <a:pPr algn="ctr"/>
-            <a:r>
-              <a:rPr sz="3000" b="1">
+            <a:off x="457200" y="713232"/>
+            <a:ext cx="11247120" cy="685800"/>
+          </a:xfrm>
+          <a:prstGeom prst="rect">
+            <a:avLst/>
+          </a:prstGeom>
+          <a:noFill/>
+        </p:spPr>
+        <p:txBody>
+          <a:bodyPr wrap="square">
+            <a:spAutoFit/>
+          </a:bodyPr>
+          <a:lstStyle/>
+          <a:p>
+            <a:pPr algn="ctr"/>
+            <a:r>
+              <a:rPr sz="2800" b="1">
                 <a:solidFill>
                   <a:srgbClr val="FFFFFF"/>
                 </a:solidFill>
@@ -11192,8 +10657,8 @@
         </p:nvSpPr>
         <p:spPr>
           <a:xfrm>
-            <a:off x="457200" y="1691640"/>
-            <a:ext cx="2743200" cy="1371600"/>
+            <a:off x="365760" y="1508760"/>
+            <a:ext cx="2834640" cy="1143000"/>
           </a:xfrm>
           <a:prstGeom prst="rect">
             <a:avLst/>
@@ -11235,23 +10700,23 @@
         </p:nvSpPr>
         <p:spPr>
           <a:xfrm>
-            <a:off x="594360" y="1737360"/>
-            <a:ext cx="2468880" cy="822960"/>
-          </a:xfrm>
-          <a:prstGeom prst="rect">
-            <a:avLst/>
-          </a:prstGeom>
-          <a:noFill/>
-        </p:spPr>
-        <p:txBody>
-          <a:bodyPr wrap="square">
-            <a:spAutoFit/>
-          </a:bodyPr>
-          <a:lstStyle/>
-          <a:p>
-            <a:pPr algn="ctr"/>
-            <a:r>
-              <a:rPr sz="4400" b="1" i="0">
+            <a:off x="457200" y="1554480"/>
+            <a:ext cx="2651760" cy="640080"/>
+          </a:xfrm>
+          <a:prstGeom prst="rect">
+            <a:avLst/>
+          </a:prstGeom>
+          <a:noFill/>
+        </p:spPr>
+        <p:txBody>
+          <a:bodyPr wrap="square">
+            <a:spAutoFit/>
+          </a:bodyPr>
+          <a:lstStyle/>
+          <a:p>
+            <a:pPr algn="ctr"/>
+            <a:r>
+              <a:rPr sz="4000" b="1" i="0">
                 <a:solidFill>
                   <a:srgbClr val="C9A84C"/>
                 </a:solidFill>
@@ -11270,30 +10735,29 @@
         </p:nvSpPr>
         <p:spPr>
           <a:xfrm>
-            <a:off x="548640" y="2514600"/>
-            <a:ext cx="2560320" cy="594360"/>
-          </a:xfrm>
-          <a:prstGeom prst="rect">
-            <a:avLst/>
-          </a:prstGeom>
-          <a:noFill/>
-        </p:spPr>
-        <p:txBody>
-          <a:bodyPr wrap="square">
-            <a:spAutoFit/>
-          </a:bodyPr>
-          <a:lstStyle/>
-          <a:p>
-            <a:pPr algn="ctr"/>
-            <a:r>
-              <a:rPr sz="1200" b="0" i="0">
+            <a:off x="457200" y="2148840"/>
+            <a:ext cx="2651760" cy="457200"/>
+          </a:xfrm>
+          <a:prstGeom prst="rect">
+            <a:avLst/>
+          </a:prstGeom>
+          <a:noFill/>
+        </p:spPr>
+        <p:txBody>
+          <a:bodyPr wrap="square">
+            <a:spAutoFit/>
+          </a:bodyPr>
+          <a:lstStyle/>
+          <a:p>
+            <a:pPr algn="ctr"/>
+            <a:r>
+              <a:rPr sz="1100" b="0" i="0">
                 <a:solidFill>
                   <a:srgbClr val="99A5BB"/>
                 </a:solidFill>
                 <a:latin typeface="Barlow"/>
               </a:rPr>
-              <a:t>Readiness Protocols
-Pre-Staged</a:t>
+              <a:t>Readiness Protocols Pre-Staged</a:t>
             </a:r>
           </a:p>
         </p:txBody>
@@ -11306,8 +10770,8 @@
         </p:nvSpPr>
         <p:spPr>
           <a:xfrm>
-            <a:off x="3383280" y="1691640"/>
-            <a:ext cx="2743200" cy="1371600"/>
+            <a:off x="3328416" y="1508760"/>
+            <a:ext cx="2834640" cy="1143000"/>
           </a:xfrm>
           <a:prstGeom prst="rect">
             <a:avLst/>
@@ -11349,23 +10813,23 @@
         </p:nvSpPr>
         <p:spPr>
           <a:xfrm>
-            <a:off x="3520440" y="1737360"/>
-            <a:ext cx="2468880" cy="822960"/>
-          </a:xfrm>
-          <a:prstGeom prst="rect">
-            <a:avLst/>
-          </a:prstGeom>
-          <a:noFill/>
-        </p:spPr>
-        <p:txBody>
-          <a:bodyPr wrap="square">
-            <a:spAutoFit/>
-          </a:bodyPr>
-          <a:lstStyle/>
-          <a:p>
-            <a:pPr algn="ctr"/>
-            <a:r>
-              <a:rPr sz="4400" b="1" i="0">
+            <a:off x="3419856" y="1554480"/>
+            <a:ext cx="2651760" cy="640080"/>
+          </a:xfrm>
+          <a:prstGeom prst="rect">
+            <a:avLst/>
+          </a:prstGeom>
+          <a:noFill/>
+        </p:spPr>
+        <p:txBody>
+          <a:bodyPr wrap="square">
+            <a:spAutoFit/>
+          </a:bodyPr>
+          <a:lstStyle/>
+          <a:p>
+            <a:pPr algn="ctr"/>
+            <a:r>
+              <a:rPr sz="4000" b="1" i="0">
                 <a:solidFill>
                   <a:srgbClr val="C9A84C"/>
                 </a:solidFill>
@@ -11384,30 +10848,29 @@
         </p:nvSpPr>
         <p:spPr>
           <a:xfrm>
-            <a:off x="3474720" y="2514600"/>
-            <a:ext cx="2560320" cy="594360"/>
-          </a:xfrm>
-          <a:prstGeom prst="rect">
-            <a:avLst/>
-          </a:prstGeom>
-          <a:noFill/>
-        </p:spPr>
-        <p:txBody>
-          <a:bodyPr wrap="square">
-            <a:spAutoFit/>
-          </a:bodyPr>
-          <a:lstStyle/>
-          <a:p>
-            <a:pPr algn="ctr"/>
-            <a:r>
-              <a:rPr sz="1200" b="0" i="0">
+            <a:off x="3419856" y="2148840"/>
+            <a:ext cx="2651760" cy="457200"/>
+          </a:xfrm>
+          <a:prstGeom prst="rect">
+            <a:avLst/>
+          </a:prstGeom>
+          <a:noFill/>
+        </p:spPr>
+        <p:txBody>
+          <a:bodyPr wrap="square">
+            <a:spAutoFit/>
+          </a:bodyPr>
+          <a:lstStyle/>
+          <a:p>
+            <a:pPr algn="ctr"/>
+            <a:r>
+              <a:rPr sz="1100" b="0" i="0">
                 <a:solidFill>
                   <a:srgbClr val="99A5BB"/>
                 </a:solidFill>
                 <a:latin typeface="Barlow"/>
               </a:rPr>
-              <a:t>Strategic Triggers
-Mapped</a:t>
+              <a:t>Strategic Triggers Mapped</a:t>
             </a:r>
           </a:p>
         </p:txBody>
@@ -11420,8 +10883,8 @@
         </p:nvSpPr>
         <p:spPr>
           <a:xfrm>
-            <a:off x="6309360" y="1691640"/>
-            <a:ext cx="2743200" cy="1371600"/>
+            <a:off x="6291072" y="1508760"/>
+            <a:ext cx="2834640" cy="1143000"/>
           </a:xfrm>
           <a:prstGeom prst="rect">
             <a:avLst/>
@@ -11463,23 +10926,23 @@
         </p:nvSpPr>
         <p:spPr>
           <a:xfrm>
-            <a:off x="6446520" y="1737360"/>
-            <a:ext cx="2468880" cy="822960"/>
-          </a:xfrm>
-          <a:prstGeom prst="rect">
-            <a:avLst/>
-          </a:prstGeom>
-          <a:noFill/>
-        </p:spPr>
-        <p:txBody>
-          <a:bodyPr wrap="square">
-            <a:spAutoFit/>
-          </a:bodyPr>
-          <a:lstStyle/>
-          <a:p>
-            <a:pPr algn="ctr"/>
-            <a:r>
-              <a:rPr sz="4400" b="1" i="0">
+            <a:off x="6382512" y="1554480"/>
+            <a:ext cx="2651760" cy="640080"/>
+          </a:xfrm>
+          <a:prstGeom prst="rect">
+            <a:avLst/>
+          </a:prstGeom>
+          <a:noFill/>
+        </p:spPr>
+        <p:txBody>
+          <a:bodyPr wrap="square">
+            <a:spAutoFit/>
+          </a:bodyPr>
+          <a:lstStyle/>
+          <a:p>
+            <a:pPr algn="ctr"/>
+            <a:r>
+              <a:rPr sz="4000" b="1" i="0">
                 <a:solidFill>
                   <a:srgbClr val="2B8A6E"/>
                 </a:solidFill>
@@ -11498,30 +10961,29 @@
         </p:nvSpPr>
         <p:spPr>
           <a:xfrm>
-            <a:off x="6400800" y="2514600"/>
-            <a:ext cx="2560320" cy="594360"/>
-          </a:xfrm>
-          <a:prstGeom prst="rect">
-            <a:avLst/>
-          </a:prstGeom>
-          <a:noFill/>
-        </p:spPr>
-        <p:txBody>
-          <a:bodyPr wrap="square">
-            <a:spAutoFit/>
-          </a:bodyPr>
-          <a:lstStyle/>
-          <a:p>
-            <a:pPr algn="ctr"/>
-            <a:r>
-              <a:rPr sz="1200" b="0" i="0">
+            <a:off x="6382512" y="2148840"/>
+            <a:ext cx="2651760" cy="457200"/>
+          </a:xfrm>
+          <a:prstGeom prst="rect">
+            <a:avLst/>
+          </a:prstGeom>
+          <a:noFill/>
+        </p:spPr>
+        <p:txBody>
+          <a:bodyPr wrap="square">
+            <a:spAutoFit/>
+          </a:bodyPr>
+          <a:lstStyle/>
+          <a:p>
+            <a:pPr algn="ctr"/>
+            <a:r>
+              <a:rPr sz="1100" b="0" i="0">
                 <a:solidFill>
                   <a:srgbClr val="99A5BB"/>
                 </a:solidFill>
                 <a:latin typeface="Barlow"/>
               </a:rPr>
-              <a:t>Data Points Monitored
-Every 15 Minutes</a:t>
+              <a:t>Data Points Every 15 Min</a:t>
             </a:r>
           </a:p>
         </p:txBody>
@@ -11534,8 +10996,8 @@
         </p:nvSpPr>
         <p:spPr>
           <a:xfrm>
-            <a:off x="9235440" y="1691640"/>
-            <a:ext cx="2743200" cy="1371600"/>
+            <a:off x="9253728" y="1508760"/>
+            <a:ext cx="2834640" cy="1143000"/>
           </a:xfrm>
           <a:prstGeom prst="rect">
             <a:avLst/>
@@ -11577,23 +11039,23 @@
         </p:nvSpPr>
         <p:spPr>
           <a:xfrm>
-            <a:off x="9372600" y="1737360"/>
-            <a:ext cx="2468880" cy="822960"/>
-          </a:xfrm>
-          <a:prstGeom prst="rect">
-            <a:avLst/>
-          </a:prstGeom>
-          <a:noFill/>
-        </p:spPr>
-        <p:txBody>
-          <a:bodyPr wrap="square">
-            <a:spAutoFit/>
-          </a:bodyPr>
-          <a:lstStyle/>
-          <a:p>
-            <a:pPr algn="ctr"/>
-            <a:r>
-              <a:rPr sz="4400" b="1" i="0">
+            <a:off x="9345168" y="1554480"/>
+            <a:ext cx="2651760" cy="640080"/>
+          </a:xfrm>
+          <a:prstGeom prst="rect">
+            <a:avLst/>
+          </a:prstGeom>
+          <a:noFill/>
+        </p:spPr>
+        <p:txBody>
+          <a:bodyPr wrap="square">
+            <a:spAutoFit/>
+          </a:bodyPr>
+          <a:lstStyle/>
+          <a:p>
+            <a:pPr algn="ctr"/>
+            <a:r>
+              <a:rPr sz="4000" b="1" i="0">
                 <a:solidFill>
                   <a:srgbClr val="C9A84C"/>
                 </a:solidFill>
@@ -11612,30 +11074,29 @@
         </p:nvSpPr>
         <p:spPr>
           <a:xfrm>
-            <a:off x="9326880" y="2514600"/>
-            <a:ext cx="2560320" cy="594360"/>
-          </a:xfrm>
-          <a:prstGeom prst="rect">
-            <a:avLst/>
-          </a:prstGeom>
-          <a:noFill/>
-        </p:spPr>
-        <p:txBody>
-          <a:bodyPr wrap="square">
-            <a:spAutoFit/>
-          </a:bodyPr>
-          <a:lstStyle/>
-          <a:p>
-            <a:pPr algn="ctr"/>
-            <a:r>
-              <a:rPr sz="1200" b="0" i="0">
+            <a:off x="9345168" y="2148840"/>
+            <a:ext cx="2651760" cy="457200"/>
+          </a:xfrm>
+          <a:prstGeom prst="rect">
+            <a:avLst/>
+          </a:prstGeom>
+          <a:noFill/>
+        </p:spPr>
+        <p:txBody>
+          <a:bodyPr wrap="square">
+            <a:spAutoFit/>
+          </a:bodyPr>
+          <a:lstStyle/>
+          <a:p>
+            <a:pPr algn="ctr"/>
+            <a:r>
+              <a:rPr sz="1100" b="0" i="0">
                 <a:solidFill>
                   <a:srgbClr val="99A5BB"/>
                 </a:solidFill>
                 <a:latin typeface="Barlow"/>
               </a:rPr>
-              <a:t>Compound Protocols
-Multi-Domain</a:t>
+              <a:t>Compound Protocols</a:t>
             </a:r>
           </a:p>
         </p:txBody>
@@ -11648,14 +11109,14 @@
         </p:nvSpPr>
         <p:spPr>
           <a:xfrm>
-            <a:off x="3200400" y="3246120"/>
-            <a:ext cx="5669280" cy="411480"/>
+            <a:off x="3017520" y="2743200"/>
+            <a:ext cx="6035040" cy="384048"/>
           </a:xfrm>
           <a:prstGeom prst="rect">
             <a:avLst/>
           </a:prstGeom>
           <a:solidFill>
-            <a:srgbClr val="182620"/>
+            <a:srgbClr val="12221C"/>
           </a:solidFill>
           <a:ln w="12700">
             <a:solidFill>
@@ -11693,36 +11154,36 @@
         </p:nvSpPr>
         <p:spPr>
           <a:xfrm>
-            <a:off x="3291840" y="3291840"/>
-            <a:ext cx="5394960" cy="330200"/>
-          </a:xfrm>
-          <a:prstGeom prst="rect">
-            <a:avLst/>
-          </a:prstGeom>
-          <a:noFill/>
-        </p:spPr>
-        <p:txBody>
-          <a:bodyPr wrap="square">
-            <a:spAutoFit/>
-          </a:bodyPr>
-          <a:lstStyle/>
-          <a:p>
-            <a:pPr algn="ctr"/>
-            <a:r>
-              <a:rPr sz="1100" b="0" i="0">
+            <a:off x="3108960" y="2788920"/>
+            <a:ext cx="5852160" cy="365760"/>
+          </a:xfrm>
+          <a:prstGeom prst="rect">
+            <a:avLst/>
+          </a:prstGeom>
+          <a:noFill/>
+        </p:spPr>
+        <p:txBody>
+          <a:bodyPr wrap="square">
+            <a:spAutoFit/>
+          </a:bodyPr>
+          <a:lstStyle/>
+          <a:p>
+            <a:pPr algn="ctr"/>
+            <a:r>
+              <a:rPr sz="1100" b="1" i="0">
                 <a:solidFill>
                   <a:srgbClr val="2B8A6E"/>
                 </a:solidFill>
                 <a:latin typeface="Barlow"/>
               </a:rPr>
-              <a:t>●  vaughnmartin.com · Signal Detection Active · Updated Every 15 Minutes</a:t>
+              <a:t>●  Signal Detection Active · Updated Every 15 Minutes · vaughnmartin.com</a:t>
             </a:r>
           </a:p>
         </p:txBody>
       </p:sp>
       <p:pic>
         <p:nvPicPr>
-          <p:cNvPr id="19" name="Picture 18" descr="deck_signals.jpg"/>
+          <p:cNvPr id="19" name="Picture 18" descr="pptx_command_tower.jpg"/>
           <p:cNvPicPr>
             <a:picLocks noChangeAspect="1"/>
           </p:cNvPicPr>
@@ -11736,8 +11197,8 @@
         </p:blipFill>
         <p:spPr>
           <a:xfrm>
-            <a:off x="365760" y="3840480"/>
-            <a:ext cx="3749039" cy="2331720"/>
+            <a:off x="320040" y="3273552"/>
+            <a:ext cx="5669280" cy="3246120"/>
           </a:xfrm>
           <a:prstGeom prst="rect">
             <a:avLst/>
@@ -11746,27 +11207,113 @@
       </p:pic>
       <p:sp>
         <p:nvSpPr>
-          <p:cNvPr id="20" name="TextBox 19"/>
-          <p:cNvSpPr txBox="1"/>
-          <p:nvPr/>
-        </p:nvSpPr>
-        <p:spPr>
-          <a:xfrm>
-            <a:off x="365760" y="6236208"/>
-            <a:ext cx="3749039" cy="228600"/>
-          </a:xfrm>
-          <a:prstGeom prst="rect">
-            <a:avLst/>
-          </a:prstGeom>
-          <a:noFill/>
-        </p:spPr>
-        <p:txBody>
-          <a:bodyPr wrap="square">
-            <a:spAutoFit/>
-          </a:bodyPr>
-          <a:lstStyle/>
-          <a:p>
-            <a:pPr algn="ctr"/>
+          <p:cNvPr id="20" name="Rectangle 19"/>
+          <p:cNvSpPr/>
+          <p:nvPr/>
+        </p:nvSpPr>
+        <p:spPr>
+          <a:xfrm>
+            <a:off x="320040" y="3273552"/>
+            <a:ext cx="5669280" cy="3246120"/>
+          </a:xfrm>
+          <a:prstGeom prst="rect">
+            <a:avLst/>
+          </a:prstGeom>
+          <a:noFill/>
+          <a:ln w="15240">
+            <a:solidFill>
+              <a:srgbClr val="C9A84C"/>
+            </a:solidFill>
+          </a:ln>
+        </p:spPr>
+        <p:style>
+          <a:lnRef idx="1">
+            <a:schemeClr val="accent1"/>
+          </a:lnRef>
+          <a:fillRef idx="3">
+            <a:schemeClr val="accent1"/>
+          </a:fillRef>
+          <a:effectRef idx="2">
+            <a:schemeClr val="accent1"/>
+          </a:effectRef>
+          <a:fontRef idx="minor">
+            <a:schemeClr val="lt1"/>
+          </a:fontRef>
+        </p:style>
+        <p:txBody>
+          <a:bodyPr rtlCol="0" anchor="ctr"/>
+          <a:lstStyle/>
+          <a:p>
+            <a:pPr algn="ctr"/>
+          </a:p>
+        </p:txBody>
+      </p:sp>
+      <p:sp>
+        <p:nvSpPr>
+          <p:cNvPr id="21" name="Rectangle 20"/>
+          <p:cNvSpPr/>
+          <p:nvPr/>
+        </p:nvSpPr>
+        <p:spPr>
+          <a:xfrm>
+            <a:off x="320040" y="6199632"/>
+            <a:ext cx="5669280" cy="320040"/>
+          </a:xfrm>
+          <a:prstGeom prst="rect">
+            <a:avLst/>
+          </a:prstGeom>
+          <a:solidFill>
+            <a:srgbClr val="080D26"/>
+          </a:solidFill>
+          <a:ln>
+            <a:noFill/>
+          </a:ln>
+        </p:spPr>
+        <p:style>
+          <a:lnRef idx="1">
+            <a:schemeClr val="accent1"/>
+          </a:lnRef>
+          <a:fillRef idx="3">
+            <a:schemeClr val="accent1"/>
+          </a:fillRef>
+          <a:effectRef idx="2">
+            <a:schemeClr val="accent1"/>
+          </a:effectRef>
+          <a:fontRef idx="minor">
+            <a:schemeClr val="lt1"/>
+          </a:fontRef>
+        </p:style>
+        <p:txBody>
+          <a:bodyPr rtlCol="0" anchor="ctr"/>
+          <a:lstStyle/>
+          <a:p>
+            <a:pPr algn="ctr"/>
+          </a:p>
+        </p:txBody>
+      </p:sp>
+      <p:sp>
+        <p:nvSpPr>
+          <p:cNvPr id="22" name="TextBox 21"/>
+          <p:cNvSpPr txBox="1"/>
+          <p:nvPr/>
+        </p:nvSpPr>
+        <p:spPr>
+          <a:xfrm>
+            <a:off x="429768" y="6275832"/>
+            <a:ext cx="5449824" cy="320040"/>
+          </a:xfrm>
+          <a:prstGeom prst="rect">
+            <a:avLst/>
+          </a:prstGeom>
+          <a:noFill/>
+        </p:spPr>
+        <p:txBody>
+          <a:bodyPr wrap="square">
+            <a:spAutoFit/>
+          </a:bodyPr>
+          <a:lstStyle/>
+          <a:p>
+            <a:pPr algn="l"/>
             <a:r>
               <a:rPr sz="900" b="1" i="0">
                 <a:solidFill>
@@ -11774,14 +11321,14 @@
                 </a:solidFill>
                 <a:latin typeface="Barlow Condensed"/>
               </a:rPr>
-              <a:t>Signal Intelligence · Live detections</a:t>
+              <a:t>COMMAND TOWER · 221 TRIGGERS ARMED · 20 ACTIVE DETECTIONS · 170 PROTOCOLS READY</a:t>
             </a:r>
           </a:p>
         </p:txBody>
       </p:sp>
       <p:pic>
         <p:nvPicPr>
-          <p:cNvPr id="21" name="Picture 20" descr="deck_protocol_library.jpg"/>
+          <p:cNvPr id="23" name="Picture 22" descr="pptx_protocols.jpg"/>
           <p:cNvPicPr>
             <a:picLocks noChangeAspect="1"/>
           </p:cNvPicPr>
@@ -11795,8 +11342,8 @@
         </p:blipFill>
         <p:spPr>
           <a:xfrm>
-            <a:off x="4297680" y="3840480"/>
-            <a:ext cx="3749039" cy="2331720"/>
+            <a:off x="6199632" y="3273552"/>
+            <a:ext cx="5669280" cy="3246120"/>
           </a:xfrm>
           <a:prstGeom prst="rect">
             <a:avLst/>
@@ -11805,27 +11352,113 @@
       </p:pic>
       <p:sp>
         <p:nvSpPr>
-          <p:cNvPr id="22" name="TextBox 21"/>
-          <p:cNvSpPr txBox="1"/>
-          <p:nvPr/>
-        </p:nvSpPr>
-        <p:spPr>
-          <a:xfrm>
-            <a:off x="4297680" y="6236208"/>
-            <a:ext cx="3749039" cy="228600"/>
-          </a:xfrm>
-          <a:prstGeom prst="rect">
-            <a:avLst/>
-          </a:prstGeom>
-          <a:noFill/>
-        </p:spPr>
-        <p:txBody>
-          <a:bodyPr wrap="square">
-            <a:spAutoFit/>
-          </a:bodyPr>
-          <a:lstStyle/>
-          <a:p>
-            <a:pPr algn="ctr"/>
+          <p:cNvPr id="24" name="Rectangle 23"/>
+          <p:cNvSpPr/>
+          <p:nvPr/>
+        </p:nvSpPr>
+        <p:spPr>
+          <a:xfrm>
+            <a:off x="6199632" y="3273552"/>
+            <a:ext cx="5669280" cy="3246120"/>
+          </a:xfrm>
+          <a:prstGeom prst="rect">
+            <a:avLst/>
+          </a:prstGeom>
+          <a:noFill/>
+          <a:ln w="15240">
+            <a:solidFill>
+              <a:srgbClr val="C9A84C"/>
+            </a:solidFill>
+          </a:ln>
+        </p:spPr>
+        <p:style>
+          <a:lnRef idx="1">
+            <a:schemeClr val="accent1"/>
+          </a:lnRef>
+          <a:fillRef idx="3">
+            <a:schemeClr val="accent1"/>
+          </a:fillRef>
+          <a:effectRef idx="2">
+            <a:schemeClr val="accent1"/>
+          </a:effectRef>
+          <a:fontRef idx="minor">
+            <a:schemeClr val="lt1"/>
+          </a:fontRef>
+        </p:style>
+        <p:txBody>
+          <a:bodyPr rtlCol="0" anchor="ctr"/>
+          <a:lstStyle/>
+          <a:p>
+            <a:pPr algn="ctr"/>
+          </a:p>
+        </p:txBody>
+      </p:sp>
+      <p:sp>
+        <p:nvSpPr>
+          <p:cNvPr id="25" name="Rectangle 24"/>
+          <p:cNvSpPr/>
+          <p:nvPr/>
+        </p:nvSpPr>
+        <p:spPr>
+          <a:xfrm>
+            <a:off x="6199632" y="6199632"/>
+            <a:ext cx="5669280" cy="320040"/>
+          </a:xfrm>
+          <a:prstGeom prst="rect">
+            <a:avLst/>
+          </a:prstGeom>
+          <a:solidFill>
+            <a:srgbClr val="080D26"/>
+          </a:solidFill>
+          <a:ln>
+            <a:noFill/>
+          </a:ln>
+        </p:spPr>
+        <p:style>
+          <a:lnRef idx="1">
+            <a:schemeClr val="accent1"/>
+          </a:lnRef>
+          <a:fillRef idx="3">
+            <a:schemeClr val="accent1"/>
+          </a:fillRef>
+          <a:effectRef idx="2">
+            <a:schemeClr val="accent1"/>
+          </a:effectRef>
+          <a:fontRef idx="minor">
+            <a:schemeClr val="lt1"/>
+          </a:fontRef>
+        </p:style>
+        <p:txBody>
+          <a:bodyPr rtlCol="0" anchor="ctr"/>
+          <a:lstStyle/>
+          <a:p>
+            <a:pPr algn="ctr"/>
+          </a:p>
+        </p:txBody>
+      </p:sp>
+      <p:sp>
+        <p:nvSpPr>
+          <p:cNvPr id="26" name="TextBox 25"/>
+          <p:cNvSpPr txBox="1"/>
+          <p:nvPr/>
+        </p:nvSpPr>
+        <p:spPr>
+          <a:xfrm>
+            <a:off x="6309360" y="6275832"/>
+            <a:ext cx="5449824" cy="320040"/>
+          </a:xfrm>
+          <a:prstGeom prst="rect">
+            <a:avLst/>
+          </a:prstGeom>
+          <a:noFill/>
+        </p:spPr>
+        <p:txBody>
+          <a:bodyPr wrap="square">
+            <a:spAutoFit/>
+          </a:bodyPr>
+          <a:lstStyle/>
+          <a:p>
+            <a:pPr algn="l"/>
             <a:r>
               <a:rPr sz="900" b="1" i="0">
                 <a:solidFill>
@@ -11833,93 +11466,34 @@
                 </a:solidFill>
                 <a:latin typeface="Barlow Condensed"/>
               </a:rPr>
-              <a:t>170 Readiness Protocols · Pre-staged</a:t>
-            </a:r>
-          </a:p>
-        </p:txBody>
-      </p:sp>
-      <p:pic>
-        <p:nvPicPr>
-          <p:cNvPr id="23" name="Picture 22" descr="deck_roi_calc.jpg"/>
-          <p:cNvPicPr>
-            <a:picLocks noChangeAspect="1"/>
-          </p:cNvPicPr>
-          <p:nvPr/>
-        </p:nvPicPr>
-        <p:blipFill>
-          <a:blip r:embed="rId4"/>
-          <a:stretch>
-            <a:fillRect/>
-          </a:stretch>
-        </p:blipFill>
-        <p:spPr>
-          <a:xfrm>
-            <a:off x="8229600" y="3840480"/>
-            <a:ext cx="3749039" cy="2331720"/>
-          </a:xfrm>
-          <a:prstGeom prst="rect">
-            <a:avLst/>
-          </a:prstGeom>
-        </p:spPr>
-      </p:pic>
-      <p:sp>
-        <p:nvSpPr>
-          <p:cNvPr id="24" name="TextBox 23"/>
-          <p:cNvSpPr txBox="1"/>
-          <p:nvPr/>
-        </p:nvSpPr>
-        <p:spPr>
-          <a:xfrm>
-            <a:off x="8229600" y="6236208"/>
-            <a:ext cx="3749039" cy="228600"/>
-          </a:xfrm>
-          <a:prstGeom prst="rect">
-            <a:avLst/>
-          </a:prstGeom>
-          <a:noFill/>
-        </p:spPr>
-        <p:txBody>
-          <a:bodyPr wrap="square">
-            <a:spAutoFit/>
-          </a:bodyPr>
-          <a:lstStyle/>
-          <a:p>
-            <a:pPr algn="ctr"/>
-            <a:r>
-              <a:rPr sz="900" b="1" i="0">
-                <a:solidFill>
-                  <a:srgbClr val="C9A84C"/>
-                </a:solidFill>
-                <a:latin typeface="Barlow Condensed"/>
-              </a:rPr>
-              <a:t>ROI Calculator · Value quantified</a:t>
-            </a:r>
-          </a:p>
-        </p:txBody>
-      </p:sp>
-      <p:sp>
-        <p:nvSpPr>
-          <p:cNvPr id="25" name="TextBox 24"/>
-          <p:cNvSpPr txBox="1"/>
-          <p:nvPr/>
-        </p:nvSpPr>
-        <p:spPr>
-          <a:xfrm>
-            <a:off x="11247120" y="6492240"/>
-            <a:ext cx="914400" cy="228600"/>
-          </a:xfrm>
-          <a:prstGeom prst="rect">
-            <a:avLst/>
-          </a:prstGeom>
-          <a:noFill/>
-        </p:spPr>
-        <p:txBody>
-          <a:bodyPr wrap="square">
-            <a:spAutoFit/>
-          </a:bodyPr>
-          <a:lstStyle/>
-          <a:p>
-            <a:pPr algn="l"/>
+              <a:t>READINESS PROTOCOL LIBRARY · 170 PROTOCOLS · EVERY STRATEGIC SCENARIO COVERED</a:t>
+            </a:r>
+          </a:p>
+        </p:txBody>
+      </p:sp>
+      <p:sp>
+        <p:nvSpPr>
+          <p:cNvPr id="27" name="TextBox 26"/>
+          <p:cNvSpPr txBox="1"/>
+          <p:nvPr/>
+        </p:nvSpPr>
+        <p:spPr>
+          <a:xfrm>
+            <a:off x="11247120" y="6537960"/>
+            <a:ext cx="914400" cy="203200"/>
+          </a:xfrm>
+          <a:prstGeom prst="rect">
+            <a:avLst/>
+          </a:prstGeom>
+          <a:noFill/>
+        </p:spPr>
+        <p:txBody>
+          <a:bodyPr wrap="square">
+            <a:spAutoFit/>
+          </a:bodyPr>
+          <a:lstStyle/>
+          <a:p>
+            <a:pPr algn="r"/>
             <a:r>
               <a:rPr sz="1000" b="1" i="0">
                 <a:solidFill>
@@ -11946,7 +11520,7 @@
     <p:bg>
       <p:bgPr>
         <a:solidFill>
-          <a:srgbClr val="F5F4F0"/>
+          <a:srgbClr val="F2F0EB"/>
         </a:solidFill>
         <a:effectLst/>
       </p:bgPr>
@@ -12052,8 +11626,8 @@
         </p:nvSpPr>
         <p:spPr>
           <a:xfrm>
-            <a:off x="457200" y="822960"/>
-            <a:ext cx="44450" cy="12700"/>
+            <a:off x="384048" y="731520"/>
+            <a:ext cx="50800" cy="3291840"/>
           </a:xfrm>
           <a:prstGeom prst="rect">
             <a:avLst/>
@@ -12095,8 +11669,8 @@
         </p:nvSpPr>
         <p:spPr>
           <a:xfrm>
-            <a:off x="548640" y="502920"/>
-            <a:ext cx="9144000" cy="254000"/>
+            <a:off x="548640" y="457200"/>
+            <a:ext cx="10972800" cy="228600"/>
           </a:xfrm>
           <a:prstGeom prst="rect">
             <a:avLst/>
@@ -12130,7 +11704,7 @@
         </p:nvSpPr>
         <p:spPr>
           <a:xfrm>
-            <a:off x="548640" y="822960"/>
+            <a:off x="548640" y="731520"/>
             <a:ext cx="4572000" cy="2743200"/>
           </a:xfrm>
           <a:prstGeom prst="rect">
@@ -12167,8 +11741,8 @@
         </p:nvSpPr>
         <p:spPr>
           <a:xfrm>
-            <a:off x="548640" y="3749039"/>
-            <a:ext cx="4114800" cy="19050"/>
+            <a:off x="548640" y="3703320"/>
+            <a:ext cx="4389120" cy="19050"/>
           </a:xfrm>
           <a:prstGeom prst="rect">
             <a:avLst/>
@@ -12210,8 +11784,8 @@
         </p:nvSpPr>
         <p:spPr>
           <a:xfrm>
-            <a:off x="548640" y="3886200"/>
-            <a:ext cx="4572000" cy="1097280"/>
+            <a:off x="548640" y="3858768"/>
+            <a:ext cx="4572000" cy="1005840"/>
           </a:xfrm>
           <a:prstGeom prst="rect">
             <a:avLst/>
@@ -12246,8 +11820,8 @@
         </p:nvSpPr>
         <p:spPr>
           <a:xfrm>
-            <a:off x="5669280" y="502920"/>
-            <a:ext cx="9144000" cy="254000"/>
+            <a:off x="548640" y="4937760"/>
+            <a:ext cx="4572000" cy="1097280"/>
           </a:xfrm>
           <a:prstGeom prst="rect">
             <a:avLst/>
@@ -12262,9 +11836,45 @@
           <a:p>
             <a:pPr algn="l"/>
             <a:r>
+              <a:rPr sz="1300" b="0" i="0">
+                <a:solidFill>
+                  <a:srgbClr val="99A5BB"/>
+                </a:solidFill>
+                <a:latin typeface="Barlow"/>
+              </a:rPr>
+              <a:t>Every Fortune 1000 has Microsoft's AI stack.
+None have the operating model to use it at trigger speed.</a:t>
+            </a:r>
+          </a:p>
+        </p:txBody>
+      </p:sp>
+      <p:sp>
+        <p:nvSpPr>
+          <p:cNvPr id="10" name="TextBox 9"/>
+          <p:cNvSpPr txBox="1"/>
+          <p:nvPr/>
+        </p:nvSpPr>
+        <p:spPr>
+          <a:xfrm>
+            <a:off x="5577840" y="457200"/>
+            <a:ext cx="10972800" cy="228600"/>
+          </a:xfrm>
+          <a:prstGeom prst="rect">
+            <a:avLst/>
+          </a:prstGeom>
+          <a:noFill/>
+        </p:spPr>
+        <p:txBody>
+          <a:bodyPr wrap="square">
+            <a:spAutoFit/>
+          </a:bodyPr>
+          <a:lstStyle/>
+          <a:p>
+            <a:pPr algn="l"/>
+            <a:r>
               <a:rPr sz="900" b="1" i="0">
                 <a:solidFill>
-                  <a:srgbClr val="0A0F2E"/>
+                  <a:srgbClr val="222C44"/>
                 </a:solidFill>
                 <a:latin typeface="Barlow Condensed"/>
               </a:rPr>
@@ -12273,76 +11883,30 @@
           </a:p>
         </p:txBody>
       </p:sp>
-      <p:sp>
-        <p:nvSpPr>
-          <p:cNvPr id="10" name="TextBox 9"/>
-          <p:cNvSpPr txBox="1"/>
-          <p:nvPr/>
-        </p:nvSpPr>
-        <p:spPr>
-          <a:xfrm>
-            <a:off x="5669280" y="822960"/>
-            <a:ext cx="594360" cy="640080"/>
-          </a:xfrm>
-          <a:prstGeom prst="rect">
-            <a:avLst/>
-          </a:prstGeom>
-          <a:noFill/>
-        </p:spPr>
-        <p:txBody>
-          <a:bodyPr wrap="square">
-            <a:spAutoFit/>
-          </a:bodyPr>
-          <a:lstStyle/>
-          <a:p>
-            <a:pPr algn="l"/>
-            <a:r>
-              <a:rPr sz="2200" b="1" i="0">
-                <a:solidFill>
-                  <a:srgbClr val="C9A84C"/>
-                </a:solidFill>
-                <a:latin typeface="Cormorant Garamond"/>
-              </a:rPr>
-              <a:t>01</a:t>
-            </a:r>
-          </a:p>
-        </p:txBody>
-      </p:sp>
-      <p:sp>
-        <p:nvSpPr>
-          <p:cNvPr id="11" name="TextBox 10"/>
-          <p:cNvSpPr txBox="1"/>
-          <p:nvPr/>
-        </p:nvSpPr>
-        <p:spPr>
-          <a:xfrm>
-            <a:off x="6309360" y="822960"/>
-            <a:ext cx="5486400" cy="1097280"/>
-          </a:xfrm>
-          <a:prstGeom prst="rect">
-            <a:avLst/>
-          </a:prstGeom>
-          <a:noFill/>
-        </p:spPr>
-        <p:txBody>
-          <a:bodyPr wrap="square">
-            <a:spAutoFit/>
-          </a:bodyPr>
-          <a:lstStyle/>
-          <a:p>
-            <a:pPr algn="l"/>
-            <a:r>
-              <a:rPr sz="1300" b="0" i="0">
-                <a:solidFill>
-                  <a:srgbClr val="222B44"/>
-                </a:solidFill>
-                <a:latin typeface="Barlow"/>
-              </a:rPr>
-              <a:t>Every Fortune 1000 has Microsoft's AI stack. None have the operating model to use it at trigger speed. Readiness OS is the layer above.</a:t>
-            </a:r>
-          </a:p>
-        </p:txBody>
-      </p:sp>
+      <p:pic>
+        <p:nvPicPr>
+          <p:cNvPr id="11" name="Picture 10" descr="pptx_protocols.jpg"/>
+          <p:cNvPicPr>
+            <a:picLocks noChangeAspect="1"/>
+          </p:cNvPicPr>
+          <p:nvPr/>
+        </p:nvPicPr>
+        <p:blipFill>
+          <a:blip r:embed="rId2"/>
+          <a:stretch>
+            <a:fillRect/>
+          </a:stretch>
+        </p:blipFill>
+        <p:spPr>
+          <a:xfrm>
+            <a:off x="5577840" y="749808"/>
+            <a:ext cx="6245352" cy="5742432"/>
+          </a:xfrm>
+          <a:prstGeom prst="rect">
+            <a:avLst/>
+          </a:prstGeom>
+        </p:spPr>
+      </p:pic>
       <p:sp>
         <p:nvSpPr>
           <p:cNvPr id="12" name="Rectangle 11"/>
@@ -12351,17 +11915,17 @@
         </p:nvSpPr>
         <p:spPr>
           <a:xfrm>
-            <a:off x="5669280" y="2011680"/>
-            <a:ext cx="6126480" cy="12700"/>
-          </a:xfrm>
-          <a:prstGeom prst="rect">
-            <a:avLst/>
-          </a:prstGeom>
-          <a:solidFill>
-            <a:srgbClr val="CCC8BE"/>
-          </a:solidFill>
-          <a:ln>
-            <a:noFill/>
+            <a:off x="5577840" y="749808"/>
+            <a:ext cx="6245352" cy="5742432"/>
+          </a:xfrm>
+          <a:prstGeom prst="rect">
+            <a:avLst/>
+          </a:prstGeom>
+          <a:noFill/>
+          <a:ln w="15240">
+            <a:solidFill>
+              <a:srgbClr val="C9A84C"/>
+            </a:solidFill>
           </a:ln>
         </p:spPr>
         <p:style>
@@ -12388,90 +11952,20 @@
       </p:sp>
       <p:sp>
         <p:nvSpPr>
-          <p:cNvPr id="13" name="TextBox 12"/>
-          <p:cNvSpPr txBox="1"/>
-          <p:nvPr/>
-        </p:nvSpPr>
-        <p:spPr>
-          <a:xfrm>
-            <a:off x="5669280" y="2103120"/>
-            <a:ext cx="594360" cy="640080"/>
-          </a:xfrm>
-          <a:prstGeom prst="rect">
-            <a:avLst/>
-          </a:prstGeom>
-          <a:noFill/>
-        </p:spPr>
-        <p:txBody>
-          <a:bodyPr wrap="square">
-            <a:spAutoFit/>
-          </a:bodyPr>
-          <a:lstStyle/>
-          <a:p>
-            <a:pPr algn="l"/>
-            <a:r>
-              <a:rPr sz="2200" b="1" i="0">
-                <a:solidFill>
-                  <a:srgbClr val="C9A84C"/>
-                </a:solidFill>
-                <a:latin typeface="Cormorant Garamond"/>
-              </a:rPr>
-              <a:t>02</a:t>
-            </a:r>
-          </a:p>
-        </p:txBody>
-      </p:sp>
-      <p:sp>
-        <p:nvSpPr>
-          <p:cNvPr id="14" name="TextBox 13"/>
-          <p:cNvSpPr txBox="1"/>
-          <p:nvPr/>
-        </p:nvSpPr>
-        <p:spPr>
-          <a:xfrm>
-            <a:off x="6309360" y="2103120"/>
-            <a:ext cx="5486400" cy="1097280"/>
-          </a:xfrm>
-          <a:prstGeom prst="rect">
-            <a:avLst/>
-          </a:prstGeom>
-          <a:noFill/>
-        </p:spPr>
-        <p:txBody>
-          <a:bodyPr wrap="square">
-            <a:spAutoFit/>
-          </a:bodyPr>
-          <a:lstStyle/>
-          <a:p>
-            <a:pPr algn="l"/>
-            <a:r>
-              <a:rPr sz="1300" b="0" i="0">
-                <a:solidFill>
-                  <a:srgbClr val="222B44"/>
-                </a:solidFill>
-                <a:latin typeface="Barlow"/>
-              </a:rPr>
-              <a:t>The category doesn't exist yet. First-mover advantage in preparation infrastructure is the same position ERP held in the 1990s.</a:t>
-            </a:r>
-          </a:p>
-        </p:txBody>
-      </p:sp>
-      <p:sp>
-        <p:nvSpPr>
-          <p:cNvPr id="15" name="Rectangle 14"/>
+          <p:cNvPr id="13" name="Rectangle 12"/>
           <p:cNvSpPr/>
           <p:nvPr/>
         </p:nvSpPr>
         <p:spPr>
           <a:xfrm>
-            <a:off x="5669280" y="3291840"/>
-            <a:ext cx="6126480" cy="12700"/>
+            <a:off x="5577840" y="6172200"/>
+            <a:ext cx="6245352" cy="320040"/>
           </a:xfrm>
           <a:prstGeom prst="rect">
             <a:avLst/>
           </a:prstGeom>
           <a:solidFill>
-            <a:srgbClr val="CCC8BE"/>
+            <a:srgbClr val="080D26"/>
           </a:solidFill>
           <a:ln>
             <a:noFill/>
@@ -12501,14 +11995,14 @@
       </p:sp>
       <p:sp>
         <p:nvSpPr>
-          <p:cNvPr id="16" name="TextBox 15"/>
-          <p:cNvSpPr txBox="1"/>
-          <p:nvPr/>
-        </p:nvSpPr>
-        <p:spPr>
-          <a:xfrm>
-            <a:off x="5669280" y="3383280"/>
-            <a:ext cx="594360" cy="640080"/>
+          <p:cNvPr id="14" name="TextBox 13"/>
+          <p:cNvSpPr txBox="1"/>
+          <p:nvPr/>
+        </p:nvSpPr>
+        <p:spPr>
+          <a:xfrm>
+            <a:off x="5687568" y="6248400"/>
+            <a:ext cx="6025896" cy="320040"/>
           </a:xfrm>
           <a:prstGeom prst="rect">
             <a:avLst/>
@@ -12523,192 +12017,44 @@
           <a:p>
             <a:pPr algn="l"/>
             <a:r>
-              <a:rPr sz="2200" b="1" i="0">
+              <a:rPr sz="900" b="1" i="0">
                 <a:solidFill>
                   <a:srgbClr val="C9A84C"/>
                 </a:solidFill>
-                <a:latin typeface="Cormorant Garamond"/>
-              </a:rPr>
-              <a:t>03</a:t>
-            </a:r>
-          </a:p>
-        </p:txBody>
-      </p:sp>
-      <p:sp>
-        <p:nvSpPr>
-          <p:cNvPr id="17" name="TextBox 16"/>
-          <p:cNvSpPr txBox="1"/>
-          <p:nvPr/>
-        </p:nvSpPr>
-        <p:spPr>
-          <a:xfrm>
-            <a:off x="6309360" y="3383280"/>
-            <a:ext cx="5486400" cy="1097280"/>
-          </a:xfrm>
-          <a:prstGeom prst="rect">
-            <a:avLst/>
-          </a:prstGeom>
-          <a:noFill/>
-        </p:spPr>
-        <p:txBody>
-          <a:bodyPr wrap="square">
-            <a:spAutoFit/>
-          </a:bodyPr>
-          <a:lstStyle/>
-          <a:p>
-            <a:pPr algn="l"/>
-            <a:r>
-              <a:rPr sz="1300" b="0" i="0">
-                <a:solidFill>
-                  <a:srgbClr val="222B44"/>
-                </a:solidFill>
-                <a:latin typeface="Barlow"/>
-              </a:rPr>
-              <a:t>Enterprise AI budgets are growing. The operating model gap is growing faster. That gap is our product.</a:t>
-            </a:r>
-          </a:p>
-        </p:txBody>
-      </p:sp>
-      <p:sp>
-        <p:nvSpPr>
-          <p:cNvPr id="18" name="Rectangle 17"/>
-          <p:cNvSpPr/>
-          <p:nvPr/>
-        </p:nvSpPr>
-        <p:spPr>
-          <a:xfrm>
-            <a:off x="5669280" y="4572000"/>
-            <a:ext cx="6126480" cy="12700"/>
-          </a:xfrm>
-          <a:prstGeom prst="rect">
-            <a:avLst/>
-          </a:prstGeom>
-          <a:solidFill>
-            <a:srgbClr val="CCC8BE"/>
-          </a:solidFill>
-          <a:ln>
-            <a:noFill/>
-          </a:ln>
-        </p:spPr>
-        <p:style>
-          <a:lnRef idx="1">
-            <a:schemeClr val="accent1"/>
-          </a:lnRef>
-          <a:fillRef idx="3">
-            <a:schemeClr val="accent1"/>
-          </a:fillRef>
-          <a:effectRef idx="2">
-            <a:schemeClr val="accent1"/>
-          </a:effectRef>
-          <a:fontRef idx="minor">
-            <a:schemeClr val="lt1"/>
-          </a:fontRef>
-        </p:style>
-        <p:txBody>
-          <a:bodyPr rtlCol="0" anchor="ctr"/>
-          <a:lstStyle/>
-          <a:p>
-            <a:pPr algn="ctr"/>
-          </a:p>
-        </p:txBody>
-      </p:sp>
-      <p:sp>
-        <p:nvSpPr>
-          <p:cNvPr id="19" name="TextBox 18"/>
-          <p:cNvSpPr txBox="1"/>
-          <p:nvPr/>
-        </p:nvSpPr>
-        <p:spPr>
-          <a:xfrm>
-            <a:off x="5669280" y="4663440"/>
-            <a:ext cx="594360" cy="640080"/>
-          </a:xfrm>
-          <a:prstGeom prst="rect">
-            <a:avLst/>
-          </a:prstGeom>
-          <a:noFill/>
-        </p:spPr>
-        <p:txBody>
-          <a:bodyPr wrap="square">
-            <a:spAutoFit/>
-          </a:bodyPr>
-          <a:lstStyle/>
-          <a:p>
-            <a:pPr algn="l"/>
-            <a:r>
-              <a:rPr sz="2200" b="1" i="0">
-                <a:solidFill>
-                  <a:srgbClr val="C9A84C"/>
-                </a:solidFill>
-                <a:latin typeface="Cormorant Garamond"/>
-              </a:rPr>
-              <a:t>04</a:t>
-            </a:r>
-          </a:p>
-        </p:txBody>
-      </p:sp>
-      <p:sp>
-        <p:nvSpPr>
-          <p:cNvPr id="20" name="TextBox 19"/>
-          <p:cNvSpPr txBox="1"/>
-          <p:nvPr/>
-        </p:nvSpPr>
-        <p:spPr>
-          <a:xfrm>
-            <a:off x="6309360" y="4663440"/>
-            <a:ext cx="5486400" cy="1097280"/>
-          </a:xfrm>
-          <a:prstGeom prst="rect">
-            <a:avLst/>
-          </a:prstGeom>
-          <a:noFill/>
-        </p:spPr>
-        <p:txBody>
-          <a:bodyPr wrap="square">
-            <a:spAutoFit/>
-          </a:bodyPr>
-          <a:lstStyle/>
-          <a:p>
-            <a:pPr algn="l"/>
-            <a:r>
-              <a:rPr sz="1300" b="0" i="0">
-                <a:solidFill>
-                  <a:srgbClr val="222B44"/>
-                </a:solidFill>
-                <a:latin typeface="Barlow"/>
-              </a:rPr>
-              <a:t>We built the IDEA Framework — 170 protocols across 3 years. This is not recreatable in a product cycle. It is a structural moat.</a:t>
-            </a:r>
-          </a:p>
-        </p:txBody>
-      </p:sp>
-      <p:sp>
-        <p:nvSpPr>
-          <p:cNvPr id="21" name="TextBox 20"/>
-          <p:cNvSpPr txBox="1"/>
-          <p:nvPr/>
-        </p:nvSpPr>
-        <p:spPr>
-          <a:xfrm>
-            <a:off x="11247120" y="6492240"/>
-            <a:ext cx="914400" cy="228600"/>
-          </a:xfrm>
-          <a:prstGeom prst="rect">
-            <a:avLst/>
-          </a:prstGeom>
-          <a:noFill/>
-        </p:spPr>
-        <p:txBody>
-          <a:bodyPr wrap="square">
-            <a:spAutoFit/>
-          </a:bodyPr>
-          <a:lstStyle/>
-          <a:p>
-            <a:pPr algn="l"/>
+                <a:latin typeface="Barlow Condensed"/>
+              </a:rPr>
+              <a:t>170 READINESS PROTOCOLS · A PRE-STAGED RESPONSE FOR EVERY STRATEGIC SCENARIO</a:t>
+            </a:r>
+          </a:p>
+        </p:txBody>
+      </p:sp>
+      <p:sp>
+        <p:nvSpPr>
+          <p:cNvPr id="15" name="TextBox 14"/>
+          <p:cNvSpPr txBox="1"/>
+          <p:nvPr/>
+        </p:nvSpPr>
+        <p:spPr>
+          <a:xfrm>
+            <a:off x="11247120" y="6537960"/>
+            <a:ext cx="914400" cy="203200"/>
+          </a:xfrm>
+          <a:prstGeom prst="rect">
+            <a:avLst/>
+          </a:prstGeom>
+          <a:noFill/>
+        </p:spPr>
+        <p:txBody>
+          <a:bodyPr wrap="square">
+            <a:spAutoFit/>
+          </a:bodyPr>
+          <a:lstStyle/>
+          <a:p>
+            <a:pPr algn="r"/>
             <a:r>
               <a:rPr sz="1000" b="1" i="0">
                 <a:solidFill>
-                  <a:srgbClr val="888A90"/>
+                  <a:srgbClr val="445070"/>
                 </a:solidFill>
                 <a:latin typeface="Barlow Condensed"/>
               </a:rPr>

--- a/attached_assets/VaughnMartin-Investor-Pitch-Deck.pptx
+++ b/attached_assets/VaughnMartin-Investor-Pitch-Deck.pptx
@@ -3173,13 +3173,13 @@
           <a:p>
             <a:pPr algn="ctr"/>
             <a:r>
-              <a:rPr sz="4000" b="1">
+              <a:rPr sz="3800" b="1">
                 <a:solidFill>
                   <a:srgbClr val="FFFFFF"/>
                 </a:solidFill>
                 <a:latin typeface="Cormorant Garamond"/>
               </a:rPr>
-              <a:t>When a strategic trigger fires—</a:t>
+              <a:t>When a strategic trigger fires in your organization—</a:t>
             </a:r>
           </a:p>
         </p:txBody>
@@ -3214,7 +3214,7 @@
                 </a:solidFill>
                 <a:latin typeface="Cormorant Garamond"/>
               </a:rPr>
-              <a:t>how long does it take to mobilize a coordinated response?</a:t>
+              <a:t>are you executing in 12 minutes or organizing from scratch?</a:t>
             </a:r>
           </a:p>
         </p:txBody>
@@ -4750,7 +4750,7 @@
                 </a:solidFill>
                 <a:latin typeface="Barlow"/>
               </a:rPr>
-              <a:t>No preparation infrastructure exists. Strategic triggers arrive in real time — the mobilization cycle still averages 30 days.</a:t>
+              <a:t>Enterprises detect more signals, but still mobilize too slowly.</a:t>
             </a:r>
           </a:p>
         </p:txBody>
@@ -4906,7 +4906,7 @@
                 </a:solidFill>
                 <a:latin typeface="Barlow"/>
               </a:rPr>
-              <a:t>We rebuilt the operating model. Pre-staged execution replaces real-time coordination — 12 minutes, not 30 days.</a:t>
+              <a:t>Readiness OS pre-stages response so executives authorize in minutes.</a:t>
             </a:r>
           </a:p>
         </p:txBody>
@@ -5027,7 +5027,7 @@
                 </a:solidFill>
                 <a:latin typeface="Barlow Condensed"/>
               </a:rPr>
-              <a:t>ROI</a:t>
+              <a:t>OUTCOME</a:t>
             </a:r>
           </a:p>
         </p:txBody>
@@ -5062,7 +5062,7 @@
                 </a:solidFill>
                 <a:latin typeface="Barlow"/>
               </a:rPr>
-              <a:t>At $120K, we replace a $400K–$800K retainer. Break-even before the second activation. The budget line already exists.</a:t>
+              <a:t>Earlier detection + faster execution protects value before the window closes.</a:t>
             </a:r>
           </a:p>
         </p:txBody>
@@ -11183,7 +11183,7 @@
       </p:sp>
       <p:pic>
         <p:nvPicPr>
-          <p:cNvPr id="19" name="Picture 18" descr="pptx_command_tower.jpg"/>
+          <p:cNvPr id="19" name="Picture 18" descr="pitch_home.jpg"/>
           <p:cNvPicPr>
             <a:picLocks noChangeAspect="1"/>
           </p:cNvPicPr>
@@ -11197,8 +11197,8 @@
         </p:blipFill>
         <p:spPr>
           <a:xfrm>
-            <a:off x="320040" y="3273552"/>
-            <a:ext cx="5669280" cy="3246120"/>
+            <a:off x="320040" y="3383280"/>
+            <a:ext cx="3758184" cy="2606040"/>
           </a:xfrm>
           <a:prstGeom prst="rect">
             <a:avLst/>
@@ -11213,8 +11213,8 @@
         </p:nvSpPr>
         <p:spPr>
           <a:xfrm>
-            <a:off x="320040" y="3273552"/>
-            <a:ext cx="5669280" cy="3246120"/>
+            <a:off x="320040" y="3383280"/>
+            <a:ext cx="3758184" cy="2606040"/>
           </a:xfrm>
           <a:prstGeom prst="rect">
             <a:avLst/>
@@ -11256,8 +11256,8 @@
         </p:nvSpPr>
         <p:spPr>
           <a:xfrm>
-            <a:off x="320040" y="6199632"/>
-            <a:ext cx="5669280" cy="320040"/>
+            <a:off x="320040" y="5669280"/>
+            <a:ext cx="3758184" cy="320040"/>
           </a:xfrm>
           <a:prstGeom prst="rect">
             <a:avLst/>
@@ -11299,8 +11299,8 @@
         </p:nvSpPr>
         <p:spPr>
           <a:xfrm>
-            <a:off x="429768" y="6275832"/>
-            <a:ext cx="5449824" cy="320040"/>
+            <a:off x="429768" y="5745480"/>
+            <a:ext cx="3538728" cy="320040"/>
           </a:xfrm>
           <a:prstGeom prst="rect">
             <a:avLst/>
@@ -11321,14 +11321,14 @@
                 </a:solidFill>
                 <a:latin typeface="Barlow Condensed"/>
               </a:rPr>
-              <a:t>COMMAND TOWER · 221 TRIGGERS ARMED · 20 ACTIVE DETECTIONS · 170 PROTOCOLS READY</a:t>
+              <a:t>LIVE READINESS EXPERIENCE</a:t>
             </a:r>
           </a:p>
         </p:txBody>
       </p:sp>
       <p:pic>
         <p:nvPicPr>
-          <p:cNvPr id="23" name="Picture 22" descr="pptx_protocols.jpg"/>
+          <p:cNvPr id="23" name="Picture 22" descr="deck_signals.jpg"/>
           <p:cNvPicPr>
             <a:picLocks noChangeAspect="1"/>
           </p:cNvPicPr>
@@ -11342,8 +11342,8 @@
         </p:blipFill>
         <p:spPr>
           <a:xfrm>
-            <a:off x="6199632" y="3273552"/>
-            <a:ext cx="5669280" cy="3246120"/>
+            <a:off x="4325112" y="3383280"/>
+            <a:ext cx="3758184" cy="2606040"/>
           </a:xfrm>
           <a:prstGeom prst="rect">
             <a:avLst/>
@@ -11358,8 +11358,8 @@
         </p:nvSpPr>
         <p:spPr>
           <a:xfrm>
-            <a:off x="6199632" y="3273552"/>
-            <a:ext cx="5669280" cy="3246120"/>
+            <a:off x="4325112" y="3383280"/>
+            <a:ext cx="3758184" cy="2606040"/>
           </a:xfrm>
           <a:prstGeom prst="rect">
             <a:avLst/>
@@ -11401,8 +11401,8 @@
         </p:nvSpPr>
         <p:spPr>
           <a:xfrm>
-            <a:off x="6199632" y="6199632"/>
-            <a:ext cx="5669280" cy="320040"/>
+            <a:off x="4325112" y="5669280"/>
+            <a:ext cx="3758184" cy="320040"/>
           </a:xfrm>
           <a:prstGeom prst="rect">
             <a:avLst/>
@@ -11444,8 +11444,8 @@
         </p:nvSpPr>
         <p:spPr>
           <a:xfrm>
-            <a:off x="6309360" y="6275832"/>
-            <a:ext cx="5449824" cy="320040"/>
+            <a:off x="4434840" y="5745480"/>
+            <a:ext cx="3538728" cy="320040"/>
           </a:xfrm>
           <a:prstGeom prst="rect">
             <a:avLst/>
@@ -11466,14 +11466,159 @@
                 </a:solidFill>
                 <a:latin typeface="Barlow Condensed"/>
               </a:rPr>
-              <a:t>READINESS PROTOCOL LIBRARY · 170 PROTOCOLS · EVERY STRATEGIC SCENARIO COVERED</a:t>
-            </a:r>
-          </a:p>
-        </p:txBody>
-      </p:sp>
-      <p:sp>
-        <p:nvSpPr>
-          <p:cNvPr id="27" name="TextBox 26"/>
+              <a:t>SIGNAL DETECTION FEED</a:t>
+            </a:r>
+          </a:p>
+        </p:txBody>
+      </p:sp>
+      <p:pic>
+        <p:nvPicPr>
+          <p:cNvPr id="27" name="Picture 26" descr="pitch_builder.jpg"/>
+          <p:cNvPicPr>
+            <a:picLocks noChangeAspect="1"/>
+          </p:cNvPicPr>
+          <p:nvPr/>
+        </p:nvPicPr>
+        <p:blipFill>
+          <a:blip r:embed="rId4"/>
+          <a:stretch>
+            <a:fillRect/>
+          </a:stretch>
+        </p:blipFill>
+        <p:spPr>
+          <a:xfrm>
+            <a:off x="8330184" y="3383280"/>
+            <a:ext cx="3758184" cy="2606040"/>
+          </a:xfrm>
+          <a:prstGeom prst="rect">
+            <a:avLst/>
+          </a:prstGeom>
+        </p:spPr>
+      </p:pic>
+      <p:sp>
+        <p:nvSpPr>
+          <p:cNvPr id="28" name="Rectangle 27"/>
+          <p:cNvSpPr/>
+          <p:nvPr/>
+        </p:nvSpPr>
+        <p:spPr>
+          <a:xfrm>
+            <a:off x="8330184" y="3383280"/>
+            <a:ext cx="3758184" cy="2606040"/>
+          </a:xfrm>
+          <a:prstGeom prst="rect">
+            <a:avLst/>
+          </a:prstGeom>
+          <a:noFill/>
+          <a:ln w="15240">
+            <a:solidFill>
+              <a:srgbClr val="C9A84C"/>
+            </a:solidFill>
+          </a:ln>
+        </p:spPr>
+        <p:style>
+          <a:lnRef idx="1">
+            <a:schemeClr val="accent1"/>
+          </a:lnRef>
+          <a:fillRef idx="3">
+            <a:schemeClr val="accent1"/>
+          </a:fillRef>
+          <a:effectRef idx="2">
+            <a:schemeClr val="accent1"/>
+          </a:effectRef>
+          <a:fontRef idx="minor">
+            <a:schemeClr val="lt1"/>
+          </a:fontRef>
+        </p:style>
+        <p:txBody>
+          <a:bodyPr rtlCol="0" anchor="ctr"/>
+          <a:lstStyle/>
+          <a:p>
+            <a:pPr algn="ctr"/>
+          </a:p>
+        </p:txBody>
+      </p:sp>
+      <p:sp>
+        <p:nvSpPr>
+          <p:cNvPr id="29" name="Rectangle 28"/>
+          <p:cNvSpPr/>
+          <p:nvPr/>
+        </p:nvSpPr>
+        <p:spPr>
+          <a:xfrm>
+            <a:off x="8330184" y="5669280"/>
+            <a:ext cx="3758184" cy="320040"/>
+          </a:xfrm>
+          <a:prstGeom prst="rect">
+            <a:avLst/>
+          </a:prstGeom>
+          <a:solidFill>
+            <a:srgbClr val="080D26"/>
+          </a:solidFill>
+          <a:ln>
+            <a:noFill/>
+          </a:ln>
+        </p:spPr>
+        <p:style>
+          <a:lnRef idx="1">
+            <a:schemeClr val="accent1"/>
+          </a:lnRef>
+          <a:fillRef idx="3">
+            <a:schemeClr val="accent1"/>
+          </a:fillRef>
+          <a:effectRef idx="2">
+            <a:schemeClr val="accent1"/>
+          </a:effectRef>
+          <a:fontRef idx="minor">
+            <a:schemeClr val="lt1"/>
+          </a:fontRef>
+        </p:style>
+        <p:txBody>
+          <a:bodyPr rtlCol="0" anchor="ctr"/>
+          <a:lstStyle/>
+          <a:p>
+            <a:pPr algn="ctr"/>
+          </a:p>
+        </p:txBody>
+      </p:sp>
+      <p:sp>
+        <p:nvSpPr>
+          <p:cNvPr id="30" name="TextBox 29"/>
+          <p:cNvSpPr txBox="1"/>
+          <p:nvPr/>
+        </p:nvSpPr>
+        <p:spPr>
+          <a:xfrm>
+            <a:off x="8439912" y="5745480"/>
+            <a:ext cx="3538728" cy="320040"/>
+          </a:xfrm>
+          <a:prstGeom prst="rect">
+            <a:avLst/>
+          </a:prstGeom>
+          <a:noFill/>
+        </p:spPr>
+        <p:txBody>
+          <a:bodyPr wrap="square">
+            <a:spAutoFit/>
+          </a:bodyPr>
+          <a:lstStyle/>
+          <a:p>
+            <a:pPr algn="l"/>
+            <a:r>
+              <a:rPr sz="900" b="1" i="0">
+                <a:solidFill>
+                  <a:srgbClr val="C9A84C"/>
+                </a:solidFill>
+                <a:latin typeface="Barlow Condensed"/>
+              </a:rPr>
+              <a:t>PROTOCOL BUILDER</a:t>
+            </a:r>
+          </a:p>
+        </p:txBody>
+      </p:sp>
+      <p:sp>
+        <p:nvSpPr>
+          <p:cNvPr id="31" name="TextBox 30"/>
           <p:cNvSpPr txBox="1"/>
           <p:nvPr/>
         </p:nvSpPr>

--- a/attached_assets/VaughnMartin-Investor-Pitch-Deck.pptx
+++ b/attached_assets/VaughnMartin-Investor-Pitch-Deck.pptx
@@ -16,6 +16,7 @@
     <p:sldId id="264" r:id="rId15"/>
     <p:sldId id="265" r:id="rId16"/>
     <p:sldId id="266" r:id="rId17"/>
+    <p:sldId id="267" r:id="rId18"/>
   </p:sldIdLst>
   <p:sldSz cx="12188952" cy="6858000" type="screen4x3"/>
   <p:notesSz cx="6858000" cy="9144000"/>
@@ -3157,8 +3158,8 @@
         </p:nvSpPr>
         <p:spPr>
           <a:xfrm>
-            <a:off x="914400" y="777240"/>
-            <a:ext cx="10332720" cy="1005840"/>
+            <a:off x="914400" y="749808"/>
+            <a:ext cx="10332720" cy="960120"/>
           </a:xfrm>
           <a:prstGeom prst="rect">
             <a:avLst/>
@@ -3192,8 +3193,8 @@
         </p:nvSpPr>
         <p:spPr>
           <a:xfrm>
-            <a:off x="914400" y="1737360"/>
-            <a:ext cx="10332720" cy="1280160"/>
+            <a:off x="914400" y="1664208"/>
+            <a:ext cx="10332720" cy="1234440"/>
           </a:xfrm>
           <a:prstGeom prst="rect">
             <a:avLst/>
@@ -3221,14 +3222,49 @@
       </p:sp>
       <p:sp>
         <p:nvSpPr>
-          <p:cNvPr id="5" name="Rectangle 4"/>
+          <p:cNvPr id="5" name="TextBox 4"/>
+          <p:cNvSpPr txBox="1"/>
+          <p:nvPr/>
+        </p:nvSpPr>
+        <p:spPr>
+          <a:xfrm>
+            <a:off x="914400" y="2834640"/>
+            <a:ext cx="10332720" cy="330200"/>
+          </a:xfrm>
+          <a:prstGeom prst="rect">
+            <a:avLst/>
+          </a:prstGeom>
+          <a:noFill/>
+        </p:spPr>
+        <p:txBody>
+          <a:bodyPr wrap="square">
+            <a:spAutoFit/>
+          </a:bodyPr>
+          <a:lstStyle/>
+          <a:p>
+            <a:pPr algn="ctr"/>
+            <a:r>
+              <a:rPr sz="1500" b="0" i="1">
+                <a:solidFill>
+                  <a:srgbClr val="99A5BB"/>
+                </a:solidFill>
+                <a:latin typeface="Barlow Condensed"/>
+              </a:rPr>
+              <a:t>Signal advantage before execution advantage.</a:t>
+            </a:r>
+          </a:p>
+        </p:txBody>
+      </p:sp>
+      <p:sp>
+        <p:nvSpPr>
+          <p:cNvPr id="6" name="Rectangle 5"/>
           <p:cNvSpPr/>
           <p:nvPr/>
         </p:nvSpPr>
         <p:spPr>
           <a:xfrm>
-            <a:off x="1188720" y="3200400"/>
-            <a:ext cx="3200400" cy="457200"/>
+            <a:off x="1188720" y="3337560"/>
+            <a:ext cx="3200400" cy="438912"/>
           </a:xfrm>
           <a:prstGeom prst="rect">
             <a:avLst/>
@@ -3266,29 +3302,29 @@
       </p:sp>
       <p:sp>
         <p:nvSpPr>
-          <p:cNvPr id="6" name="TextBox 5"/>
-          <p:cNvSpPr txBox="1"/>
-          <p:nvPr/>
-        </p:nvSpPr>
-        <p:spPr>
-          <a:xfrm>
-            <a:off x="1298448" y="3314700"/>
-            <a:ext cx="2980944" cy="457200"/>
-          </a:xfrm>
-          <a:prstGeom prst="rect">
-            <a:avLst/>
-          </a:prstGeom>
-          <a:noFill/>
-        </p:spPr>
-        <p:txBody>
-          <a:bodyPr wrap="square">
-            <a:spAutoFit/>
-          </a:bodyPr>
-          <a:lstStyle/>
-          <a:p>
-            <a:pPr algn="ctr"/>
-            <a:r>
-              <a:rPr sz="1300" b="1" i="0">
+          <p:cNvPr id="7" name="TextBox 6"/>
+          <p:cNvSpPr txBox="1"/>
+          <p:nvPr/>
+        </p:nvSpPr>
+        <p:spPr>
+          <a:xfrm>
+            <a:off x="1298448" y="3439160"/>
+            <a:ext cx="2980944" cy="438912"/>
+          </a:xfrm>
+          <a:prstGeom prst="rect">
+            <a:avLst/>
+          </a:prstGeom>
+          <a:noFill/>
+        </p:spPr>
+        <p:txBody>
+          <a:bodyPr wrap="square">
+            <a:spAutoFit/>
+          </a:bodyPr>
+          <a:lstStyle/>
+          <a:p>
+            <a:pPr algn="ctr"/>
+            <a:r>
+              <a:rPr sz="1200" b="1" i="0">
                 <a:solidFill>
                   <a:srgbClr val="C9A84C"/>
                 </a:solidFill>
@@ -3301,14 +3337,14 @@
       </p:sp>
       <p:sp>
         <p:nvSpPr>
-          <p:cNvPr id="7" name="Rectangle 6"/>
+          <p:cNvPr id="8" name="Rectangle 7"/>
           <p:cNvSpPr/>
           <p:nvPr/>
         </p:nvSpPr>
         <p:spPr>
           <a:xfrm>
-            <a:off x="4617720" y="3200400"/>
-            <a:ext cx="3200400" cy="457200"/>
+            <a:off x="4617720" y="3337560"/>
+            <a:ext cx="3200400" cy="438912"/>
           </a:xfrm>
           <a:prstGeom prst="rect">
             <a:avLst/>
@@ -3346,29 +3382,29 @@
       </p:sp>
       <p:sp>
         <p:nvSpPr>
-          <p:cNvPr id="8" name="TextBox 7"/>
-          <p:cNvSpPr txBox="1"/>
-          <p:nvPr/>
-        </p:nvSpPr>
-        <p:spPr>
-          <a:xfrm>
-            <a:off x="4727448" y="3314700"/>
-            <a:ext cx="2980944" cy="457200"/>
-          </a:xfrm>
-          <a:prstGeom prst="rect">
-            <a:avLst/>
-          </a:prstGeom>
-          <a:noFill/>
-        </p:spPr>
-        <p:txBody>
-          <a:bodyPr wrap="square">
-            <a:spAutoFit/>
-          </a:bodyPr>
-          <a:lstStyle/>
-          <a:p>
-            <a:pPr algn="ctr"/>
-            <a:r>
-              <a:rPr sz="1300" b="1" i="0">
+          <p:cNvPr id="9" name="TextBox 8"/>
+          <p:cNvSpPr txBox="1"/>
+          <p:nvPr/>
+        </p:nvSpPr>
+        <p:spPr>
+          <a:xfrm>
+            <a:off x="4727448" y="3439160"/>
+            <a:ext cx="2980944" cy="438912"/>
+          </a:xfrm>
+          <a:prstGeom prst="rect">
+            <a:avLst/>
+          </a:prstGeom>
+          <a:noFill/>
+        </p:spPr>
+        <p:txBody>
+          <a:bodyPr wrap="square">
+            <a:spAutoFit/>
+          </a:bodyPr>
+          <a:lstStyle/>
+          <a:p>
+            <a:pPr algn="ctr"/>
+            <a:r>
+              <a:rPr sz="1200" b="1" i="0">
                 <a:solidFill>
                   <a:srgbClr val="C9A84C"/>
                 </a:solidFill>
@@ -3381,14 +3417,14 @@
       </p:sp>
       <p:sp>
         <p:nvSpPr>
-          <p:cNvPr id="9" name="Rectangle 8"/>
+          <p:cNvPr id="10" name="Rectangle 9"/>
           <p:cNvSpPr/>
           <p:nvPr/>
         </p:nvSpPr>
         <p:spPr>
           <a:xfrm>
-            <a:off x="8046720" y="3200400"/>
-            <a:ext cx="3200400" cy="457200"/>
+            <a:off x="8046720" y="3337560"/>
+            <a:ext cx="3200400" cy="438912"/>
           </a:xfrm>
           <a:prstGeom prst="rect">
             <a:avLst/>
@@ -3426,70 +3462,35 @@
       </p:sp>
       <p:sp>
         <p:nvSpPr>
-          <p:cNvPr id="10" name="TextBox 9"/>
-          <p:cNvSpPr txBox="1"/>
-          <p:nvPr/>
-        </p:nvSpPr>
-        <p:spPr>
-          <a:xfrm>
-            <a:off x="8156448" y="3314700"/>
-            <a:ext cx="2980944" cy="457200"/>
-          </a:xfrm>
-          <a:prstGeom prst="rect">
-            <a:avLst/>
-          </a:prstGeom>
-          <a:noFill/>
-        </p:spPr>
-        <p:txBody>
-          <a:bodyPr wrap="square">
-            <a:spAutoFit/>
-          </a:bodyPr>
-          <a:lstStyle/>
-          <a:p>
-            <a:pPr algn="ctr"/>
-            <a:r>
-              <a:rPr sz="1300" b="1" i="0">
+          <p:cNvPr id="11" name="TextBox 10"/>
+          <p:cNvSpPr txBox="1"/>
+          <p:nvPr/>
+        </p:nvSpPr>
+        <p:spPr>
+          <a:xfrm>
+            <a:off x="8156448" y="3439160"/>
+            <a:ext cx="2980944" cy="438912"/>
+          </a:xfrm>
+          <a:prstGeom prst="rect">
+            <a:avLst/>
+          </a:prstGeom>
+          <a:noFill/>
+        </p:spPr>
+        <p:txBody>
+          <a:bodyPr wrap="square">
+            <a:spAutoFit/>
+          </a:bodyPr>
+          <a:lstStyle/>
+          <a:p>
+            <a:pPr algn="ctr"/>
+            <a:r>
+              <a:rPr sz="1200" b="1" i="0">
                 <a:solidFill>
                   <a:srgbClr val="99A5BB"/>
                 </a:solidFill>
                 <a:latin typeface="Barlow Condensed"/>
               </a:rPr>
               <a:t>Regulatory Inquiry · 87%</a:t>
-            </a:r>
-          </a:p>
-        </p:txBody>
-      </p:sp>
-      <p:sp>
-        <p:nvSpPr>
-          <p:cNvPr id="11" name="TextBox 10"/>
-          <p:cNvSpPr txBox="1"/>
-          <p:nvPr/>
-        </p:nvSpPr>
-        <p:spPr>
-          <a:xfrm>
-            <a:off x="914400" y="3840480"/>
-            <a:ext cx="10332720" cy="330200"/>
-          </a:xfrm>
-          <a:prstGeom prst="rect">
-            <a:avLst/>
-          </a:prstGeom>
-          <a:noFill/>
-        </p:spPr>
-        <p:txBody>
-          <a:bodyPr wrap="square">
-            <a:spAutoFit/>
-          </a:bodyPr>
-          <a:lstStyle/>
-          <a:p>
-            <a:pPr algn="ctr"/>
-            <a:r>
-              <a:rPr sz="1500" b="0" i="1">
-                <a:solidFill>
-                  <a:srgbClr val="99A5BB"/>
-                </a:solidFill>
-                <a:latin typeface="Barlow"/>
-              </a:rPr>
-              <a:t>These are live signal detections. Production. Right now.</a:t>
             </a:r>
           </a:p>
         </p:txBody>
@@ -3510,7 +3511,7 @@
         </p:blipFill>
         <p:spPr>
           <a:xfrm>
-            <a:off x="1828800" y="4572000"/>
+            <a:off x="1828800" y="4114800"/>
             <a:ext cx="8531352" cy="1920240"/>
           </a:xfrm>
           <a:prstGeom prst="rect">
@@ -3526,7 +3527,7 @@
         </p:nvSpPr>
         <p:spPr>
           <a:xfrm>
-            <a:off x="1828800" y="4572000"/>
+            <a:off x="1828800" y="4114800"/>
             <a:ext cx="8531352" cy="1920240"/>
           </a:xfrm>
           <a:prstGeom prst="rect">
@@ -3569,8 +3570,8 @@
         </p:nvSpPr>
         <p:spPr>
           <a:xfrm>
-            <a:off x="1828800" y="6172200"/>
-            <a:ext cx="8531352" cy="320040"/>
+            <a:off x="1828800" y="5742432"/>
+            <a:ext cx="8531352" cy="292608"/>
           </a:xfrm>
           <a:prstGeom prst="rect">
             <a:avLst/>
@@ -3612,8 +3613,8 @@
         </p:nvSpPr>
         <p:spPr>
           <a:xfrm>
-            <a:off x="1938528" y="6248400"/>
-            <a:ext cx="8311896" cy="320040"/>
+            <a:off x="1920240" y="5805932"/>
+            <a:ext cx="8348472" cy="292608"/>
           </a:xfrm>
           <a:prstGeom prst="rect">
             <a:avLst/>
@@ -3634,7 +3635,7 @@
                 </a:solidFill>
                 <a:latin typeface="Barlow Condensed"/>
               </a:rPr>
-              <a:t>COMMAND TOWER · LIVE PRODUCTION · 221 TRIGGERS ARMED · 20 ACTIVE DETECTIONS · 170 PROTOCOLS READY</a:t>
+              <a:t>Command Tower · Live production · 221 triggers armed · 20 active detections · 170 protocols ready</a:t>
             </a:r>
           </a:p>
         </p:txBody>
@@ -3648,20 +3649,20 @@
         <p:spPr>
           <a:xfrm>
             <a:off x="365760" y="6565392"/>
-            <a:ext cx="4572000" cy="228600"/>
-          </a:xfrm>
-          <a:prstGeom prst="rect">
-            <a:avLst/>
-          </a:prstGeom>
-          <a:noFill/>
-        </p:spPr>
-        <p:txBody>
-          <a:bodyPr wrap="square">
-            <a:spAutoFit/>
-          </a:bodyPr>
-          <a:lstStyle/>
-          <a:p>
-            <a:pPr algn="l"/>
+            <a:ext cx="11430000" cy="228600"/>
+          </a:xfrm>
+          <a:prstGeom prst="rect">
+            <a:avLst/>
+          </a:prstGeom>
+          <a:noFill/>
+        </p:spPr>
+        <p:txBody>
+          <a:bodyPr wrap="square">
+            <a:spAutoFit/>
+          </a:bodyPr>
+          <a:lstStyle/>
+          <a:p>
+            <a:pPr algn="ctr"/>
             <a:r>
               <a:rPr sz="1100" b="1" i="0">
                 <a:solidFill>
@@ -3669,7 +3670,7 @@
                 </a:solidFill>
                 <a:latin typeface="Barlow Condensed"/>
               </a:rPr>
-              <a:t>VaughnMartin  ·  Readiness OS</a:t>
+              <a:t>AI monitors continuously.  Executives authorize decisively.</a:t>
             </a:r>
           </a:p>
         </p:txBody>
@@ -3704,7 +3705,7 @@
                 </a:solidFill>
                 <a:latin typeface="Barlow Condensed"/>
               </a:rPr>
-              <a:t>01 / 11</a:t>
+              <a:t>01 / 12</a:t>
             </a:r>
           </a:p>
         </p:txBody>
@@ -3723,7 +3724,7 @@
     <p:bg>
       <p:bgPr>
         <a:solidFill>
-          <a:srgbClr val="0A0F2E"/>
+          <a:srgbClr val="F2F0EB"/>
         </a:solidFill>
         <a:effectLst/>
       </p:bgPr>
@@ -3786,7 +3787,7 @@
         </p:nvSpPr>
         <p:spPr>
           <a:xfrm>
-            <a:off x="457200" y="411480"/>
+            <a:off x="457200" y="438912"/>
             <a:ext cx="10972800" cy="228600"/>
           </a:xfrm>
           <a:prstGeom prst="rect">
@@ -3804,11 +3805,11 @@
             <a:r>
               <a:rPr sz="900" b="1" i="0">
                 <a:solidFill>
-                  <a:srgbClr val="C9A84C"/>
+                  <a:srgbClr val="444C66"/>
                 </a:solidFill>
                 <a:latin typeface="Barlow Condensed"/>
               </a:rPr>
-              <a:t>FOUNDING PARTNER PROGRAM</a:t>
+              <a:t>WHY NOW</a:t>
             </a:r>
           </a:p>
         </p:txBody>
@@ -3821,8 +3822,8 @@
         </p:nvSpPr>
         <p:spPr>
           <a:xfrm>
-            <a:off x="457200" y="749808"/>
-            <a:ext cx="5120640" cy="2743200"/>
+            <a:off x="457200" y="685800"/>
+            <a:ext cx="11247120" cy="1051560"/>
           </a:xfrm>
           <a:prstGeom prst="rect">
             <a:avLst/>
@@ -3837,15 +3838,13 @@
           <a:p>
             <a:pPr algn="l"/>
             <a:r>
-              <a:rPr sz="4400" b="1">
-                <a:solidFill>
-                  <a:srgbClr val="FFFFFF"/>
+              <a:rPr sz="3200" b="1">
+                <a:solidFill>
+                  <a:srgbClr val="0A0F2E"/>
                 </a:solidFill>
                 <a:latin typeface="Cormorant Garamond"/>
               </a:rPr>
-              <a:t>Twelve
-organizations.
-One first cohort.</a:t>
+              <a:t>AI capability is accelerating faster than enterprise readiness.</a:t>
             </a:r>
           </a:p>
         </p:txBody>
@@ -3858,8 +3857,8 @@
         </p:nvSpPr>
         <p:spPr>
           <a:xfrm>
-            <a:off x="457200" y="3657600"/>
-            <a:ext cx="4572000" cy="19050"/>
+            <a:off x="457200" y="1874519"/>
+            <a:ext cx="11274552" cy="19050"/>
           </a:xfrm>
           <a:prstGeom prst="rect">
             <a:avLst/>
@@ -3895,92 +3894,20 @@
       </p:sp>
       <p:sp>
         <p:nvSpPr>
-          <p:cNvPr id="6" name="TextBox 5"/>
-          <p:cNvSpPr txBox="1"/>
-          <p:nvPr/>
-        </p:nvSpPr>
-        <p:spPr>
-          <a:xfrm>
-            <a:off x="457200" y="3822191"/>
-            <a:ext cx="4846320" cy="1371600"/>
-          </a:xfrm>
-          <a:prstGeom prst="rect">
-            <a:avLst/>
-          </a:prstGeom>
-          <a:noFill/>
-        </p:spPr>
-        <p:txBody>
-          <a:bodyPr wrap="square">
-            <a:spAutoFit/>
-          </a:bodyPr>
-          <a:lstStyle/>
-          <a:p>
-            <a:pPr algn="l"/>
-            <a:r>
-              <a:rPr sz="1700" b="0" i="1">
-                <a:solidFill>
-                  <a:srgbClr val="99A5BB"/>
-                </a:solidFill>
-                <a:latin typeface="Barlow"/>
-              </a:rPr>
-              <a:t>We're not looking for customers.
-We're selecting partners who will
-define the category with us.</a:t>
-            </a:r>
-          </a:p>
-        </p:txBody>
-      </p:sp>
-      <p:sp>
-        <p:nvSpPr>
-          <p:cNvPr id="7" name="TextBox 6"/>
-          <p:cNvSpPr txBox="1"/>
-          <p:nvPr/>
-        </p:nvSpPr>
-        <p:spPr>
-          <a:xfrm>
-            <a:off x="5760720" y="411480"/>
-            <a:ext cx="10972800" cy="228600"/>
-          </a:xfrm>
-          <a:prstGeom prst="rect">
-            <a:avLst/>
-          </a:prstGeom>
-          <a:noFill/>
-        </p:spPr>
-        <p:txBody>
-          <a:bodyPr wrap="square">
-            <a:spAutoFit/>
-          </a:bodyPr>
-          <a:lstStyle/>
-          <a:p>
-            <a:pPr algn="l"/>
-            <a:r>
-              <a:rPr sz="900" b="1" i="0">
-                <a:solidFill>
-                  <a:srgbClr val="C9A84C"/>
-                </a:solidFill>
-                <a:latin typeface="Barlow Condensed"/>
-              </a:rPr>
-              <a:t>THE ASK</a:t>
-            </a:r>
-          </a:p>
-        </p:txBody>
-      </p:sp>
-      <p:sp>
-        <p:nvSpPr>
-          <p:cNvPr id="8" name="Rectangle 7"/>
+          <p:cNvPr id="6" name="Rectangle 5"/>
           <p:cNvSpPr/>
           <p:nvPr/>
         </p:nvSpPr>
         <p:spPr>
           <a:xfrm>
-            <a:off x="5760720" y="749808"/>
-            <a:ext cx="6035040" cy="1143000"/>
+            <a:off x="457200" y="2131568"/>
+            <a:ext cx="146304" cy="146304"/>
           </a:xfrm>
           <a:prstGeom prst="rect">
             <a:avLst/>
           </a:prstGeom>
           <a:solidFill>
-            <a:srgbClr val="121A44"/>
+            <a:srgbClr val="C9A84C"/>
           </a:solidFill>
           <a:ln>
             <a:noFill/>
@@ -4010,14 +3937,14 @@
       </p:sp>
       <p:sp>
         <p:nvSpPr>
-          <p:cNvPr id="9" name="TextBox 8"/>
-          <p:cNvSpPr txBox="1"/>
-          <p:nvPr/>
-        </p:nvSpPr>
-        <p:spPr>
-          <a:xfrm>
-            <a:off x="5943600" y="851408"/>
-            <a:ext cx="2743200" cy="228600"/>
+          <p:cNvPr id="7" name="TextBox 6"/>
+          <p:cNvSpPr txBox="1"/>
+          <p:nvPr/>
+        </p:nvSpPr>
+        <p:spPr>
+          <a:xfrm>
+            <a:off x="749808" y="2029968"/>
+            <a:ext cx="10789920" cy="868680"/>
           </a:xfrm>
           <a:prstGeom prst="rect">
             <a:avLst/>
@@ -4032,68 +3959,33 @@
           <a:p>
             <a:pPr algn="l"/>
             <a:r>
-              <a:rPr sz="900" b="1" i="0">
-                <a:solidFill>
-                  <a:srgbClr val="99A5BB"/>
+              <a:rPr sz="1700" b="0" i="0">
+                <a:solidFill>
+                  <a:srgbClr val="1A2348"/>
                 </a:solidFill>
                 <a:latin typeface="Barlow Condensed"/>
               </a:rPr>
-              <a:t>PROGRAM</a:t>
-            </a:r>
-          </a:p>
-        </p:txBody>
-      </p:sp>
-      <p:sp>
-        <p:nvSpPr>
-          <p:cNvPr id="10" name="TextBox 9"/>
-          <p:cNvSpPr txBox="1"/>
-          <p:nvPr/>
-        </p:nvSpPr>
-        <p:spPr>
-          <a:xfrm>
-            <a:off x="5943600" y="1080008"/>
-            <a:ext cx="5669280" cy="482600"/>
-          </a:xfrm>
-          <a:prstGeom prst="rect">
-            <a:avLst/>
-          </a:prstGeom>
-          <a:noFill/>
-        </p:spPr>
-        <p:txBody>
-          <a:bodyPr wrap="square">
-            <a:spAutoFit/>
-          </a:bodyPr>
-          <a:lstStyle/>
-          <a:p>
-            <a:pPr algn="l"/>
-            <a:r>
-              <a:rPr sz="1400" b="1" i="0">
-                <a:solidFill>
-                  <a:srgbClr val="FFFFFF"/>
-                </a:solidFill>
-                <a:latin typeface="Barlow"/>
-              </a:rPr>
-              <a:t>Founding Partner Program · 90-Day Validation</a:t>
-            </a:r>
-          </a:p>
-        </p:txBody>
-      </p:sp>
-      <p:sp>
-        <p:nvSpPr>
-          <p:cNvPr id="11" name="Rectangle 10"/>
+              <a:t>Organizations can detect more than ever, but still mobilize too slowly.</a:t>
+            </a:r>
+          </a:p>
+        </p:txBody>
+      </p:sp>
+      <p:sp>
+        <p:nvSpPr>
+          <p:cNvPr id="8" name="Rectangle 7"/>
           <p:cNvSpPr/>
           <p:nvPr/>
         </p:nvSpPr>
         <p:spPr>
           <a:xfrm>
-            <a:off x="5760720" y="2029968"/>
-            <a:ext cx="6035040" cy="1143000"/>
+            <a:off x="457200" y="3183128"/>
+            <a:ext cx="146304" cy="146304"/>
           </a:xfrm>
           <a:prstGeom prst="rect">
             <a:avLst/>
           </a:prstGeom>
           <a:solidFill>
-            <a:srgbClr val="0E1438"/>
+            <a:srgbClr val="C9A84C"/>
           </a:solidFill>
           <a:ln>
             <a:noFill/>
@@ -4123,14 +4015,14 @@
       </p:sp>
       <p:sp>
         <p:nvSpPr>
-          <p:cNvPr id="12" name="TextBox 11"/>
-          <p:cNvSpPr txBox="1"/>
-          <p:nvPr/>
-        </p:nvSpPr>
-        <p:spPr>
-          <a:xfrm>
-            <a:off x="5943600" y="2131568"/>
-            <a:ext cx="2743200" cy="228600"/>
+          <p:cNvPr id="9" name="TextBox 8"/>
+          <p:cNvSpPr txBox="1"/>
+          <p:nvPr/>
+        </p:nvSpPr>
+        <p:spPr>
+          <a:xfrm>
+            <a:off x="749808" y="3081528"/>
+            <a:ext cx="10789920" cy="868680"/>
           </a:xfrm>
           <a:prstGeom prst="rect">
             <a:avLst/>
@@ -4145,68 +4037,33 @@
           <a:p>
             <a:pPr algn="l"/>
             <a:r>
-              <a:rPr sz="900" b="1" i="0">
-                <a:solidFill>
-                  <a:srgbClr val="99A5BB"/>
+              <a:rPr sz="1700" b="0" i="0">
+                <a:solidFill>
+                  <a:srgbClr val="1A2348"/>
                 </a:solidFill>
                 <a:latin typeface="Barlow Condensed"/>
               </a:rPr>
-              <a:t>COHORT SIZE</a:t>
-            </a:r>
-          </a:p>
-        </p:txBody>
-      </p:sp>
-      <p:sp>
-        <p:nvSpPr>
-          <p:cNvPr id="13" name="TextBox 12"/>
-          <p:cNvSpPr txBox="1"/>
-          <p:nvPr/>
-        </p:nvSpPr>
-        <p:spPr>
-          <a:xfrm>
-            <a:off x="5943600" y="2360168"/>
-            <a:ext cx="5669280" cy="482600"/>
-          </a:xfrm>
-          <a:prstGeom prst="rect">
-            <a:avLst/>
-          </a:prstGeom>
-          <a:noFill/>
-        </p:spPr>
-        <p:txBody>
-          <a:bodyPr wrap="square">
-            <a:spAutoFit/>
-          </a:bodyPr>
-          <a:lstStyle/>
-          <a:p>
-            <a:pPr algn="l"/>
-            <a:r>
-              <a:rPr sz="1400" b="1" i="0">
-                <a:solidFill>
-                  <a:srgbClr val="C9A84C"/>
-                </a:solidFill>
-                <a:latin typeface="Barlow"/>
-              </a:rPr>
-              <a:t>12 Organizations · Fortune 1000</a:t>
-            </a:r>
-          </a:p>
-        </p:txBody>
-      </p:sp>
-      <p:sp>
-        <p:nvSpPr>
-          <p:cNvPr id="14" name="Rectangle 13"/>
+              <a:t>Governance and execution readiness are now the competitive bottleneck.</a:t>
+            </a:r>
+          </a:p>
+        </p:txBody>
+      </p:sp>
+      <p:sp>
+        <p:nvSpPr>
+          <p:cNvPr id="10" name="Rectangle 9"/>
           <p:cNvSpPr/>
           <p:nvPr/>
         </p:nvSpPr>
         <p:spPr>
           <a:xfrm>
-            <a:off x="5760720" y="3310128"/>
-            <a:ext cx="6035040" cy="1143000"/>
+            <a:off x="457200" y="4234688"/>
+            <a:ext cx="146304" cy="146304"/>
           </a:xfrm>
           <a:prstGeom prst="rect">
             <a:avLst/>
           </a:prstGeom>
           <a:solidFill>
-            <a:srgbClr val="121A44"/>
+            <a:srgbClr val="C9A84C"/>
           </a:solidFill>
           <a:ln>
             <a:noFill/>
@@ -4236,14 +4093,14 @@
       </p:sp>
       <p:sp>
         <p:nvSpPr>
-          <p:cNvPr id="15" name="TextBox 14"/>
-          <p:cNvSpPr txBox="1"/>
-          <p:nvPr/>
-        </p:nvSpPr>
-        <p:spPr>
-          <a:xfrm>
-            <a:off x="5943600" y="3411728"/>
-            <a:ext cx="2743200" cy="228600"/>
+          <p:cNvPr id="11" name="TextBox 10"/>
+          <p:cNvSpPr txBox="1"/>
+          <p:nvPr/>
+        </p:nvSpPr>
+        <p:spPr>
+          <a:xfrm>
+            <a:off x="749808" y="4133088"/>
+            <a:ext cx="10789920" cy="868680"/>
           </a:xfrm>
           <a:prstGeom prst="rect">
             <a:avLst/>
@@ -4258,168 +4115,55 @@
           <a:p>
             <a:pPr algn="l"/>
             <a:r>
-              <a:rPr sz="900" b="1" i="0">
+              <a:rPr sz="1700" b="0" i="0">
+                <a:solidFill>
+                  <a:srgbClr val="1A2348"/>
+                </a:solidFill>
+                <a:latin typeface="Barlow Condensed"/>
+              </a:rPr>
+              <a:t>The winners will be companies that pair AI sensing with governed execution speed.</a:t>
+            </a:r>
+          </a:p>
+        </p:txBody>
+      </p:sp>
+      <p:sp>
+        <p:nvSpPr>
+          <p:cNvPr id="12" name="TextBox 11"/>
+          <p:cNvSpPr txBox="1"/>
+          <p:nvPr/>
+        </p:nvSpPr>
+        <p:spPr>
+          <a:xfrm>
+            <a:off x="457200" y="5285232"/>
+            <a:ext cx="11274552" cy="279400"/>
+          </a:xfrm>
+          <a:prstGeom prst="rect">
+            <a:avLst/>
+          </a:prstGeom>
+          <a:noFill/>
+        </p:spPr>
+        <p:txBody>
+          <a:bodyPr wrap="square">
+            <a:spAutoFit/>
+          </a:bodyPr>
+          <a:lstStyle/>
+          <a:p>
+            <a:pPr algn="l"/>
+            <a:r>
+              <a:rPr sz="1100" b="0" i="1">
                 <a:solidFill>
                   <a:srgbClr val="99A5BB"/>
                 </a:solidFill>
                 <a:latin typeface="Barlow Condensed"/>
               </a:rPr>
-              <a:t>USE OF FUNDS</a:t>
-            </a:r>
-          </a:p>
-        </p:txBody>
-      </p:sp>
-      <p:sp>
-        <p:nvSpPr>
-          <p:cNvPr id="16" name="TextBox 15"/>
-          <p:cNvSpPr txBox="1"/>
-          <p:nvPr/>
-        </p:nvSpPr>
-        <p:spPr>
-          <a:xfrm>
-            <a:off x="5943600" y="3640328"/>
-            <a:ext cx="5669280" cy="482600"/>
-          </a:xfrm>
-          <a:prstGeom prst="rect">
-            <a:avLst/>
-          </a:prstGeom>
-          <a:noFill/>
-        </p:spPr>
-        <p:txBody>
-          <a:bodyPr wrap="square">
-            <a:spAutoFit/>
-          </a:bodyPr>
-          <a:lstStyle/>
-          <a:p>
-            <a:pPr algn="l"/>
-            <a:r>
-              <a:rPr sz="1400" b="1" i="0">
-                <a:solidFill>
-                  <a:srgbClr val="FFFFFF"/>
-                </a:solidFill>
-                <a:latin typeface="Barlow"/>
-              </a:rPr>
-              <a:t>Protocol Expansion · Sales Infrastructure · Category Establishment</a:t>
-            </a:r>
-          </a:p>
-        </p:txBody>
-      </p:sp>
-      <p:sp>
-        <p:nvSpPr>
-          <p:cNvPr id="17" name="Rectangle 16"/>
-          <p:cNvSpPr/>
-          <p:nvPr/>
-        </p:nvSpPr>
-        <p:spPr>
-          <a:xfrm>
-            <a:off x="5760720" y="4590288"/>
-            <a:ext cx="6035040" cy="1143000"/>
-          </a:xfrm>
-          <a:prstGeom prst="rect">
-            <a:avLst/>
-          </a:prstGeom>
-          <a:solidFill>
-            <a:srgbClr val="0E1438"/>
-          </a:solidFill>
-          <a:ln>
-            <a:noFill/>
-          </a:ln>
-        </p:spPr>
-        <p:style>
-          <a:lnRef idx="1">
-            <a:schemeClr val="accent1"/>
-          </a:lnRef>
-          <a:fillRef idx="3">
-            <a:schemeClr val="accent1"/>
-          </a:fillRef>
-          <a:effectRef idx="2">
-            <a:schemeClr val="accent1"/>
-          </a:effectRef>
-          <a:fontRef idx="minor">
-            <a:schemeClr val="lt1"/>
-          </a:fontRef>
-        </p:style>
-        <p:txBody>
-          <a:bodyPr rtlCol="0" anchor="ctr"/>
-          <a:lstStyle/>
-          <a:p>
-            <a:pPr algn="ctr"/>
-          </a:p>
-        </p:txBody>
-      </p:sp>
-      <p:sp>
-        <p:nvSpPr>
-          <p:cNvPr id="18" name="TextBox 17"/>
-          <p:cNvSpPr txBox="1"/>
-          <p:nvPr/>
-        </p:nvSpPr>
-        <p:spPr>
-          <a:xfrm>
-            <a:off x="5943600" y="4691888"/>
-            <a:ext cx="2743200" cy="228600"/>
-          </a:xfrm>
-          <a:prstGeom prst="rect">
-            <a:avLst/>
-          </a:prstGeom>
-          <a:noFill/>
-        </p:spPr>
-        <p:txBody>
-          <a:bodyPr wrap="square">
-            <a:spAutoFit/>
-          </a:bodyPr>
-          <a:lstStyle/>
-          <a:p>
-            <a:pPr algn="l"/>
-            <a:r>
-              <a:rPr sz="900" b="1" i="0">
-                <a:solidFill>
-                  <a:srgbClr val="99A5BB"/>
-                </a:solidFill>
-                <a:latin typeface="Barlow Condensed"/>
-              </a:rPr>
-              <a:t>WHY THIS ROOM</a:t>
-            </a:r>
-          </a:p>
-        </p:txBody>
-      </p:sp>
-      <p:sp>
-        <p:nvSpPr>
-          <p:cNvPr id="19" name="TextBox 18"/>
-          <p:cNvSpPr txBox="1"/>
-          <p:nvPr/>
-        </p:nvSpPr>
-        <p:spPr>
-          <a:xfrm>
-            <a:off x="5943600" y="4920488"/>
-            <a:ext cx="5669280" cy="482600"/>
-          </a:xfrm>
-          <a:prstGeom prst="rect">
-            <a:avLst/>
-          </a:prstGeom>
-          <a:noFill/>
-        </p:spPr>
-        <p:txBody>
-          <a:bodyPr wrap="square">
-            <a:spAutoFit/>
-          </a:bodyPr>
-          <a:lstStyle/>
-          <a:p>
-            <a:pPr algn="l"/>
-            <a:r>
-              <a:rPr sz="1400" b="1" i="0">
-                <a:solidFill>
-                  <a:srgbClr val="C9A84C"/>
-                </a:solidFill>
-                <a:latin typeface="Barlow"/>
-              </a:rPr>
-              <a:t>Investors who see the category before the category exists</a:t>
-            </a:r>
-          </a:p>
-        </p:txBody>
-      </p:sp>
-      <p:sp>
-        <p:nvSpPr>
-          <p:cNvPr id="20" name="TextBox 19"/>
+              <a:t>Sources: Stanford HAI AI Index 2026  ·  Gartner Autonomous Business</a:t>
+            </a:r>
+          </a:p>
+        </p:txBody>
+      </p:sp>
+      <p:sp>
+        <p:nvSpPr>
+          <p:cNvPr id="13" name="TextBox 12"/>
           <p:cNvSpPr txBox="1"/>
           <p:nvPr/>
         </p:nvSpPr>
@@ -4447,7 +4191,7 @@
                 </a:solidFill>
                 <a:latin typeface="Barlow Condensed"/>
               </a:rPr>
-              <a:t>10 / 11</a:t>
+              <a:t>10 / 12</a:t>
             </a:r>
           </a:p>
         </p:txBody>
@@ -4523,20 +4267,125 @@
       </p:sp>
       <p:sp>
         <p:nvSpPr>
-          <p:cNvPr id="3" name="Rectangle 2"/>
+          <p:cNvPr id="3" name="TextBox 2"/>
+          <p:cNvSpPr txBox="1"/>
+          <p:nvPr/>
+        </p:nvSpPr>
+        <p:spPr>
+          <a:xfrm>
+            <a:off x="457200" y="411480"/>
+            <a:ext cx="10972800" cy="228600"/>
+          </a:xfrm>
+          <a:prstGeom prst="rect">
+            <a:avLst/>
+          </a:prstGeom>
+          <a:noFill/>
+        </p:spPr>
+        <p:txBody>
+          <a:bodyPr wrap="square">
+            <a:spAutoFit/>
+          </a:bodyPr>
+          <a:lstStyle/>
+          <a:p>
+            <a:pPr algn="l"/>
+            <a:r>
+              <a:rPr sz="900" b="1" i="0">
+                <a:solidFill>
+                  <a:srgbClr val="C9A84C"/>
+                </a:solidFill>
+                <a:latin typeface="Barlow Condensed"/>
+              </a:rPr>
+              <a:t>THE ASK</a:t>
+            </a:r>
+          </a:p>
+        </p:txBody>
+      </p:sp>
+      <p:sp>
+        <p:nvSpPr>
+          <p:cNvPr id="4" name="TextBox 3"/>
+          <p:cNvSpPr txBox="1"/>
+          <p:nvPr/>
+        </p:nvSpPr>
+        <p:spPr>
+          <a:xfrm>
+            <a:off x="457200" y="685800"/>
+            <a:ext cx="6858000" cy="1051560"/>
+          </a:xfrm>
+          <a:prstGeom prst="rect">
+            <a:avLst/>
+          </a:prstGeom>
+          <a:noFill/>
+        </p:spPr>
+        <p:txBody>
+          <a:bodyPr wrap="square">
+            <a:spAutoFit/>
+          </a:bodyPr>
+          <a:lstStyle/>
+          <a:p>
+            <a:pPr algn="l"/>
+            <a:r>
+              <a:rPr sz="3400" b="1">
+                <a:solidFill>
+                  <a:srgbClr val="FFFFFF"/>
+                </a:solidFill>
+                <a:latin typeface="Cormorant Garamond"/>
+              </a:rPr>
+              <a:t>Twelve founding partners. One defining cohort.</a:t>
+            </a:r>
+          </a:p>
+        </p:txBody>
+      </p:sp>
+      <p:sp>
+        <p:nvSpPr>
+          <p:cNvPr id="5" name="TextBox 4"/>
+          <p:cNvSpPr txBox="1"/>
+          <p:nvPr/>
+        </p:nvSpPr>
+        <p:spPr>
+          <a:xfrm>
+            <a:off x="457200" y="1874519"/>
+            <a:ext cx="6858000" cy="502920"/>
+          </a:xfrm>
+          <a:prstGeom prst="rect">
+            <a:avLst/>
+          </a:prstGeom>
+          <a:noFill/>
+        </p:spPr>
+        <p:txBody>
+          <a:bodyPr wrap="square">
+            <a:spAutoFit/>
+          </a:bodyPr>
+          <a:lstStyle/>
+          <a:p>
+            <a:pPr algn="l"/>
+            <a:r>
+              <a:rPr sz="1500" b="0" i="1">
+                <a:solidFill>
+                  <a:srgbClr val="99A5BB"/>
+                </a:solidFill>
+                <a:latin typeface="Barlow Condensed"/>
+              </a:rPr>
+              <a:t>Partners who want readiness as competitive advantage.</a:t>
+            </a:r>
+          </a:p>
+        </p:txBody>
+      </p:sp>
+      <p:sp>
+        <p:nvSpPr>
+          <p:cNvPr id="6" name="Rectangle 5"/>
           <p:cNvSpPr/>
           <p:nvPr/>
         </p:nvSpPr>
         <p:spPr>
           <a:xfrm>
-            <a:off x="7315200" y="0"/>
-            <a:ext cx="5029200" cy="3200400"/>
+            <a:off x="365760" y="2578608"/>
+            <a:ext cx="11457432" cy="822960"/>
           </a:xfrm>
           <a:prstGeom prst="rect">
             <a:avLst/>
           </a:prstGeom>
           <a:solidFill>
-            <a:srgbClr val="0E1844"/>
+            <a:srgbClr val="121A44"/>
           </a:solidFill>
           <a:ln>
             <a:noFill/>
@@ -4566,49 +4415,84 @@
       </p:sp>
       <p:sp>
         <p:nvSpPr>
-          <p:cNvPr id="4" name="TextBox 3"/>
-          <p:cNvSpPr txBox="1"/>
-          <p:nvPr/>
-        </p:nvSpPr>
-        <p:spPr>
-          <a:xfrm>
-            <a:off x="457200" y="457200"/>
-            <a:ext cx="11247120" cy="279400"/>
-          </a:xfrm>
-          <a:prstGeom prst="rect">
-            <a:avLst/>
-          </a:prstGeom>
-          <a:noFill/>
-        </p:spPr>
-        <p:txBody>
-          <a:bodyPr wrap="square">
-            <a:spAutoFit/>
-          </a:bodyPr>
-          <a:lstStyle/>
-          <a:p>
-            <a:pPr algn="ctr"/>
-            <a:r>
-              <a:rPr sz="1200" b="1" i="0">
-                <a:solidFill>
-                  <a:srgbClr val="C9A84C"/>
+          <p:cNvPr id="7" name="TextBox 6"/>
+          <p:cNvSpPr txBox="1"/>
+          <p:nvPr/>
+        </p:nvSpPr>
+        <p:spPr>
+          <a:xfrm>
+            <a:off x="548640" y="2731008"/>
+            <a:ext cx="2194560" cy="304800"/>
+          </a:xfrm>
+          <a:prstGeom prst="rect">
+            <a:avLst/>
+          </a:prstGeom>
+          <a:noFill/>
+        </p:spPr>
+        <p:txBody>
+          <a:bodyPr wrap="square">
+            <a:spAutoFit/>
+          </a:bodyPr>
+          <a:lstStyle/>
+          <a:p>
+            <a:pPr algn="l"/>
+            <a:r>
+              <a:rPr sz="900" b="1" i="0">
+                <a:solidFill>
+                  <a:srgbClr val="99A5BB"/>
                 </a:solidFill>
                 <a:latin typeface="Barlow Condensed"/>
               </a:rPr>
-              <a:t>Three sentences. That's the whole pitch.</a:t>
-            </a:r>
-          </a:p>
-        </p:txBody>
-      </p:sp>
-      <p:sp>
-        <p:nvSpPr>
-          <p:cNvPr id="5" name="Rectangle 4"/>
+              <a:t>PROGRAM</a:t>
+            </a:r>
+          </a:p>
+        </p:txBody>
+      </p:sp>
+      <p:sp>
+        <p:nvSpPr>
+          <p:cNvPr id="8" name="TextBox 7"/>
+          <p:cNvSpPr txBox="1"/>
+          <p:nvPr/>
+        </p:nvSpPr>
+        <p:spPr>
+          <a:xfrm>
+            <a:off x="2834640" y="2718308"/>
+            <a:ext cx="8869680" cy="304800"/>
+          </a:xfrm>
+          <a:prstGeom prst="rect">
+            <a:avLst/>
+          </a:prstGeom>
+          <a:noFill/>
+        </p:spPr>
+        <p:txBody>
+          <a:bodyPr wrap="square">
+            <a:spAutoFit/>
+          </a:bodyPr>
+          <a:lstStyle/>
+          <a:p>
+            <a:pPr algn="l"/>
+            <a:r>
+              <a:rPr sz="1600" b="0" i="0">
+                <a:solidFill>
+                  <a:srgbClr val="FFFFFF"/>
+                </a:solidFill>
+                <a:latin typeface="Barlow Condensed"/>
+              </a:rPr>
+              <a:t>Founding Partner  ·  90-Day Validation</a:t>
+            </a:r>
+          </a:p>
+        </p:txBody>
+      </p:sp>
+      <p:sp>
+        <p:nvSpPr>
+          <p:cNvPr id="9" name="Rectangle 8"/>
           <p:cNvSpPr/>
           <p:nvPr/>
         </p:nvSpPr>
         <p:spPr>
           <a:xfrm>
-            <a:off x="640080" y="960120"/>
-            <a:ext cx="10881360" cy="1444752"/>
+            <a:off x="365760" y="3465576"/>
+            <a:ext cx="11457432" cy="822960"/>
           </a:xfrm>
           <a:prstGeom prst="rect">
             <a:avLst/>
@@ -4644,14 +4528,371 @@
       </p:sp>
       <p:sp>
         <p:nvSpPr>
-          <p:cNvPr id="6" name="Rectangle 5"/>
+          <p:cNvPr id="10" name="TextBox 9"/>
+          <p:cNvSpPr txBox="1"/>
+          <p:nvPr/>
+        </p:nvSpPr>
+        <p:spPr>
+          <a:xfrm>
+            <a:off x="548640" y="3617976"/>
+            <a:ext cx="2194560" cy="304800"/>
+          </a:xfrm>
+          <a:prstGeom prst="rect">
+            <a:avLst/>
+          </a:prstGeom>
+          <a:noFill/>
+        </p:spPr>
+        <p:txBody>
+          <a:bodyPr wrap="square">
+            <a:spAutoFit/>
+          </a:bodyPr>
+          <a:lstStyle/>
+          <a:p>
+            <a:pPr algn="l"/>
+            <a:r>
+              <a:rPr sz="900" b="1" i="0">
+                <a:solidFill>
+                  <a:srgbClr val="99A5BB"/>
+                </a:solidFill>
+                <a:latin typeface="Barlow Condensed"/>
+              </a:rPr>
+              <a:t>COMMERCIAL</a:t>
+            </a:r>
+          </a:p>
+        </p:txBody>
+      </p:sp>
+      <p:sp>
+        <p:nvSpPr>
+          <p:cNvPr id="11" name="TextBox 10"/>
+          <p:cNvSpPr txBox="1"/>
+          <p:nvPr/>
+        </p:nvSpPr>
+        <p:spPr>
+          <a:xfrm>
+            <a:off x="2834640" y="3605276"/>
+            <a:ext cx="8869680" cy="304800"/>
+          </a:xfrm>
+          <a:prstGeom prst="rect">
+            <a:avLst/>
+          </a:prstGeom>
+          <a:noFill/>
+        </p:spPr>
+        <p:txBody>
+          <a:bodyPr wrap="square">
+            <a:spAutoFit/>
+          </a:bodyPr>
+          <a:lstStyle/>
+          <a:p>
+            <a:pPr algn="l"/>
+            <a:r>
+              <a:rPr sz="1600" b="1" i="0">
+                <a:solidFill>
+                  <a:srgbClr val="C9A84C"/>
+                </a:solidFill>
+                <a:latin typeface="Barlow Condensed"/>
+              </a:rPr>
+              <a:t>$75K / 90 days</a:t>
+            </a:r>
+          </a:p>
+        </p:txBody>
+      </p:sp>
+      <p:sp>
+        <p:nvSpPr>
+          <p:cNvPr id="12" name="Rectangle 11"/>
           <p:cNvSpPr/>
           <p:nvPr/>
         </p:nvSpPr>
         <p:spPr>
           <a:xfrm>
-            <a:off x="640080" y="960120"/>
-            <a:ext cx="50800" cy="1444752"/>
+            <a:off x="365760" y="4352544"/>
+            <a:ext cx="11457432" cy="822960"/>
+          </a:xfrm>
+          <a:prstGeom prst="rect">
+            <a:avLst/>
+          </a:prstGeom>
+          <a:solidFill>
+            <a:srgbClr val="121A44"/>
+          </a:solidFill>
+          <a:ln>
+            <a:noFill/>
+          </a:ln>
+        </p:spPr>
+        <p:style>
+          <a:lnRef idx="1">
+            <a:schemeClr val="accent1"/>
+          </a:lnRef>
+          <a:fillRef idx="3">
+            <a:schemeClr val="accent1"/>
+          </a:fillRef>
+          <a:effectRef idx="2">
+            <a:schemeClr val="accent1"/>
+          </a:effectRef>
+          <a:fontRef idx="minor">
+            <a:schemeClr val="lt1"/>
+          </a:fontRef>
+        </p:style>
+        <p:txBody>
+          <a:bodyPr rtlCol="0" anchor="ctr"/>
+          <a:lstStyle/>
+          <a:p>
+            <a:pPr algn="ctr"/>
+          </a:p>
+        </p:txBody>
+      </p:sp>
+      <p:sp>
+        <p:nvSpPr>
+          <p:cNvPr id="13" name="TextBox 12"/>
+          <p:cNvSpPr txBox="1"/>
+          <p:nvPr/>
+        </p:nvSpPr>
+        <p:spPr>
+          <a:xfrm>
+            <a:off x="548640" y="4504944"/>
+            <a:ext cx="2194560" cy="304800"/>
+          </a:xfrm>
+          <a:prstGeom prst="rect">
+            <a:avLst/>
+          </a:prstGeom>
+          <a:noFill/>
+        </p:spPr>
+        <p:txBody>
+          <a:bodyPr wrap="square">
+            <a:spAutoFit/>
+          </a:bodyPr>
+          <a:lstStyle/>
+          <a:p>
+            <a:pPr algn="l"/>
+            <a:r>
+              <a:rPr sz="900" b="1" i="0">
+                <a:solidFill>
+                  <a:srgbClr val="99A5BB"/>
+                </a:solidFill>
+                <a:latin typeface="Barlow Condensed"/>
+              </a:rPr>
+              <a:t>COHORT</a:t>
+            </a:r>
+          </a:p>
+        </p:txBody>
+      </p:sp>
+      <p:sp>
+        <p:nvSpPr>
+          <p:cNvPr id="14" name="TextBox 13"/>
+          <p:cNvSpPr txBox="1"/>
+          <p:nvPr/>
+        </p:nvSpPr>
+        <p:spPr>
+          <a:xfrm>
+            <a:off x="2834640" y="4492244"/>
+            <a:ext cx="8869680" cy="304800"/>
+          </a:xfrm>
+          <a:prstGeom prst="rect">
+            <a:avLst/>
+          </a:prstGeom>
+          <a:noFill/>
+        </p:spPr>
+        <p:txBody>
+          <a:bodyPr wrap="square">
+            <a:spAutoFit/>
+          </a:bodyPr>
+          <a:lstStyle/>
+          <a:p>
+            <a:pPr algn="l"/>
+            <a:r>
+              <a:rPr sz="1600" b="0" i="0">
+                <a:solidFill>
+                  <a:srgbClr val="FFFFFF"/>
+                </a:solidFill>
+                <a:latin typeface="Barlow Condensed"/>
+              </a:rPr>
+              <a:t>12 startup to Fortune 500 organizations</a:t>
+            </a:r>
+          </a:p>
+        </p:txBody>
+      </p:sp>
+      <p:sp>
+        <p:nvSpPr>
+          <p:cNvPr id="15" name="Rectangle 14"/>
+          <p:cNvSpPr/>
+          <p:nvPr/>
+        </p:nvSpPr>
+        <p:spPr>
+          <a:xfrm>
+            <a:off x="365760" y="5239512"/>
+            <a:ext cx="11457432" cy="822960"/>
+          </a:xfrm>
+          <a:prstGeom prst="rect">
+            <a:avLst/>
+          </a:prstGeom>
+          <a:solidFill>
+            <a:srgbClr val="0E1640"/>
+          </a:solidFill>
+          <a:ln>
+            <a:noFill/>
+          </a:ln>
+        </p:spPr>
+        <p:style>
+          <a:lnRef idx="1">
+            <a:schemeClr val="accent1"/>
+          </a:lnRef>
+          <a:fillRef idx="3">
+            <a:schemeClr val="accent1"/>
+          </a:fillRef>
+          <a:effectRef idx="2">
+            <a:schemeClr val="accent1"/>
+          </a:effectRef>
+          <a:fontRef idx="minor">
+            <a:schemeClr val="lt1"/>
+          </a:fontRef>
+        </p:style>
+        <p:txBody>
+          <a:bodyPr rtlCol="0" anchor="ctr"/>
+          <a:lstStyle/>
+          <a:p>
+            <a:pPr algn="ctr"/>
+          </a:p>
+        </p:txBody>
+      </p:sp>
+      <p:sp>
+        <p:nvSpPr>
+          <p:cNvPr id="16" name="TextBox 15"/>
+          <p:cNvSpPr txBox="1"/>
+          <p:nvPr/>
+        </p:nvSpPr>
+        <p:spPr>
+          <a:xfrm>
+            <a:off x="548640" y="5391912"/>
+            <a:ext cx="2194560" cy="304800"/>
+          </a:xfrm>
+          <a:prstGeom prst="rect">
+            <a:avLst/>
+          </a:prstGeom>
+          <a:noFill/>
+        </p:spPr>
+        <p:txBody>
+          <a:bodyPr wrap="square">
+            <a:spAutoFit/>
+          </a:bodyPr>
+          <a:lstStyle/>
+          <a:p>
+            <a:pPr algn="l"/>
+            <a:r>
+              <a:rPr sz="900" b="1" i="0">
+                <a:solidFill>
+                  <a:srgbClr val="99A5BB"/>
+                </a:solidFill>
+                <a:latin typeface="Barlow Condensed"/>
+              </a:rPr>
+              <a:t>RAISE</a:t>
+            </a:r>
+          </a:p>
+        </p:txBody>
+      </p:sp>
+      <p:sp>
+        <p:nvSpPr>
+          <p:cNvPr id="17" name="TextBox 16"/>
+          <p:cNvSpPr txBox="1"/>
+          <p:nvPr/>
+        </p:nvSpPr>
+        <p:spPr>
+          <a:xfrm>
+            <a:off x="2834640" y="5379212"/>
+            <a:ext cx="8869680" cy="304800"/>
+          </a:xfrm>
+          <a:prstGeom prst="rect">
+            <a:avLst/>
+          </a:prstGeom>
+          <a:noFill/>
+        </p:spPr>
+        <p:txBody>
+          <a:bodyPr wrap="square">
+            <a:spAutoFit/>
+          </a:bodyPr>
+          <a:lstStyle/>
+          <a:p>
+            <a:pPr algn="l"/>
+            <a:r>
+              <a:rPr sz="1600" b="0" i="0">
+                <a:solidFill>
+                  <a:srgbClr val="99A5BB"/>
+                </a:solidFill>
+                <a:latin typeface="Barlow Condensed"/>
+              </a:rPr>
+              <a:t>Open strategic raise  ·  active conversations underway</a:t>
+            </a:r>
+          </a:p>
+        </p:txBody>
+      </p:sp>
+      <p:sp>
+        <p:nvSpPr>
+          <p:cNvPr id="18" name="TextBox 17"/>
+          <p:cNvSpPr txBox="1"/>
+          <p:nvPr/>
+        </p:nvSpPr>
+        <p:spPr>
+          <a:xfrm>
+            <a:off x="11247120" y="6537960"/>
+            <a:ext cx="914400" cy="203200"/>
+          </a:xfrm>
+          <a:prstGeom prst="rect">
+            <a:avLst/>
+          </a:prstGeom>
+          <a:noFill/>
+        </p:spPr>
+        <p:txBody>
+          <a:bodyPr wrap="square">
+            <a:spAutoFit/>
+          </a:bodyPr>
+          <a:lstStyle/>
+          <a:p>
+            <a:pPr algn="r"/>
+            <a:r>
+              <a:rPr sz="1000" b="1" i="0">
+                <a:solidFill>
+                  <a:srgbClr val="445070"/>
+                </a:solidFill>
+                <a:latin typeface="Barlow Condensed"/>
+              </a:rPr>
+              <a:t>11 / 12</a:t>
+            </a:r>
+          </a:p>
+        </p:txBody>
+      </p:sp>
+    </p:spTree>
+  </p:cSld>
+  <p:clrMapOvr>
+    <a:masterClrMapping/>
+  </p:clrMapOvr>
+</p:sld>
+</file>
+
+<file path=ppt/slides/slide12.xml><?xml version="1.0" encoding="utf-8"?>
+<p:sld xmlns:a="http://schemas.openxmlformats.org/drawingml/2006/main" xmlns:p="http://schemas.openxmlformats.org/presentationml/2006/main" xmlns:r="http://schemas.openxmlformats.org/officeDocument/2006/relationships">
+  <p:cSld>
+    <p:bg>
+      <p:bgPr>
+        <a:solidFill>
+          <a:srgbClr val="0A0F2E"/>
+        </a:solidFill>
+        <a:effectLst/>
+      </p:bgPr>
+    </p:bg>
+    <p:spTree>
+      <p:nvGrpSpPr>
+        <p:cNvPr id="1" name=""/>
+        <p:cNvGrpSpPr/>
+        <p:nvPr/>
+      </p:nvGrpSpPr>
+      <p:grpSpPr/>
+      <p:sp>
+        <p:nvSpPr>
+          <p:cNvPr id="2" name="Rectangle 1"/>
+          <p:cNvSpPr/>
+          <p:nvPr/>
+        </p:nvSpPr>
+        <p:spPr>
+          <a:xfrm>
+            <a:off x="0" y="0"/>
+            <a:ext cx="12188952" cy="63500"/>
           </a:xfrm>
           <a:prstGeom prst="rect">
             <a:avLst/>
@@ -4687,84 +4928,49 @@
       </p:sp>
       <p:sp>
         <p:nvSpPr>
-          <p:cNvPr id="7" name="TextBox 6"/>
-          <p:cNvSpPr txBox="1"/>
-          <p:nvPr/>
-        </p:nvSpPr>
-        <p:spPr>
-          <a:xfrm>
-            <a:off x="868680" y="1112520"/>
-            <a:ext cx="1097280" cy="330200"/>
-          </a:xfrm>
-          <a:prstGeom prst="rect">
-            <a:avLst/>
-          </a:prstGeom>
-          <a:noFill/>
-        </p:spPr>
-        <p:txBody>
-          <a:bodyPr wrap="square">
-            <a:spAutoFit/>
-          </a:bodyPr>
-          <a:lstStyle/>
-          <a:p>
-            <a:pPr algn="l"/>
+          <p:cNvPr id="3" name="TextBox 2"/>
+          <p:cNvSpPr txBox="1"/>
+          <p:nvPr/>
+        </p:nvSpPr>
+        <p:spPr>
+          <a:xfrm>
+            <a:off x="457200" y="411480"/>
+            <a:ext cx="10972800" cy="228600"/>
+          </a:xfrm>
+          <a:prstGeom prst="rect">
+            <a:avLst/>
+          </a:prstGeom>
+          <a:noFill/>
+        </p:spPr>
+        <p:txBody>
+          <a:bodyPr wrap="square">
+            <a:spAutoFit/>
+          </a:bodyPr>
+          <a:lstStyle/>
+          <a:p>
+            <a:pPr algn="ctr"/>
             <a:r>
               <a:rPr sz="900" b="1" i="0">
                 <a:solidFill>
-                  <a:srgbClr val="808AA0"/>
+                  <a:srgbClr val="C9A84C"/>
                 </a:solidFill>
                 <a:latin typeface="Barlow Condensed"/>
               </a:rPr>
-              <a:t>PROBLEM</a:t>
-            </a:r>
-          </a:p>
-        </p:txBody>
-      </p:sp>
-      <p:sp>
-        <p:nvSpPr>
-          <p:cNvPr id="8" name="TextBox 7"/>
-          <p:cNvSpPr txBox="1"/>
-          <p:nvPr/>
-        </p:nvSpPr>
-        <p:spPr>
-          <a:xfrm>
-            <a:off x="1965960" y="1087120"/>
-            <a:ext cx="9326880" cy="635000"/>
-          </a:xfrm>
-          <a:prstGeom prst="rect">
-            <a:avLst/>
-          </a:prstGeom>
-          <a:noFill/>
-        </p:spPr>
-        <p:txBody>
-          <a:bodyPr wrap="square">
-            <a:spAutoFit/>
-          </a:bodyPr>
-          <a:lstStyle/>
-          <a:p>
-            <a:pPr algn="l"/>
-            <a:r>
-              <a:rPr sz="1500" b="1" i="0">
-                <a:solidFill>
-                  <a:srgbClr val="FFFFFF"/>
-                </a:solidFill>
-                <a:latin typeface="Barlow"/>
-              </a:rPr>
-              <a:t>Enterprises detect more signals, but still mobilize too slowly.</a:t>
-            </a:r>
-          </a:p>
-        </p:txBody>
-      </p:sp>
-      <p:sp>
-        <p:nvSpPr>
-          <p:cNvPr id="9" name="Rectangle 8"/>
+              <a:t>THREE LINES. THAT'S THE PITCH.</a:t>
+            </a:r>
+          </a:p>
+        </p:txBody>
+      </p:sp>
+      <p:sp>
+        <p:nvSpPr>
+          <p:cNvPr id="4" name="Rectangle 3"/>
           <p:cNvSpPr/>
           <p:nvPr/>
         </p:nvSpPr>
         <p:spPr>
           <a:xfrm>
-            <a:off x="640080" y="2560320"/>
-            <a:ext cx="10881360" cy="1444752"/>
+            <a:off x="640080" y="1024128"/>
+            <a:ext cx="10908792" cy="1444752"/>
           </a:xfrm>
           <a:prstGeom prst="rect">
             <a:avLst/>
@@ -4800,13 +5006,13 @@
       </p:sp>
       <p:sp>
         <p:nvSpPr>
-          <p:cNvPr id="10" name="Rectangle 9"/>
+          <p:cNvPr id="5" name="Rectangle 4"/>
           <p:cNvSpPr/>
           <p:nvPr/>
         </p:nvSpPr>
         <p:spPr>
           <a:xfrm>
-            <a:off x="640080" y="2560320"/>
+            <a:off x="640080" y="1024128"/>
             <a:ext cx="50800" cy="1444752"/>
           </a:xfrm>
           <a:prstGeom prst="rect">
@@ -4843,14 +5049,14 @@
       </p:sp>
       <p:sp>
         <p:nvSpPr>
-          <p:cNvPr id="11" name="TextBox 10"/>
-          <p:cNvSpPr txBox="1"/>
-          <p:nvPr/>
-        </p:nvSpPr>
-        <p:spPr>
-          <a:xfrm>
-            <a:off x="868680" y="2712720"/>
-            <a:ext cx="1097280" cy="330200"/>
+          <p:cNvPr id="6" name="TextBox 5"/>
+          <p:cNvSpPr txBox="1"/>
+          <p:nvPr/>
+        </p:nvSpPr>
+        <p:spPr>
+          <a:xfrm>
+            <a:off x="822960" y="1201928"/>
+            <a:ext cx="1645920" cy="355600"/>
           </a:xfrm>
           <a:prstGeom prst="rect">
             <a:avLst/>
@@ -4867,25 +5073,25 @@
             <a:r>
               <a:rPr sz="900" b="1" i="0">
                 <a:solidFill>
-                  <a:srgbClr val="808AA0"/>
+                  <a:srgbClr val="99A5BB"/>
                 </a:solidFill>
                 <a:latin typeface="Barlow Condensed"/>
               </a:rPr>
-              <a:t>SOLUTION</a:t>
-            </a:r>
-          </a:p>
-        </p:txBody>
-      </p:sp>
-      <p:sp>
-        <p:nvSpPr>
-          <p:cNvPr id="12" name="TextBox 11"/>
-          <p:cNvSpPr txBox="1"/>
-          <p:nvPr/>
-        </p:nvSpPr>
-        <p:spPr>
-          <a:xfrm>
-            <a:off x="1965960" y="2687320"/>
-            <a:ext cx="9326880" cy="635000"/>
+              <a:t>PROBLEM</a:t>
+            </a:r>
+          </a:p>
+        </p:txBody>
+      </p:sp>
+      <p:sp>
+        <p:nvSpPr>
+          <p:cNvPr id="7" name="TextBox 6"/>
+          <p:cNvSpPr txBox="1"/>
+          <p:nvPr/>
+        </p:nvSpPr>
+        <p:spPr>
+          <a:xfrm>
+            <a:off x="822960" y="1463040"/>
+            <a:ext cx="10424160" cy="841248"/>
           </a:xfrm>
           <a:prstGeom prst="rect">
             <a:avLst/>
@@ -4900,27 +5106,27 @@
           <a:p>
             <a:pPr algn="l"/>
             <a:r>
-              <a:rPr sz="1500" b="1" i="0">
-                <a:solidFill>
-                  <a:srgbClr val="FFFFFF"/>
-                </a:solidFill>
-                <a:latin typeface="Barlow"/>
-              </a:rPr>
-              <a:t>Readiness OS pre-stages response so executives authorize in minutes.</a:t>
-            </a:r>
-          </a:p>
-        </p:txBody>
-      </p:sp>
-      <p:sp>
-        <p:nvSpPr>
-          <p:cNvPr id="13" name="Rectangle 12"/>
+              <a:rPr sz="1900" b="0" i="0">
+                <a:solidFill>
+                  <a:srgbClr val="C9A84C"/>
+                </a:solidFill>
+                <a:latin typeface="Barlow Condensed"/>
+              </a:rPr>
+              <a:t>Enterprises detect more signals, but still mobilize too slowly.</a:t>
+            </a:r>
+          </a:p>
+        </p:txBody>
+      </p:sp>
+      <p:sp>
+        <p:nvSpPr>
+          <p:cNvPr id="8" name="Rectangle 7"/>
           <p:cNvSpPr/>
           <p:nvPr/>
         </p:nvSpPr>
         <p:spPr>
           <a:xfrm>
-            <a:off x="640080" y="4160520"/>
-            <a:ext cx="10881360" cy="1444752"/>
+            <a:off x="640080" y="2624328"/>
+            <a:ext cx="10908792" cy="1444752"/>
           </a:xfrm>
           <a:prstGeom prst="rect">
             <a:avLst/>
@@ -4956,13 +5162,169 @@
       </p:sp>
       <p:sp>
         <p:nvSpPr>
-          <p:cNvPr id="14" name="Rectangle 13"/>
+          <p:cNvPr id="9" name="Rectangle 8"/>
           <p:cNvSpPr/>
           <p:nvPr/>
         </p:nvSpPr>
         <p:spPr>
           <a:xfrm>
-            <a:off x="640080" y="4160520"/>
+            <a:off x="640080" y="2624328"/>
+            <a:ext cx="50800" cy="1444752"/>
+          </a:xfrm>
+          <a:prstGeom prst="rect">
+            <a:avLst/>
+          </a:prstGeom>
+          <a:solidFill>
+            <a:srgbClr val="C9A84C"/>
+          </a:solidFill>
+          <a:ln>
+            <a:noFill/>
+          </a:ln>
+        </p:spPr>
+        <p:style>
+          <a:lnRef idx="1">
+            <a:schemeClr val="accent1"/>
+          </a:lnRef>
+          <a:fillRef idx="3">
+            <a:schemeClr val="accent1"/>
+          </a:fillRef>
+          <a:effectRef idx="2">
+            <a:schemeClr val="accent1"/>
+          </a:effectRef>
+          <a:fontRef idx="minor">
+            <a:schemeClr val="lt1"/>
+          </a:fontRef>
+        </p:style>
+        <p:txBody>
+          <a:bodyPr rtlCol="0" anchor="ctr"/>
+          <a:lstStyle/>
+          <a:p>
+            <a:pPr algn="ctr"/>
+          </a:p>
+        </p:txBody>
+      </p:sp>
+      <p:sp>
+        <p:nvSpPr>
+          <p:cNvPr id="10" name="TextBox 9"/>
+          <p:cNvSpPr txBox="1"/>
+          <p:nvPr/>
+        </p:nvSpPr>
+        <p:spPr>
+          <a:xfrm>
+            <a:off x="822960" y="2802128"/>
+            <a:ext cx="1645920" cy="355600"/>
+          </a:xfrm>
+          <a:prstGeom prst="rect">
+            <a:avLst/>
+          </a:prstGeom>
+          <a:noFill/>
+        </p:spPr>
+        <p:txBody>
+          <a:bodyPr wrap="square">
+            <a:spAutoFit/>
+          </a:bodyPr>
+          <a:lstStyle/>
+          <a:p>
+            <a:pPr algn="l"/>
+            <a:r>
+              <a:rPr sz="900" b="1" i="0">
+                <a:solidFill>
+                  <a:srgbClr val="99A5BB"/>
+                </a:solidFill>
+                <a:latin typeface="Barlow Condensed"/>
+              </a:rPr>
+              <a:t>SOLUTION</a:t>
+            </a:r>
+          </a:p>
+        </p:txBody>
+      </p:sp>
+      <p:sp>
+        <p:nvSpPr>
+          <p:cNvPr id="11" name="TextBox 10"/>
+          <p:cNvSpPr txBox="1"/>
+          <p:nvPr/>
+        </p:nvSpPr>
+        <p:spPr>
+          <a:xfrm>
+            <a:off x="822960" y="3063240"/>
+            <a:ext cx="10424160" cy="841248"/>
+          </a:xfrm>
+          <a:prstGeom prst="rect">
+            <a:avLst/>
+          </a:prstGeom>
+          <a:noFill/>
+        </p:spPr>
+        <p:txBody>
+          <a:bodyPr wrap="square">
+            <a:spAutoFit/>
+          </a:bodyPr>
+          <a:lstStyle/>
+          <a:p>
+            <a:pPr algn="l"/>
+            <a:r>
+              <a:rPr sz="1900" b="0" i="0">
+                <a:solidFill>
+                  <a:srgbClr val="C9A84C"/>
+                </a:solidFill>
+                <a:latin typeface="Barlow Condensed"/>
+              </a:rPr>
+              <a:t>VaughnMartin pre-stages response so executives authorize in minutes.</a:t>
+            </a:r>
+          </a:p>
+        </p:txBody>
+      </p:sp>
+      <p:sp>
+        <p:nvSpPr>
+          <p:cNvPr id="12" name="Rectangle 11"/>
+          <p:cNvSpPr/>
+          <p:nvPr/>
+        </p:nvSpPr>
+        <p:spPr>
+          <a:xfrm>
+            <a:off x="640080" y="4224528"/>
+            <a:ext cx="10908792" cy="1444752"/>
+          </a:xfrm>
+          <a:prstGeom prst="rect">
+            <a:avLst/>
+          </a:prstGeom>
+          <a:solidFill>
+            <a:srgbClr val="0E1640"/>
+          </a:solidFill>
+          <a:ln>
+            <a:noFill/>
+          </a:ln>
+        </p:spPr>
+        <p:style>
+          <a:lnRef idx="1">
+            <a:schemeClr val="accent1"/>
+          </a:lnRef>
+          <a:fillRef idx="3">
+            <a:schemeClr val="accent1"/>
+          </a:fillRef>
+          <a:effectRef idx="2">
+            <a:schemeClr val="accent1"/>
+          </a:effectRef>
+          <a:fontRef idx="minor">
+            <a:schemeClr val="lt1"/>
+          </a:fontRef>
+        </p:style>
+        <p:txBody>
+          <a:bodyPr rtlCol="0" anchor="ctr"/>
+          <a:lstStyle/>
+          <a:p>
+            <a:pPr algn="ctr"/>
+          </a:p>
+        </p:txBody>
+      </p:sp>
+      <p:sp>
+        <p:nvSpPr>
+          <p:cNvPr id="13" name="Rectangle 12"/>
+          <p:cNvSpPr/>
+          <p:nvPr/>
+        </p:nvSpPr>
+        <p:spPr>
+          <a:xfrm>
+            <a:off x="640080" y="4224528"/>
             <a:ext cx="50800" cy="1444752"/>
           </a:xfrm>
           <a:prstGeom prst="rect">
@@ -4999,14 +5361,49 @@
       </p:sp>
       <p:sp>
         <p:nvSpPr>
+          <p:cNvPr id="14" name="TextBox 13"/>
+          <p:cNvSpPr txBox="1"/>
+          <p:nvPr/>
+        </p:nvSpPr>
+        <p:spPr>
+          <a:xfrm>
+            <a:off x="822960" y="4402328"/>
+            <a:ext cx="1645920" cy="355600"/>
+          </a:xfrm>
+          <a:prstGeom prst="rect">
+            <a:avLst/>
+          </a:prstGeom>
+          <a:noFill/>
+        </p:spPr>
+        <p:txBody>
+          <a:bodyPr wrap="square">
+            <a:spAutoFit/>
+          </a:bodyPr>
+          <a:lstStyle/>
+          <a:p>
+            <a:pPr algn="l"/>
+            <a:r>
+              <a:rPr sz="900" b="1" i="0">
+                <a:solidFill>
+                  <a:srgbClr val="99A5BB"/>
+                </a:solidFill>
+                <a:latin typeface="Barlow Condensed"/>
+              </a:rPr>
+              <a:t>OUTCOME</a:t>
+            </a:r>
+          </a:p>
+        </p:txBody>
+      </p:sp>
+      <p:sp>
+        <p:nvSpPr>
           <p:cNvPr id="15" name="TextBox 14"/>
           <p:cNvSpPr txBox="1"/>
           <p:nvPr/>
         </p:nvSpPr>
         <p:spPr>
           <a:xfrm>
-            <a:off x="868680" y="4312920"/>
-            <a:ext cx="1097280" cy="330200"/>
+            <a:off x="822960" y="4663440"/>
+            <a:ext cx="10424160" cy="841248"/>
           </a:xfrm>
           <a:prstGeom prst="rect">
             <a:avLst/>
@@ -5021,47 +5418,12 @@
           <a:p>
             <a:pPr algn="l"/>
             <a:r>
-              <a:rPr sz="900" b="1" i="0">
-                <a:solidFill>
-                  <a:srgbClr val="808AA0"/>
+              <a:rPr sz="1900" b="0" i="0">
+                <a:solidFill>
+                  <a:srgbClr val="FFFFFF"/>
                 </a:solidFill>
                 <a:latin typeface="Barlow Condensed"/>
               </a:rPr>
-              <a:t>OUTCOME</a:t>
-            </a:r>
-          </a:p>
-        </p:txBody>
-      </p:sp>
-      <p:sp>
-        <p:nvSpPr>
-          <p:cNvPr id="16" name="TextBox 15"/>
-          <p:cNvSpPr txBox="1"/>
-          <p:nvPr/>
-        </p:nvSpPr>
-        <p:spPr>
-          <a:xfrm>
-            <a:off x="1965960" y="4287520"/>
-            <a:ext cx="9326880" cy="635000"/>
-          </a:xfrm>
-          <a:prstGeom prst="rect">
-            <a:avLst/>
-          </a:prstGeom>
-          <a:noFill/>
-        </p:spPr>
-        <p:txBody>
-          <a:bodyPr wrap="square">
-            <a:spAutoFit/>
-          </a:bodyPr>
-          <a:lstStyle/>
-          <a:p>
-            <a:pPr algn="l"/>
-            <a:r>
-              <a:rPr sz="1500" b="1" i="0">
-                <a:solidFill>
-                  <a:srgbClr val="FFFFFF"/>
-                </a:solidFill>
-                <a:latin typeface="Barlow"/>
-              </a:rPr>
               <a:t>Earlier detection + faster execution protects value before the window closes.</a:t>
             </a:r>
           </a:p>
@@ -5069,35 +5431,80 @@
       </p:sp>
       <p:sp>
         <p:nvSpPr>
+          <p:cNvPr id="16" name="Rectangle 15"/>
+          <p:cNvSpPr/>
+          <p:nvPr/>
+        </p:nvSpPr>
+        <p:spPr>
+          <a:xfrm>
+            <a:off x="1645920" y="5806440"/>
+            <a:ext cx="8897112" cy="621792"/>
+          </a:xfrm>
+          <a:prstGeom prst="rect">
+            <a:avLst/>
+          </a:prstGeom>
+          <a:solidFill>
+            <a:srgbClr val="0A0F2E"/>
+          </a:solidFill>
+          <a:ln w="12700">
+            <a:solidFill>
+              <a:srgbClr val="C9A84C"/>
+            </a:solidFill>
+          </a:ln>
+        </p:spPr>
+        <p:style>
+          <a:lnRef idx="1">
+            <a:schemeClr val="accent1"/>
+          </a:lnRef>
+          <a:fillRef idx="3">
+            <a:schemeClr val="accent1"/>
+          </a:fillRef>
+          <a:effectRef idx="2">
+            <a:schemeClr val="accent1"/>
+          </a:effectRef>
+          <a:fontRef idx="minor">
+            <a:schemeClr val="lt1"/>
+          </a:fontRef>
+        </p:style>
+        <p:txBody>
+          <a:bodyPr rtlCol="0" anchor="ctr"/>
+          <a:lstStyle/>
+          <a:p>
+            <a:pPr algn="ctr"/>
+          </a:p>
+        </p:txBody>
+      </p:sp>
+      <p:sp>
+        <p:nvSpPr>
           <p:cNvPr id="17" name="TextBox 16"/>
           <p:cNvSpPr txBox="1"/>
           <p:nvPr/>
         </p:nvSpPr>
         <p:spPr>
           <a:xfrm>
-            <a:off x="1371600" y="5715000"/>
-            <a:ext cx="9418320" cy="457200"/>
-          </a:xfrm>
-          <a:prstGeom prst="rect">
-            <a:avLst/>
-          </a:prstGeom>
-          <a:noFill/>
-        </p:spPr>
-        <p:txBody>
-          <a:bodyPr wrap="square">
-            <a:spAutoFit/>
-          </a:bodyPr>
-          <a:lstStyle/>
-          <a:p>
-            <a:pPr algn="ctr"/>
-            <a:r>
-              <a:rPr sz="1400" b="1" i="0">
+            <a:off x="1737360" y="5888736"/>
+            <a:ext cx="8714232" cy="475488"/>
+          </a:xfrm>
+          <a:prstGeom prst="rect">
+            <a:avLst/>
+          </a:prstGeom>
+          <a:noFill/>
+        </p:spPr>
+        <p:txBody>
+          <a:bodyPr wrap="square">
+            <a:spAutoFit/>
+          </a:bodyPr>
+          <a:lstStyle/>
+          <a:p>
+            <a:pPr algn="ctr"/>
+            <a:r>
+              <a:rPr sz="1300" b="1" i="0">
                 <a:solidFill>
                   <a:srgbClr val="C9A84C"/>
                 </a:solidFill>
                 <a:latin typeface="Barlow Condensed"/>
               </a:rPr>
-              <a:t>vaughnmartin.com/founding-partner-program</a:t>
+              <a:t>Apply for Founding Partner Access  ·  vaughnmartin.com/founding-partner-program</a:t>
             </a:r>
           </a:p>
         </p:txBody>
@@ -5105,41 +5512,6 @@
       <p:sp>
         <p:nvSpPr>
           <p:cNvPr id="18" name="TextBox 17"/>
-          <p:cNvSpPr txBox="1"/>
-          <p:nvPr/>
-        </p:nvSpPr>
-        <p:spPr>
-          <a:xfrm>
-            <a:off x="1371600" y="6199632"/>
-            <a:ext cx="9418320" cy="254000"/>
-          </a:xfrm>
-          <a:prstGeom prst="rect">
-            <a:avLst/>
-          </a:prstGeom>
-          <a:noFill/>
-        </p:spPr>
-        <p:txBody>
-          <a:bodyPr wrap="square">
-            <a:spAutoFit/>
-          </a:bodyPr>
-          <a:lstStyle/>
-          <a:p>
-            <a:pPr algn="ctr"/>
-            <a:r>
-              <a:rPr sz="1000" b="1" i="0">
-                <a:solidFill>
-                  <a:srgbClr val="445070"/>
-                </a:solidFill>
-                <a:latin typeface="Barlow Condensed"/>
-              </a:rPr>
-              <a:t>VaughnMartin · Readiness OS · The response is ready before the trigger fires</a:t>
-            </a:r>
-          </a:p>
-        </p:txBody>
-      </p:sp>
-      <p:sp>
-        <p:nvSpPr>
-          <p:cNvPr id="19" name="TextBox 18"/>
           <p:cNvSpPr txBox="1"/>
           <p:nvPr/>
         </p:nvSpPr>
@@ -5167,7 +5539,7 @@
                 </a:solidFill>
                 <a:latin typeface="Barlow Condensed"/>
               </a:rPr>
-              <a:t>11 / 11</a:t>
+              <a:t>12 / 12</a:t>
             </a:r>
           </a:p>
         </p:txBody>
@@ -5398,7 +5770,7 @@
         <p:spPr>
           <a:xfrm>
             <a:off x="457200" y="3410712"/>
-            <a:ext cx="3657600" cy="822960"/>
+            <a:ext cx="3657600" cy="548640"/>
           </a:xfrm>
           <a:prstGeom prst="rect">
             <a:avLst/>
@@ -5413,14 +5785,13 @@
           <a:p>
             <a:pPr algn="l"/>
             <a:r>
-              <a:rPr sz="1500" b="0" i="1">
+              <a:rPr sz="1400" b="0" i="1">
                 <a:solidFill>
                   <a:srgbClr val="99A5BB"/>
                 </a:solidFill>
-                <a:latin typeface="Barlow"/>
-              </a:rPr>
-              <a:t>Average mobilization time before
-any execution begins.</a:t>
+                <a:latin typeface="Barlow Condensed"/>
+              </a:rPr>
+              <a:t>Mobilization time before any execution begins.</a:t>
             </a:r>
           </a:p>
         </p:txBody>
@@ -5433,7 +5804,7 @@
         </p:nvSpPr>
         <p:spPr>
           <a:xfrm>
-            <a:off x="457200" y="4297680"/>
+            <a:off x="457200" y="4160520"/>
             <a:ext cx="3749039" cy="822960"/>
           </a:xfrm>
           <a:prstGeom prst="rect">
@@ -5449,14 +5820,14 @@
           <a:p>
             <a:pPr algn="l"/>
             <a:r>
-              <a:rPr sz="1400" b="0" i="0">
+              <a:rPr sz="1300" b="0" i="0">
                 <a:solidFill>
                   <a:srgbClr val="CCD2E0"/>
                 </a:solidFill>
-                <a:latin typeface="Barlow"/>
-              </a:rPr>
-              <a:t>That's not execution time.
-That's just figuring out who's in the room.</a:t>
+                <a:latin typeface="Barlow Condensed"/>
+              </a:rPr>
+              <a:t>Coordination starts from zero at every trigger.
+The window closes before execution begins.</a:t>
             </a:r>
           </a:p>
         </p:txBody>
@@ -5571,8 +5942,8 @@
         </p:nvSpPr>
         <p:spPr>
           <a:xfrm>
-            <a:off x="4572000" y="5943600"/>
-            <a:ext cx="7223760" cy="320040"/>
+            <a:off x="4572000" y="5971032"/>
+            <a:ext cx="7223760" cy="292608"/>
           </a:xfrm>
           <a:prstGeom prst="rect">
             <a:avLst/>
@@ -5614,8 +5985,8 @@
         </p:nvSpPr>
         <p:spPr>
           <a:xfrm>
-            <a:off x="4681728" y="6019800"/>
-            <a:ext cx="7004304" cy="320040"/>
+            <a:off x="4663440" y="6034532"/>
+            <a:ext cx="7040880" cy="292608"/>
           </a:xfrm>
           <a:prstGeom prst="rect">
             <a:avLst/>
@@ -5636,7 +6007,7 @@
                 </a:solidFill>
                 <a:latin typeface="Barlow Condensed"/>
               </a:rPr>
-              <a:t>LIVE SIMULATION · M&amp;A TRIGGER · RISK 88/100 — HIGH · NO RESPONSE PRE-STAGED</a:t>
+              <a:t>Live simulation · M&amp;A trigger · Risk 88/100 — HIGH · No response pre-staged</a:t>
             </a:r>
           </a:p>
         </p:txBody>
@@ -5671,7 +6042,7 @@
                 </a:solidFill>
                 <a:latin typeface="Barlow Condensed"/>
               </a:rPr>
-              <a:t>02 / 11</a:t>
+              <a:t>02 / 12</a:t>
             </a:r>
           </a:p>
         </p:txBody>
@@ -5804,7 +6175,7 @@
           <a:p>
             <a:pPr algn="ctr"/>
             <a:r>
-              <a:rPr sz="2800" b="1">
+              <a:rPr sz="2600" b="1">
                 <a:solidFill>
                   <a:srgbClr val="FFFFFF"/>
                 </a:solidFill>
@@ -5954,7 +6325,7 @@
           <a:p>
             <a:pPr algn="l"/>
             <a:r>
-              <a:rPr sz="2100" b="1">
+              <a:rPr sz="2000" b="1">
                 <a:solidFill>
                   <a:srgbClr val="FFFFFF"/>
                 </a:solidFill>
@@ -6080,7 +6451,7 @@
                 <a:solidFill>
                   <a:srgbClr val="2B8A6E"/>
                 </a:solidFill>
-                <a:latin typeface="Barlow"/>
+                <a:latin typeface="Barlow Condensed"/>
               </a:rPr>
               <a:t>● Signal Detected · 248 data points</a:t>
             </a:r>
@@ -6226,7 +6597,7 @@
           <a:p>
             <a:pPr algn="l"/>
             <a:r>
-              <a:rPr sz="2100" b="1">
+              <a:rPr sz="2000" b="1">
                 <a:solidFill>
                   <a:srgbClr val="FFFFFF"/>
                 </a:solidFill>
@@ -6352,7 +6723,7 @@
                 <a:solidFill>
                   <a:srgbClr val="2B8A6E"/>
                 </a:solidFill>
-                <a:latin typeface="Barlow"/>
+                <a:latin typeface="Barlow Condensed"/>
               </a:rPr>
               <a:t>● Signal Detected · Live Monitoring</a:t>
             </a:r>
@@ -6498,7 +6869,7 @@
           <a:p>
             <a:pPr algn="l"/>
             <a:r>
-              <a:rPr sz="2100" b="1">
+              <a:rPr sz="2000" b="1">
                 <a:solidFill>
                   <a:srgbClr val="FFFFFF"/>
                 </a:solidFill>
@@ -6624,7 +6995,7 @@
                 <a:solidFill>
                   <a:srgbClr val="2B8A6E"/>
                 </a:solidFill>
-                <a:latin typeface="Barlow"/>
+                <a:latin typeface="Barlow Condensed"/>
               </a:rPr>
               <a:t>● Signal Detected · Threshold Forming</a:t>
             </a:r>
@@ -6706,8 +7077,8 @@
         </p:nvSpPr>
         <p:spPr>
           <a:xfrm>
-            <a:off x="365760" y="6217920"/>
-            <a:ext cx="11457432" cy="320040"/>
+            <a:off x="365760" y="6245352"/>
+            <a:ext cx="11457432" cy="292608"/>
           </a:xfrm>
           <a:prstGeom prst="rect">
             <a:avLst/>
@@ -6749,8 +7120,8 @@
         </p:nvSpPr>
         <p:spPr>
           <a:xfrm>
-            <a:off x="475488" y="6294120"/>
-            <a:ext cx="11237976" cy="320040"/>
+            <a:off x="457200" y="6308852"/>
+            <a:ext cx="11274552" cy="292608"/>
           </a:xfrm>
           <a:prstGeom prst="rect">
             <a:avLst/>
@@ -6771,7 +7142,7 @@
                 </a:solidFill>
                 <a:latin typeface="Barlow Condensed"/>
               </a:rPr>
-              <a:t>SIGNAL INTELLIGENCE FEED · VAUGHNMARTIN.COM · LIVE DETECTIONS · PRODUCTION</a:t>
+              <a:t>Signal Intelligence feed · vaughnmartin.com · Live detections · production</a:t>
             </a:r>
           </a:p>
         </p:txBody>
@@ -6806,7 +7177,7 @@
                 </a:solidFill>
                 <a:latin typeface="Barlow Condensed"/>
               </a:rPr>
-              <a:t>03 / 11</a:t>
+              <a:t>03 / 12</a:t>
             </a:r>
           </a:p>
         </p:txBody>
@@ -6931,7 +7302,7 @@
         </p:nvSpPr>
         <p:spPr>
           <a:xfrm>
-            <a:off x="914400" y="777240"/>
+            <a:off x="914400" y="749808"/>
             <a:ext cx="10332720" cy="1097280"/>
           </a:xfrm>
           <a:prstGeom prst="rect">
@@ -6966,7 +7337,7 @@
         </p:nvSpPr>
         <p:spPr>
           <a:xfrm>
-            <a:off x="914400" y="1783080"/>
+            <a:off x="914400" y="1755648"/>
             <a:ext cx="10332720" cy="1097280"/>
           </a:xfrm>
           <a:prstGeom prst="rect">
@@ -7001,7 +7372,7 @@
         </p:nvSpPr>
         <p:spPr>
           <a:xfrm>
-            <a:off x="914400" y="2834640"/>
+            <a:off x="914400" y="2816352"/>
             <a:ext cx="10332720" cy="355600"/>
           </a:xfrm>
           <a:prstGeom prst="rect">
@@ -7017,11 +7388,11 @@
           <a:p>
             <a:pPr algn="ctr"/>
             <a:r>
-              <a:rPr sz="1600" b="0" i="0">
+              <a:rPr sz="1500" b="0" i="1">
                 <a:solidFill>
                   <a:srgbClr val="99A5BB"/>
                 </a:solidFill>
-                <a:latin typeface="Barlow"/>
+                <a:latin typeface="Barlow Condensed"/>
               </a:rPr>
               <a:t>Preparation  →  Readiness  →  Fearless</a:t>
             </a:r>
@@ -7095,7 +7466,7 @@
           <a:p>
             <a:pPr algn="ctr"/>
             <a:r>
-              <a:rPr sz="6000" b="1" i="0">
+              <a:rPr sz="5800" b="1" i="0">
                 <a:solidFill>
                   <a:srgbClr val="C9A84C"/>
                 </a:solidFill>
@@ -7134,7 +7505,7 @@
                 <a:solidFill>
                   <a:srgbClr val="FFFFFF"/>
                 </a:solidFill>
-                <a:latin typeface="Barlow"/>
+                <a:latin typeface="Barlow Condensed"/>
               </a:rPr>
               <a:t>Readiness Protocols</a:t>
             </a:r>
@@ -7208,7 +7579,7 @@
           <a:p>
             <a:pPr algn="ctr"/>
             <a:r>
-              <a:rPr sz="6000" b="1" i="0">
+              <a:rPr sz="5800" b="1" i="0">
                 <a:solidFill>
                   <a:srgbClr val="C9A84C"/>
                 </a:solidFill>
@@ -7247,7 +7618,7 @@
                 <a:solidFill>
                   <a:srgbClr val="FFFFFF"/>
                 </a:solidFill>
-                <a:latin typeface="Barlow"/>
+                <a:latin typeface="Barlow Condensed"/>
               </a:rPr>
               <a:t>Strategic Triggers</a:t>
             </a:r>
@@ -7321,7 +7692,7 @@
           <a:p>
             <a:pPr algn="ctr"/>
             <a:r>
-              <a:rPr sz="4400" b="1" i="0">
+              <a:rPr sz="4200" b="1" i="0">
                 <a:solidFill>
                   <a:srgbClr val="C9A84C"/>
                 </a:solidFill>
@@ -7360,7 +7731,7 @@
                 <a:solidFill>
                   <a:srgbClr val="FFFFFF"/>
                 </a:solidFill>
-                <a:latin typeface="Barlow"/>
+                <a:latin typeface="Barlow Condensed"/>
               </a:rPr>
               <a:t>Full Execution Cycle</a:t>
             </a:r>
@@ -7383,7 +7754,7 @@
         </p:blipFill>
         <p:spPr>
           <a:xfrm>
-            <a:off x="2743200" y="5120640"/>
+            <a:off x="2743200" y="5102352"/>
             <a:ext cx="6702552" cy="1417320"/>
           </a:xfrm>
           <a:prstGeom prst="rect">
@@ -7399,7 +7770,7 @@
         </p:nvSpPr>
         <p:spPr>
           <a:xfrm>
-            <a:off x="2743200" y="5120640"/>
+            <a:off x="2743200" y="5102352"/>
             <a:ext cx="6702552" cy="1417320"/>
           </a:xfrm>
           <a:prstGeom prst="rect">
@@ -7442,8 +7813,8 @@
         </p:nvSpPr>
         <p:spPr>
           <a:xfrm>
-            <a:off x="2743200" y="6217920"/>
-            <a:ext cx="6702552" cy="320040"/>
+            <a:off x="2743200" y="6227064"/>
+            <a:ext cx="6702552" cy="292608"/>
           </a:xfrm>
           <a:prstGeom prst="rect">
             <a:avLst/>
@@ -7485,8 +7856,8 @@
         </p:nvSpPr>
         <p:spPr>
           <a:xfrm>
-            <a:off x="2852928" y="6294120"/>
-            <a:ext cx="6483096" cy="320040"/>
+            <a:off x="2834640" y="6290564"/>
+            <a:ext cx="6519672" cy="292608"/>
           </a:xfrm>
           <a:prstGeom prst="rect">
             <a:avLst/>
@@ -7507,7 +7878,7 @@
                 </a:solidFill>
                 <a:latin typeface="Barlow Condensed"/>
               </a:rPr>
-              <a:t>VAUGHNMARTIN.COM/HOW-IT-EXECUTES · LIVE ANIMATED EXECUTION CHAIN</a:t>
+              <a:t>vaughnmartin.com/how-it-executes · Live animated 12-minute execution chain</a:t>
             </a:r>
           </a:p>
         </p:txBody>
@@ -7542,7 +7913,7 @@
                 </a:solidFill>
                 <a:latin typeface="Barlow Condensed"/>
               </a:rPr>
-              <a:t>04 / 11</a:t>
+              <a:t>04 / 12</a:t>
             </a:r>
           </a:p>
         </p:txBody>
@@ -7689,7 +8060,7 @@
                 </a:solidFill>
                 <a:latin typeface="Barlow Condensed"/>
               </a:rPr>
-              <a:t>Every Other Vendor</a:t>
+              <a:t>Old Model</a:t>
             </a:r>
           </a:p>
         </p:txBody>
@@ -7703,7 +8074,7 @@
         <p:spPr>
           <a:xfrm>
             <a:off x="411480" y="868680"/>
-            <a:ext cx="5212080" cy="914400"/>
+            <a:ext cx="5212080" cy="868680"/>
           </a:xfrm>
           <a:prstGeom prst="rect">
             <a:avLst/>
@@ -7718,7 +8089,7 @@
           <a:p>
             <a:pPr algn="l"/>
             <a:r>
-              <a:rPr sz="2200" b="1">
+              <a:rPr sz="2100" b="1">
                 <a:solidFill>
                   <a:srgbClr val="99A5BB"/>
                 </a:solidFill>
@@ -7737,7 +8108,7 @@
         </p:nvSpPr>
         <p:spPr>
           <a:xfrm>
-            <a:off x="411480" y="1920240"/>
+            <a:off x="411480" y="1874519"/>
             <a:ext cx="411480" cy="355600"/>
           </a:xfrm>
           <a:prstGeom prst="rect">
@@ -7757,7 +8128,7 @@
                 <a:solidFill>
                   <a:srgbClr val="FF5050"/>
                 </a:solidFill>
-                <a:latin typeface="Barlow"/>
+                <a:latin typeface="Barlow Condensed"/>
               </a:rPr>
               <a:t>✕</a:t>
             </a:r>
@@ -7772,7 +8143,7 @@
         </p:nvSpPr>
         <p:spPr>
           <a:xfrm>
-            <a:off x="868680" y="1920240"/>
+            <a:off x="868680" y="1874519"/>
             <a:ext cx="4663440" cy="355600"/>
           </a:xfrm>
           <a:prstGeom prst="rect">
@@ -7788,13 +8159,13 @@
           <a:p>
             <a:pPr algn="l"/>
             <a:r>
-              <a:rPr sz="1400" b="0" i="0">
+              <a:rPr sz="1500" b="0" i="0">
                 <a:solidFill>
                   <a:srgbClr val="99A5BB"/>
                 </a:solidFill>
-                <a:latin typeface="Barlow"/>
-              </a:rPr>
-              <a:t>Faster summaries from the same slow meeting</a:t>
+                <a:latin typeface="Barlow Condensed"/>
+              </a:rPr>
+              <a:t>Faster notes from the same slow meetings</a:t>
             </a:r>
           </a:p>
         </p:txBody>
@@ -7807,7 +8178,7 @@
         </p:nvSpPr>
         <p:spPr>
           <a:xfrm>
-            <a:off x="411480" y="2788920"/>
+            <a:off x="411480" y="2880359"/>
             <a:ext cx="411480" cy="355600"/>
           </a:xfrm>
           <a:prstGeom prst="rect">
@@ -7827,7 +8198,7 @@
                 <a:solidFill>
                   <a:srgbClr val="FF5050"/>
                 </a:solidFill>
-                <a:latin typeface="Barlow"/>
+                <a:latin typeface="Barlow Condensed"/>
               </a:rPr>
               <a:t>✕</a:t>
             </a:r>
@@ -7842,7 +8213,7 @@
         </p:nvSpPr>
         <p:spPr>
           <a:xfrm>
-            <a:off x="868680" y="2788920"/>
+            <a:off x="868680" y="2880359"/>
             <a:ext cx="4663440" cy="355600"/>
           </a:xfrm>
           <a:prstGeom prst="rect">
@@ -7858,13 +8229,13 @@
           <a:p>
             <a:pPr algn="l"/>
             <a:r>
-              <a:rPr sz="1400" b="0" i="0">
+              <a:rPr sz="1500" b="0" i="0">
                 <a:solidFill>
                   <a:srgbClr val="99A5BB"/>
                 </a:solidFill>
-                <a:latin typeface="Barlow"/>
-              </a:rPr>
-              <a:t>Smarter notes. Same 30-day mobilization cycle.</a:t>
+                <a:latin typeface="Barlow Condensed"/>
+              </a:rPr>
+              <a:t>No readiness architecture before triggers fire</a:t>
             </a:r>
           </a:p>
         </p:txBody>
@@ -7877,7 +8248,7 @@
         </p:nvSpPr>
         <p:spPr>
           <a:xfrm>
-            <a:off x="411480" y="3657600"/>
+            <a:off x="411480" y="3886199"/>
             <a:ext cx="411480" cy="355600"/>
           </a:xfrm>
           <a:prstGeom prst="rect">
@@ -7897,7 +8268,7 @@
                 <a:solidFill>
                   <a:srgbClr val="FF5050"/>
                 </a:solidFill>
-                <a:latin typeface="Barlow"/>
+                <a:latin typeface="Barlow Condensed"/>
               </a:rPr>
               <a:t>✕</a:t>
             </a:r>
@@ -7912,7 +8283,7 @@
         </p:nvSpPr>
         <p:spPr>
           <a:xfrm>
-            <a:off x="868680" y="3657600"/>
+            <a:off x="868680" y="3886199"/>
             <a:ext cx="4663440" cy="355600"/>
           </a:xfrm>
           <a:prstGeom prst="rect">
@@ -7928,13 +8299,13 @@
           <a:p>
             <a:pPr algn="l"/>
             <a:r>
-              <a:rPr sz="1400" b="0" i="0">
+              <a:rPr sz="1500" b="0" i="0">
                 <a:solidFill>
                   <a:srgbClr val="99A5BB"/>
                 </a:solidFill>
-                <a:latin typeface="Barlow"/>
-              </a:rPr>
-              <a:t>AI tools. No operating model change.</a:t>
+                <a:latin typeface="Barlow Condensed"/>
+              </a:rPr>
+              <a:t>Authority unclear when pressure arrives</a:t>
             </a:r>
           </a:p>
         </p:txBody>
@@ -7942,76 +8313,6 @@
       <p:sp>
         <p:nvSpPr>
           <p:cNvPr id="12" name="TextBox 11"/>
-          <p:cNvSpPr txBox="1"/>
-          <p:nvPr/>
-        </p:nvSpPr>
-        <p:spPr>
-          <a:xfrm>
-            <a:off x="411480" y="4526280"/>
-            <a:ext cx="411480" cy="355600"/>
-          </a:xfrm>
-          <a:prstGeom prst="rect">
-            <a:avLst/>
-          </a:prstGeom>
-          <a:noFill/>
-        </p:spPr>
-        <p:txBody>
-          <a:bodyPr wrap="square">
-            <a:spAutoFit/>
-          </a:bodyPr>
-          <a:lstStyle/>
-          <a:p>
-            <a:pPr algn="l"/>
-            <a:r>
-              <a:rPr sz="1600" b="1" i="0">
-                <a:solidFill>
-                  <a:srgbClr val="FF5050"/>
-                </a:solidFill>
-                <a:latin typeface="Barlow"/>
-              </a:rPr>
-              <a:t>✕</a:t>
-            </a:r>
-          </a:p>
-        </p:txBody>
-      </p:sp>
-      <p:sp>
-        <p:nvSpPr>
-          <p:cNvPr id="13" name="TextBox 12"/>
-          <p:cNvSpPr txBox="1"/>
-          <p:nvPr/>
-        </p:nvSpPr>
-        <p:spPr>
-          <a:xfrm>
-            <a:off x="868680" y="4526280"/>
-            <a:ext cx="4663440" cy="355600"/>
-          </a:xfrm>
-          <a:prstGeom prst="rect">
-            <a:avLst/>
-          </a:prstGeom>
-          <a:noFill/>
-        </p:spPr>
-        <p:txBody>
-          <a:bodyPr wrap="square">
-            <a:spAutoFit/>
-          </a:bodyPr>
-          <a:lstStyle/>
-          <a:p>
-            <a:pPr algn="l"/>
-            <a:r>
-              <a:rPr sz="1400" b="0" i="0">
-                <a:solidFill>
-                  <a:srgbClr val="99A5BB"/>
-                </a:solidFill>
-                <a:latin typeface="Barlow"/>
-              </a:rPr>
-              <a:t>Competes with Copilot. We don't.</a:t>
-            </a:r>
-          </a:p>
-        </p:txBody>
-      </p:sp>
-      <p:sp>
-        <p:nvSpPr>
-          <p:cNvPr id="14" name="TextBox 13"/>
           <p:cNvSpPr txBox="1"/>
           <p:nvPr/>
         </p:nvSpPr>
@@ -8046,14 +8347,84 @@
       </p:sp>
       <p:sp>
         <p:nvSpPr>
+          <p:cNvPr id="13" name="TextBox 12"/>
+          <p:cNvSpPr txBox="1"/>
+          <p:nvPr/>
+        </p:nvSpPr>
+        <p:spPr>
+          <a:xfrm>
+            <a:off x="5943600" y="868680"/>
+            <a:ext cx="5852160" cy="868680"/>
+          </a:xfrm>
+          <a:prstGeom prst="rect">
+            <a:avLst/>
+          </a:prstGeom>
+          <a:noFill/>
+        </p:spPr>
+        <p:txBody>
+          <a:bodyPr wrap="square">
+            <a:spAutoFit/>
+          </a:bodyPr>
+          <a:lstStyle/>
+          <a:p>
+            <a:pPr algn="l"/>
+            <a:r>
+              <a:rPr sz="1900" b="1">
+                <a:solidFill>
+                  <a:srgbClr val="FFFFFF"/>
+                </a:solidFill>
+                <a:latin typeface="Cormorant Garamond"/>
+              </a:rPr>
+              <a:t>"Rebuilt the operating model from first principles"</a:t>
+            </a:r>
+          </a:p>
+        </p:txBody>
+      </p:sp>
+      <p:sp>
+        <p:nvSpPr>
+          <p:cNvPr id="14" name="TextBox 13"/>
+          <p:cNvSpPr txBox="1"/>
+          <p:nvPr/>
+        </p:nvSpPr>
+        <p:spPr>
+          <a:xfrm>
+            <a:off x="5943600" y="1874519"/>
+            <a:ext cx="411480" cy="355600"/>
+          </a:xfrm>
+          <a:prstGeom prst="rect">
+            <a:avLst/>
+          </a:prstGeom>
+          <a:noFill/>
+        </p:spPr>
+        <p:txBody>
+          <a:bodyPr wrap="square">
+            <a:spAutoFit/>
+          </a:bodyPr>
+          <a:lstStyle/>
+          <a:p>
+            <a:pPr algn="l"/>
+            <a:r>
+              <a:rPr sz="1600" b="1" i="0">
+                <a:solidFill>
+                  <a:srgbClr val="2B8A6E"/>
+                </a:solidFill>
+                <a:latin typeface="Barlow Condensed"/>
+              </a:rPr>
+              <a:t>✓</a:t>
+            </a:r>
+          </a:p>
+        </p:txBody>
+      </p:sp>
+      <p:sp>
+        <p:nvSpPr>
           <p:cNvPr id="15" name="TextBox 14"/>
           <p:cNvSpPr txBox="1"/>
           <p:nvPr/>
         </p:nvSpPr>
         <p:spPr>
           <a:xfrm>
-            <a:off x="5943600" y="868680"/>
-            <a:ext cx="5852160" cy="1005840"/>
+            <a:off x="6400800" y="1874519"/>
+            <a:ext cx="5394960" cy="355600"/>
           </a:xfrm>
           <a:prstGeom prst="rect">
             <a:avLst/>
@@ -8068,13 +8439,13 @@
           <a:p>
             <a:pPr algn="l"/>
             <a:r>
-              <a:rPr sz="2000" b="1">
+              <a:rPr sz="1500" b="0" i="0">
                 <a:solidFill>
                   <a:srgbClr val="FFFFFF"/>
                 </a:solidFill>
-                <a:latin typeface="Cormorant Garamond"/>
-              </a:rPr>
-              <a:t>"Rebuilt the operating model from first principles"</a:t>
+                <a:latin typeface="Barlow Condensed"/>
+              </a:rPr>
+              <a:t>Response pre-staged before trigger fires</a:t>
             </a:r>
           </a:p>
         </p:txBody>
@@ -8087,7 +8458,7 @@
         </p:nvSpPr>
         <p:spPr>
           <a:xfrm>
-            <a:off x="5943600" y="1920240"/>
+            <a:off x="5943600" y="2880359"/>
             <a:ext cx="411480" cy="355600"/>
           </a:xfrm>
           <a:prstGeom prst="rect">
@@ -8107,7 +8478,7 @@
                 <a:solidFill>
                   <a:srgbClr val="2B8A6E"/>
                 </a:solidFill>
-                <a:latin typeface="Barlow"/>
+                <a:latin typeface="Barlow Condensed"/>
               </a:rPr>
               <a:t>✓</a:t>
             </a:r>
@@ -8122,7 +8493,7 @@
         </p:nvSpPr>
         <p:spPr>
           <a:xfrm>
-            <a:off x="6400800" y="1920240"/>
+            <a:off x="6400800" y="2880359"/>
             <a:ext cx="5394960" cy="355600"/>
           </a:xfrm>
           <a:prstGeom prst="rect">
@@ -8138,13 +8509,13 @@
           <a:p>
             <a:pPr algn="l"/>
             <a:r>
-              <a:rPr sz="1400" b="0" i="0">
+              <a:rPr sz="1500" b="0" i="0">
                 <a:solidFill>
                   <a:srgbClr val="FFFFFF"/>
                 </a:solidFill>
-                <a:latin typeface="Barlow"/>
-              </a:rPr>
-              <a:t>Pre-staged before any trigger fires</a:t>
+                <a:latin typeface="Barlow Condensed"/>
+              </a:rPr>
+              <a:t>AI monitors. Executives authorize. Teams execute.</a:t>
             </a:r>
           </a:p>
         </p:txBody>
@@ -8157,7 +8528,7 @@
         </p:nvSpPr>
         <p:spPr>
           <a:xfrm>
-            <a:off x="5943600" y="2788920"/>
+            <a:off x="5943600" y="3886199"/>
             <a:ext cx="411480" cy="355600"/>
           </a:xfrm>
           <a:prstGeom prst="rect">
@@ -8177,7 +8548,7 @@
                 <a:solidFill>
                   <a:srgbClr val="2B8A6E"/>
                 </a:solidFill>
-                <a:latin typeface="Barlow"/>
+                <a:latin typeface="Barlow Condensed"/>
               </a:rPr>
               <a:t>✓</a:t>
             </a:r>
@@ -8192,7 +8563,7 @@
         </p:nvSpPr>
         <p:spPr>
           <a:xfrm>
-            <a:off x="6400800" y="2788920"/>
+            <a:off x="6400800" y="3886199"/>
             <a:ext cx="5394960" cy="355600"/>
           </a:xfrm>
           <a:prstGeom prst="rect">
@@ -8208,203 +8579,20 @@
           <a:p>
             <a:pPr algn="l"/>
             <a:r>
-              <a:rPr sz="1400" b="0" i="0">
+              <a:rPr sz="1500" b="0" i="0">
                 <a:solidFill>
                   <a:srgbClr val="FFFFFF"/>
                 </a:solidFill>
-                <a:latin typeface="Barlow"/>
-              </a:rPr>
-              <a:t>Proprietary IDEA Framework — 3 years to build</a:t>
-            </a:r>
-          </a:p>
-        </p:txBody>
-      </p:sp>
-      <p:sp>
-        <p:nvSpPr>
-          <p:cNvPr id="20" name="TextBox 19"/>
-          <p:cNvSpPr txBox="1"/>
-          <p:nvPr/>
-        </p:nvSpPr>
-        <p:spPr>
-          <a:xfrm>
-            <a:off x="5943600" y="3657600"/>
-            <a:ext cx="411480" cy="355600"/>
-          </a:xfrm>
-          <a:prstGeom prst="rect">
-            <a:avLst/>
-          </a:prstGeom>
-          <a:noFill/>
-        </p:spPr>
-        <p:txBody>
-          <a:bodyPr wrap="square">
-            <a:spAutoFit/>
-          </a:bodyPr>
-          <a:lstStyle/>
-          <a:p>
-            <a:pPr algn="l"/>
-            <a:r>
-              <a:rPr sz="1600" b="1" i="0">
-                <a:solidFill>
-                  <a:srgbClr val="2B8A6E"/>
-                </a:solidFill>
-                <a:latin typeface="Barlow"/>
-              </a:rPr>
-              <a:t>✓</a:t>
-            </a:r>
-          </a:p>
-        </p:txBody>
-      </p:sp>
-      <p:sp>
-        <p:nvSpPr>
-          <p:cNvPr id="21" name="TextBox 20"/>
-          <p:cNvSpPr txBox="1"/>
-          <p:nvPr/>
-        </p:nvSpPr>
-        <p:spPr>
-          <a:xfrm>
-            <a:off x="6400800" y="3657600"/>
-            <a:ext cx="5394960" cy="355600"/>
-          </a:xfrm>
-          <a:prstGeom prst="rect">
-            <a:avLst/>
-          </a:prstGeom>
-          <a:noFill/>
-        </p:spPr>
-        <p:txBody>
-          <a:bodyPr wrap="square">
-            <a:spAutoFit/>
-          </a:bodyPr>
-          <a:lstStyle/>
-          <a:p>
-            <a:pPr algn="l"/>
-            <a:r>
-              <a:rPr sz="1400" b="0" i="0">
-                <a:solidFill>
-                  <a:srgbClr val="FFFFFF"/>
-                </a:solidFill>
-                <a:latin typeface="Barlow"/>
-              </a:rPr>
-              <a:t>Orchestrates the Microsoft stack — doesn't replace it</a:t>
-            </a:r>
-          </a:p>
-        </p:txBody>
-      </p:sp>
-      <p:sp>
-        <p:nvSpPr>
-          <p:cNvPr id="22" name="TextBox 21"/>
-          <p:cNvSpPr txBox="1"/>
-          <p:nvPr/>
-        </p:nvSpPr>
-        <p:spPr>
-          <a:xfrm>
-            <a:off x="5943600" y="4526280"/>
-            <a:ext cx="411480" cy="355600"/>
-          </a:xfrm>
-          <a:prstGeom prst="rect">
-            <a:avLst/>
-          </a:prstGeom>
-          <a:noFill/>
-        </p:spPr>
-        <p:txBody>
-          <a:bodyPr wrap="square">
-            <a:spAutoFit/>
-          </a:bodyPr>
-          <a:lstStyle/>
-          <a:p>
-            <a:pPr algn="l"/>
-            <a:r>
-              <a:rPr sz="1600" b="1" i="0">
-                <a:solidFill>
-                  <a:srgbClr val="2B8A6E"/>
-                </a:solidFill>
-                <a:latin typeface="Barlow"/>
-              </a:rPr>
-              <a:t>✓</a:t>
-            </a:r>
-          </a:p>
-        </p:txBody>
-      </p:sp>
-      <p:sp>
-        <p:nvSpPr>
-          <p:cNvPr id="23" name="TextBox 22"/>
-          <p:cNvSpPr txBox="1"/>
-          <p:nvPr/>
-        </p:nvSpPr>
-        <p:spPr>
-          <a:xfrm>
-            <a:off x="6400800" y="4526280"/>
-            <a:ext cx="5394960" cy="355600"/>
-          </a:xfrm>
-          <a:prstGeom prst="rect">
-            <a:avLst/>
-          </a:prstGeom>
-          <a:noFill/>
-        </p:spPr>
-        <p:txBody>
-          <a:bodyPr wrap="square">
-            <a:spAutoFit/>
-          </a:bodyPr>
-          <a:lstStyle/>
-          <a:p>
-            <a:pPr algn="l"/>
-            <a:r>
-              <a:rPr sz="1400" b="0" i="0">
-                <a:solidFill>
-                  <a:srgbClr val="FFFFFF"/>
-                </a:solidFill>
-                <a:latin typeface="Barlow"/>
-              </a:rPr>
-              <a:t>Competes with the 40-year-old meeting model</a:t>
-            </a:r>
-          </a:p>
-        </p:txBody>
-      </p:sp>
-      <p:sp>
-        <p:nvSpPr>
-          <p:cNvPr id="24" name="Rectangle 23"/>
-          <p:cNvSpPr/>
-          <p:nvPr/>
-        </p:nvSpPr>
-        <p:spPr>
-          <a:xfrm>
-            <a:off x="5897880" y="365760"/>
-            <a:ext cx="0" cy="19050"/>
-          </a:xfrm>
-          <a:prstGeom prst="rect">
-            <a:avLst/>
-          </a:prstGeom>
-          <a:solidFill>
-            <a:srgbClr val="C9A84C"/>
-          </a:solidFill>
-          <a:ln>
-            <a:noFill/>
-          </a:ln>
-        </p:spPr>
-        <p:style>
-          <a:lnRef idx="1">
-            <a:schemeClr val="accent1"/>
-          </a:lnRef>
-          <a:fillRef idx="3">
-            <a:schemeClr val="accent1"/>
-          </a:fillRef>
-          <a:effectRef idx="2">
-            <a:schemeClr val="accent1"/>
-          </a:effectRef>
-          <a:fontRef idx="minor">
-            <a:schemeClr val="lt1"/>
-          </a:fontRef>
-        </p:style>
-        <p:txBody>
-          <a:bodyPr rtlCol="0" anchor="ctr"/>
-          <a:lstStyle/>
-          <a:p>
-            <a:pPr algn="ctr"/>
-          </a:p>
-        </p:txBody>
-      </p:sp>
-      <p:sp>
-        <p:nvSpPr>
-          <p:cNvPr id="25" name="Rectangle 24"/>
+                <a:latin typeface="Barlow Condensed"/>
+              </a:rPr>
+              <a:t>Governance and auditability built into execution</a:t>
+            </a:r>
+          </a:p>
+        </p:txBody>
+      </p:sp>
+      <p:sp>
+        <p:nvSpPr>
+          <p:cNvPr id="20" name="Rectangle 19"/>
           <p:cNvSpPr/>
           <p:nvPr/>
         </p:nvSpPr>
@@ -8447,7 +8635,7 @@
       </p:sp>
       <p:sp>
         <p:nvSpPr>
-          <p:cNvPr id="26" name="TextBox 25"/>
+          <p:cNvPr id="21" name="TextBox 20"/>
           <p:cNvSpPr txBox="1"/>
           <p:nvPr/>
         </p:nvSpPr>
@@ -8475,7 +8663,7 @@
                 </a:solidFill>
                 <a:latin typeface="Barlow Condensed"/>
               </a:rPr>
-              <a:t>05 / 11</a:t>
+              <a:t>05 / 12</a:t>
             </a:r>
           </a:p>
         </p:txBody>
@@ -8579,7 +8767,7 @@
                 </a:solidFill>
                 <a:latin typeface="Barlow Condensed"/>
               </a:rPr>
-              <a:t>HOW IT EXECUTES</a:t>
+              <a:t>FROM DETECTION TO AUTHORIZED EXECUTION</a:t>
             </a:r>
           </a:p>
         </p:txBody>
@@ -8593,22 +8781,22 @@
         <p:spPr>
           <a:xfrm>
             <a:off x="457200" y="713232"/>
-            <a:ext cx="11247120" cy="731520"/>
-          </a:xfrm>
-          <a:prstGeom prst="rect">
-            <a:avLst/>
-          </a:prstGeom>
-          <a:noFill/>
-        </p:spPr>
-        <p:txBody>
-          <a:bodyPr wrap="square">
-            <a:spAutoFit/>
-          </a:bodyPr>
-          <a:lstStyle/>
-          <a:p>
-            <a:pPr algn="ctr"/>
-            <a:r>
-              <a:rPr sz="2200" b="1">
+            <a:ext cx="11247120" cy="685800"/>
+          </a:xfrm>
+          <a:prstGeom prst="rect">
+            <a:avLst/>
+          </a:prstGeom>
+          <a:noFill/>
+        </p:spPr>
+        <p:txBody>
+          <a:bodyPr wrap="square">
+            <a:spAutoFit/>
+          </a:bodyPr>
+          <a:lstStyle/>
+          <a:p>
+            <a:pPr algn="ctr"/>
+            <a:r>
+              <a:rPr sz="2100" b="1">
                 <a:solidFill>
                   <a:srgbClr val="FFFFFF"/>
                 </a:solidFill>
@@ -8627,7 +8815,7 @@
         </p:nvSpPr>
         <p:spPr>
           <a:xfrm>
-            <a:off x="502920" y="1508760"/>
+            <a:off x="502920" y="1481328"/>
             <a:ext cx="1463040" cy="1463040"/>
           </a:xfrm>
           <a:prstGeom prst="ellipse">
@@ -8672,7 +8860,7 @@
         </p:nvSpPr>
         <p:spPr>
           <a:xfrm>
-            <a:off x="502920" y="1965960"/>
+            <a:off x="502920" y="1938528"/>
             <a:ext cx="1463040" cy="548640"/>
           </a:xfrm>
           <a:prstGeom prst="rect">
@@ -8707,7 +8895,7 @@
         </p:nvSpPr>
         <p:spPr>
           <a:xfrm>
-            <a:off x="502920" y="3017520"/>
+            <a:off x="502920" y="2990088"/>
             <a:ext cx="1463040" cy="548640"/>
           </a:xfrm>
           <a:prstGeom prst="rect">
@@ -8727,7 +8915,7 @@
                 <a:solidFill>
                   <a:srgbClr val="FFFFFF"/>
                 </a:solidFill>
-                <a:latin typeface="Barlow"/>
+                <a:latin typeface="Barlow Condensed"/>
               </a:rPr>
               <a:t>Signal
 Detected</a:t>
@@ -8743,7 +8931,7 @@
         </p:nvSpPr>
         <p:spPr>
           <a:xfrm>
-            <a:off x="1984248" y="2212848"/>
+            <a:off x="1984248" y="2185416"/>
             <a:ext cx="484632" cy="25400"/>
           </a:xfrm>
           <a:prstGeom prst="rect">
@@ -8786,7 +8974,7 @@
         </p:nvSpPr>
         <p:spPr>
           <a:xfrm>
-            <a:off x="2487168" y="1508760"/>
+            <a:off x="2487168" y="1481328"/>
             <a:ext cx="1463040" cy="1463040"/>
           </a:xfrm>
           <a:prstGeom prst="ellipse">
@@ -8831,7 +9019,7 @@
         </p:nvSpPr>
         <p:spPr>
           <a:xfrm>
-            <a:off x="2487168" y="1965960"/>
+            <a:off x="2487168" y="1938528"/>
             <a:ext cx="1463040" cy="548640"/>
           </a:xfrm>
           <a:prstGeom prst="rect">
@@ -8866,7 +9054,7 @@
         </p:nvSpPr>
         <p:spPr>
           <a:xfrm>
-            <a:off x="2487168" y="3017520"/>
+            <a:off x="2487168" y="2990088"/>
             <a:ext cx="1463040" cy="548640"/>
           </a:xfrm>
           <a:prstGeom prst="rect">
@@ -8886,7 +9074,7 @@
                 <a:solidFill>
                   <a:srgbClr val="FFFFFF"/>
                 </a:solidFill>
-                <a:latin typeface="Barlow"/>
+                <a:latin typeface="Barlow Condensed"/>
               </a:rPr>
               <a:t>Scored &amp;
 Classified</a:t>
@@ -8902,7 +9090,7 @@
         </p:nvSpPr>
         <p:spPr>
           <a:xfrm>
-            <a:off x="3968496" y="2212848"/>
+            <a:off x="3968496" y="2185416"/>
             <a:ext cx="484632" cy="25400"/>
           </a:xfrm>
           <a:prstGeom prst="rect">
@@ -8945,7 +9133,7 @@
         </p:nvSpPr>
         <p:spPr>
           <a:xfrm>
-            <a:off x="4471416" y="1508760"/>
+            <a:off x="4471416" y="1481328"/>
             <a:ext cx="1463040" cy="1463040"/>
           </a:xfrm>
           <a:prstGeom prst="ellipse">
@@ -8990,7 +9178,7 @@
         </p:nvSpPr>
         <p:spPr>
           <a:xfrm>
-            <a:off x="4471416" y="1965960"/>
+            <a:off x="4471416" y="1938528"/>
             <a:ext cx="1463040" cy="548640"/>
           </a:xfrm>
           <a:prstGeom prst="rect">
@@ -9025,7 +9213,7 @@
         </p:nvSpPr>
         <p:spPr>
           <a:xfrm>
-            <a:off x="4471416" y="3017520"/>
+            <a:off x="4471416" y="2990088"/>
             <a:ext cx="1463040" cy="548640"/>
           </a:xfrm>
           <a:prstGeom prst="rect">
@@ -9045,7 +9233,7 @@
                 <a:solidFill>
                   <a:srgbClr val="FFFFFF"/>
                 </a:solidFill>
-                <a:latin typeface="Barlow"/>
+                <a:latin typeface="Barlow Condensed"/>
               </a:rPr>
               <a:t>Protocol
 Activates</a:t>
@@ -9061,7 +9249,7 @@
         </p:nvSpPr>
         <p:spPr>
           <a:xfrm>
-            <a:off x="5952744" y="2212848"/>
+            <a:off x="5952744" y="2185416"/>
             <a:ext cx="484632" cy="25400"/>
           </a:xfrm>
           <a:prstGeom prst="rect">
@@ -9104,7 +9292,7 @@
         </p:nvSpPr>
         <p:spPr>
           <a:xfrm>
-            <a:off x="6455664" y="1508760"/>
+            <a:off x="6455664" y="1481328"/>
             <a:ext cx="1463040" cy="1463040"/>
           </a:xfrm>
           <a:prstGeom prst="ellipse">
@@ -9149,7 +9337,7 @@
         </p:nvSpPr>
         <p:spPr>
           <a:xfrm>
-            <a:off x="6455664" y="1965960"/>
+            <a:off x="6455664" y="1938528"/>
             <a:ext cx="1463040" cy="548640"/>
           </a:xfrm>
           <a:prstGeom prst="rect">
@@ -9184,7 +9372,7 @@
         </p:nvSpPr>
         <p:spPr>
           <a:xfrm>
-            <a:off x="6455664" y="3017520"/>
+            <a:off x="6455664" y="2990088"/>
             <a:ext cx="1463040" cy="548640"/>
           </a:xfrm>
           <a:prstGeom prst="rect">
@@ -9204,7 +9392,7 @@
                 <a:solidFill>
                   <a:srgbClr val="FFFFFF"/>
                 </a:solidFill>
-                <a:latin typeface="Barlow"/>
+                <a:latin typeface="Barlow Condensed"/>
               </a:rPr>
               <a:t>Stakeholders
 Notified</a:t>
@@ -9220,7 +9408,7 @@
         </p:nvSpPr>
         <p:spPr>
           <a:xfrm>
-            <a:off x="7936992" y="2212848"/>
+            <a:off x="7936992" y="2185416"/>
             <a:ext cx="484632" cy="25400"/>
           </a:xfrm>
           <a:prstGeom prst="rect">
@@ -9263,7 +9451,7 @@
         </p:nvSpPr>
         <p:spPr>
           <a:xfrm>
-            <a:off x="8439912" y="1508760"/>
+            <a:off x="8439912" y="1481328"/>
             <a:ext cx="1463040" cy="1463040"/>
           </a:xfrm>
           <a:prstGeom prst="ellipse">
@@ -9308,7 +9496,7 @@
         </p:nvSpPr>
         <p:spPr>
           <a:xfrm>
-            <a:off x="8439912" y="1965960"/>
+            <a:off x="8439912" y="1938528"/>
             <a:ext cx="1463040" cy="548640"/>
           </a:xfrm>
           <a:prstGeom prst="rect">
@@ -9343,7 +9531,7 @@
         </p:nvSpPr>
         <p:spPr>
           <a:xfrm>
-            <a:off x="8439912" y="3017520"/>
+            <a:off x="8439912" y="2990088"/>
             <a:ext cx="1463040" cy="548640"/>
           </a:xfrm>
           <a:prstGeom prst="rect">
@@ -9363,7 +9551,7 @@
                 <a:solidFill>
                   <a:srgbClr val="FFFFFF"/>
                 </a:solidFill>
-                <a:latin typeface="Barlow"/>
+                <a:latin typeface="Barlow Condensed"/>
               </a:rPr>
               <a:t>Executive
 Authorizes</a:t>
@@ -9379,7 +9567,7 @@
         </p:nvSpPr>
         <p:spPr>
           <a:xfrm>
-            <a:off x="9921240" y="2212848"/>
+            <a:off x="9921240" y="2185416"/>
             <a:ext cx="484632" cy="25400"/>
           </a:xfrm>
           <a:prstGeom prst="rect">
@@ -9422,7 +9610,7 @@
         </p:nvSpPr>
         <p:spPr>
           <a:xfrm>
-            <a:off x="10424160" y="1508760"/>
+            <a:off x="10424160" y="1481328"/>
             <a:ext cx="1463040" cy="1463040"/>
           </a:xfrm>
           <a:prstGeom prst="ellipse">
@@ -9467,7 +9655,7 @@
         </p:nvSpPr>
         <p:spPr>
           <a:xfrm>
-            <a:off x="10424160" y="1965960"/>
+            <a:off x="10424160" y="1938528"/>
             <a:ext cx="1463040" cy="548640"/>
           </a:xfrm>
           <a:prstGeom prst="rect">
@@ -9502,7 +9690,7 @@
         </p:nvSpPr>
         <p:spPr>
           <a:xfrm>
-            <a:off x="10424160" y="3017520"/>
+            <a:off x="10424160" y="2990088"/>
             <a:ext cx="1463040" cy="548640"/>
           </a:xfrm>
           <a:prstGeom prst="rect">
@@ -9522,7 +9710,7 @@
                 <a:solidFill>
                   <a:srgbClr val="FFFFFF"/>
                 </a:solidFill>
-                <a:latin typeface="Barlow"/>
+                <a:latin typeface="Barlow Condensed"/>
               </a:rPr>
               <a:t>Execution
 Begins</a:t>
@@ -9538,8 +9726,8 @@
         </p:nvSpPr>
         <p:spPr>
           <a:xfrm>
-            <a:off x="457200" y="3200400"/>
-            <a:ext cx="5943600" cy="475488"/>
+            <a:off x="457200" y="3182112"/>
+            <a:ext cx="5943600" cy="457200"/>
           </a:xfrm>
           <a:prstGeom prst="rect">
             <a:avLst/>
@@ -9583,8 +9771,8 @@
         </p:nvSpPr>
         <p:spPr>
           <a:xfrm>
-            <a:off x="594360" y="3246120"/>
-            <a:ext cx="5669280" cy="438912"/>
+            <a:off x="594360" y="3227832"/>
+            <a:ext cx="5669280" cy="420624"/>
           </a:xfrm>
           <a:prstGeom prst="rect">
             <a:avLst/>
@@ -9603,7 +9791,7 @@
                 <a:solidFill>
                   <a:srgbClr val="2B8A6E"/>
                 </a:solidFill>
-                <a:latin typeface="Barlow"/>
+                <a:latin typeface="Barlow Condensed"/>
               </a:rPr>
               <a:t>✓  Complete in 12 minutes — 30 days compressed</a:t>
             </a:r>
@@ -9618,8 +9806,8 @@
         </p:nvSpPr>
         <p:spPr>
           <a:xfrm>
-            <a:off x="6583680" y="3264408"/>
-            <a:ext cx="5212080" cy="438912"/>
+            <a:off x="6583680" y="3246120"/>
+            <a:ext cx="5212080" cy="420624"/>
           </a:xfrm>
           <a:prstGeom prst="rect">
             <a:avLst/>
@@ -9634,11 +9822,11 @@
           <a:p>
             <a:pPr algn="l"/>
             <a:r>
-              <a:rPr sz="1300" b="0" i="1">
+              <a:rPr sz="1200" b="0" i="1">
                 <a:solidFill>
                   <a:srgbClr val="99A5BB"/>
                 </a:solidFill>
-                <a:latin typeface="Barlow"/>
+                <a:latin typeface="Barlow Condensed"/>
               </a:rPr>
               <a:t>The alternative: 30 days of mobilization before any execution begins</a:t>
             </a:r>
@@ -9647,7 +9835,7 @@
       </p:sp>
       <p:pic>
         <p:nvPicPr>
-          <p:cNvPr id="31" name="Picture 30" descr="pptx_how_executes.jpg"/>
+          <p:cNvPr id="31" name="Picture 30" descr="pitch_builder.jpg"/>
           <p:cNvPicPr>
             <a:picLocks noChangeAspect="1"/>
           </p:cNvPicPr>
@@ -9661,8 +9849,8 @@
         </p:blipFill>
         <p:spPr>
           <a:xfrm>
-            <a:off x="365760" y="3794760"/>
-            <a:ext cx="11457432" cy="2697480"/>
+            <a:off x="365760" y="3767328"/>
+            <a:ext cx="11457432" cy="2724912"/>
           </a:xfrm>
           <a:prstGeom prst="rect">
             <a:avLst/>
@@ -9677,8 +9865,8 @@
         </p:nvSpPr>
         <p:spPr>
           <a:xfrm>
-            <a:off x="365760" y="3794760"/>
-            <a:ext cx="11457432" cy="2697480"/>
+            <a:off x="365760" y="3767328"/>
+            <a:ext cx="11457432" cy="2724912"/>
           </a:xfrm>
           <a:prstGeom prst="rect">
             <a:avLst/>
@@ -9720,8 +9908,8 @@
         </p:nvSpPr>
         <p:spPr>
           <a:xfrm>
-            <a:off x="365760" y="6172200"/>
-            <a:ext cx="11457432" cy="320040"/>
+            <a:off x="365760" y="6199632"/>
+            <a:ext cx="11457432" cy="292608"/>
           </a:xfrm>
           <a:prstGeom prst="rect">
             <a:avLst/>
@@ -9763,8 +9951,8 @@
         </p:nvSpPr>
         <p:spPr>
           <a:xfrm>
-            <a:off x="475488" y="6248400"/>
-            <a:ext cx="11237976" cy="320040"/>
+            <a:off x="457200" y="6263132"/>
+            <a:ext cx="11274552" cy="292608"/>
           </a:xfrm>
           <a:prstGeom prst="rect">
             <a:avLst/>
@@ -9785,7 +9973,7 @@
                 </a:solidFill>
                 <a:latin typeface="Barlow Condensed"/>
               </a:rPr>
-              <a:t>VAUGHNMARTIN.COM/HOW-IT-EXECUTES · LIVE ANIMATED EXECUTION CHAIN · SHOWING 12-MINUTE SEQUENCE</a:t>
+              <a:t>Protocol Builder · Pre-staged execution architecture · Live in production</a:t>
             </a:r>
           </a:p>
         </p:txBody>
@@ -9820,7 +10008,7 @@
                 </a:solidFill>
                 <a:latin typeface="Barlow Condensed"/>
               </a:rPr>
-              <a:t>06 / 11</a:t>
+              <a:t>06 / 12</a:t>
             </a:r>
           </a:p>
         </p:txBody>
@@ -9902,7 +10090,7 @@
         </p:nvSpPr>
         <p:spPr>
           <a:xfrm>
-            <a:off x="411480" y="411480"/>
+            <a:off x="457200" y="411480"/>
             <a:ext cx="10972800" cy="228600"/>
           </a:xfrm>
           <a:prstGeom prst="rect">
@@ -9924,7 +10112,7 @@
                 </a:solidFill>
                 <a:latin typeface="Barlow Condensed"/>
               </a:rPr>
-              <a:t>RETURN ON READINESS</a:t>
+              <a:t>BUSINESS VALUE</a:t>
             </a:r>
           </a:p>
         </p:txBody>
@@ -9937,8 +10125,8 @@
         </p:nvSpPr>
         <p:spPr>
           <a:xfrm>
-            <a:off x="411480" y="777240"/>
-            <a:ext cx="4206240" cy="1463040"/>
+            <a:off x="457200" y="685800"/>
+            <a:ext cx="11247120" cy="1051560"/>
           </a:xfrm>
           <a:prstGeom prst="rect">
             <a:avLst/>
@@ -9953,132 +10141,27 @@
           <a:p>
             <a:pPr algn="l"/>
             <a:r>
-              <a:rPr sz="7200" b="1" i="0">
-                <a:solidFill>
-                  <a:srgbClr val="C9A84C"/>
+              <a:rPr sz="3600" b="1">
+                <a:solidFill>
+                  <a:srgbClr val="FFFFFF"/>
                 </a:solidFill>
                 <a:latin typeface="Cormorant Garamond"/>
               </a:rPr>
-              <a:t>3,600×</a:t>
-            </a:r>
-          </a:p>
-        </p:txBody>
-      </p:sp>
-      <p:sp>
-        <p:nvSpPr>
-          <p:cNvPr id="5" name="TextBox 4"/>
-          <p:cNvSpPr txBox="1"/>
-          <p:nvPr/>
-        </p:nvSpPr>
-        <p:spPr>
-          <a:xfrm>
-            <a:off x="411480" y="2011680"/>
-            <a:ext cx="4206240" cy="355600"/>
-          </a:xfrm>
-          <a:prstGeom prst="rect">
-            <a:avLst/>
-          </a:prstGeom>
-          <a:noFill/>
-        </p:spPr>
-        <p:txBody>
-          <a:bodyPr wrap="square">
-            <a:spAutoFit/>
-          </a:bodyPr>
-          <a:lstStyle/>
-          <a:p>
-            <a:pPr algn="l"/>
-            <a:r>
-              <a:rPr sz="1300" b="0" i="0">
-                <a:solidFill>
-                  <a:srgbClr val="99A5BB"/>
-                </a:solidFill>
-                <a:latin typeface="Barlow"/>
-              </a:rPr>
-              <a:t>Execution Head Start vs. Old Model</a:t>
-            </a:r>
-          </a:p>
-        </p:txBody>
-      </p:sp>
-      <p:sp>
-        <p:nvSpPr>
-          <p:cNvPr id="6" name="TextBox 5"/>
-          <p:cNvSpPr txBox="1"/>
-          <p:nvPr/>
-        </p:nvSpPr>
-        <p:spPr>
-          <a:xfrm>
-            <a:off x="411480" y="2514600"/>
-            <a:ext cx="4206240" cy="868680"/>
-          </a:xfrm>
-          <a:prstGeom prst="rect">
-            <a:avLst/>
-          </a:prstGeom>
-          <a:noFill/>
-        </p:spPr>
-        <p:txBody>
-          <a:bodyPr wrap="square">
-            <a:spAutoFit/>
-          </a:bodyPr>
-          <a:lstStyle/>
-          <a:p>
-            <a:pPr algn="l"/>
-            <a:r>
-              <a:rPr sz="5000" b="1" i="0">
-                <a:solidFill>
-                  <a:srgbClr val="FFFFFF"/>
-                </a:solidFill>
-                <a:latin typeface="Cormorant Garamond"/>
-              </a:rPr>
-              <a:t>$120K</a:t>
-            </a:r>
-          </a:p>
-        </p:txBody>
-      </p:sp>
-      <p:sp>
-        <p:nvSpPr>
-          <p:cNvPr id="7" name="TextBox 6"/>
-          <p:cNvSpPr txBox="1"/>
-          <p:nvPr/>
-        </p:nvSpPr>
-        <p:spPr>
-          <a:xfrm>
-            <a:off x="411480" y="3246120"/>
-            <a:ext cx="4206240" cy="304800"/>
-          </a:xfrm>
-          <a:prstGeom prst="rect">
-            <a:avLst/>
-          </a:prstGeom>
-          <a:noFill/>
-        </p:spPr>
-        <p:txBody>
-          <a:bodyPr wrap="square">
-            <a:spAutoFit/>
-          </a:bodyPr>
-          <a:lstStyle/>
-          <a:p>
-            <a:pPr algn="l"/>
-            <a:r>
-              <a:rPr sz="1300" b="0" i="0">
-                <a:solidFill>
-                  <a:srgbClr val="99A5BB"/>
-                </a:solidFill>
-                <a:latin typeface="Barlow"/>
-              </a:rPr>
-              <a:t>Platform Cost · Annual</a:t>
-            </a:r>
-          </a:p>
-        </p:txBody>
-      </p:sp>
-      <p:sp>
-        <p:nvSpPr>
-          <p:cNvPr id="8" name="Rectangle 7"/>
+              <a:t>Readiness is not overhead. It is value protection.</a:t>
+            </a:r>
+          </a:p>
+        </p:txBody>
+      </p:sp>
+      <p:sp>
+        <p:nvSpPr>
+          <p:cNvPr id="5" name="Rectangle 4"/>
           <p:cNvSpPr/>
           <p:nvPr/>
         </p:nvSpPr>
         <p:spPr>
           <a:xfrm>
-            <a:off x="411480" y="3630168"/>
-            <a:ext cx="4206240" cy="19050"/>
+            <a:off x="457200" y="1874519"/>
+            <a:ext cx="11274552" cy="19050"/>
           </a:xfrm>
           <a:prstGeom prst="rect">
             <a:avLst/>
@@ -10114,119 +10197,14 @@
       </p:sp>
       <p:sp>
         <p:nvSpPr>
-          <p:cNvPr id="9" name="TextBox 8"/>
-          <p:cNvSpPr txBox="1"/>
-          <p:nvPr/>
-        </p:nvSpPr>
-        <p:spPr>
-          <a:xfrm>
-            <a:off x="411480" y="3749039"/>
-            <a:ext cx="4206240" cy="355600"/>
-          </a:xfrm>
-          <a:prstGeom prst="rect">
-            <a:avLst/>
-          </a:prstGeom>
-          <a:noFill/>
-        </p:spPr>
-        <p:txBody>
-          <a:bodyPr wrap="square">
-            <a:spAutoFit/>
-          </a:bodyPr>
-          <a:lstStyle/>
-          <a:p>
-            <a:pPr algn="l"/>
-            <a:r>
-              <a:rPr sz="1400" b="0" i="0">
-                <a:solidFill>
-                  <a:srgbClr val="FFFFFF"/>
-                </a:solidFill>
-                <a:latin typeface="Barlow"/>
-              </a:rPr>
-              <a:t>Replaces $400K–$800K consulting retainer</a:t>
-            </a:r>
-          </a:p>
-        </p:txBody>
-      </p:sp>
-      <p:sp>
-        <p:nvSpPr>
-          <p:cNvPr id="10" name="TextBox 9"/>
-          <p:cNvSpPr txBox="1"/>
-          <p:nvPr/>
-        </p:nvSpPr>
-        <p:spPr>
-          <a:xfrm>
-            <a:off x="411480" y="4114800"/>
-            <a:ext cx="4206240" cy="355600"/>
-          </a:xfrm>
-          <a:prstGeom prst="rect">
-            <a:avLst/>
-          </a:prstGeom>
-          <a:noFill/>
-        </p:spPr>
-        <p:txBody>
-          <a:bodyPr wrap="square">
-            <a:spAutoFit/>
-          </a:bodyPr>
-          <a:lstStyle/>
-          <a:p>
-            <a:pPr algn="l"/>
-            <a:r>
-              <a:rPr sz="1400" b="0" i="0">
-                <a:solidFill>
-                  <a:srgbClr val="2B8A6E"/>
-                </a:solidFill>
-                <a:latin typeface="Barlow"/>
-              </a:rPr>
-              <a:t>Break-even before the 2nd activation.</a:t>
-            </a:r>
-          </a:p>
-        </p:txBody>
-      </p:sp>
-      <p:sp>
-        <p:nvSpPr>
-          <p:cNvPr id="11" name="TextBox 10"/>
-          <p:cNvSpPr txBox="1"/>
-          <p:nvPr/>
-        </p:nvSpPr>
-        <p:spPr>
-          <a:xfrm>
-            <a:off x="411480" y="4480560"/>
-            <a:ext cx="4206240" cy="355600"/>
-          </a:xfrm>
-          <a:prstGeom prst="rect">
-            <a:avLst/>
-          </a:prstGeom>
-          <a:noFill/>
-        </p:spPr>
-        <p:txBody>
-          <a:bodyPr wrap="square">
-            <a:spAutoFit/>
-          </a:bodyPr>
-          <a:lstStyle/>
-          <a:p>
-            <a:pPr algn="l"/>
-            <a:r>
-              <a:rPr sz="1400" b="0" i="0">
-                <a:solidFill>
-                  <a:srgbClr val="FFFFFF"/>
-                </a:solidFill>
-                <a:latin typeface="Barlow"/>
-              </a:rPr>
-              <a:t>The budget line already exists.</a:t>
-            </a:r>
-          </a:p>
-        </p:txBody>
-      </p:sp>
-      <p:sp>
-        <p:nvSpPr>
-          <p:cNvPr id="12" name="Rectangle 11"/>
+          <p:cNvPr id="6" name="Rectangle 5"/>
           <p:cNvSpPr/>
           <p:nvPr/>
         </p:nvSpPr>
         <p:spPr>
           <a:xfrm>
-            <a:off x="411480" y="4956048"/>
-            <a:ext cx="4206240" cy="19050"/>
+            <a:off x="457200" y="2159000"/>
+            <a:ext cx="164592" cy="164592"/>
           </a:xfrm>
           <a:prstGeom prst="rect">
             <a:avLst/>
@@ -10262,14 +10240,14 @@
       </p:sp>
       <p:sp>
         <p:nvSpPr>
-          <p:cNvPr id="13" name="TextBox 12"/>
-          <p:cNvSpPr txBox="1"/>
-          <p:nvPr/>
-        </p:nvSpPr>
-        <p:spPr>
-          <a:xfrm>
-            <a:off x="411480" y="5074920"/>
-            <a:ext cx="4206240" cy="731520"/>
+          <p:cNvPr id="7" name="TextBox 6"/>
+          <p:cNvSpPr txBox="1"/>
+          <p:nvPr/>
+        </p:nvSpPr>
+        <p:spPr>
+          <a:xfrm>
+            <a:off x="749808" y="2057400"/>
+            <a:ext cx="10789920" cy="914400"/>
           </a:xfrm>
           <a:prstGeom prst="rect">
             <a:avLst/>
@@ -10284,95 +10262,36 @@
           <a:p>
             <a:pPr algn="l"/>
             <a:r>
-              <a:rPr sz="1200" b="0" i="1">
-                <a:solidFill>
-                  <a:srgbClr val="99A5BB"/>
-                </a:solidFill>
-                <a:latin typeface="Barlow"/>
-              </a:rPr>
-              <a:t>"We're replacing a line item every Fortune 1000 already pays."</a:t>
-            </a:r>
-          </a:p>
-        </p:txBody>
-      </p:sp>
-      <p:sp>
-        <p:nvSpPr>
-          <p:cNvPr id="14" name="TextBox 13"/>
-          <p:cNvSpPr txBox="1"/>
-          <p:nvPr/>
-        </p:nvSpPr>
-        <p:spPr>
-          <a:xfrm>
-            <a:off x="4754880" y="411480"/>
-            <a:ext cx="10972800" cy="228600"/>
-          </a:xfrm>
-          <a:prstGeom prst="rect">
-            <a:avLst/>
-          </a:prstGeom>
-          <a:noFill/>
-        </p:spPr>
-        <p:txBody>
-          <a:bodyPr wrap="square">
-            <a:spAutoFit/>
-          </a:bodyPr>
-          <a:lstStyle/>
-          <a:p>
-            <a:pPr algn="l"/>
-            <a:r>
-              <a:rPr sz="900" b="1" i="0">
+              <a:rPr sz="1800" b="0" i="0">
                 <a:solidFill>
                   <a:srgbClr val="C9A84C"/>
                 </a:solidFill>
                 <a:latin typeface="Barlow Condensed"/>
               </a:rPr>
-              <a:t>LIVE AT VAUGHNMARTIN.COM/ROI-CALCULATOR</a:t>
-            </a:r>
-          </a:p>
-        </p:txBody>
-      </p:sp>
-      <p:pic>
-        <p:nvPicPr>
-          <p:cNvPr id="15" name="Picture 14" descr="pptx_roi.jpg"/>
-          <p:cNvPicPr>
-            <a:picLocks noChangeAspect="1"/>
-          </p:cNvPicPr>
-          <p:nvPr/>
-        </p:nvPicPr>
-        <p:blipFill>
-          <a:blip r:embed="rId2"/>
-          <a:stretch>
-            <a:fillRect/>
-          </a:stretch>
-        </p:blipFill>
-        <p:spPr>
-          <a:xfrm>
-            <a:off x="4754880" y="749808"/>
-            <a:ext cx="7068312" cy="5742432"/>
-          </a:xfrm>
-          <a:prstGeom prst="rect">
-            <a:avLst/>
-          </a:prstGeom>
-        </p:spPr>
-      </p:pic>
-      <p:sp>
-        <p:nvSpPr>
-          <p:cNvPr id="16" name="Rectangle 15"/>
+              <a:t>Founding Partner: $75K / 90-day validation</a:t>
+            </a:r>
+          </a:p>
+        </p:txBody>
+      </p:sp>
+      <p:sp>
+        <p:nvSpPr>
+          <p:cNvPr id="8" name="Rectangle 7"/>
           <p:cNvSpPr/>
           <p:nvPr/>
         </p:nvSpPr>
         <p:spPr>
           <a:xfrm>
-            <a:off x="4754880" y="749808"/>
-            <a:ext cx="7068312" cy="5742432"/>
-          </a:xfrm>
-          <a:prstGeom prst="rect">
-            <a:avLst/>
-          </a:prstGeom>
-          <a:noFill/>
-          <a:ln w="15240">
-            <a:solidFill>
-              <a:srgbClr val="C9A84C"/>
-            </a:solidFill>
+            <a:off x="457200" y="3274568"/>
+            <a:ext cx="164592" cy="164592"/>
+          </a:xfrm>
+          <a:prstGeom prst="rect">
+            <a:avLst/>
+          </a:prstGeom>
+          <a:solidFill>
+            <a:srgbClr val="FFFFFF"/>
+          </a:solidFill>
+          <a:ln>
+            <a:noFill/>
           </a:ln>
         </p:spPr>
         <p:style>
@@ -10399,20 +10318,55 @@
       </p:sp>
       <p:sp>
         <p:nvSpPr>
-          <p:cNvPr id="17" name="Rectangle 16"/>
+          <p:cNvPr id="9" name="TextBox 8"/>
+          <p:cNvSpPr txBox="1"/>
+          <p:nvPr/>
+        </p:nvSpPr>
+        <p:spPr>
+          <a:xfrm>
+            <a:off x="749808" y="3172968"/>
+            <a:ext cx="10789920" cy="914400"/>
+          </a:xfrm>
+          <a:prstGeom prst="rect">
+            <a:avLst/>
+          </a:prstGeom>
+          <a:noFill/>
+        </p:spPr>
+        <p:txBody>
+          <a:bodyPr wrap="square">
+            <a:spAutoFit/>
+          </a:bodyPr>
+          <a:lstStyle/>
+          <a:p>
+            <a:pPr algn="l"/>
+            <a:r>
+              <a:rPr sz="1800" b="0" i="0">
+                <a:solidFill>
+                  <a:srgbClr val="FFFFFF"/>
+                </a:solidFill>
+                <a:latin typeface="Barlow Condensed"/>
+              </a:rPr>
+              <a:t>Growth tiers: $75K–$250K annually</a:t>
+            </a:r>
+          </a:p>
+        </p:txBody>
+      </p:sp>
+      <p:sp>
+        <p:nvSpPr>
+          <p:cNvPr id="10" name="Rectangle 9"/>
           <p:cNvSpPr/>
           <p:nvPr/>
         </p:nvSpPr>
         <p:spPr>
           <a:xfrm>
-            <a:off x="4754880" y="6172200"/>
-            <a:ext cx="7068312" cy="320040"/>
+            <a:off x="457200" y="4390136"/>
+            <a:ext cx="164592" cy="164592"/>
           </a:xfrm>
           <a:prstGeom prst="rect">
             <a:avLst/>
           </a:prstGeom>
           <a:solidFill>
-            <a:srgbClr val="080D26"/>
+            <a:srgbClr val="2B8A6E"/>
           </a:solidFill>
           <a:ln>
             <a:noFill/>
@@ -10442,14 +10396,14 @@
       </p:sp>
       <p:sp>
         <p:nvSpPr>
-          <p:cNvPr id="18" name="TextBox 17"/>
-          <p:cNvSpPr txBox="1"/>
-          <p:nvPr/>
-        </p:nvSpPr>
-        <p:spPr>
-          <a:xfrm>
-            <a:off x="4864608" y="6248400"/>
-            <a:ext cx="6848856" cy="320040"/>
+          <p:cNvPr id="11" name="TextBox 10"/>
+          <p:cNvSpPr txBox="1"/>
+          <p:nvPr/>
+        </p:nvSpPr>
+        <p:spPr>
+          <a:xfrm>
+            <a:off x="749808" y="4288536"/>
+            <a:ext cx="10789920" cy="914400"/>
           </a:xfrm>
           <a:prstGeom prst="rect">
             <a:avLst/>
@@ -10464,20 +10418,98 @@
           <a:p>
             <a:pPr algn="l"/>
             <a:r>
-              <a:rPr sz="900" b="1" i="0">
+              <a:rPr sz="1800" b="0" i="0">
+                <a:solidFill>
+                  <a:srgbClr val="2B8A6E"/>
+                </a:solidFill>
+                <a:latin typeface="Barlow Condensed"/>
+              </a:rPr>
+              <a:t>If one strategic window is preserved, readiness can pay for itself quickly</a:t>
+            </a:r>
+          </a:p>
+        </p:txBody>
+      </p:sp>
+      <p:sp>
+        <p:nvSpPr>
+          <p:cNvPr id="12" name="Rectangle 11"/>
+          <p:cNvSpPr/>
+          <p:nvPr/>
+        </p:nvSpPr>
+        <p:spPr>
+          <a:xfrm>
+            <a:off x="457200" y="5468112"/>
+            <a:ext cx="11274552" cy="19050"/>
+          </a:xfrm>
+          <a:prstGeom prst="rect">
+            <a:avLst/>
+          </a:prstGeom>
+          <a:solidFill>
+            <a:srgbClr val="C9A84C"/>
+          </a:solidFill>
+          <a:ln>
+            <a:noFill/>
+          </a:ln>
+        </p:spPr>
+        <p:style>
+          <a:lnRef idx="1">
+            <a:schemeClr val="accent1"/>
+          </a:lnRef>
+          <a:fillRef idx="3">
+            <a:schemeClr val="accent1"/>
+          </a:fillRef>
+          <a:effectRef idx="2">
+            <a:schemeClr val="accent1"/>
+          </a:effectRef>
+          <a:fontRef idx="minor">
+            <a:schemeClr val="lt1"/>
+          </a:fontRef>
+        </p:style>
+        <p:txBody>
+          <a:bodyPr rtlCol="0" anchor="ctr"/>
+          <a:lstStyle/>
+          <a:p>
+            <a:pPr algn="ctr"/>
+          </a:p>
+        </p:txBody>
+      </p:sp>
+      <p:sp>
+        <p:nvSpPr>
+          <p:cNvPr id="13" name="TextBox 12"/>
+          <p:cNvSpPr txBox="1"/>
+          <p:nvPr/>
+        </p:nvSpPr>
+        <p:spPr>
+          <a:xfrm>
+            <a:off x="457200" y="5596128"/>
+            <a:ext cx="11274552" cy="594360"/>
+          </a:xfrm>
+          <a:prstGeom prst="rect">
+            <a:avLst/>
+          </a:prstGeom>
+          <a:noFill/>
+        </p:spPr>
+        <p:txBody>
+          <a:bodyPr wrap="square">
+            <a:spAutoFit/>
+          </a:bodyPr>
+          <a:lstStyle/>
+          <a:p>
+            <a:pPr algn="ctr"/>
+            <a:r>
+              <a:rPr sz="1800" b="1" i="1">
                 <a:solidFill>
                   <a:srgbClr val="C9A84C"/>
                 </a:solidFill>
                 <a:latin typeface="Barlow Condensed"/>
               </a:rPr>
-              <a:t>ROI CALCULATOR · ESTIMATES $61.3M+ ANNUAL VALUE · 3,600× EXECUTION HEAD START</a:t>
-            </a:r>
-          </a:p>
-        </p:txBody>
-      </p:sp>
-      <p:sp>
-        <p:nvSpPr>
-          <p:cNvPr id="19" name="TextBox 18"/>
+              <a:t>The cost of delay is usually higher than the cost of readiness.</a:t>
+            </a:r>
+          </a:p>
+        </p:txBody>
+      </p:sp>
+      <p:sp>
+        <p:nvSpPr>
+          <p:cNvPr id="14" name="TextBox 13"/>
           <p:cNvSpPr txBox="1"/>
           <p:nvPr/>
         </p:nvSpPr>
@@ -10505,7 +10537,7 @@
                 </a:solidFill>
                 <a:latin typeface="Barlow Condensed"/>
               </a:rPr>
-              <a:t>07 / 11</a:t>
+              <a:t>07 / 12</a:t>
             </a:r>
           </a:p>
         </p:txBody>
@@ -10609,7 +10641,7 @@
                 </a:solidFill>
                 <a:latin typeface="Barlow Condensed"/>
               </a:rPr>
-              <a:t>BUILT. IN PRODUCTION. RIGHT NOW.</a:t>
+              <a:t>BUILT. LIVE. IN PRODUCTION.</a:t>
             </a:r>
           </a:p>
         </p:txBody>
@@ -10623,28 +10655,28 @@
         <p:spPr>
           <a:xfrm>
             <a:off x="457200" y="713232"/>
-            <a:ext cx="11247120" cy="685800"/>
-          </a:xfrm>
-          <a:prstGeom prst="rect">
-            <a:avLst/>
-          </a:prstGeom>
-          <a:noFill/>
-        </p:spPr>
-        <p:txBody>
-          <a:bodyPr wrap="square">
-            <a:spAutoFit/>
-          </a:bodyPr>
-          <a:lstStyle/>
-          <a:p>
-            <a:pPr algn="ctr"/>
-            <a:r>
-              <a:rPr sz="2800" b="1">
+            <a:ext cx="11247120" cy="658368"/>
+          </a:xfrm>
+          <a:prstGeom prst="rect">
+            <a:avLst/>
+          </a:prstGeom>
+          <a:noFill/>
+        </p:spPr>
+        <p:txBody>
+          <a:bodyPr wrap="square">
+            <a:spAutoFit/>
+          </a:bodyPr>
+          <a:lstStyle/>
+          <a:p>
+            <a:pPr algn="ctr"/>
+            <a:r>
+              <a:rPr sz="3000" b="1">
                 <a:solidFill>
                   <a:srgbClr val="FFFFFF"/>
                 </a:solidFill>
                 <a:latin typeface="Cormorant Garamond"/>
               </a:rPr>
-              <a:t>The system is live — not a demo, not a roadmap</a:t>
+              <a:t>Not a roadmap — operating now</a:t>
             </a:r>
           </a:p>
         </p:txBody>
@@ -10657,8 +10689,8 @@
         </p:nvSpPr>
         <p:spPr>
           <a:xfrm>
-            <a:off x="365760" y="1508760"/>
-            <a:ext cx="2834640" cy="1143000"/>
+            <a:off x="365760" y="1481328"/>
+            <a:ext cx="2834640" cy="1051560"/>
           </a:xfrm>
           <a:prstGeom prst="rect">
             <a:avLst/>
@@ -10700,8 +10732,8 @@
         </p:nvSpPr>
         <p:spPr>
           <a:xfrm>
-            <a:off x="457200" y="1554480"/>
-            <a:ext cx="2651760" cy="640080"/>
+            <a:off x="365760" y="1527048"/>
+            <a:ext cx="2834640" cy="640080"/>
           </a:xfrm>
           <a:prstGeom prst="rect">
             <a:avLst/>
@@ -10735,29 +10767,29 @@
         </p:nvSpPr>
         <p:spPr>
           <a:xfrm>
-            <a:off x="457200" y="2148840"/>
-            <a:ext cx="2651760" cy="457200"/>
-          </a:xfrm>
-          <a:prstGeom prst="rect">
-            <a:avLst/>
-          </a:prstGeom>
-          <a:noFill/>
-        </p:spPr>
-        <p:txBody>
-          <a:bodyPr wrap="square">
-            <a:spAutoFit/>
-          </a:bodyPr>
-          <a:lstStyle/>
-          <a:p>
-            <a:pPr algn="ctr"/>
-            <a:r>
-              <a:rPr sz="1100" b="0" i="0">
+            <a:off x="365760" y="2103120"/>
+            <a:ext cx="2834640" cy="330200"/>
+          </a:xfrm>
+          <a:prstGeom prst="rect">
+            <a:avLst/>
+          </a:prstGeom>
+          <a:noFill/>
+        </p:spPr>
+        <p:txBody>
+          <a:bodyPr wrap="square">
+            <a:spAutoFit/>
+          </a:bodyPr>
+          <a:lstStyle/>
+          <a:p>
+            <a:pPr algn="ctr"/>
+            <a:r>
+              <a:rPr sz="1200" b="0" i="0">
                 <a:solidFill>
                   <a:srgbClr val="99A5BB"/>
                 </a:solidFill>
-                <a:latin typeface="Barlow"/>
-              </a:rPr>
-              <a:t>Readiness Protocols Pre-Staged</a:t>
+                <a:latin typeface="Barlow Condensed"/>
+              </a:rPr>
+              <a:t>Protocols</a:t>
             </a:r>
           </a:p>
         </p:txBody>
@@ -10770,8 +10802,8 @@
         </p:nvSpPr>
         <p:spPr>
           <a:xfrm>
-            <a:off x="3328416" y="1508760"/>
-            <a:ext cx="2834640" cy="1143000"/>
+            <a:off x="3328416" y="1481328"/>
+            <a:ext cx="2834640" cy="1051560"/>
           </a:xfrm>
           <a:prstGeom prst="rect">
             <a:avLst/>
@@ -10813,8 +10845,8 @@
         </p:nvSpPr>
         <p:spPr>
           <a:xfrm>
-            <a:off x="3419856" y="1554480"/>
-            <a:ext cx="2651760" cy="640080"/>
+            <a:off x="3328416" y="1527048"/>
+            <a:ext cx="2834640" cy="640080"/>
           </a:xfrm>
           <a:prstGeom prst="rect">
             <a:avLst/>
@@ -10848,29 +10880,29 @@
         </p:nvSpPr>
         <p:spPr>
           <a:xfrm>
-            <a:off x="3419856" y="2148840"/>
-            <a:ext cx="2651760" cy="457200"/>
-          </a:xfrm>
-          <a:prstGeom prst="rect">
-            <a:avLst/>
-          </a:prstGeom>
-          <a:noFill/>
-        </p:spPr>
-        <p:txBody>
-          <a:bodyPr wrap="square">
-            <a:spAutoFit/>
-          </a:bodyPr>
-          <a:lstStyle/>
-          <a:p>
-            <a:pPr algn="ctr"/>
-            <a:r>
-              <a:rPr sz="1100" b="0" i="0">
+            <a:off x="3328416" y="2103120"/>
+            <a:ext cx="2834640" cy="330200"/>
+          </a:xfrm>
+          <a:prstGeom prst="rect">
+            <a:avLst/>
+          </a:prstGeom>
+          <a:noFill/>
+        </p:spPr>
+        <p:txBody>
+          <a:bodyPr wrap="square">
+            <a:spAutoFit/>
+          </a:bodyPr>
+          <a:lstStyle/>
+          <a:p>
+            <a:pPr algn="ctr"/>
+            <a:r>
+              <a:rPr sz="1200" b="0" i="0">
                 <a:solidFill>
                   <a:srgbClr val="99A5BB"/>
                 </a:solidFill>
-                <a:latin typeface="Barlow"/>
-              </a:rPr>
-              <a:t>Strategic Triggers Mapped</a:t>
+                <a:latin typeface="Barlow Condensed"/>
+              </a:rPr>
+              <a:t>Triggers</a:t>
             </a:r>
           </a:p>
         </p:txBody>
@@ -10883,8 +10915,8 @@
         </p:nvSpPr>
         <p:spPr>
           <a:xfrm>
-            <a:off x="6291072" y="1508760"/>
-            <a:ext cx="2834640" cy="1143000"/>
+            <a:off x="6291072" y="1481328"/>
+            <a:ext cx="2834640" cy="1051560"/>
           </a:xfrm>
           <a:prstGeom prst="rect">
             <a:avLst/>
@@ -10926,8 +10958,8 @@
         </p:nvSpPr>
         <p:spPr>
           <a:xfrm>
-            <a:off x="6382512" y="1554480"/>
-            <a:ext cx="2651760" cy="640080"/>
+            <a:off x="6291072" y="1527048"/>
+            <a:ext cx="2834640" cy="640080"/>
           </a:xfrm>
           <a:prstGeom prst="rect">
             <a:avLst/>
@@ -10961,29 +10993,29 @@
         </p:nvSpPr>
         <p:spPr>
           <a:xfrm>
-            <a:off x="6382512" y="2148840"/>
-            <a:ext cx="2651760" cy="457200"/>
-          </a:xfrm>
-          <a:prstGeom prst="rect">
-            <a:avLst/>
-          </a:prstGeom>
-          <a:noFill/>
-        </p:spPr>
-        <p:txBody>
-          <a:bodyPr wrap="square">
-            <a:spAutoFit/>
-          </a:bodyPr>
-          <a:lstStyle/>
-          <a:p>
-            <a:pPr algn="ctr"/>
-            <a:r>
-              <a:rPr sz="1100" b="0" i="0">
+            <a:off x="6291072" y="2103120"/>
+            <a:ext cx="2834640" cy="330200"/>
+          </a:xfrm>
+          <a:prstGeom prst="rect">
+            <a:avLst/>
+          </a:prstGeom>
+          <a:noFill/>
+        </p:spPr>
+        <p:txBody>
+          <a:bodyPr wrap="square">
+            <a:spAutoFit/>
+          </a:bodyPr>
+          <a:lstStyle/>
+          <a:p>
+            <a:pPr algn="ctr"/>
+            <a:r>
+              <a:rPr sz="1200" b="0" i="0">
                 <a:solidFill>
                   <a:srgbClr val="99A5BB"/>
                 </a:solidFill>
-                <a:latin typeface="Barlow"/>
-              </a:rPr>
-              <a:t>Data Points Every 15 Min</a:t>
+                <a:latin typeface="Barlow Condensed"/>
+              </a:rPr>
+              <a:t>Data Points</a:t>
             </a:r>
           </a:p>
         </p:txBody>
@@ -10996,8 +11028,8 @@
         </p:nvSpPr>
         <p:spPr>
           <a:xfrm>
-            <a:off x="9253728" y="1508760"/>
-            <a:ext cx="2834640" cy="1143000"/>
+            <a:off x="9253728" y="1481328"/>
+            <a:ext cx="2834640" cy="1051560"/>
           </a:xfrm>
           <a:prstGeom prst="rect">
             <a:avLst/>
@@ -11039,8 +11071,8 @@
         </p:nvSpPr>
         <p:spPr>
           <a:xfrm>
-            <a:off x="9345168" y="1554480"/>
-            <a:ext cx="2651760" cy="640080"/>
+            <a:off x="9253728" y="1527048"/>
+            <a:ext cx="2834640" cy="640080"/>
           </a:xfrm>
           <a:prstGeom prst="rect">
             <a:avLst/>
@@ -11061,7 +11093,7 @@
                 </a:solidFill>
                 <a:latin typeface="Cormorant Garamond"/>
               </a:rPr>
-              <a:t>12</a:t>
+              <a:t>15 MIN</a:t>
             </a:r>
           </a:p>
         </p:txBody>
@@ -11074,29 +11106,29 @@
         </p:nvSpPr>
         <p:spPr>
           <a:xfrm>
-            <a:off x="9345168" y="2148840"/>
-            <a:ext cx="2651760" cy="457200"/>
-          </a:xfrm>
-          <a:prstGeom prst="rect">
-            <a:avLst/>
-          </a:prstGeom>
-          <a:noFill/>
-        </p:spPr>
-        <p:txBody>
-          <a:bodyPr wrap="square">
-            <a:spAutoFit/>
-          </a:bodyPr>
-          <a:lstStyle/>
-          <a:p>
-            <a:pPr algn="ctr"/>
-            <a:r>
-              <a:rPr sz="1100" b="0" i="0">
+            <a:off x="9253728" y="2103120"/>
+            <a:ext cx="2834640" cy="330200"/>
+          </a:xfrm>
+          <a:prstGeom prst="rect">
+            <a:avLst/>
+          </a:prstGeom>
+          <a:noFill/>
+        </p:spPr>
+        <p:txBody>
+          <a:bodyPr wrap="square">
+            <a:spAutoFit/>
+          </a:bodyPr>
+          <a:lstStyle/>
+          <a:p>
+            <a:pPr algn="ctr"/>
+            <a:r>
+              <a:rPr sz="1200" b="0" i="0">
                 <a:solidFill>
                   <a:srgbClr val="99A5BB"/>
                 </a:solidFill>
-                <a:latin typeface="Barlow"/>
-              </a:rPr>
-              <a:t>Compound Protocols</a:t>
+                <a:latin typeface="Barlow Condensed"/>
+              </a:rPr>
+              <a:t>Refresh</a:t>
             </a:r>
           </a:p>
         </p:txBody>
@@ -11109,8 +11141,8 @@
         </p:nvSpPr>
         <p:spPr>
           <a:xfrm>
-            <a:off x="3017520" y="2743200"/>
-            <a:ext cx="6035040" cy="384048"/>
+            <a:off x="3017520" y="2715768"/>
+            <a:ext cx="6035040" cy="365760"/>
           </a:xfrm>
           <a:prstGeom prst="rect">
             <a:avLst/>
@@ -11154,27 +11186,27 @@
         </p:nvSpPr>
         <p:spPr>
           <a:xfrm>
-            <a:off x="3108960" y="2788920"/>
-            <a:ext cx="5852160" cy="365760"/>
-          </a:xfrm>
-          <a:prstGeom prst="rect">
-            <a:avLst/>
-          </a:prstGeom>
-          <a:noFill/>
-        </p:spPr>
-        <p:txBody>
-          <a:bodyPr wrap="square">
-            <a:spAutoFit/>
-          </a:bodyPr>
-          <a:lstStyle/>
-          <a:p>
-            <a:pPr algn="ctr"/>
-            <a:r>
-              <a:rPr sz="1100" b="1" i="0">
+            <a:off x="3108960" y="2761488"/>
+            <a:ext cx="5852160" cy="347472"/>
+          </a:xfrm>
+          <a:prstGeom prst="rect">
+            <a:avLst/>
+          </a:prstGeom>
+          <a:noFill/>
+        </p:spPr>
+        <p:txBody>
+          <a:bodyPr wrap="square">
+            <a:spAutoFit/>
+          </a:bodyPr>
+          <a:lstStyle/>
+          <a:p>
+            <a:pPr algn="ctr"/>
+            <a:r>
+              <a:rPr sz="1000" b="1" i="0">
                 <a:solidFill>
                   <a:srgbClr val="2B8A6E"/>
                 </a:solidFill>
-                <a:latin typeface="Barlow"/>
+                <a:latin typeface="Barlow Condensed"/>
               </a:rPr>
               <a:t>●  Signal Detection Active · Updated Every 15 Minutes · vaughnmartin.com</a:t>
             </a:r>
@@ -11183,7 +11215,7 @@
       </p:sp>
       <p:pic>
         <p:nvPicPr>
-          <p:cNvPr id="19" name="Picture 18" descr="pitch_home.jpg"/>
+          <p:cNvPr id="19" name="Picture 18" descr="deck_signals.jpg"/>
           <p:cNvPicPr>
             <a:picLocks noChangeAspect="1"/>
           </p:cNvPicPr>
@@ -11197,8 +11229,8 @@
         </p:blipFill>
         <p:spPr>
           <a:xfrm>
-            <a:off x="320040" y="3383280"/>
-            <a:ext cx="3758184" cy="2606040"/>
+            <a:off x="320040" y="3246120"/>
+            <a:ext cx="11548872" cy="3273552"/>
           </a:xfrm>
           <a:prstGeom prst="rect">
             <a:avLst/>
@@ -11213,8 +11245,8 @@
         </p:nvSpPr>
         <p:spPr>
           <a:xfrm>
-            <a:off x="320040" y="3383280"/>
-            <a:ext cx="3758184" cy="2606040"/>
+            <a:off x="320040" y="3246120"/>
+            <a:ext cx="11548872" cy="3273552"/>
           </a:xfrm>
           <a:prstGeom prst="rect">
             <a:avLst/>
@@ -11256,8 +11288,8 @@
         </p:nvSpPr>
         <p:spPr>
           <a:xfrm>
-            <a:off x="320040" y="5669280"/>
-            <a:ext cx="3758184" cy="320040"/>
+            <a:off x="320040" y="6227064"/>
+            <a:ext cx="11548872" cy="292608"/>
           </a:xfrm>
           <a:prstGeom prst="rect">
             <a:avLst/>
@@ -11299,8 +11331,8 @@
         </p:nvSpPr>
         <p:spPr>
           <a:xfrm>
-            <a:off x="429768" y="5745480"/>
-            <a:ext cx="3538728" cy="320040"/>
+            <a:off x="411480" y="6290564"/>
+            <a:ext cx="11365992" cy="292608"/>
           </a:xfrm>
           <a:prstGeom prst="rect">
             <a:avLst/>
@@ -11321,304 +11353,14 @@
                 </a:solidFill>
                 <a:latin typeface="Barlow Condensed"/>
               </a:rPr>
-              <a:t>LIVE READINESS EXPERIENCE</a:t>
-            </a:r>
-          </a:p>
-        </p:txBody>
-      </p:sp>
-      <p:pic>
-        <p:nvPicPr>
-          <p:cNvPr id="23" name="Picture 22" descr="deck_signals.jpg"/>
-          <p:cNvPicPr>
-            <a:picLocks noChangeAspect="1"/>
-          </p:cNvPicPr>
-          <p:nvPr/>
-        </p:nvPicPr>
-        <p:blipFill>
-          <a:blip r:embed="rId3"/>
-          <a:stretch>
-            <a:fillRect/>
-          </a:stretch>
-        </p:blipFill>
-        <p:spPr>
-          <a:xfrm>
-            <a:off x="4325112" y="3383280"/>
-            <a:ext cx="3758184" cy="2606040"/>
-          </a:xfrm>
-          <a:prstGeom prst="rect">
-            <a:avLst/>
-          </a:prstGeom>
-        </p:spPr>
-      </p:pic>
-      <p:sp>
-        <p:nvSpPr>
-          <p:cNvPr id="24" name="Rectangle 23"/>
-          <p:cNvSpPr/>
-          <p:nvPr/>
-        </p:nvSpPr>
-        <p:spPr>
-          <a:xfrm>
-            <a:off x="4325112" y="3383280"/>
-            <a:ext cx="3758184" cy="2606040"/>
-          </a:xfrm>
-          <a:prstGeom prst="rect">
-            <a:avLst/>
-          </a:prstGeom>
-          <a:noFill/>
-          <a:ln w="15240">
-            <a:solidFill>
-              <a:srgbClr val="C9A84C"/>
-            </a:solidFill>
-          </a:ln>
-        </p:spPr>
-        <p:style>
-          <a:lnRef idx="1">
-            <a:schemeClr val="accent1"/>
-          </a:lnRef>
-          <a:fillRef idx="3">
-            <a:schemeClr val="accent1"/>
-          </a:fillRef>
-          <a:effectRef idx="2">
-            <a:schemeClr val="accent1"/>
-          </a:effectRef>
-          <a:fontRef idx="minor">
-            <a:schemeClr val="lt1"/>
-          </a:fontRef>
-        </p:style>
-        <p:txBody>
-          <a:bodyPr rtlCol="0" anchor="ctr"/>
-          <a:lstStyle/>
-          <a:p>
-            <a:pPr algn="ctr"/>
-          </a:p>
-        </p:txBody>
-      </p:sp>
-      <p:sp>
-        <p:nvSpPr>
-          <p:cNvPr id="25" name="Rectangle 24"/>
-          <p:cNvSpPr/>
-          <p:nvPr/>
-        </p:nvSpPr>
-        <p:spPr>
-          <a:xfrm>
-            <a:off x="4325112" y="5669280"/>
-            <a:ext cx="3758184" cy="320040"/>
-          </a:xfrm>
-          <a:prstGeom prst="rect">
-            <a:avLst/>
-          </a:prstGeom>
-          <a:solidFill>
-            <a:srgbClr val="080D26"/>
-          </a:solidFill>
-          <a:ln>
-            <a:noFill/>
-          </a:ln>
-        </p:spPr>
-        <p:style>
-          <a:lnRef idx="1">
-            <a:schemeClr val="accent1"/>
-          </a:lnRef>
-          <a:fillRef idx="3">
-            <a:schemeClr val="accent1"/>
-          </a:fillRef>
-          <a:effectRef idx="2">
-            <a:schemeClr val="accent1"/>
-          </a:effectRef>
-          <a:fontRef idx="minor">
-            <a:schemeClr val="lt1"/>
-          </a:fontRef>
-        </p:style>
-        <p:txBody>
-          <a:bodyPr rtlCol="0" anchor="ctr"/>
-          <a:lstStyle/>
-          <a:p>
-            <a:pPr algn="ctr"/>
-          </a:p>
-        </p:txBody>
-      </p:sp>
-      <p:sp>
-        <p:nvSpPr>
-          <p:cNvPr id="26" name="TextBox 25"/>
-          <p:cNvSpPr txBox="1"/>
-          <p:nvPr/>
-        </p:nvSpPr>
-        <p:spPr>
-          <a:xfrm>
-            <a:off x="4434840" y="5745480"/>
-            <a:ext cx="3538728" cy="320040"/>
-          </a:xfrm>
-          <a:prstGeom prst="rect">
-            <a:avLst/>
-          </a:prstGeom>
-          <a:noFill/>
-        </p:spPr>
-        <p:txBody>
-          <a:bodyPr wrap="square">
-            <a:spAutoFit/>
-          </a:bodyPr>
-          <a:lstStyle/>
-          <a:p>
-            <a:pPr algn="l"/>
-            <a:r>
-              <a:rPr sz="900" b="1" i="0">
-                <a:solidFill>
-                  <a:srgbClr val="C9A84C"/>
-                </a:solidFill>
-                <a:latin typeface="Barlow Condensed"/>
-              </a:rPr>
-              <a:t>SIGNAL DETECTION FEED</a:t>
-            </a:r>
-          </a:p>
-        </p:txBody>
-      </p:sp>
-      <p:pic>
-        <p:nvPicPr>
-          <p:cNvPr id="27" name="Picture 26" descr="pitch_builder.jpg"/>
-          <p:cNvPicPr>
-            <a:picLocks noChangeAspect="1"/>
-          </p:cNvPicPr>
-          <p:nvPr/>
-        </p:nvPicPr>
-        <p:blipFill>
-          <a:blip r:embed="rId4"/>
-          <a:stretch>
-            <a:fillRect/>
-          </a:stretch>
-        </p:blipFill>
-        <p:spPr>
-          <a:xfrm>
-            <a:off x="8330184" y="3383280"/>
-            <a:ext cx="3758184" cy="2606040"/>
-          </a:xfrm>
-          <a:prstGeom prst="rect">
-            <a:avLst/>
-          </a:prstGeom>
-        </p:spPr>
-      </p:pic>
-      <p:sp>
-        <p:nvSpPr>
-          <p:cNvPr id="28" name="Rectangle 27"/>
-          <p:cNvSpPr/>
-          <p:nvPr/>
-        </p:nvSpPr>
-        <p:spPr>
-          <a:xfrm>
-            <a:off x="8330184" y="3383280"/>
-            <a:ext cx="3758184" cy="2606040"/>
-          </a:xfrm>
-          <a:prstGeom prst="rect">
-            <a:avLst/>
-          </a:prstGeom>
-          <a:noFill/>
-          <a:ln w="15240">
-            <a:solidFill>
-              <a:srgbClr val="C9A84C"/>
-            </a:solidFill>
-          </a:ln>
-        </p:spPr>
-        <p:style>
-          <a:lnRef idx="1">
-            <a:schemeClr val="accent1"/>
-          </a:lnRef>
-          <a:fillRef idx="3">
-            <a:schemeClr val="accent1"/>
-          </a:fillRef>
-          <a:effectRef idx="2">
-            <a:schemeClr val="accent1"/>
-          </a:effectRef>
-          <a:fontRef idx="minor">
-            <a:schemeClr val="lt1"/>
-          </a:fontRef>
-        </p:style>
-        <p:txBody>
-          <a:bodyPr rtlCol="0" anchor="ctr"/>
-          <a:lstStyle/>
-          <a:p>
-            <a:pPr algn="ctr"/>
-          </a:p>
-        </p:txBody>
-      </p:sp>
-      <p:sp>
-        <p:nvSpPr>
-          <p:cNvPr id="29" name="Rectangle 28"/>
-          <p:cNvSpPr/>
-          <p:nvPr/>
-        </p:nvSpPr>
-        <p:spPr>
-          <a:xfrm>
-            <a:off x="8330184" y="5669280"/>
-            <a:ext cx="3758184" cy="320040"/>
-          </a:xfrm>
-          <a:prstGeom prst="rect">
-            <a:avLst/>
-          </a:prstGeom>
-          <a:solidFill>
-            <a:srgbClr val="080D26"/>
-          </a:solidFill>
-          <a:ln>
-            <a:noFill/>
-          </a:ln>
-        </p:spPr>
-        <p:style>
-          <a:lnRef idx="1">
-            <a:schemeClr val="accent1"/>
-          </a:lnRef>
-          <a:fillRef idx="3">
-            <a:schemeClr val="accent1"/>
-          </a:fillRef>
-          <a:effectRef idx="2">
-            <a:schemeClr val="accent1"/>
-          </a:effectRef>
-          <a:fontRef idx="minor">
-            <a:schemeClr val="lt1"/>
-          </a:fontRef>
-        </p:style>
-        <p:txBody>
-          <a:bodyPr rtlCol="0" anchor="ctr"/>
-          <a:lstStyle/>
-          <a:p>
-            <a:pPr algn="ctr"/>
-          </a:p>
-        </p:txBody>
-      </p:sp>
-      <p:sp>
-        <p:nvSpPr>
-          <p:cNvPr id="30" name="TextBox 29"/>
-          <p:cNvSpPr txBox="1"/>
-          <p:nvPr/>
-        </p:nvSpPr>
-        <p:spPr>
-          <a:xfrm>
-            <a:off x="8439912" y="5745480"/>
-            <a:ext cx="3538728" cy="320040"/>
-          </a:xfrm>
-          <a:prstGeom prst="rect">
-            <a:avLst/>
-          </a:prstGeom>
-          <a:noFill/>
-        </p:spPr>
-        <p:txBody>
-          <a:bodyPr wrap="square">
-            <a:spAutoFit/>
-          </a:bodyPr>
-          <a:lstStyle/>
-          <a:p>
-            <a:pPr algn="l"/>
-            <a:r>
-              <a:rPr sz="900" b="1" i="0">
-                <a:solidFill>
-                  <a:srgbClr val="C9A84C"/>
-                </a:solidFill>
-                <a:latin typeface="Barlow Condensed"/>
-              </a:rPr>
-              <a:t>PROTOCOL BUILDER</a:t>
-            </a:r>
-          </a:p>
-        </p:txBody>
-      </p:sp>
-      <p:sp>
-        <p:nvSpPr>
-          <p:cNvPr id="31" name="TextBox 30"/>
+              <a:t>Signal Intelligence feed · Live detections · vaughnmartin.com</a:t>
+            </a:r>
+          </a:p>
+        </p:txBody>
+      </p:sp>
+      <p:sp>
+        <p:nvSpPr>
+          <p:cNvPr id="23" name="TextBox 22"/>
           <p:cNvSpPr txBox="1"/>
           <p:nvPr/>
         </p:nvSpPr>
@@ -11646,7 +11388,7 @@
                 </a:solidFill>
                 <a:latin typeface="Barlow Condensed"/>
               </a:rPr>
-              <a:t>08 / 11</a:t>
+              <a:t>08 / 12</a:t>
             </a:r>
           </a:p>
         </p:txBody>
@@ -11665,7 +11407,7 @@
     <p:bg>
       <p:bgPr>
         <a:solidFill>
-          <a:srgbClr val="F2F0EB"/>
+          <a:srgbClr val="0A0F2E"/>
         </a:solidFill>
         <a:effectLst/>
       </p:bgPr>
@@ -11722,99 +11464,13 @@
       </p:sp>
       <p:sp>
         <p:nvSpPr>
-          <p:cNvPr id="3" name="Rectangle 2"/>
-          <p:cNvSpPr/>
-          <p:nvPr/>
-        </p:nvSpPr>
-        <p:spPr>
-          <a:xfrm>
-            <a:off x="0" y="0"/>
-            <a:ext cx="5303520" cy="6858000"/>
-          </a:xfrm>
-          <a:prstGeom prst="rect">
-            <a:avLst/>
-          </a:prstGeom>
-          <a:solidFill>
-            <a:srgbClr val="0A0F2E"/>
-          </a:solidFill>
-          <a:ln>
-            <a:noFill/>
-          </a:ln>
-        </p:spPr>
-        <p:style>
-          <a:lnRef idx="1">
-            <a:schemeClr val="accent1"/>
-          </a:lnRef>
-          <a:fillRef idx="3">
-            <a:schemeClr val="accent1"/>
-          </a:fillRef>
-          <a:effectRef idx="2">
-            <a:schemeClr val="accent1"/>
-          </a:effectRef>
-          <a:fontRef idx="minor">
-            <a:schemeClr val="lt1"/>
-          </a:fontRef>
-        </p:style>
-        <p:txBody>
-          <a:bodyPr rtlCol="0" anchor="ctr"/>
-          <a:lstStyle/>
-          <a:p>
-            <a:pPr algn="ctr"/>
-          </a:p>
-        </p:txBody>
-      </p:sp>
-      <p:sp>
-        <p:nvSpPr>
-          <p:cNvPr id="4" name="Rectangle 3"/>
-          <p:cNvSpPr/>
-          <p:nvPr/>
-        </p:nvSpPr>
-        <p:spPr>
-          <a:xfrm>
-            <a:off x="384048" y="731520"/>
-            <a:ext cx="50800" cy="3291840"/>
-          </a:xfrm>
-          <a:prstGeom prst="rect">
-            <a:avLst/>
-          </a:prstGeom>
-          <a:solidFill>
-            <a:srgbClr val="C9A84C"/>
-          </a:solidFill>
-          <a:ln>
-            <a:noFill/>
-          </a:ln>
-        </p:spPr>
-        <p:style>
-          <a:lnRef idx="1">
-            <a:schemeClr val="accent1"/>
-          </a:lnRef>
-          <a:fillRef idx="3">
-            <a:schemeClr val="accent1"/>
-          </a:fillRef>
-          <a:effectRef idx="2">
-            <a:schemeClr val="accent1"/>
-          </a:effectRef>
-          <a:fontRef idx="minor">
-            <a:schemeClr val="lt1"/>
-          </a:fontRef>
-        </p:style>
-        <p:txBody>
-          <a:bodyPr rtlCol="0" anchor="ctr"/>
-          <a:lstStyle/>
-          <a:p>
-            <a:pPr algn="ctr"/>
-          </a:p>
-        </p:txBody>
-      </p:sp>
-      <p:sp>
-        <p:nvSpPr>
-          <p:cNvPr id="5" name="TextBox 4"/>
-          <p:cNvSpPr txBox="1"/>
-          <p:nvPr/>
-        </p:nvSpPr>
-        <p:spPr>
-          <a:xfrm>
-            <a:off x="548640" y="457200"/>
+          <p:cNvPr id="3" name="TextBox 2"/>
+          <p:cNvSpPr txBox="1"/>
+          <p:nvPr/>
+        </p:nvSpPr>
+        <p:spPr>
+          <a:xfrm>
+            <a:off x="457200" y="411480"/>
             <a:ext cx="10972800" cy="228600"/>
           </a:xfrm>
           <a:prstGeom prst="rect">
@@ -11836,201 +11492,49 @@
                 </a:solidFill>
                 <a:latin typeface="Barlow Condensed"/>
               </a:rPr>
-              <a:t>THE MARKET OPPORTUNITY</a:t>
-            </a:r>
-          </a:p>
-        </p:txBody>
-      </p:sp>
-      <p:sp>
-        <p:nvSpPr>
-          <p:cNvPr id="6" name="TextBox 5"/>
-          <p:cNvSpPr txBox="1"/>
-          <p:nvPr/>
-        </p:nvSpPr>
-        <p:spPr>
-          <a:xfrm>
-            <a:off x="548640" y="731520"/>
-            <a:ext cx="4572000" cy="2743200"/>
-          </a:xfrm>
-          <a:prstGeom prst="rect">
-            <a:avLst/>
-          </a:prstGeom>
-          <a:noFill/>
-        </p:spPr>
-        <p:txBody>
-          <a:bodyPr wrap="square">
-            <a:spAutoFit/>
-          </a:bodyPr>
-          <a:lstStyle/>
-          <a:p>
-            <a:pPr algn="l"/>
-            <a:r>
-              <a:rPr sz="3400" b="1">
+              <a:t>PROOF OF PRODUCTION</a:t>
+            </a:r>
+          </a:p>
+        </p:txBody>
+      </p:sp>
+      <p:sp>
+        <p:nvSpPr>
+          <p:cNvPr id="4" name="TextBox 3"/>
+          <p:cNvSpPr txBox="1"/>
+          <p:nvPr/>
+        </p:nvSpPr>
+        <p:spPr>
+          <a:xfrm>
+            <a:off x="457200" y="658368"/>
+            <a:ext cx="11247120" cy="713232"/>
+          </a:xfrm>
+          <a:prstGeom prst="rect">
+            <a:avLst/>
+          </a:prstGeom>
+          <a:noFill/>
+        </p:spPr>
+        <p:txBody>
+          <a:bodyPr wrap="square">
+            <a:spAutoFit/>
+          </a:bodyPr>
+          <a:lstStyle/>
+          <a:p>
+            <a:pPr algn="ctr"/>
+            <a:r>
+              <a:rPr sz="2800" b="1">
                 <a:solidFill>
                   <a:srgbClr val="FFFFFF"/>
                 </a:solidFill>
                 <a:latin typeface="Cormorant Garamond"/>
               </a:rPr>
-              <a:t>Preparation
-infrastructure
-does not exist yet.</a:t>
-            </a:r>
-          </a:p>
-        </p:txBody>
-      </p:sp>
-      <p:sp>
-        <p:nvSpPr>
-          <p:cNvPr id="7" name="Rectangle 6"/>
-          <p:cNvSpPr/>
-          <p:nvPr/>
-        </p:nvSpPr>
-        <p:spPr>
-          <a:xfrm>
-            <a:off x="548640" y="3703320"/>
-            <a:ext cx="4389120" cy="19050"/>
-          </a:xfrm>
-          <a:prstGeom prst="rect">
-            <a:avLst/>
-          </a:prstGeom>
-          <a:solidFill>
-            <a:srgbClr val="C9A84C"/>
-          </a:solidFill>
-          <a:ln>
-            <a:noFill/>
-          </a:ln>
-        </p:spPr>
-        <p:style>
-          <a:lnRef idx="1">
-            <a:schemeClr val="accent1"/>
-          </a:lnRef>
-          <a:fillRef idx="3">
-            <a:schemeClr val="accent1"/>
-          </a:fillRef>
-          <a:effectRef idx="2">
-            <a:schemeClr val="accent1"/>
-          </a:effectRef>
-          <a:fontRef idx="minor">
-            <a:schemeClr val="lt1"/>
-          </a:fontRef>
-        </p:style>
-        <p:txBody>
-          <a:bodyPr rtlCol="0" anchor="ctr"/>
-          <a:lstStyle/>
-          <a:p>
-            <a:pPr algn="ctr"/>
-          </a:p>
-        </p:txBody>
-      </p:sp>
-      <p:sp>
-        <p:nvSpPr>
-          <p:cNvPr id="8" name="TextBox 7"/>
-          <p:cNvSpPr txBox="1"/>
-          <p:nvPr/>
-        </p:nvSpPr>
-        <p:spPr>
-          <a:xfrm>
-            <a:off x="548640" y="3858768"/>
-            <a:ext cx="4572000" cy="1005840"/>
-          </a:xfrm>
-          <a:prstGeom prst="rect">
-            <a:avLst/>
-          </a:prstGeom>
-          <a:noFill/>
-        </p:spPr>
-        <p:txBody>
-          <a:bodyPr wrap="square">
-            <a:spAutoFit/>
-          </a:bodyPr>
-          <a:lstStyle/>
-          <a:p>
-            <a:pPr algn="l"/>
-            <a:r>
-              <a:rPr sz="1800" b="0" i="1">
-                <a:solidFill>
-                  <a:srgbClr val="F0EDE4"/>
-                </a:solidFill>
-                <a:latin typeface="Barlow"/>
-              </a:rPr>
-              <a:t>That's not a problem.
-That's the entire opportunity.</a:t>
-            </a:r>
-          </a:p>
-        </p:txBody>
-      </p:sp>
-      <p:sp>
-        <p:nvSpPr>
-          <p:cNvPr id="9" name="TextBox 8"/>
-          <p:cNvSpPr txBox="1"/>
-          <p:nvPr/>
-        </p:nvSpPr>
-        <p:spPr>
-          <a:xfrm>
-            <a:off x="548640" y="4937760"/>
-            <a:ext cx="4572000" cy="1097280"/>
-          </a:xfrm>
-          <a:prstGeom prst="rect">
-            <a:avLst/>
-          </a:prstGeom>
-          <a:noFill/>
-        </p:spPr>
-        <p:txBody>
-          <a:bodyPr wrap="square">
-            <a:spAutoFit/>
-          </a:bodyPr>
-          <a:lstStyle/>
-          <a:p>
-            <a:pPr algn="l"/>
-            <a:r>
-              <a:rPr sz="1300" b="0" i="0">
-                <a:solidFill>
-                  <a:srgbClr val="99A5BB"/>
-                </a:solidFill>
-                <a:latin typeface="Barlow"/>
-              </a:rPr>
-              <a:t>Every Fortune 1000 has Microsoft's AI stack.
-None have the operating model to use it at trigger speed.</a:t>
-            </a:r>
-          </a:p>
-        </p:txBody>
-      </p:sp>
-      <p:sp>
-        <p:nvSpPr>
-          <p:cNvPr id="10" name="TextBox 9"/>
-          <p:cNvSpPr txBox="1"/>
-          <p:nvPr/>
-        </p:nvSpPr>
-        <p:spPr>
-          <a:xfrm>
-            <a:off x="5577840" y="457200"/>
-            <a:ext cx="10972800" cy="228600"/>
-          </a:xfrm>
-          <a:prstGeom prst="rect">
-            <a:avLst/>
-          </a:prstGeom>
-          <a:noFill/>
-        </p:spPr>
-        <p:txBody>
-          <a:bodyPr wrap="square">
-            <a:spAutoFit/>
-          </a:bodyPr>
-          <a:lstStyle/>
-          <a:p>
-            <a:pPr algn="l"/>
-            <a:r>
-              <a:rPr sz="900" b="1" i="0">
-                <a:solidFill>
-                  <a:srgbClr val="222C44"/>
-                </a:solidFill>
-                <a:latin typeface="Barlow Condensed"/>
-              </a:rPr>
-              <a:t>WHY NOW · WHY VAUGHNMARTIN</a:t>
+              <a:t>From Signal to Authorized Execution in 12 Minutes</a:t>
             </a:r>
           </a:p>
         </p:txBody>
       </p:sp>
       <p:pic>
         <p:nvPicPr>
-          <p:cNvPr id="11" name="Picture 10" descr="pptx_protocols.jpg"/>
+          <p:cNvPr id="5" name="Picture 4" descr="deck_signals.jpg"/>
           <p:cNvPicPr>
             <a:picLocks noChangeAspect="1"/>
           </p:cNvPicPr>
@@ -12044,8 +11548,8 @@
         </p:blipFill>
         <p:spPr>
           <a:xfrm>
-            <a:off x="5577840" y="749808"/>
-            <a:ext cx="6245352" cy="5742432"/>
+            <a:off x="320040" y="1389888"/>
+            <a:ext cx="5733288" cy="3730752"/>
           </a:xfrm>
           <a:prstGeom prst="rect">
             <a:avLst/>
@@ -12054,14 +11558,14 @@
       </p:pic>
       <p:sp>
         <p:nvSpPr>
-          <p:cNvPr id="12" name="Rectangle 11"/>
+          <p:cNvPr id="6" name="Rectangle 5"/>
           <p:cNvSpPr/>
           <p:nvPr/>
         </p:nvSpPr>
         <p:spPr>
           <a:xfrm>
-            <a:off x="5577840" y="749808"/>
-            <a:ext cx="6245352" cy="5742432"/>
+            <a:off x="320040" y="1389888"/>
+            <a:ext cx="5733288" cy="3730752"/>
           </a:xfrm>
           <a:prstGeom prst="rect">
             <a:avLst/>
@@ -12097,14 +11601,14 @@
       </p:sp>
       <p:sp>
         <p:nvSpPr>
-          <p:cNvPr id="13" name="Rectangle 12"/>
+          <p:cNvPr id="7" name="Rectangle 6"/>
           <p:cNvSpPr/>
           <p:nvPr/>
         </p:nvSpPr>
         <p:spPr>
           <a:xfrm>
-            <a:off x="5577840" y="6172200"/>
-            <a:ext cx="6245352" cy="320040"/>
+            <a:off x="320040" y="4828032"/>
+            <a:ext cx="5733288" cy="292608"/>
           </a:xfrm>
           <a:prstGeom prst="rect">
             <a:avLst/>
@@ -12140,35 +11644,258 @@
       </p:sp>
       <p:sp>
         <p:nvSpPr>
+          <p:cNvPr id="8" name="TextBox 7"/>
+          <p:cNvSpPr txBox="1"/>
+          <p:nvPr/>
+        </p:nvSpPr>
+        <p:spPr>
+          <a:xfrm>
+            <a:off x="411480" y="4891532"/>
+            <a:ext cx="5550408" cy="292608"/>
+          </a:xfrm>
+          <a:prstGeom prst="rect">
+            <a:avLst/>
+          </a:prstGeom>
+          <a:noFill/>
+        </p:spPr>
+        <p:txBody>
+          <a:bodyPr wrap="square">
+            <a:spAutoFit/>
+          </a:bodyPr>
+          <a:lstStyle/>
+          <a:p>
+            <a:pPr algn="l"/>
+            <a:r>
+              <a:rPr sz="900" b="1" i="0">
+                <a:solidFill>
+                  <a:srgbClr val="C9A84C"/>
+                </a:solidFill>
+                <a:latin typeface="Barlow Condensed"/>
+              </a:rPr>
+              <a:t>Live trigger detected with confidence scoring.</a:t>
+            </a:r>
+          </a:p>
+        </p:txBody>
+      </p:sp>
+      <p:pic>
+        <p:nvPicPr>
+          <p:cNvPr id="9" name="Picture 8" descr="pptx_how_executes.jpg"/>
+          <p:cNvPicPr>
+            <a:picLocks noChangeAspect="1"/>
+          </p:cNvPicPr>
+          <p:nvPr/>
+        </p:nvPicPr>
+        <p:blipFill>
+          <a:blip r:embed="rId3"/>
+          <a:stretch>
+            <a:fillRect/>
+          </a:stretch>
+        </p:blipFill>
+        <p:spPr>
+          <a:xfrm>
+            <a:off x="6135624" y="1389888"/>
+            <a:ext cx="5733288" cy="3730752"/>
+          </a:xfrm>
+          <a:prstGeom prst="rect">
+            <a:avLst/>
+          </a:prstGeom>
+        </p:spPr>
+      </p:pic>
+      <p:sp>
+        <p:nvSpPr>
+          <p:cNvPr id="10" name="Rectangle 9"/>
+          <p:cNvSpPr/>
+          <p:nvPr/>
+        </p:nvSpPr>
+        <p:spPr>
+          <a:xfrm>
+            <a:off x="6135624" y="1389888"/>
+            <a:ext cx="5733288" cy="3730752"/>
+          </a:xfrm>
+          <a:prstGeom prst="rect">
+            <a:avLst/>
+          </a:prstGeom>
+          <a:noFill/>
+          <a:ln w="15240">
+            <a:solidFill>
+              <a:srgbClr val="C9A84C"/>
+            </a:solidFill>
+          </a:ln>
+        </p:spPr>
+        <p:style>
+          <a:lnRef idx="1">
+            <a:schemeClr val="accent1"/>
+          </a:lnRef>
+          <a:fillRef idx="3">
+            <a:schemeClr val="accent1"/>
+          </a:fillRef>
+          <a:effectRef idx="2">
+            <a:schemeClr val="accent1"/>
+          </a:effectRef>
+          <a:fontRef idx="minor">
+            <a:schemeClr val="lt1"/>
+          </a:fontRef>
+        </p:style>
+        <p:txBody>
+          <a:bodyPr rtlCol="0" anchor="ctr"/>
+          <a:lstStyle/>
+          <a:p>
+            <a:pPr algn="ctr"/>
+          </a:p>
+        </p:txBody>
+      </p:sp>
+      <p:sp>
+        <p:nvSpPr>
+          <p:cNvPr id="11" name="Rectangle 10"/>
+          <p:cNvSpPr/>
+          <p:nvPr/>
+        </p:nvSpPr>
+        <p:spPr>
+          <a:xfrm>
+            <a:off x="6135624" y="4828032"/>
+            <a:ext cx="5733288" cy="292608"/>
+          </a:xfrm>
+          <a:prstGeom prst="rect">
+            <a:avLst/>
+          </a:prstGeom>
+          <a:solidFill>
+            <a:srgbClr val="080D26"/>
+          </a:solidFill>
+          <a:ln>
+            <a:noFill/>
+          </a:ln>
+        </p:spPr>
+        <p:style>
+          <a:lnRef idx="1">
+            <a:schemeClr val="accent1"/>
+          </a:lnRef>
+          <a:fillRef idx="3">
+            <a:schemeClr val="accent1"/>
+          </a:fillRef>
+          <a:effectRef idx="2">
+            <a:schemeClr val="accent1"/>
+          </a:effectRef>
+          <a:fontRef idx="minor">
+            <a:schemeClr val="lt1"/>
+          </a:fontRef>
+        </p:style>
+        <p:txBody>
+          <a:bodyPr rtlCol="0" anchor="ctr"/>
+          <a:lstStyle/>
+          <a:p>
+            <a:pPr algn="ctr"/>
+          </a:p>
+        </p:txBody>
+      </p:sp>
+      <p:sp>
+        <p:nvSpPr>
+          <p:cNvPr id="12" name="TextBox 11"/>
+          <p:cNvSpPr txBox="1"/>
+          <p:nvPr/>
+        </p:nvSpPr>
+        <p:spPr>
+          <a:xfrm>
+            <a:off x="6227064" y="4891532"/>
+            <a:ext cx="5550408" cy="292608"/>
+          </a:xfrm>
+          <a:prstGeom prst="rect">
+            <a:avLst/>
+          </a:prstGeom>
+          <a:noFill/>
+        </p:spPr>
+        <p:txBody>
+          <a:bodyPr wrap="square">
+            <a:spAutoFit/>
+          </a:bodyPr>
+          <a:lstStyle/>
+          <a:p>
+            <a:pPr algn="l"/>
+            <a:r>
+              <a:rPr sz="900" b="1" i="0">
+                <a:solidFill>
+                  <a:srgbClr val="C9A84C"/>
+                </a:solidFill>
+                <a:latin typeface="Barlow Condensed"/>
+              </a:rPr>
+              <a:t>Pre-staged protocol, stakeholders, authority, and tasks ready before pressure.</a:t>
+            </a:r>
+          </a:p>
+        </p:txBody>
+      </p:sp>
+      <p:sp>
+        <p:nvSpPr>
+          <p:cNvPr id="13" name="Rectangle 12"/>
+          <p:cNvSpPr/>
+          <p:nvPr/>
+        </p:nvSpPr>
+        <p:spPr>
+          <a:xfrm>
+            <a:off x="0" y="5276088"/>
+            <a:ext cx="12188952" cy="804672"/>
+          </a:xfrm>
+          <a:prstGeom prst="rect">
+            <a:avLst/>
+          </a:prstGeom>
+          <a:solidFill>
+            <a:srgbClr val="080D26"/>
+          </a:solidFill>
+          <a:ln>
+            <a:noFill/>
+          </a:ln>
+        </p:spPr>
+        <p:style>
+          <a:lnRef idx="1">
+            <a:schemeClr val="accent1"/>
+          </a:lnRef>
+          <a:fillRef idx="3">
+            <a:schemeClr val="accent1"/>
+          </a:fillRef>
+          <a:effectRef idx="2">
+            <a:schemeClr val="accent1"/>
+          </a:effectRef>
+          <a:fontRef idx="minor">
+            <a:schemeClr val="lt1"/>
+          </a:fontRef>
+        </p:style>
+        <p:txBody>
+          <a:bodyPr rtlCol="0" anchor="ctr"/>
+          <a:lstStyle/>
+          <a:p>
+            <a:pPr algn="ctr"/>
+          </a:p>
+        </p:txBody>
+      </p:sp>
+      <p:sp>
+        <p:nvSpPr>
           <p:cNvPr id="14" name="TextBox 13"/>
           <p:cNvSpPr txBox="1"/>
           <p:nvPr/>
         </p:nvSpPr>
         <p:spPr>
           <a:xfrm>
-            <a:off x="5687568" y="6248400"/>
-            <a:ext cx="6025896" cy="320040"/>
-          </a:xfrm>
-          <a:prstGeom prst="rect">
-            <a:avLst/>
-          </a:prstGeom>
-          <a:noFill/>
-        </p:spPr>
-        <p:txBody>
-          <a:bodyPr wrap="square">
-            <a:spAutoFit/>
-          </a:bodyPr>
-          <a:lstStyle/>
-          <a:p>
-            <a:pPr algn="l"/>
-            <a:r>
-              <a:rPr sz="900" b="1" i="0">
+            <a:off x="457200" y="5349240"/>
+            <a:ext cx="11274552" cy="502920"/>
+          </a:xfrm>
+          <a:prstGeom prst="rect">
+            <a:avLst/>
+          </a:prstGeom>
+          <a:noFill/>
+        </p:spPr>
+        <p:txBody>
+          <a:bodyPr wrap="square">
+            <a:spAutoFit/>
+          </a:bodyPr>
+          <a:lstStyle/>
+          <a:p>
+            <a:pPr algn="ctr"/>
+            <a:r>
+              <a:rPr sz="2200" b="1" i="0">
                 <a:solidFill>
                   <a:srgbClr val="C9A84C"/>
                 </a:solidFill>
                 <a:latin typeface="Barlow Condensed"/>
               </a:rPr>
-              <a:t>170 READINESS PROTOCOLS · A PRE-STAGED RESPONSE FOR EVERY STRATEGIC SCENARIO</a:t>
+              <a:t>AI monitors.   Executives authorize.   Teams execute.</a:t>
             </a:r>
           </a:p>
         </p:txBody>
@@ -12176,6 +11903,41 @@
       <p:sp>
         <p:nvSpPr>
           <p:cNvPr id="15" name="TextBox 14"/>
+          <p:cNvSpPr txBox="1"/>
+          <p:nvPr/>
+        </p:nvSpPr>
+        <p:spPr>
+          <a:xfrm>
+            <a:off x="457200" y="6153912"/>
+            <a:ext cx="11274552" cy="347472"/>
+          </a:xfrm>
+          <a:prstGeom prst="rect">
+            <a:avLst/>
+          </a:prstGeom>
+          <a:noFill/>
+        </p:spPr>
+        <p:txBody>
+          <a:bodyPr wrap="square">
+            <a:spAutoFit/>
+          </a:bodyPr>
+          <a:lstStyle/>
+          <a:p>
+            <a:pPr algn="ctr"/>
+            <a:r>
+              <a:rPr sz="1000" b="0" i="0">
+                <a:solidFill>
+                  <a:srgbClr val="99A5BB"/>
+                </a:solidFill>
+                <a:latin typeface="Barlow Condensed"/>
+              </a:rPr>
+              <a:t>170 protocols  ·  221 triggers  ·  248 data points  ·  refreshed every 15 minutes</a:t>
+            </a:r>
+          </a:p>
+        </p:txBody>
+      </p:sp>
+      <p:sp>
+        <p:nvSpPr>
+          <p:cNvPr id="16" name="TextBox 15"/>
           <p:cNvSpPr txBox="1"/>
           <p:nvPr/>
         </p:nvSpPr>
@@ -12203,7 +11965,7 @@
                 </a:solidFill>
                 <a:latin typeface="Barlow Condensed"/>
               </a:rPr>
-              <a:t>09 / 11</a:t>
+              <a:t>09 / 12</a:t>
             </a:r>
           </a:p>
         </p:txBody>
